--- a/docs/presentations/PFSM_overview.pptx
+++ b/docs/presentations/PFSM_overview.pptx
@@ -3161,2649 +3161,9 @@
           </a:p>
         </p:txBody>
       </p:sp>
-      <p:sp>
-        <p:nvSpPr>
-          <p:cNvPr id="3" name="Oval 2"/>
-          <p:cNvSpPr/>
-          <p:nvPr/>
-        </p:nvSpPr>
-        <p:spPr>
-          <a:xfrm>
-            <a:off x="1738429" y="5716392"/>
-            <a:ext cx="18288" cy="18288"/>
-          </a:xfrm>
-          <a:prstGeom prst="ellipse">
-            <a:avLst/>
-          </a:prstGeom>
-          <a:solidFill>
-            <a:srgbClr val="3A4A78"/>
-          </a:solidFill>
-          <a:ln>
-            <a:noFill/>
-          </a:ln>
-          <a:effectLst/>
-        </p:spPr>
-        <p:style>
-          <a:lnRef idx="1">
-            <a:schemeClr val="accent1"/>
-          </a:lnRef>
-          <a:fillRef idx="3">
-            <a:schemeClr val="accent1"/>
-          </a:fillRef>
-          <a:effectRef idx="2">
-            <a:schemeClr val="accent1"/>
-          </a:effectRef>
-          <a:fontRef idx="minor">
-            <a:schemeClr val="lt1"/>
-          </a:fontRef>
-        </p:style>
-        <p:txBody>
-          <a:bodyPr rtlCol="0" anchor="ctr"/>
-          <a:lstStyle/>
-          <a:p>
-            <a:pPr algn="ctr"/>
-          </a:p>
-        </p:txBody>
-      </p:sp>
-      <p:sp>
-        <p:nvSpPr>
-          <p:cNvPr id="4" name="Oval 3"/>
-          <p:cNvSpPr/>
-          <p:nvPr/>
-        </p:nvSpPr>
-        <p:spPr>
-          <a:xfrm>
-            <a:off x="3176913" y="3398946"/>
-            <a:ext cx="27432" cy="27432"/>
-          </a:xfrm>
-          <a:prstGeom prst="ellipse">
-            <a:avLst/>
-          </a:prstGeom>
-          <a:solidFill>
-            <a:srgbClr val="3A4A78"/>
-          </a:solidFill>
-          <a:ln>
-            <a:noFill/>
-          </a:ln>
-          <a:effectLst/>
-        </p:spPr>
-        <p:style>
-          <a:lnRef idx="1">
-            <a:schemeClr val="accent1"/>
-          </a:lnRef>
-          <a:fillRef idx="3">
-            <a:schemeClr val="accent1"/>
-          </a:fillRef>
-          <a:effectRef idx="2">
-            <a:schemeClr val="accent1"/>
-          </a:effectRef>
-          <a:fontRef idx="minor">
-            <a:schemeClr val="lt1"/>
-          </a:fontRef>
-        </p:style>
-        <p:txBody>
-          <a:bodyPr rtlCol="0" anchor="ctr"/>
-          <a:lstStyle/>
-          <a:p>
-            <a:pPr algn="ctr"/>
-          </a:p>
-        </p:txBody>
-      </p:sp>
-      <p:sp>
-        <p:nvSpPr>
-          <p:cNvPr id="5" name="Oval 4"/>
-          <p:cNvSpPr/>
-          <p:nvPr/>
-        </p:nvSpPr>
-        <p:spPr>
-          <a:xfrm>
-            <a:off x="5765083" y="2636425"/>
-            <a:ext cx="18288" cy="18288"/>
-          </a:xfrm>
-          <a:prstGeom prst="ellipse">
-            <a:avLst/>
-          </a:prstGeom>
-          <a:solidFill>
-            <a:srgbClr val="3A4A78"/>
-          </a:solidFill>
-          <a:ln>
-            <a:noFill/>
-          </a:ln>
-          <a:effectLst/>
-        </p:spPr>
-        <p:style>
-          <a:lnRef idx="1">
-            <a:schemeClr val="accent1"/>
-          </a:lnRef>
-          <a:fillRef idx="3">
-            <a:schemeClr val="accent1"/>
-          </a:fillRef>
-          <a:effectRef idx="2">
-            <a:schemeClr val="accent1"/>
-          </a:effectRef>
-          <a:fontRef idx="minor">
-            <a:schemeClr val="lt1"/>
-          </a:fontRef>
-        </p:style>
-        <p:txBody>
-          <a:bodyPr rtlCol="0" anchor="ctr"/>
-          <a:lstStyle/>
-          <a:p>
-            <a:pPr algn="ctr"/>
-          </a:p>
-        </p:txBody>
-      </p:sp>
-      <p:sp>
-        <p:nvSpPr>
-          <p:cNvPr id="6" name="Oval 5"/>
-          <p:cNvSpPr/>
-          <p:nvPr/>
-        </p:nvSpPr>
-        <p:spPr>
-          <a:xfrm>
-            <a:off x="1255719" y="323790"/>
-            <a:ext cx="27432" cy="27432"/>
-          </a:xfrm>
-          <a:prstGeom prst="ellipse">
-            <a:avLst/>
-          </a:prstGeom>
-          <a:solidFill>
-            <a:srgbClr val="3A4A78"/>
-          </a:solidFill>
-          <a:ln>
-            <a:noFill/>
-          </a:ln>
-          <a:effectLst/>
-        </p:spPr>
-        <p:style>
-          <a:lnRef idx="1">
-            <a:schemeClr val="accent1"/>
-          </a:lnRef>
-          <a:fillRef idx="3">
-            <a:schemeClr val="accent1"/>
-          </a:fillRef>
-          <a:effectRef idx="2">
-            <a:schemeClr val="accent1"/>
-          </a:effectRef>
-          <a:fontRef idx="minor">
-            <a:schemeClr val="lt1"/>
-          </a:fontRef>
-        </p:style>
-        <p:txBody>
-          <a:bodyPr rtlCol="0" anchor="ctr"/>
-          <a:lstStyle/>
-          <a:p>
-            <a:pPr algn="ctr"/>
-          </a:p>
-        </p:txBody>
-      </p:sp>
-      <p:sp>
-        <p:nvSpPr>
-          <p:cNvPr id="7" name="Oval 6"/>
-          <p:cNvSpPr/>
-          <p:nvPr/>
-        </p:nvSpPr>
-        <p:spPr>
-          <a:xfrm>
-            <a:off x="5294607" y="5155768"/>
-            <a:ext cx="18288" cy="18288"/>
-          </a:xfrm>
-          <a:prstGeom prst="ellipse">
-            <a:avLst/>
-          </a:prstGeom>
-          <a:solidFill>
-            <a:srgbClr val="3A4A78"/>
-          </a:solidFill>
-          <a:ln>
-            <a:noFill/>
-          </a:ln>
-          <a:effectLst/>
-        </p:spPr>
-        <p:style>
-          <a:lnRef idx="1">
-            <a:schemeClr val="accent1"/>
-          </a:lnRef>
-          <a:fillRef idx="3">
-            <a:schemeClr val="accent1"/>
-          </a:fillRef>
-          <a:effectRef idx="2">
-            <a:schemeClr val="accent1"/>
-          </a:effectRef>
-          <a:fontRef idx="minor">
-            <a:schemeClr val="lt1"/>
-          </a:fontRef>
-        </p:style>
-        <p:txBody>
-          <a:bodyPr rtlCol="0" anchor="ctr"/>
-          <a:lstStyle/>
-          <a:p>
-            <a:pPr algn="ctr"/>
-          </a:p>
-        </p:txBody>
-      </p:sp>
-      <p:sp>
-        <p:nvSpPr>
-          <p:cNvPr id="8" name="Oval 7"/>
-          <p:cNvSpPr/>
-          <p:nvPr/>
-        </p:nvSpPr>
-        <p:spPr>
-          <a:xfrm>
-            <a:off x="8429661" y="1890595"/>
-            <a:ext cx="18288" cy="18288"/>
-          </a:xfrm>
-          <a:prstGeom prst="ellipse">
-            <a:avLst/>
-          </a:prstGeom>
-          <a:solidFill>
-            <a:srgbClr val="3A4A78"/>
-          </a:solidFill>
-          <a:ln>
-            <a:noFill/>
-          </a:ln>
-          <a:effectLst/>
-        </p:spPr>
-        <p:style>
-          <a:lnRef idx="1">
-            <a:schemeClr val="accent1"/>
-          </a:lnRef>
-          <a:fillRef idx="3">
-            <a:schemeClr val="accent1"/>
-          </a:fillRef>
-          <a:effectRef idx="2">
-            <a:schemeClr val="accent1"/>
-          </a:effectRef>
-          <a:fontRef idx="minor">
-            <a:schemeClr val="lt1"/>
-          </a:fontRef>
-        </p:style>
-        <p:txBody>
-          <a:bodyPr rtlCol="0" anchor="ctr"/>
-          <a:lstStyle/>
-          <a:p>
-            <a:pPr algn="ctr"/>
-          </a:p>
-        </p:txBody>
-      </p:sp>
-      <p:sp>
-        <p:nvSpPr>
-          <p:cNvPr id="9" name="Oval 8"/>
-          <p:cNvSpPr/>
-          <p:nvPr/>
-        </p:nvSpPr>
-        <p:spPr>
-          <a:xfrm>
-            <a:off x="7182157" y="810190"/>
-            <a:ext cx="27432" cy="27432"/>
-          </a:xfrm>
-          <a:prstGeom prst="ellipse">
-            <a:avLst/>
-          </a:prstGeom>
-          <a:solidFill>
-            <a:srgbClr val="3A4A78"/>
-          </a:solidFill>
-          <a:ln>
-            <a:noFill/>
-          </a:ln>
-          <a:effectLst/>
-        </p:spPr>
-        <p:style>
-          <a:lnRef idx="1">
-            <a:schemeClr val="accent1"/>
-          </a:lnRef>
-          <a:fillRef idx="3">
-            <a:schemeClr val="accent1"/>
-          </a:fillRef>
-          <a:effectRef idx="2">
-            <a:schemeClr val="accent1"/>
-          </a:effectRef>
-          <a:fontRef idx="minor">
-            <a:schemeClr val="lt1"/>
-          </a:fontRef>
-        </p:style>
-        <p:txBody>
-          <a:bodyPr rtlCol="0" anchor="ctr"/>
-          <a:lstStyle/>
-          <a:p>
-            <a:pPr algn="ctr"/>
-          </a:p>
-        </p:txBody>
-      </p:sp>
-      <p:sp>
-        <p:nvSpPr>
-          <p:cNvPr id="10" name="Oval 9"/>
-          <p:cNvSpPr/>
-          <p:nvPr/>
-        </p:nvSpPr>
-        <p:spPr>
-          <a:xfrm>
-            <a:off x="501712" y="304687"/>
-            <a:ext cx="41148" cy="41148"/>
-          </a:xfrm>
-          <a:prstGeom prst="ellipse">
-            <a:avLst/>
-          </a:prstGeom>
-          <a:solidFill>
-            <a:srgbClr val="3A4A78"/>
-          </a:solidFill>
-          <a:ln>
-            <a:noFill/>
-          </a:ln>
-          <a:effectLst/>
-        </p:spPr>
-        <p:style>
-          <a:lnRef idx="1">
-            <a:schemeClr val="accent1"/>
-          </a:lnRef>
-          <a:fillRef idx="3">
-            <a:schemeClr val="accent1"/>
-          </a:fillRef>
-          <a:effectRef idx="2">
-            <a:schemeClr val="accent1"/>
-          </a:effectRef>
-          <a:fontRef idx="minor">
-            <a:schemeClr val="lt1"/>
-          </a:fontRef>
-        </p:style>
-        <p:txBody>
-          <a:bodyPr rtlCol="0" anchor="ctr"/>
-          <a:lstStyle/>
-          <a:p>
-            <a:pPr algn="ctr"/>
-          </a:p>
-        </p:txBody>
-      </p:sp>
-      <p:sp>
-        <p:nvSpPr>
-          <p:cNvPr id="11" name="Oval 10"/>
-          <p:cNvSpPr/>
-          <p:nvPr/>
-        </p:nvSpPr>
-        <p:spPr>
-          <a:xfrm>
-            <a:off x="246858" y="5938921"/>
-            <a:ext cx="41148" cy="41148"/>
-          </a:xfrm>
-          <a:prstGeom prst="ellipse">
-            <a:avLst/>
-          </a:prstGeom>
-          <a:solidFill>
-            <a:srgbClr val="3A4A78"/>
-          </a:solidFill>
-          <a:ln>
-            <a:noFill/>
-          </a:ln>
-          <a:effectLst/>
-        </p:spPr>
-        <p:style>
-          <a:lnRef idx="1">
-            <a:schemeClr val="accent1"/>
-          </a:lnRef>
-          <a:fillRef idx="3">
-            <a:schemeClr val="accent1"/>
-          </a:fillRef>
-          <a:effectRef idx="2">
-            <a:schemeClr val="accent1"/>
-          </a:effectRef>
-          <a:fontRef idx="minor">
-            <a:schemeClr val="lt1"/>
-          </a:fontRef>
-        </p:style>
-        <p:txBody>
-          <a:bodyPr rtlCol="0" anchor="ctr"/>
-          <a:lstStyle/>
-          <a:p>
-            <a:pPr algn="ctr"/>
-          </a:p>
-        </p:txBody>
-      </p:sp>
-      <p:sp>
-        <p:nvSpPr>
-          <p:cNvPr id="12" name="Oval 11"/>
-          <p:cNvSpPr/>
-          <p:nvPr/>
-        </p:nvSpPr>
-        <p:spPr>
-          <a:xfrm>
-            <a:off x="2718456" y="2916240"/>
-            <a:ext cx="18288" cy="18288"/>
-          </a:xfrm>
-          <a:prstGeom prst="ellipse">
-            <a:avLst/>
-          </a:prstGeom>
-          <a:solidFill>
-            <a:srgbClr val="3A4A78"/>
-          </a:solidFill>
-          <a:ln>
-            <a:noFill/>
-          </a:ln>
-          <a:effectLst/>
-        </p:spPr>
-        <p:style>
-          <a:lnRef idx="1">
-            <a:schemeClr val="accent1"/>
-          </a:lnRef>
-          <a:fillRef idx="3">
-            <a:schemeClr val="accent1"/>
-          </a:fillRef>
-          <a:effectRef idx="2">
-            <a:schemeClr val="accent1"/>
-          </a:effectRef>
-          <a:fontRef idx="minor">
-            <a:schemeClr val="lt1"/>
-          </a:fontRef>
-        </p:style>
-        <p:txBody>
-          <a:bodyPr rtlCol="0" anchor="ctr"/>
-          <a:lstStyle/>
-          <a:p>
-            <a:pPr algn="ctr"/>
-          </a:p>
-        </p:txBody>
-      </p:sp>
-      <p:sp>
-        <p:nvSpPr>
-          <p:cNvPr id="13" name="Oval 12"/>
-          <p:cNvSpPr/>
-          <p:nvPr/>
-        </p:nvSpPr>
-        <p:spPr>
-          <a:xfrm>
-            <a:off x="6425117" y="5165122"/>
-            <a:ext cx="27432" cy="27432"/>
-          </a:xfrm>
-          <a:prstGeom prst="ellipse">
-            <a:avLst/>
-          </a:prstGeom>
-          <a:solidFill>
-            <a:srgbClr val="3A4A78"/>
-          </a:solidFill>
-          <a:ln>
-            <a:noFill/>
-          </a:ln>
-          <a:effectLst/>
-        </p:spPr>
-        <p:style>
-          <a:lnRef idx="1">
-            <a:schemeClr val="accent1"/>
-          </a:lnRef>
-          <a:fillRef idx="3">
-            <a:schemeClr val="accent1"/>
-          </a:fillRef>
-          <a:effectRef idx="2">
-            <a:schemeClr val="accent1"/>
-          </a:effectRef>
-          <a:fontRef idx="minor">
-            <a:schemeClr val="lt1"/>
-          </a:fontRef>
-        </p:style>
-        <p:txBody>
-          <a:bodyPr rtlCol="0" anchor="ctr"/>
-          <a:lstStyle/>
-          <a:p>
-            <a:pPr algn="ctr"/>
-          </a:p>
-        </p:txBody>
-      </p:sp>
-      <p:sp>
-        <p:nvSpPr>
-          <p:cNvPr id="14" name="Oval 13"/>
-          <p:cNvSpPr/>
-          <p:nvPr/>
-        </p:nvSpPr>
-        <p:spPr>
-          <a:xfrm>
-            <a:off x="6725795" y="2413140"/>
-            <a:ext cx="41148" cy="41148"/>
-          </a:xfrm>
-          <a:prstGeom prst="ellipse">
-            <a:avLst/>
-          </a:prstGeom>
-          <a:solidFill>
-            <a:srgbClr val="3A4A78"/>
-          </a:solidFill>
-          <a:ln>
-            <a:noFill/>
-          </a:ln>
-          <a:effectLst/>
-        </p:spPr>
-        <p:style>
-          <a:lnRef idx="1">
-            <a:schemeClr val="accent1"/>
-          </a:lnRef>
-          <a:fillRef idx="3">
-            <a:schemeClr val="accent1"/>
-          </a:fillRef>
-          <a:effectRef idx="2">
-            <a:schemeClr val="accent1"/>
-          </a:effectRef>
-          <a:fontRef idx="minor">
-            <a:schemeClr val="lt1"/>
-          </a:fontRef>
-        </p:style>
-        <p:txBody>
-          <a:bodyPr rtlCol="0" anchor="ctr"/>
-          <a:lstStyle/>
-          <a:p>
-            <a:pPr algn="ctr"/>
-          </a:p>
-        </p:txBody>
-      </p:sp>
-      <p:sp>
-        <p:nvSpPr>
-          <p:cNvPr id="15" name="Oval 14"/>
-          <p:cNvSpPr/>
-          <p:nvPr/>
-        </p:nvSpPr>
-        <p:spPr>
-          <a:xfrm>
-            <a:off x="2744455" y="3163042"/>
-            <a:ext cx="27432" cy="27432"/>
-          </a:xfrm>
-          <a:prstGeom prst="ellipse">
-            <a:avLst/>
-          </a:prstGeom>
-          <a:solidFill>
-            <a:srgbClr val="3A4A78"/>
-          </a:solidFill>
-          <a:ln>
-            <a:noFill/>
-          </a:ln>
-          <a:effectLst/>
-        </p:spPr>
-        <p:style>
-          <a:lnRef idx="1">
-            <a:schemeClr val="accent1"/>
-          </a:lnRef>
-          <a:fillRef idx="3">
-            <a:schemeClr val="accent1"/>
-          </a:fillRef>
-          <a:effectRef idx="2">
-            <a:schemeClr val="accent1"/>
-          </a:effectRef>
-          <a:fontRef idx="minor">
-            <a:schemeClr val="lt1"/>
-          </a:fontRef>
-        </p:style>
-        <p:txBody>
-          <a:bodyPr rtlCol="0" anchor="ctr"/>
-          <a:lstStyle/>
-          <a:p>
-            <a:pPr algn="ctr"/>
-          </a:p>
-        </p:txBody>
-      </p:sp>
-      <p:sp>
-        <p:nvSpPr>
-          <p:cNvPr id="16" name="Oval 15"/>
-          <p:cNvSpPr/>
-          <p:nvPr/>
-        </p:nvSpPr>
-        <p:spPr>
-          <a:xfrm>
-            <a:off x="11178687" y="2877155"/>
-            <a:ext cx="41148" cy="41148"/>
-          </a:xfrm>
-          <a:prstGeom prst="ellipse">
-            <a:avLst/>
-          </a:prstGeom>
-          <a:solidFill>
-            <a:srgbClr val="3A4A78"/>
-          </a:solidFill>
-          <a:ln>
-            <a:noFill/>
-          </a:ln>
-          <a:effectLst/>
-        </p:spPr>
-        <p:style>
-          <a:lnRef idx="1">
-            <a:schemeClr val="accent1"/>
-          </a:lnRef>
-          <a:fillRef idx="3">
-            <a:schemeClr val="accent1"/>
-          </a:fillRef>
-          <a:effectRef idx="2">
-            <a:schemeClr val="accent1"/>
-          </a:effectRef>
-          <a:fontRef idx="minor">
-            <a:schemeClr val="lt1"/>
-          </a:fontRef>
-        </p:style>
-        <p:txBody>
-          <a:bodyPr rtlCol="0" anchor="ctr"/>
-          <a:lstStyle/>
-          <a:p>
-            <a:pPr algn="ctr"/>
-          </a:p>
-        </p:txBody>
-      </p:sp>
-      <p:sp>
-        <p:nvSpPr>
-          <p:cNvPr id="17" name="Oval 16"/>
-          <p:cNvSpPr/>
-          <p:nvPr/>
-        </p:nvSpPr>
-        <p:spPr>
-          <a:xfrm>
-            <a:off x="11127227" y="795529"/>
-            <a:ext cx="41148" cy="41148"/>
-          </a:xfrm>
-          <a:prstGeom prst="ellipse">
-            <a:avLst/>
-          </a:prstGeom>
-          <a:solidFill>
-            <a:srgbClr val="3A4A78"/>
-          </a:solidFill>
-          <a:ln>
-            <a:noFill/>
-          </a:ln>
-          <a:effectLst/>
-        </p:spPr>
-        <p:style>
-          <a:lnRef idx="1">
-            <a:schemeClr val="accent1"/>
-          </a:lnRef>
-          <a:fillRef idx="3">
-            <a:schemeClr val="accent1"/>
-          </a:fillRef>
-          <a:effectRef idx="2">
-            <a:schemeClr val="accent1"/>
-          </a:effectRef>
-          <a:fontRef idx="minor">
-            <a:schemeClr val="lt1"/>
-          </a:fontRef>
-        </p:style>
-        <p:txBody>
-          <a:bodyPr rtlCol="0" anchor="ctr"/>
-          <a:lstStyle/>
-          <a:p>
-            <a:pPr algn="ctr"/>
-          </a:p>
-        </p:txBody>
-      </p:sp>
-      <p:sp>
-        <p:nvSpPr>
-          <p:cNvPr id="18" name="Oval 17"/>
-          <p:cNvSpPr/>
-          <p:nvPr/>
-        </p:nvSpPr>
-        <p:spPr>
-          <a:xfrm>
-            <a:off x="11965672" y="5798772"/>
-            <a:ext cx="18288" cy="18288"/>
-          </a:xfrm>
-          <a:prstGeom prst="ellipse">
-            <a:avLst/>
-          </a:prstGeom>
-          <a:solidFill>
-            <a:srgbClr val="3A4A78"/>
-          </a:solidFill>
-          <a:ln>
-            <a:noFill/>
-          </a:ln>
-          <a:effectLst/>
-        </p:spPr>
-        <p:style>
-          <a:lnRef idx="1">
-            <a:schemeClr val="accent1"/>
-          </a:lnRef>
-          <a:fillRef idx="3">
-            <a:schemeClr val="accent1"/>
-          </a:fillRef>
-          <a:effectRef idx="2">
-            <a:schemeClr val="accent1"/>
-          </a:effectRef>
-          <a:fontRef idx="minor">
-            <a:schemeClr val="lt1"/>
-          </a:fontRef>
-        </p:style>
-        <p:txBody>
-          <a:bodyPr rtlCol="0" anchor="ctr"/>
-          <a:lstStyle/>
-          <a:p>
-            <a:pPr algn="ctr"/>
-          </a:p>
-        </p:txBody>
-      </p:sp>
-      <p:sp>
-        <p:nvSpPr>
-          <p:cNvPr id="19" name="Oval 18"/>
-          <p:cNvSpPr/>
-          <p:nvPr/>
-        </p:nvSpPr>
-        <p:spPr>
-          <a:xfrm>
-            <a:off x="8993517" y="6033341"/>
-            <a:ext cx="41148" cy="41148"/>
-          </a:xfrm>
-          <a:prstGeom prst="ellipse">
-            <a:avLst/>
-          </a:prstGeom>
-          <a:solidFill>
-            <a:srgbClr val="3A4A78"/>
-          </a:solidFill>
-          <a:ln>
-            <a:noFill/>
-          </a:ln>
-          <a:effectLst/>
-        </p:spPr>
-        <p:style>
-          <a:lnRef idx="1">
-            <a:schemeClr val="accent1"/>
-          </a:lnRef>
-          <a:fillRef idx="3">
-            <a:schemeClr val="accent1"/>
-          </a:fillRef>
-          <a:effectRef idx="2">
-            <a:schemeClr val="accent1"/>
-          </a:effectRef>
-          <a:fontRef idx="minor">
-            <a:schemeClr val="lt1"/>
-          </a:fontRef>
-        </p:style>
-        <p:txBody>
-          <a:bodyPr rtlCol="0" anchor="ctr"/>
-          <a:lstStyle/>
-          <a:p>
-            <a:pPr algn="ctr"/>
-          </a:p>
-        </p:txBody>
-      </p:sp>
-      <p:sp>
-        <p:nvSpPr>
-          <p:cNvPr id="20" name="Oval 19"/>
-          <p:cNvSpPr/>
-          <p:nvPr/>
-        </p:nvSpPr>
-        <p:spPr>
-          <a:xfrm>
-            <a:off x="6105377" y="6504962"/>
-            <a:ext cx="41148" cy="41148"/>
-          </a:xfrm>
-          <a:prstGeom prst="ellipse">
-            <a:avLst/>
-          </a:prstGeom>
-          <a:solidFill>
-            <a:srgbClr val="3A4A78"/>
-          </a:solidFill>
-          <a:ln>
-            <a:noFill/>
-          </a:ln>
-          <a:effectLst/>
-        </p:spPr>
-        <p:style>
-          <a:lnRef idx="1">
-            <a:schemeClr val="accent1"/>
-          </a:lnRef>
-          <a:fillRef idx="3">
-            <a:schemeClr val="accent1"/>
-          </a:fillRef>
-          <a:effectRef idx="2">
-            <a:schemeClr val="accent1"/>
-          </a:effectRef>
-          <a:fontRef idx="minor">
-            <a:schemeClr val="lt1"/>
-          </a:fontRef>
-        </p:style>
-        <p:txBody>
-          <a:bodyPr rtlCol="0" anchor="ctr"/>
-          <a:lstStyle/>
-          <a:p>
-            <a:pPr algn="ctr"/>
-          </a:p>
-        </p:txBody>
-      </p:sp>
-      <p:sp>
-        <p:nvSpPr>
-          <p:cNvPr id="21" name="Oval 20"/>
-          <p:cNvSpPr/>
-          <p:nvPr/>
-        </p:nvSpPr>
-        <p:spPr>
-          <a:xfrm>
-            <a:off x="10029006" y="4550237"/>
-            <a:ext cx="27432" cy="27432"/>
-          </a:xfrm>
-          <a:prstGeom prst="ellipse">
-            <a:avLst/>
-          </a:prstGeom>
-          <a:solidFill>
-            <a:srgbClr val="3A4A78"/>
-          </a:solidFill>
-          <a:ln>
-            <a:noFill/>
-          </a:ln>
-          <a:effectLst/>
-        </p:spPr>
-        <p:style>
-          <a:lnRef idx="1">
-            <a:schemeClr val="accent1"/>
-          </a:lnRef>
-          <a:fillRef idx="3">
-            <a:schemeClr val="accent1"/>
-          </a:fillRef>
-          <a:effectRef idx="2">
-            <a:schemeClr val="accent1"/>
-          </a:effectRef>
-          <a:fontRef idx="minor">
-            <a:schemeClr val="lt1"/>
-          </a:fontRef>
-        </p:style>
-        <p:txBody>
-          <a:bodyPr rtlCol="0" anchor="ctr"/>
-          <a:lstStyle/>
-          <a:p>
-            <a:pPr algn="ctr"/>
-          </a:p>
-        </p:txBody>
-      </p:sp>
-      <p:sp>
-        <p:nvSpPr>
-          <p:cNvPr id="22" name="Oval 21"/>
-          <p:cNvSpPr/>
-          <p:nvPr/>
-        </p:nvSpPr>
-        <p:spPr>
-          <a:xfrm>
-            <a:off x="3523593" y="6546052"/>
-            <a:ext cx="27432" cy="27432"/>
-          </a:xfrm>
-          <a:prstGeom prst="ellipse">
-            <a:avLst/>
-          </a:prstGeom>
-          <a:solidFill>
-            <a:srgbClr val="3A4A78"/>
-          </a:solidFill>
-          <a:ln>
-            <a:noFill/>
-          </a:ln>
-          <a:effectLst/>
-        </p:spPr>
-        <p:style>
-          <a:lnRef idx="1">
-            <a:schemeClr val="accent1"/>
-          </a:lnRef>
-          <a:fillRef idx="3">
-            <a:schemeClr val="accent1"/>
-          </a:fillRef>
-          <a:effectRef idx="2">
-            <a:schemeClr val="accent1"/>
-          </a:effectRef>
-          <a:fontRef idx="minor">
-            <a:schemeClr val="lt1"/>
-          </a:fontRef>
-        </p:style>
-        <p:txBody>
-          <a:bodyPr rtlCol="0" anchor="ctr"/>
-          <a:lstStyle/>
-          <a:p>
-            <a:pPr algn="ctr"/>
-          </a:p>
-        </p:txBody>
-      </p:sp>
-      <p:sp>
-        <p:nvSpPr>
-          <p:cNvPr id="23" name="Oval 22"/>
-          <p:cNvSpPr/>
-          <p:nvPr/>
-        </p:nvSpPr>
-        <p:spPr>
-          <a:xfrm>
-            <a:off x="10221612" y="3463786"/>
-            <a:ext cx="41148" cy="41148"/>
-          </a:xfrm>
-          <a:prstGeom prst="ellipse">
-            <a:avLst/>
-          </a:prstGeom>
-          <a:solidFill>
-            <a:srgbClr val="3A4A78"/>
-          </a:solidFill>
-          <a:ln>
-            <a:noFill/>
-          </a:ln>
-          <a:effectLst/>
-        </p:spPr>
-        <p:style>
-          <a:lnRef idx="1">
-            <a:schemeClr val="accent1"/>
-          </a:lnRef>
-          <a:fillRef idx="3">
-            <a:schemeClr val="accent1"/>
-          </a:fillRef>
-          <a:effectRef idx="2">
-            <a:schemeClr val="accent1"/>
-          </a:effectRef>
-          <a:fontRef idx="minor">
-            <a:schemeClr val="lt1"/>
-          </a:fontRef>
-        </p:style>
-        <p:txBody>
-          <a:bodyPr rtlCol="0" anchor="ctr"/>
-          <a:lstStyle/>
-          <a:p>
-            <a:pPr algn="ctr"/>
-          </a:p>
-        </p:txBody>
-      </p:sp>
-      <p:sp>
-        <p:nvSpPr>
-          <p:cNvPr id="24" name="Oval 23"/>
-          <p:cNvSpPr/>
-          <p:nvPr/>
-        </p:nvSpPr>
-        <p:spPr>
-          <a:xfrm>
-            <a:off x="10306112" y="3298820"/>
-            <a:ext cx="41148" cy="41148"/>
-          </a:xfrm>
-          <a:prstGeom prst="ellipse">
-            <a:avLst/>
-          </a:prstGeom>
-          <a:solidFill>
-            <a:srgbClr val="3A4A78"/>
-          </a:solidFill>
-          <a:ln>
-            <a:noFill/>
-          </a:ln>
-          <a:effectLst/>
-        </p:spPr>
-        <p:style>
-          <a:lnRef idx="1">
-            <a:schemeClr val="accent1"/>
-          </a:lnRef>
-          <a:fillRef idx="3">
-            <a:schemeClr val="accent1"/>
-          </a:fillRef>
-          <a:effectRef idx="2">
-            <a:schemeClr val="accent1"/>
-          </a:effectRef>
-          <a:fontRef idx="minor">
-            <a:schemeClr val="lt1"/>
-          </a:fontRef>
-        </p:style>
-        <p:txBody>
-          <a:bodyPr rtlCol="0" anchor="ctr"/>
-          <a:lstStyle/>
-          <a:p>
-            <a:pPr algn="ctr"/>
-          </a:p>
-        </p:txBody>
-      </p:sp>
-      <p:sp>
-        <p:nvSpPr>
-          <p:cNvPr id="25" name="Oval 24"/>
-          <p:cNvSpPr/>
-          <p:nvPr/>
-        </p:nvSpPr>
-        <p:spPr>
-          <a:xfrm>
-            <a:off x="9640125" y="2864870"/>
-            <a:ext cx="18288" cy="18288"/>
-          </a:xfrm>
-          <a:prstGeom prst="ellipse">
-            <a:avLst/>
-          </a:prstGeom>
-          <a:solidFill>
-            <a:srgbClr val="3A4A78"/>
-          </a:solidFill>
-          <a:ln>
-            <a:noFill/>
-          </a:ln>
-          <a:effectLst/>
-        </p:spPr>
-        <p:style>
-          <a:lnRef idx="1">
-            <a:schemeClr val="accent1"/>
-          </a:lnRef>
-          <a:fillRef idx="3">
-            <a:schemeClr val="accent1"/>
-          </a:fillRef>
-          <a:effectRef idx="2">
-            <a:schemeClr val="accent1"/>
-          </a:effectRef>
-          <a:fontRef idx="minor">
-            <a:schemeClr val="lt1"/>
-          </a:fontRef>
-        </p:style>
-        <p:txBody>
-          <a:bodyPr rtlCol="0" anchor="ctr"/>
-          <a:lstStyle/>
-          <a:p>
-            <a:pPr algn="ctr"/>
-          </a:p>
-        </p:txBody>
-      </p:sp>
-      <p:sp>
-        <p:nvSpPr>
-          <p:cNvPr id="26" name="Oval 25"/>
-          <p:cNvSpPr/>
-          <p:nvPr/>
-        </p:nvSpPr>
-        <p:spPr>
-          <a:xfrm>
-            <a:off x="4512312" y="5948785"/>
-            <a:ext cx="41148" cy="41148"/>
-          </a:xfrm>
-          <a:prstGeom prst="ellipse">
-            <a:avLst/>
-          </a:prstGeom>
-          <a:solidFill>
-            <a:srgbClr val="3A4A78"/>
-          </a:solidFill>
-          <a:ln>
-            <a:noFill/>
-          </a:ln>
-          <a:effectLst/>
-        </p:spPr>
-        <p:style>
-          <a:lnRef idx="1">
-            <a:schemeClr val="accent1"/>
-          </a:lnRef>
-          <a:fillRef idx="3">
-            <a:schemeClr val="accent1"/>
-          </a:fillRef>
-          <a:effectRef idx="2">
-            <a:schemeClr val="accent1"/>
-          </a:effectRef>
-          <a:fontRef idx="minor">
-            <a:schemeClr val="lt1"/>
-          </a:fontRef>
-        </p:style>
-        <p:txBody>
-          <a:bodyPr rtlCol="0" anchor="ctr"/>
-          <a:lstStyle/>
-          <a:p>
-            <a:pPr algn="ctr"/>
-          </a:p>
-        </p:txBody>
-      </p:sp>
-      <p:sp>
-        <p:nvSpPr>
-          <p:cNvPr id="27" name="Oval 26"/>
-          <p:cNvSpPr/>
-          <p:nvPr/>
-        </p:nvSpPr>
-        <p:spPr>
-          <a:xfrm>
-            <a:off x="8934750" y="706434"/>
-            <a:ext cx="41148" cy="41148"/>
-          </a:xfrm>
-          <a:prstGeom prst="ellipse">
-            <a:avLst/>
-          </a:prstGeom>
-          <a:solidFill>
-            <a:srgbClr val="3A4A78"/>
-          </a:solidFill>
-          <a:ln>
-            <a:noFill/>
-          </a:ln>
-          <a:effectLst/>
-        </p:spPr>
-        <p:style>
-          <a:lnRef idx="1">
-            <a:schemeClr val="accent1"/>
-          </a:lnRef>
-          <a:fillRef idx="3">
-            <a:schemeClr val="accent1"/>
-          </a:fillRef>
-          <a:effectRef idx="2">
-            <a:schemeClr val="accent1"/>
-          </a:effectRef>
-          <a:fontRef idx="minor">
-            <a:schemeClr val="lt1"/>
-          </a:fontRef>
-        </p:style>
-        <p:txBody>
-          <a:bodyPr rtlCol="0" anchor="ctr"/>
-          <a:lstStyle/>
-          <a:p>
-            <a:pPr algn="ctr"/>
-          </a:p>
-        </p:txBody>
-      </p:sp>
-      <p:sp>
-        <p:nvSpPr>
-          <p:cNvPr id="28" name="Oval 27"/>
-          <p:cNvSpPr/>
-          <p:nvPr/>
-        </p:nvSpPr>
-        <p:spPr>
-          <a:xfrm>
-            <a:off x="6196269" y="5262177"/>
-            <a:ext cx="41148" cy="41148"/>
-          </a:xfrm>
-          <a:prstGeom prst="ellipse">
-            <a:avLst/>
-          </a:prstGeom>
-          <a:solidFill>
-            <a:srgbClr val="3A4A78"/>
-          </a:solidFill>
-          <a:ln>
-            <a:noFill/>
-          </a:ln>
-          <a:effectLst/>
-        </p:spPr>
-        <p:style>
-          <a:lnRef idx="1">
-            <a:schemeClr val="accent1"/>
-          </a:lnRef>
-          <a:fillRef idx="3">
-            <a:schemeClr val="accent1"/>
-          </a:fillRef>
-          <a:effectRef idx="2">
-            <a:schemeClr val="accent1"/>
-          </a:effectRef>
-          <a:fontRef idx="minor">
-            <a:schemeClr val="lt1"/>
-          </a:fontRef>
-        </p:style>
-        <p:txBody>
-          <a:bodyPr rtlCol="0" anchor="ctr"/>
-          <a:lstStyle/>
-          <a:p>
-            <a:pPr algn="ctr"/>
-          </a:p>
-        </p:txBody>
-      </p:sp>
-      <p:sp>
-        <p:nvSpPr>
-          <p:cNvPr id="29" name="Oval 28"/>
-          <p:cNvSpPr/>
-          <p:nvPr/>
-        </p:nvSpPr>
-        <p:spPr>
-          <a:xfrm>
-            <a:off x="10147177" y="2576562"/>
-            <a:ext cx="41148" cy="41148"/>
-          </a:xfrm>
-          <a:prstGeom prst="ellipse">
-            <a:avLst/>
-          </a:prstGeom>
-          <a:solidFill>
-            <a:srgbClr val="3A4A78"/>
-          </a:solidFill>
-          <a:ln>
-            <a:noFill/>
-          </a:ln>
-          <a:effectLst/>
-        </p:spPr>
-        <p:style>
-          <a:lnRef idx="1">
-            <a:schemeClr val="accent1"/>
-          </a:lnRef>
-          <a:fillRef idx="3">
-            <a:schemeClr val="accent1"/>
-          </a:fillRef>
-          <a:effectRef idx="2">
-            <a:schemeClr val="accent1"/>
-          </a:effectRef>
-          <a:fontRef idx="minor">
-            <a:schemeClr val="lt1"/>
-          </a:fontRef>
-        </p:style>
-        <p:txBody>
-          <a:bodyPr rtlCol="0" anchor="ctr"/>
-          <a:lstStyle/>
-          <a:p>
-            <a:pPr algn="ctr"/>
-          </a:p>
-        </p:txBody>
-      </p:sp>
-      <p:sp>
-        <p:nvSpPr>
-          <p:cNvPr id="30" name="Oval 29"/>
-          <p:cNvSpPr/>
-          <p:nvPr/>
-        </p:nvSpPr>
-        <p:spPr>
-          <a:xfrm>
-            <a:off x="489615" y="423466"/>
-            <a:ext cx="41148" cy="41148"/>
-          </a:xfrm>
-          <a:prstGeom prst="ellipse">
-            <a:avLst/>
-          </a:prstGeom>
-          <a:solidFill>
-            <a:srgbClr val="3A4A78"/>
-          </a:solidFill>
-          <a:ln>
-            <a:noFill/>
-          </a:ln>
-          <a:effectLst/>
-        </p:spPr>
-        <p:style>
-          <a:lnRef idx="1">
-            <a:schemeClr val="accent1"/>
-          </a:lnRef>
-          <a:fillRef idx="3">
-            <a:schemeClr val="accent1"/>
-          </a:fillRef>
-          <a:effectRef idx="2">
-            <a:schemeClr val="accent1"/>
-          </a:effectRef>
-          <a:fontRef idx="minor">
-            <a:schemeClr val="lt1"/>
-          </a:fontRef>
-        </p:style>
-        <p:txBody>
-          <a:bodyPr rtlCol="0" anchor="ctr"/>
-          <a:lstStyle/>
-          <a:p>
-            <a:pPr algn="ctr"/>
-          </a:p>
-        </p:txBody>
-      </p:sp>
-      <p:sp>
-        <p:nvSpPr>
-          <p:cNvPr id="31" name="Oval 30"/>
-          <p:cNvSpPr/>
-          <p:nvPr/>
-        </p:nvSpPr>
-        <p:spPr>
-          <a:xfrm>
-            <a:off x="10246688" y="4184877"/>
-            <a:ext cx="41148" cy="41148"/>
-          </a:xfrm>
-          <a:prstGeom prst="ellipse">
-            <a:avLst/>
-          </a:prstGeom>
-          <a:solidFill>
-            <a:srgbClr val="3A4A78"/>
-          </a:solidFill>
-          <a:ln>
-            <a:noFill/>
-          </a:ln>
-          <a:effectLst/>
-        </p:spPr>
-        <p:style>
-          <a:lnRef idx="1">
-            <a:schemeClr val="accent1"/>
-          </a:lnRef>
-          <a:fillRef idx="3">
-            <a:schemeClr val="accent1"/>
-          </a:fillRef>
-          <a:effectRef idx="2">
-            <a:schemeClr val="accent1"/>
-          </a:effectRef>
-          <a:fontRef idx="minor">
-            <a:schemeClr val="lt1"/>
-          </a:fontRef>
-        </p:style>
-        <p:txBody>
-          <a:bodyPr rtlCol="0" anchor="ctr"/>
-          <a:lstStyle/>
-          <a:p>
-            <a:pPr algn="ctr"/>
-          </a:p>
-        </p:txBody>
-      </p:sp>
-      <p:sp>
-        <p:nvSpPr>
-          <p:cNvPr id="32" name="Oval 31"/>
-          <p:cNvSpPr/>
-          <p:nvPr/>
-        </p:nvSpPr>
-        <p:spPr>
-          <a:xfrm>
-            <a:off x="4827835" y="1258684"/>
-            <a:ext cx="41148" cy="41148"/>
-          </a:xfrm>
-          <a:prstGeom prst="ellipse">
-            <a:avLst/>
-          </a:prstGeom>
-          <a:solidFill>
-            <a:srgbClr val="3A4A78"/>
-          </a:solidFill>
-          <a:ln>
-            <a:noFill/>
-          </a:ln>
-          <a:effectLst/>
-        </p:spPr>
-        <p:style>
-          <a:lnRef idx="1">
-            <a:schemeClr val="accent1"/>
-          </a:lnRef>
-          <a:fillRef idx="3">
-            <a:schemeClr val="accent1"/>
-          </a:fillRef>
-          <a:effectRef idx="2">
-            <a:schemeClr val="accent1"/>
-          </a:effectRef>
-          <a:fontRef idx="minor">
-            <a:schemeClr val="lt1"/>
-          </a:fontRef>
-        </p:style>
-        <p:txBody>
-          <a:bodyPr rtlCol="0" anchor="ctr"/>
-          <a:lstStyle/>
-          <a:p>
-            <a:pPr algn="ctr"/>
-          </a:p>
-        </p:txBody>
-      </p:sp>
-      <p:sp>
-        <p:nvSpPr>
-          <p:cNvPr id="33" name="Oval 32"/>
-          <p:cNvSpPr/>
-          <p:nvPr/>
-        </p:nvSpPr>
-        <p:spPr>
-          <a:xfrm>
-            <a:off x="2841657" y="218149"/>
-            <a:ext cx="18288" cy="18288"/>
-          </a:xfrm>
-          <a:prstGeom prst="ellipse">
-            <a:avLst/>
-          </a:prstGeom>
-          <a:solidFill>
-            <a:srgbClr val="3A4A78"/>
-          </a:solidFill>
-          <a:ln>
-            <a:noFill/>
-          </a:ln>
-          <a:effectLst/>
-        </p:spPr>
-        <p:style>
-          <a:lnRef idx="1">
-            <a:schemeClr val="accent1"/>
-          </a:lnRef>
-          <a:fillRef idx="3">
-            <a:schemeClr val="accent1"/>
-          </a:fillRef>
-          <a:effectRef idx="2">
-            <a:schemeClr val="accent1"/>
-          </a:effectRef>
-          <a:fontRef idx="minor">
-            <a:schemeClr val="lt1"/>
-          </a:fontRef>
-        </p:style>
-        <p:txBody>
-          <a:bodyPr rtlCol="0" anchor="ctr"/>
-          <a:lstStyle/>
-          <a:p>
-            <a:pPr algn="ctr"/>
-          </a:p>
-        </p:txBody>
-      </p:sp>
-      <p:sp>
-        <p:nvSpPr>
-          <p:cNvPr id="34" name="Oval 33"/>
-          <p:cNvSpPr/>
-          <p:nvPr/>
-        </p:nvSpPr>
-        <p:spPr>
-          <a:xfrm>
-            <a:off x="6567983" y="5801032"/>
-            <a:ext cx="18288" cy="18288"/>
-          </a:xfrm>
-          <a:prstGeom prst="ellipse">
-            <a:avLst/>
-          </a:prstGeom>
-          <a:solidFill>
-            <a:srgbClr val="3A4A78"/>
-          </a:solidFill>
-          <a:ln>
-            <a:noFill/>
-          </a:ln>
-          <a:effectLst/>
-        </p:spPr>
-        <p:style>
-          <a:lnRef idx="1">
-            <a:schemeClr val="accent1"/>
-          </a:lnRef>
-          <a:fillRef idx="3">
-            <a:schemeClr val="accent1"/>
-          </a:fillRef>
-          <a:effectRef idx="2">
-            <a:schemeClr val="accent1"/>
-          </a:effectRef>
-          <a:fontRef idx="minor">
-            <a:schemeClr val="lt1"/>
-          </a:fontRef>
-        </p:style>
-        <p:txBody>
-          <a:bodyPr rtlCol="0" anchor="ctr"/>
-          <a:lstStyle/>
-          <a:p>
-            <a:pPr algn="ctr"/>
-          </a:p>
-        </p:txBody>
-      </p:sp>
-      <p:sp>
-        <p:nvSpPr>
-          <p:cNvPr id="35" name="Oval 34"/>
-          <p:cNvSpPr/>
-          <p:nvPr/>
-        </p:nvSpPr>
-        <p:spPr>
-          <a:xfrm>
-            <a:off x="4957200" y="2400799"/>
-            <a:ext cx="41148" cy="41148"/>
-          </a:xfrm>
-          <a:prstGeom prst="ellipse">
-            <a:avLst/>
-          </a:prstGeom>
-          <a:solidFill>
-            <a:srgbClr val="3A4A78"/>
-          </a:solidFill>
-          <a:ln>
-            <a:noFill/>
-          </a:ln>
-          <a:effectLst/>
-        </p:spPr>
-        <p:style>
-          <a:lnRef idx="1">
-            <a:schemeClr val="accent1"/>
-          </a:lnRef>
-          <a:fillRef idx="3">
-            <a:schemeClr val="accent1"/>
-          </a:fillRef>
-          <a:effectRef idx="2">
-            <a:schemeClr val="accent1"/>
-          </a:effectRef>
-          <a:fontRef idx="minor">
-            <a:schemeClr val="lt1"/>
-          </a:fontRef>
-        </p:style>
-        <p:txBody>
-          <a:bodyPr rtlCol="0" anchor="ctr"/>
-          <a:lstStyle/>
-          <a:p>
-            <a:pPr algn="ctr"/>
-          </a:p>
-        </p:txBody>
-      </p:sp>
-      <p:sp>
-        <p:nvSpPr>
-          <p:cNvPr id="36" name="Oval 35"/>
-          <p:cNvSpPr/>
-          <p:nvPr/>
-        </p:nvSpPr>
-        <p:spPr>
-          <a:xfrm>
-            <a:off x="4347260" y="6126695"/>
-            <a:ext cx="41148" cy="41148"/>
-          </a:xfrm>
-          <a:prstGeom prst="ellipse">
-            <a:avLst/>
-          </a:prstGeom>
-          <a:solidFill>
-            <a:srgbClr val="3A4A78"/>
-          </a:solidFill>
-          <a:ln>
-            <a:noFill/>
-          </a:ln>
-          <a:effectLst/>
-        </p:spPr>
-        <p:style>
-          <a:lnRef idx="1">
-            <a:schemeClr val="accent1"/>
-          </a:lnRef>
-          <a:fillRef idx="3">
-            <a:schemeClr val="accent1"/>
-          </a:fillRef>
-          <a:effectRef idx="2">
-            <a:schemeClr val="accent1"/>
-          </a:effectRef>
-          <a:fontRef idx="minor">
-            <a:schemeClr val="lt1"/>
-          </a:fontRef>
-        </p:style>
-        <p:txBody>
-          <a:bodyPr rtlCol="0" anchor="ctr"/>
-          <a:lstStyle/>
-          <a:p>
-            <a:pPr algn="ctr"/>
-          </a:p>
-        </p:txBody>
-      </p:sp>
-      <p:sp>
-        <p:nvSpPr>
-          <p:cNvPr id="37" name="Oval 36"/>
-          <p:cNvSpPr/>
-          <p:nvPr/>
-        </p:nvSpPr>
-        <p:spPr>
-          <a:xfrm>
-            <a:off x="6667837" y="6438507"/>
-            <a:ext cx="18288" cy="18288"/>
-          </a:xfrm>
-          <a:prstGeom prst="ellipse">
-            <a:avLst/>
-          </a:prstGeom>
-          <a:solidFill>
-            <a:srgbClr val="3A4A78"/>
-          </a:solidFill>
-          <a:ln>
-            <a:noFill/>
-          </a:ln>
-          <a:effectLst/>
-        </p:spPr>
-        <p:style>
-          <a:lnRef idx="1">
-            <a:schemeClr val="accent1"/>
-          </a:lnRef>
-          <a:fillRef idx="3">
-            <a:schemeClr val="accent1"/>
-          </a:fillRef>
-          <a:effectRef idx="2">
-            <a:schemeClr val="accent1"/>
-          </a:effectRef>
-          <a:fontRef idx="minor">
-            <a:schemeClr val="lt1"/>
-          </a:fontRef>
-        </p:style>
-        <p:txBody>
-          <a:bodyPr rtlCol="0" anchor="ctr"/>
-          <a:lstStyle/>
-          <a:p>
-            <a:pPr algn="ctr"/>
-          </a:p>
-        </p:txBody>
-      </p:sp>
-      <p:sp>
-        <p:nvSpPr>
-          <p:cNvPr id="38" name="Oval 37"/>
-          <p:cNvSpPr/>
-          <p:nvPr/>
-        </p:nvSpPr>
-        <p:spPr>
-          <a:xfrm>
-            <a:off x="4709733" y="5779038"/>
-            <a:ext cx="41148" cy="41148"/>
-          </a:xfrm>
-          <a:prstGeom prst="ellipse">
-            <a:avLst/>
-          </a:prstGeom>
-          <a:solidFill>
-            <a:srgbClr val="3A4A78"/>
-          </a:solidFill>
-          <a:ln>
-            <a:noFill/>
-          </a:ln>
-          <a:effectLst/>
-        </p:spPr>
-        <p:style>
-          <a:lnRef idx="1">
-            <a:schemeClr val="accent1"/>
-          </a:lnRef>
-          <a:fillRef idx="3">
-            <a:schemeClr val="accent1"/>
-          </a:fillRef>
-          <a:effectRef idx="2">
-            <a:schemeClr val="accent1"/>
-          </a:effectRef>
-          <a:fontRef idx="minor">
-            <a:schemeClr val="lt1"/>
-          </a:fontRef>
-        </p:style>
-        <p:txBody>
-          <a:bodyPr rtlCol="0" anchor="ctr"/>
-          <a:lstStyle/>
-          <a:p>
-            <a:pPr algn="ctr"/>
-          </a:p>
-        </p:txBody>
-      </p:sp>
-      <p:sp>
-        <p:nvSpPr>
-          <p:cNvPr id="39" name="Oval 38"/>
-          <p:cNvSpPr/>
-          <p:nvPr/>
-        </p:nvSpPr>
-        <p:spPr>
-          <a:xfrm>
-            <a:off x="6244814" y="988096"/>
-            <a:ext cx="41148" cy="41148"/>
-          </a:xfrm>
-          <a:prstGeom prst="ellipse">
-            <a:avLst/>
-          </a:prstGeom>
-          <a:solidFill>
-            <a:srgbClr val="3A4A78"/>
-          </a:solidFill>
-          <a:ln>
-            <a:noFill/>
-          </a:ln>
-          <a:effectLst/>
-        </p:spPr>
-        <p:style>
-          <a:lnRef idx="1">
-            <a:schemeClr val="accent1"/>
-          </a:lnRef>
-          <a:fillRef idx="3">
-            <a:schemeClr val="accent1"/>
-          </a:fillRef>
-          <a:effectRef idx="2">
-            <a:schemeClr val="accent1"/>
-          </a:effectRef>
-          <a:fontRef idx="minor">
-            <a:schemeClr val="lt1"/>
-          </a:fontRef>
-        </p:style>
-        <p:txBody>
-          <a:bodyPr rtlCol="0" anchor="ctr"/>
-          <a:lstStyle/>
-          <a:p>
-            <a:pPr algn="ctr"/>
-          </a:p>
-        </p:txBody>
-      </p:sp>
-      <p:sp>
-        <p:nvSpPr>
-          <p:cNvPr id="40" name="Oval 39"/>
-          <p:cNvSpPr/>
-          <p:nvPr/>
-        </p:nvSpPr>
-        <p:spPr>
-          <a:xfrm>
-            <a:off x="2586004" y="6389807"/>
-            <a:ext cx="27432" cy="27432"/>
-          </a:xfrm>
-          <a:prstGeom prst="ellipse">
-            <a:avLst/>
-          </a:prstGeom>
-          <a:solidFill>
-            <a:srgbClr val="3A4A78"/>
-          </a:solidFill>
-          <a:ln>
-            <a:noFill/>
-          </a:ln>
-          <a:effectLst/>
-        </p:spPr>
-        <p:style>
-          <a:lnRef idx="1">
-            <a:schemeClr val="accent1"/>
-          </a:lnRef>
-          <a:fillRef idx="3">
-            <a:schemeClr val="accent1"/>
-          </a:fillRef>
-          <a:effectRef idx="2">
-            <a:schemeClr val="accent1"/>
-          </a:effectRef>
-          <a:fontRef idx="minor">
-            <a:schemeClr val="lt1"/>
-          </a:fontRef>
-        </p:style>
-        <p:txBody>
-          <a:bodyPr rtlCol="0" anchor="ctr"/>
-          <a:lstStyle/>
-          <a:p>
-            <a:pPr algn="ctr"/>
-          </a:p>
-        </p:txBody>
-      </p:sp>
-      <p:sp>
-        <p:nvSpPr>
-          <p:cNvPr id="41" name="Oval 40"/>
-          <p:cNvSpPr/>
-          <p:nvPr/>
-        </p:nvSpPr>
-        <p:spPr>
-          <a:xfrm>
-            <a:off x="10505397" y="3889853"/>
-            <a:ext cx="18288" cy="18288"/>
-          </a:xfrm>
-          <a:prstGeom prst="ellipse">
-            <a:avLst/>
-          </a:prstGeom>
-          <a:solidFill>
-            <a:srgbClr val="3A4A78"/>
-          </a:solidFill>
-          <a:ln>
-            <a:noFill/>
-          </a:ln>
-          <a:effectLst/>
-        </p:spPr>
-        <p:style>
-          <a:lnRef idx="1">
-            <a:schemeClr val="accent1"/>
-          </a:lnRef>
-          <a:fillRef idx="3">
-            <a:schemeClr val="accent1"/>
-          </a:fillRef>
-          <a:effectRef idx="2">
-            <a:schemeClr val="accent1"/>
-          </a:effectRef>
-          <a:fontRef idx="minor">
-            <a:schemeClr val="lt1"/>
-          </a:fontRef>
-        </p:style>
-        <p:txBody>
-          <a:bodyPr rtlCol="0" anchor="ctr"/>
-          <a:lstStyle/>
-          <a:p>
-            <a:pPr algn="ctr"/>
-          </a:p>
-        </p:txBody>
-      </p:sp>
-      <p:sp>
-        <p:nvSpPr>
-          <p:cNvPr id="42" name="Oval 41"/>
-          <p:cNvSpPr/>
-          <p:nvPr/>
-        </p:nvSpPr>
-        <p:spPr>
-          <a:xfrm>
-            <a:off x="11351571" y="2858853"/>
-            <a:ext cx="27432" cy="27432"/>
-          </a:xfrm>
-          <a:prstGeom prst="ellipse">
-            <a:avLst/>
-          </a:prstGeom>
-          <a:solidFill>
-            <a:srgbClr val="3A4A78"/>
-          </a:solidFill>
-          <a:ln>
-            <a:noFill/>
-          </a:ln>
-          <a:effectLst/>
-        </p:spPr>
-        <p:style>
-          <a:lnRef idx="1">
-            <a:schemeClr val="accent1"/>
-          </a:lnRef>
-          <a:fillRef idx="3">
-            <a:schemeClr val="accent1"/>
-          </a:fillRef>
-          <a:effectRef idx="2">
-            <a:schemeClr val="accent1"/>
-          </a:effectRef>
-          <a:fontRef idx="minor">
-            <a:schemeClr val="lt1"/>
-          </a:fontRef>
-        </p:style>
-        <p:txBody>
-          <a:bodyPr rtlCol="0" anchor="ctr"/>
-          <a:lstStyle/>
-          <a:p>
-            <a:pPr algn="ctr"/>
-          </a:p>
-        </p:txBody>
-      </p:sp>
-      <p:sp>
-        <p:nvSpPr>
-          <p:cNvPr id="43" name="Oval 42"/>
-          <p:cNvSpPr/>
-          <p:nvPr/>
-        </p:nvSpPr>
-        <p:spPr>
-          <a:xfrm>
-            <a:off x="5076012" y="147593"/>
-            <a:ext cx="41148" cy="41148"/>
-          </a:xfrm>
-          <a:prstGeom prst="ellipse">
-            <a:avLst/>
-          </a:prstGeom>
-          <a:solidFill>
-            <a:srgbClr val="3A4A78"/>
-          </a:solidFill>
-          <a:ln>
-            <a:noFill/>
-          </a:ln>
-          <a:effectLst/>
-        </p:spPr>
-        <p:style>
-          <a:lnRef idx="1">
-            <a:schemeClr val="accent1"/>
-          </a:lnRef>
-          <a:fillRef idx="3">
-            <a:schemeClr val="accent1"/>
-          </a:fillRef>
-          <a:effectRef idx="2">
-            <a:schemeClr val="accent1"/>
-          </a:effectRef>
-          <a:fontRef idx="minor">
-            <a:schemeClr val="lt1"/>
-          </a:fontRef>
-        </p:style>
-        <p:txBody>
-          <a:bodyPr rtlCol="0" anchor="ctr"/>
-          <a:lstStyle/>
-          <a:p>
-            <a:pPr algn="ctr"/>
-          </a:p>
-        </p:txBody>
-      </p:sp>
-      <p:sp>
-        <p:nvSpPr>
-          <p:cNvPr id="44" name="Oval 43"/>
-          <p:cNvSpPr/>
-          <p:nvPr/>
-        </p:nvSpPr>
-        <p:spPr>
-          <a:xfrm>
-            <a:off x="7567517" y="4169351"/>
-            <a:ext cx="27432" cy="27432"/>
-          </a:xfrm>
-          <a:prstGeom prst="ellipse">
-            <a:avLst/>
-          </a:prstGeom>
-          <a:solidFill>
-            <a:srgbClr val="3A4A78"/>
-          </a:solidFill>
-          <a:ln>
-            <a:noFill/>
-          </a:ln>
-          <a:effectLst/>
-        </p:spPr>
-        <p:style>
-          <a:lnRef idx="1">
-            <a:schemeClr val="accent1"/>
-          </a:lnRef>
-          <a:fillRef idx="3">
-            <a:schemeClr val="accent1"/>
-          </a:fillRef>
-          <a:effectRef idx="2">
-            <a:schemeClr val="accent1"/>
-          </a:effectRef>
-          <a:fontRef idx="minor">
-            <a:schemeClr val="lt1"/>
-          </a:fontRef>
-        </p:style>
-        <p:txBody>
-          <a:bodyPr rtlCol="0" anchor="ctr"/>
-          <a:lstStyle/>
-          <a:p>
-            <a:pPr algn="ctr"/>
-          </a:p>
-        </p:txBody>
-      </p:sp>
-      <p:sp>
-        <p:nvSpPr>
-          <p:cNvPr id="45" name="Oval 44"/>
-          <p:cNvSpPr/>
-          <p:nvPr/>
-        </p:nvSpPr>
-        <p:spPr>
-          <a:xfrm>
-            <a:off x="7285859" y="5434188"/>
-            <a:ext cx="41148" cy="41148"/>
-          </a:xfrm>
-          <a:prstGeom prst="ellipse">
-            <a:avLst/>
-          </a:prstGeom>
-          <a:solidFill>
-            <a:srgbClr val="3A4A78"/>
-          </a:solidFill>
-          <a:ln>
-            <a:noFill/>
-          </a:ln>
-          <a:effectLst/>
-        </p:spPr>
-        <p:style>
-          <a:lnRef idx="1">
-            <a:schemeClr val="accent1"/>
-          </a:lnRef>
-          <a:fillRef idx="3">
-            <a:schemeClr val="accent1"/>
-          </a:fillRef>
-          <a:effectRef idx="2">
-            <a:schemeClr val="accent1"/>
-          </a:effectRef>
-          <a:fontRef idx="minor">
-            <a:schemeClr val="lt1"/>
-          </a:fontRef>
-        </p:style>
-        <p:txBody>
-          <a:bodyPr rtlCol="0" anchor="ctr"/>
-          <a:lstStyle/>
-          <a:p>
-            <a:pPr algn="ctr"/>
-          </a:p>
-        </p:txBody>
-      </p:sp>
-      <p:sp>
-        <p:nvSpPr>
-          <p:cNvPr id="46" name="Oval 45"/>
-          <p:cNvSpPr/>
-          <p:nvPr/>
-        </p:nvSpPr>
-        <p:spPr>
-          <a:xfrm>
-            <a:off x="2249053" y="3985063"/>
-            <a:ext cx="18288" cy="18288"/>
-          </a:xfrm>
-          <a:prstGeom prst="ellipse">
-            <a:avLst/>
-          </a:prstGeom>
-          <a:solidFill>
-            <a:srgbClr val="3A4A78"/>
-          </a:solidFill>
-          <a:ln>
-            <a:noFill/>
-          </a:ln>
-          <a:effectLst/>
-        </p:spPr>
-        <p:style>
-          <a:lnRef idx="1">
-            <a:schemeClr val="accent1"/>
-          </a:lnRef>
-          <a:fillRef idx="3">
-            <a:schemeClr val="accent1"/>
-          </a:fillRef>
-          <a:effectRef idx="2">
-            <a:schemeClr val="accent1"/>
-          </a:effectRef>
-          <a:fontRef idx="minor">
-            <a:schemeClr val="lt1"/>
-          </a:fontRef>
-        </p:style>
-        <p:txBody>
-          <a:bodyPr rtlCol="0" anchor="ctr"/>
-          <a:lstStyle/>
-          <a:p>
-            <a:pPr algn="ctr"/>
-          </a:p>
-        </p:txBody>
-      </p:sp>
-      <p:sp>
-        <p:nvSpPr>
-          <p:cNvPr id="47" name="Oval 46"/>
-          <p:cNvSpPr/>
-          <p:nvPr/>
-        </p:nvSpPr>
-        <p:spPr>
-          <a:xfrm>
-            <a:off x="9652456" y="5384995"/>
-            <a:ext cx="27432" cy="27432"/>
-          </a:xfrm>
-          <a:prstGeom prst="ellipse">
-            <a:avLst/>
-          </a:prstGeom>
-          <a:solidFill>
-            <a:srgbClr val="3A4A78"/>
-          </a:solidFill>
-          <a:ln>
-            <a:noFill/>
-          </a:ln>
-          <a:effectLst/>
-        </p:spPr>
-        <p:style>
-          <a:lnRef idx="1">
-            <a:schemeClr val="accent1"/>
-          </a:lnRef>
-          <a:fillRef idx="3">
-            <a:schemeClr val="accent1"/>
-          </a:fillRef>
-          <a:effectRef idx="2">
-            <a:schemeClr val="accent1"/>
-          </a:effectRef>
-          <a:fontRef idx="minor">
-            <a:schemeClr val="lt1"/>
-          </a:fontRef>
-        </p:style>
-        <p:txBody>
-          <a:bodyPr rtlCol="0" anchor="ctr"/>
-          <a:lstStyle/>
-          <a:p>
-            <a:pPr algn="ctr"/>
-          </a:p>
-        </p:txBody>
-      </p:sp>
-      <p:sp>
-        <p:nvSpPr>
-          <p:cNvPr id="48" name="Oval 47"/>
-          <p:cNvSpPr/>
-          <p:nvPr/>
-        </p:nvSpPr>
-        <p:spPr>
-          <a:xfrm>
-            <a:off x="523987" y="6349324"/>
-            <a:ext cx="18288" cy="18288"/>
-          </a:xfrm>
-          <a:prstGeom prst="ellipse">
-            <a:avLst/>
-          </a:prstGeom>
-          <a:solidFill>
-            <a:srgbClr val="3A4A78"/>
-          </a:solidFill>
-          <a:ln>
-            <a:noFill/>
-          </a:ln>
-          <a:effectLst/>
-        </p:spPr>
-        <p:style>
-          <a:lnRef idx="1">
-            <a:schemeClr val="accent1"/>
-          </a:lnRef>
-          <a:fillRef idx="3">
-            <a:schemeClr val="accent1"/>
-          </a:fillRef>
-          <a:effectRef idx="2">
-            <a:schemeClr val="accent1"/>
-          </a:effectRef>
-          <a:fontRef idx="minor">
-            <a:schemeClr val="lt1"/>
-          </a:fontRef>
-        </p:style>
-        <p:txBody>
-          <a:bodyPr rtlCol="0" anchor="ctr"/>
-          <a:lstStyle/>
-          <a:p>
-            <a:pPr algn="ctr"/>
-          </a:p>
-        </p:txBody>
-      </p:sp>
-      <p:sp>
-        <p:nvSpPr>
-          <p:cNvPr id="49" name="Oval 48"/>
-          <p:cNvSpPr/>
-          <p:nvPr/>
-        </p:nvSpPr>
-        <p:spPr>
-          <a:xfrm>
-            <a:off x="1129092" y="247045"/>
-            <a:ext cx="18288" cy="18288"/>
-          </a:xfrm>
-          <a:prstGeom prst="ellipse">
-            <a:avLst/>
-          </a:prstGeom>
-          <a:solidFill>
-            <a:srgbClr val="3A4A78"/>
-          </a:solidFill>
-          <a:ln>
-            <a:noFill/>
-          </a:ln>
-          <a:effectLst/>
-        </p:spPr>
-        <p:style>
-          <a:lnRef idx="1">
-            <a:schemeClr val="accent1"/>
-          </a:lnRef>
-          <a:fillRef idx="3">
-            <a:schemeClr val="accent1"/>
-          </a:fillRef>
-          <a:effectRef idx="2">
-            <a:schemeClr val="accent1"/>
-          </a:effectRef>
-          <a:fontRef idx="minor">
-            <a:schemeClr val="lt1"/>
-          </a:fontRef>
-        </p:style>
-        <p:txBody>
-          <a:bodyPr rtlCol="0" anchor="ctr"/>
-          <a:lstStyle/>
-          <a:p>
-            <a:pPr algn="ctr"/>
-          </a:p>
-        </p:txBody>
-      </p:sp>
-      <p:sp>
-        <p:nvSpPr>
-          <p:cNvPr id="50" name="Oval 49"/>
-          <p:cNvSpPr/>
-          <p:nvPr/>
-        </p:nvSpPr>
-        <p:spPr>
-          <a:xfrm>
-            <a:off x="9124592" y="1988468"/>
-            <a:ext cx="27432" cy="27432"/>
-          </a:xfrm>
-          <a:prstGeom prst="ellipse">
-            <a:avLst/>
-          </a:prstGeom>
-          <a:solidFill>
-            <a:srgbClr val="3A4A78"/>
-          </a:solidFill>
-          <a:ln>
-            <a:noFill/>
-          </a:ln>
-          <a:effectLst/>
-        </p:spPr>
-        <p:style>
-          <a:lnRef idx="1">
-            <a:schemeClr val="accent1"/>
-          </a:lnRef>
-          <a:fillRef idx="3">
-            <a:schemeClr val="accent1"/>
-          </a:fillRef>
-          <a:effectRef idx="2">
-            <a:schemeClr val="accent1"/>
-          </a:effectRef>
-          <a:fontRef idx="minor">
-            <a:schemeClr val="lt1"/>
-          </a:fontRef>
-        </p:style>
-        <p:txBody>
-          <a:bodyPr rtlCol="0" anchor="ctr"/>
-          <a:lstStyle/>
-          <a:p>
-            <a:pPr algn="ctr"/>
-          </a:p>
-        </p:txBody>
-      </p:sp>
-      <p:sp>
-        <p:nvSpPr>
-          <p:cNvPr id="51" name="Oval 50"/>
-          <p:cNvSpPr/>
-          <p:nvPr/>
-        </p:nvSpPr>
-        <p:spPr>
-          <a:xfrm>
-            <a:off x="1441977" y="4250656"/>
-            <a:ext cx="27432" cy="27432"/>
-          </a:xfrm>
-          <a:prstGeom prst="ellipse">
-            <a:avLst/>
-          </a:prstGeom>
-          <a:solidFill>
-            <a:srgbClr val="3A4A78"/>
-          </a:solidFill>
-          <a:ln>
-            <a:noFill/>
-          </a:ln>
-          <a:effectLst/>
-        </p:spPr>
-        <p:style>
-          <a:lnRef idx="1">
-            <a:schemeClr val="accent1"/>
-          </a:lnRef>
-          <a:fillRef idx="3">
-            <a:schemeClr val="accent1"/>
-          </a:fillRef>
-          <a:effectRef idx="2">
-            <a:schemeClr val="accent1"/>
-          </a:effectRef>
-          <a:fontRef idx="minor">
-            <a:schemeClr val="lt1"/>
-          </a:fontRef>
-        </p:style>
-        <p:txBody>
-          <a:bodyPr rtlCol="0" anchor="ctr"/>
-          <a:lstStyle/>
-          <a:p>
-            <a:pPr algn="ctr"/>
-          </a:p>
-        </p:txBody>
-      </p:sp>
-      <p:sp>
-        <p:nvSpPr>
-          <p:cNvPr id="52" name="Oval 51"/>
-          <p:cNvSpPr/>
-          <p:nvPr/>
-        </p:nvSpPr>
-        <p:spPr>
-          <a:xfrm>
-            <a:off x="3596587" y="1239730"/>
-            <a:ext cx="27432" cy="27432"/>
-          </a:xfrm>
-          <a:prstGeom prst="ellipse">
-            <a:avLst/>
-          </a:prstGeom>
-          <a:solidFill>
-            <a:srgbClr val="3A4A78"/>
-          </a:solidFill>
-          <a:ln>
-            <a:noFill/>
-          </a:ln>
-          <a:effectLst/>
-        </p:spPr>
-        <p:style>
-          <a:lnRef idx="1">
-            <a:schemeClr val="accent1"/>
-          </a:lnRef>
-          <a:fillRef idx="3">
-            <a:schemeClr val="accent1"/>
-          </a:fillRef>
-          <a:effectRef idx="2">
-            <a:schemeClr val="accent1"/>
-          </a:effectRef>
-          <a:fontRef idx="minor">
-            <a:schemeClr val="lt1"/>
-          </a:fontRef>
-        </p:style>
-        <p:txBody>
-          <a:bodyPr rtlCol="0" anchor="ctr"/>
-          <a:lstStyle/>
-          <a:p>
-            <a:pPr algn="ctr"/>
-          </a:p>
-        </p:txBody>
-      </p:sp>
-      <p:sp>
-        <p:nvSpPr>
-          <p:cNvPr id="53" name="Oval 52"/>
-          <p:cNvSpPr/>
-          <p:nvPr/>
-        </p:nvSpPr>
-        <p:spPr>
-          <a:xfrm>
-            <a:off x="6422150" y="1244172"/>
-            <a:ext cx="27432" cy="27432"/>
-          </a:xfrm>
-          <a:prstGeom prst="ellipse">
-            <a:avLst/>
-          </a:prstGeom>
-          <a:solidFill>
-            <a:srgbClr val="3A4A78"/>
-          </a:solidFill>
-          <a:ln>
-            <a:noFill/>
-          </a:ln>
-          <a:effectLst/>
-        </p:spPr>
-        <p:style>
-          <a:lnRef idx="1">
-            <a:schemeClr val="accent1"/>
-          </a:lnRef>
-          <a:fillRef idx="3">
-            <a:schemeClr val="accent1"/>
-          </a:fillRef>
-          <a:effectRef idx="2">
-            <a:schemeClr val="accent1"/>
-          </a:effectRef>
-          <a:fontRef idx="minor">
-            <a:schemeClr val="lt1"/>
-          </a:fontRef>
-        </p:style>
-        <p:txBody>
-          <a:bodyPr rtlCol="0" anchor="ctr"/>
-          <a:lstStyle/>
-          <a:p>
-            <a:pPr algn="ctr"/>
-          </a:p>
-        </p:txBody>
-      </p:sp>
-      <p:sp>
-        <p:nvSpPr>
-          <p:cNvPr id="54" name="Oval 53"/>
-          <p:cNvSpPr/>
-          <p:nvPr/>
-        </p:nvSpPr>
-        <p:spPr>
-          <a:xfrm>
-            <a:off x="7862036" y="2076006"/>
-            <a:ext cx="41148" cy="41148"/>
-          </a:xfrm>
-          <a:prstGeom prst="ellipse">
-            <a:avLst/>
-          </a:prstGeom>
-          <a:solidFill>
-            <a:srgbClr val="3A4A78"/>
-          </a:solidFill>
-          <a:ln>
-            <a:noFill/>
-          </a:ln>
-          <a:effectLst/>
-        </p:spPr>
-        <p:style>
-          <a:lnRef idx="1">
-            <a:schemeClr val="accent1"/>
-          </a:lnRef>
-          <a:fillRef idx="3">
-            <a:schemeClr val="accent1"/>
-          </a:fillRef>
-          <a:effectRef idx="2">
-            <a:schemeClr val="accent1"/>
-          </a:effectRef>
-          <a:fontRef idx="minor">
-            <a:schemeClr val="lt1"/>
-          </a:fontRef>
-        </p:style>
-        <p:txBody>
-          <a:bodyPr rtlCol="0" anchor="ctr"/>
-          <a:lstStyle/>
-          <a:p>
-            <a:pPr algn="ctr"/>
-          </a:p>
-        </p:txBody>
-      </p:sp>
-      <p:sp>
-        <p:nvSpPr>
-          <p:cNvPr id="55" name="Oval 54"/>
-          <p:cNvSpPr/>
-          <p:nvPr/>
-        </p:nvSpPr>
-        <p:spPr>
-          <a:xfrm>
-            <a:off x="3974575" y="3256316"/>
-            <a:ext cx="18288" cy="18288"/>
-          </a:xfrm>
-          <a:prstGeom prst="ellipse">
-            <a:avLst/>
-          </a:prstGeom>
-          <a:solidFill>
-            <a:srgbClr val="3A4A78"/>
-          </a:solidFill>
-          <a:ln>
-            <a:noFill/>
-          </a:ln>
-          <a:effectLst/>
-        </p:spPr>
-        <p:style>
-          <a:lnRef idx="1">
-            <a:schemeClr val="accent1"/>
-          </a:lnRef>
-          <a:fillRef idx="3">
-            <a:schemeClr val="accent1"/>
-          </a:fillRef>
-          <a:effectRef idx="2">
-            <a:schemeClr val="accent1"/>
-          </a:effectRef>
-          <a:fontRef idx="minor">
-            <a:schemeClr val="lt1"/>
-          </a:fontRef>
-        </p:style>
-        <p:txBody>
-          <a:bodyPr rtlCol="0" anchor="ctr"/>
-          <a:lstStyle/>
-          <a:p>
-            <a:pPr algn="ctr"/>
-          </a:p>
-        </p:txBody>
-      </p:sp>
-      <p:sp>
-        <p:nvSpPr>
-          <p:cNvPr id="56" name="Oval 55"/>
-          <p:cNvSpPr/>
-          <p:nvPr/>
-        </p:nvSpPr>
-        <p:spPr>
-          <a:xfrm>
-            <a:off x="3855439" y="2397616"/>
-            <a:ext cx="18288" cy="18288"/>
-          </a:xfrm>
-          <a:prstGeom prst="ellipse">
-            <a:avLst/>
-          </a:prstGeom>
-          <a:solidFill>
-            <a:srgbClr val="3A4A78"/>
-          </a:solidFill>
-          <a:ln>
-            <a:noFill/>
-          </a:ln>
-          <a:effectLst/>
-        </p:spPr>
-        <p:style>
-          <a:lnRef idx="1">
-            <a:schemeClr val="accent1"/>
-          </a:lnRef>
-          <a:fillRef idx="3">
-            <a:schemeClr val="accent1"/>
-          </a:fillRef>
-          <a:effectRef idx="2">
-            <a:schemeClr val="accent1"/>
-          </a:effectRef>
-          <a:fontRef idx="minor">
-            <a:schemeClr val="lt1"/>
-          </a:fontRef>
-        </p:style>
-        <p:txBody>
-          <a:bodyPr rtlCol="0" anchor="ctr"/>
-          <a:lstStyle/>
-          <a:p>
-            <a:pPr algn="ctr"/>
-          </a:p>
-        </p:txBody>
-      </p:sp>
-      <p:sp>
-        <p:nvSpPr>
-          <p:cNvPr id="57" name="Oval 56"/>
-          <p:cNvSpPr/>
-          <p:nvPr/>
-        </p:nvSpPr>
-        <p:spPr>
-          <a:xfrm>
-            <a:off x="3216858" y="1805847"/>
-            <a:ext cx="41148" cy="41148"/>
-          </a:xfrm>
-          <a:prstGeom prst="ellipse">
-            <a:avLst/>
-          </a:prstGeom>
-          <a:solidFill>
-            <a:srgbClr val="3A4A78"/>
-          </a:solidFill>
-          <a:ln>
-            <a:noFill/>
-          </a:ln>
-          <a:effectLst/>
-        </p:spPr>
-        <p:style>
-          <a:lnRef idx="1">
-            <a:schemeClr val="accent1"/>
-          </a:lnRef>
-          <a:fillRef idx="3">
-            <a:schemeClr val="accent1"/>
-          </a:fillRef>
-          <a:effectRef idx="2">
-            <a:schemeClr val="accent1"/>
-          </a:effectRef>
-          <a:fontRef idx="minor">
-            <a:schemeClr val="lt1"/>
-          </a:fontRef>
-        </p:style>
-        <p:txBody>
-          <a:bodyPr rtlCol="0" anchor="ctr"/>
-          <a:lstStyle/>
-          <a:p>
-            <a:pPr algn="ctr"/>
-          </a:p>
-        </p:txBody>
-      </p:sp>
-      <p:sp>
-        <p:nvSpPr>
-          <p:cNvPr id="58" name="Oval 57"/>
-          <p:cNvSpPr/>
-          <p:nvPr/>
-        </p:nvSpPr>
-        <p:spPr>
-          <a:xfrm>
-            <a:off x="6216403" y="1513748"/>
-            <a:ext cx="41148" cy="41148"/>
-          </a:xfrm>
-          <a:prstGeom prst="ellipse">
-            <a:avLst/>
-          </a:prstGeom>
-          <a:solidFill>
-            <a:srgbClr val="3A4A78"/>
-          </a:solidFill>
-          <a:ln>
-            <a:noFill/>
-          </a:ln>
-          <a:effectLst/>
-        </p:spPr>
-        <p:style>
-          <a:lnRef idx="1">
-            <a:schemeClr val="accent1"/>
-          </a:lnRef>
-          <a:fillRef idx="3">
-            <a:schemeClr val="accent1"/>
-          </a:fillRef>
-          <a:effectRef idx="2">
-            <a:schemeClr val="accent1"/>
-          </a:effectRef>
-          <a:fontRef idx="minor">
-            <a:schemeClr val="lt1"/>
-          </a:fontRef>
-        </p:style>
-        <p:txBody>
-          <a:bodyPr rtlCol="0" anchor="ctr"/>
-          <a:lstStyle/>
-          <a:p>
-            <a:pPr algn="ctr"/>
-          </a:p>
-        </p:txBody>
-      </p:sp>
-      <p:sp>
-        <p:nvSpPr>
-          <p:cNvPr id="59" name="Oval 58"/>
-          <p:cNvSpPr/>
-          <p:nvPr/>
-        </p:nvSpPr>
-        <p:spPr>
-          <a:xfrm>
-            <a:off x="5281361" y="6559891"/>
-            <a:ext cx="18288" cy="18288"/>
-          </a:xfrm>
-          <a:prstGeom prst="ellipse">
-            <a:avLst/>
-          </a:prstGeom>
-          <a:solidFill>
-            <a:srgbClr val="3A4A78"/>
-          </a:solidFill>
-          <a:ln>
-            <a:noFill/>
-          </a:ln>
-          <a:effectLst/>
-        </p:spPr>
-        <p:style>
-          <a:lnRef idx="1">
-            <a:schemeClr val="accent1"/>
-          </a:lnRef>
-          <a:fillRef idx="3">
-            <a:schemeClr val="accent1"/>
-          </a:fillRef>
-          <a:effectRef idx="2">
-            <a:schemeClr val="accent1"/>
-          </a:effectRef>
-          <a:fontRef idx="minor">
-            <a:schemeClr val="lt1"/>
-          </a:fontRef>
-        </p:style>
-        <p:txBody>
-          <a:bodyPr rtlCol="0" anchor="ctr"/>
-          <a:lstStyle/>
-          <a:p>
-            <a:pPr algn="ctr"/>
-          </a:p>
-        </p:txBody>
-      </p:sp>
-      <p:sp>
-        <p:nvSpPr>
-          <p:cNvPr id="60" name="Oval 59"/>
-          <p:cNvSpPr/>
-          <p:nvPr/>
-        </p:nvSpPr>
-        <p:spPr>
-          <a:xfrm>
-            <a:off x="350058" y="1101417"/>
-            <a:ext cx="41148" cy="41148"/>
-          </a:xfrm>
-          <a:prstGeom prst="ellipse">
-            <a:avLst/>
-          </a:prstGeom>
-          <a:solidFill>
-            <a:srgbClr val="3A4A78"/>
-          </a:solidFill>
-          <a:ln>
-            <a:noFill/>
-          </a:ln>
-          <a:effectLst/>
-        </p:spPr>
-        <p:style>
-          <a:lnRef idx="1">
-            <a:schemeClr val="accent1"/>
-          </a:lnRef>
-          <a:fillRef idx="3">
-            <a:schemeClr val="accent1"/>
-          </a:fillRef>
-          <a:effectRef idx="2">
-            <a:schemeClr val="accent1"/>
-          </a:effectRef>
-          <a:fontRef idx="minor">
-            <a:schemeClr val="lt1"/>
-          </a:fontRef>
-        </p:style>
-        <p:txBody>
-          <a:bodyPr rtlCol="0" anchor="ctr"/>
-          <a:lstStyle/>
-          <a:p>
-            <a:pPr algn="ctr"/>
-          </a:p>
-        </p:txBody>
-      </p:sp>
-      <p:sp>
-        <p:nvSpPr>
-          <p:cNvPr id="61" name="Oval 60"/>
-          <p:cNvSpPr/>
-          <p:nvPr/>
-        </p:nvSpPr>
-        <p:spPr>
-          <a:xfrm>
-            <a:off x="11576568" y="3071298"/>
-            <a:ext cx="41148" cy="41148"/>
-          </a:xfrm>
-          <a:prstGeom prst="ellipse">
-            <a:avLst/>
-          </a:prstGeom>
-          <a:solidFill>
-            <a:srgbClr val="3A4A78"/>
-          </a:solidFill>
-          <a:ln>
-            <a:noFill/>
-          </a:ln>
-          <a:effectLst/>
-        </p:spPr>
-        <p:style>
-          <a:lnRef idx="1">
-            <a:schemeClr val="accent1"/>
-          </a:lnRef>
-          <a:fillRef idx="3">
-            <a:schemeClr val="accent1"/>
-          </a:fillRef>
-          <a:effectRef idx="2">
-            <a:schemeClr val="accent1"/>
-          </a:effectRef>
-          <a:fontRef idx="minor">
-            <a:schemeClr val="lt1"/>
-          </a:fontRef>
-        </p:style>
-        <p:txBody>
-          <a:bodyPr rtlCol="0" anchor="ctr"/>
-          <a:lstStyle/>
-          <a:p>
-            <a:pPr algn="ctr"/>
-          </a:p>
-        </p:txBody>
-      </p:sp>
-      <p:sp>
-        <p:nvSpPr>
-          <p:cNvPr id="62" name="Oval 61"/>
-          <p:cNvSpPr/>
-          <p:nvPr/>
-        </p:nvSpPr>
-        <p:spPr>
-          <a:xfrm>
-            <a:off x="8219235" y="3723304"/>
-            <a:ext cx="18288" cy="18288"/>
-          </a:xfrm>
-          <a:prstGeom prst="ellipse">
-            <a:avLst/>
-          </a:prstGeom>
-          <a:solidFill>
-            <a:srgbClr val="3A4A78"/>
-          </a:solidFill>
-          <a:ln>
-            <a:noFill/>
-          </a:ln>
-          <a:effectLst/>
-        </p:spPr>
-        <p:style>
-          <a:lnRef idx="1">
-            <a:schemeClr val="accent1"/>
-          </a:lnRef>
-          <a:fillRef idx="3">
-            <a:schemeClr val="accent1"/>
-          </a:fillRef>
-          <a:effectRef idx="2">
-            <a:schemeClr val="accent1"/>
-          </a:effectRef>
-          <a:fontRef idx="minor">
-            <a:schemeClr val="lt1"/>
-          </a:fontRef>
-        </p:style>
-        <p:txBody>
-          <a:bodyPr rtlCol="0" anchor="ctr"/>
-          <a:lstStyle/>
-          <a:p>
-            <a:pPr algn="ctr"/>
-          </a:p>
-        </p:txBody>
-      </p:sp>
       <p:pic>
         <p:nvPicPr>
-          <p:cNvPr id="63" name="Picture 62" descr="PiFinder.jpg"/>
+          <p:cNvPr id="3" name="Picture 2" descr="PiFinder.jpg"/>
           <p:cNvPicPr>
             <a:picLocks noChangeAspect="1"/>
           </p:cNvPicPr>
@@ -5817,8 +3177,8 @@
         </p:blipFill>
         <p:spPr>
           <a:xfrm>
-            <a:off x="7543800" y="0"/>
-            <a:ext cx="4654296" cy="6858000"/>
+            <a:off x="-1161851" y="0"/>
+            <a:ext cx="13353546" cy="6858000"/>
           </a:xfrm>
           <a:prstGeom prst="rect">
             <a:avLst/>
@@ -5827,58 +3187,152 @@
       </p:pic>
       <p:sp>
         <p:nvSpPr>
-          <p:cNvPr id="64" name="Rectangle 63"/>
-          <p:cNvSpPr/>
-          <p:nvPr/>
-        </p:nvSpPr>
-        <p:spPr>
-          <a:xfrm>
-            <a:off x="6903720" y="0"/>
-            <a:ext cx="822960" cy="6858000"/>
+          <p:cNvPr id="4" name="Rectangle 3"/>
+          <p:cNvSpPr/>
+          <p:nvPr/>
+        </p:nvSpPr>
+        <p:spPr>
+          <a:xfrm>
+            <a:off x="0" y="0"/>
+            <a:ext cx="12191695" cy="6858000"/>
           </a:xfrm>
           <a:prstGeom prst="rect">
             <a:avLst/>
           </a:prstGeom>
           <a:solidFill>
-            <a:srgbClr val="0B1026"/>
-          </a:solidFill>
-          <a:ln>
-            <a:noFill/>
-          </a:ln>
-          <a:effectLst/>
-        </p:spPr>
-        <p:style>
-          <a:lnRef idx="1">
-            <a:schemeClr val="accent1"/>
-          </a:lnRef>
-          <a:fillRef idx="3">
-            <a:schemeClr val="accent1"/>
-          </a:fillRef>
-          <a:effectRef idx="2">
-            <a:schemeClr val="accent1"/>
-          </a:effectRef>
-          <a:fontRef idx="minor">
-            <a:schemeClr val="lt1"/>
-          </a:fontRef>
-        </p:style>
-        <p:txBody>
-          <a:bodyPr rtlCol="0" anchor="ctr"/>
-          <a:lstStyle/>
-          <a:p>
-            <a:pPr algn="ctr"/>
-          </a:p>
-        </p:txBody>
-      </p:sp>
-      <p:sp>
-        <p:nvSpPr>
-          <p:cNvPr id="65" name="TextBox 64"/>
+            <a:srgbClr val="0B1026">
+              <a:alpha val="16000"/>
+            </a:srgbClr>
+          </a:solidFill>
+          <a:ln>
+            <a:noFill/>
+          </a:ln>
+          <a:effectLst/>
+        </p:spPr>
+        <p:style>
+          <a:lnRef idx="1">
+            <a:schemeClr val="accent1"/>
+          </a:lnRef>
+          <a:fillRef idx="3">
+            <a:schemeClr val="accent1"/>
+          </a:fillRef>
+          <a:effectRef idx="2">
+            <a:schemeClr val="accent1"/>
+          </a:effectRef>
+          <a:fontRef idx="minor">
+            <a:schemeClr val="lt1"/>
+          </a:fontRef>
+        </p:style>
+        <p:txBody>
+          <a:bodyPr rtlCol="0" anchor="ctr"/>
+          <a:lstStyle/>
+          <a:p>
+            <a:pPr algn="ctr"/>
+          </a:p>
+        </p:txBody>
+      </p:sp>
+      <p:sp>
+        <p:nvSpPr>
+          <p:cNvPr id="5" name="Rectangle 4"/>
+          <p:cNvSpPr/>
+          <p:nvPr/>
+        </p:nvSpPr>
+        <p:spPr>
+          <a:xfrm>
+            <a:off x="0" y="0"/>
+            <a:ext cx="8778240" cy="6858000"/>
+          </a:xfrm>
+          <a:prstGeom prst="rect">
+            <a:avLst/>
+          </a:prstGeom>
+          <a:solidFill>
+            <a:srgbClr val="0B1026">
+              <a:alpha val="24000"/>
+            </a:srgbClr>
+          </a:solidFill>
+          <a:ln>
+            <a:noFill/>
+          </a:ln>
+          <a:effectLst/>
+        </p:spPr>
+        <p:style>
+          <a:lnRef idx="1">
+            <a:schemeClr val="accent1"/>
+          </a:lnRef>
+          <a:fillRef idx="3">
+            <a:schemeClr val="accent1"/>
+          </a:fillRef>
+          <a:effectRef idx="2">
+            <a:schemeClr val="accent1"/>
+          </a:effectRef>
+          <a:fontRef idx="minor">
+            <a:schemeClr val="lt1"/>
+          </a:fontRef>
+        </p:style>
+        <p:txBody>
+          <a:bodyPr rtlCol="0" anchor="ctr"/>
+          <a:lstStyle/>
+          <a:p>
+            <a:pPr algn="ctr"/>
+          </a:p>
+        </p:txBody>
+      </p:sp>
+      <p:sp>
+        <p:nvSpPr>
+          <p:cNvPr id="6" name="Rectangle 5"/>
+          <p:cNvSpPr/>
+          <p:nvPr/>
+        </p:nvSpPr>
+        <p:spPr>
+          <a:xfrm>
+            <a:off x="0" y="0"/>
+            <a:ext cx="6400800" cy="6858000"/>
+          </a:xfrm>
+          <a:prstGeom prst="rect">
+            <a:avLst/>
+          </a:prstGeom>
+          <a:solidFill>
+            <a:srgbClr val="0B1026">
+              <a:alpha val="26000"/>
+            </a:srgbClr>
+          </a:solidFill>
+          <a:ln>
+            <a:noFill/>
+          </a:ln>
+          <a:effectLst/>
+        </p:spPr>
+        <p:style>
+          <a:lnRef idx="1">
+            <a:schemeClr val="accent1"/>
+          </a:lnRef>
+          <a:fillRef idx="3">
+            <a:schemeClr val="accent1"/>
+          </a:fillRef>
+          <a:effectRef idx="2">
+            <a:schemeClr val="accent1"/>
+          </a:effectRef>
+          <a:fontRef idx="minor">
+            <a:schemeClr val="lt1"/>
+          </a:fontRef>
+        </p:style>
+        <p:txBody>
+          <a:bodyPr rtlCol="0" anchor="ctr"/>
+          <a:lstStyle/>
+          <a:p>
+            <a:pPr algn="ctr"/>
+          </a:p>
+        </p:txBody>
+      </p:sp>
+      <p:sp>
+        <p:nvSpPr>
+          <p:cNvPr id="7" name="TextBox 6"/>
           <p:cNvSpPr txBox="1"/>
           <p:nvPr/>
         </p:nvSpPr>
         <p:spPr>
           <a:xfrm>
-            <a:off x="640080" y="1783080"/>
-            <a:ext cx="6400800" cy="457200"/>
+            <a:off x="640080" y="1325880"/>
+            <a:ext cx="6583680" cy="365760"/>
           </a:xfrm>
           <a:prstGeom prst="rect">
             <a:avLst/>
@@ -5914,7 +3368,7 @@
             <a:r>
               <a:rPr sz="1800" b="1" i="0">
                 <a:solidFill>
-                  <a:srgbClr val="9AA6C2"/>
+                  <a:srgbClr val="EAEFF8"/>
                 </a:solidFill>
                 <a:latin typeface="Calibri"/>
               </a:rPr>
@@ -5934,14 +3388,14 @@
       </p:sp>
       <p:sp>
         <p:nvSpPr>
-          <p:cNvPr id="66" name="TextBox 65"/>
+          <p:cNvPr id="8" name="TextBox 7"/>
           <p:cNvSpPr txBox="1"/>
           <p:nvPr/>
         </p:nvSpPr>
         <p:spPr>
           <a:xfrm>
-            <a:off x="640080" y="2286000"/>
-            <a:ext cx="6126480" cy="2194560"/>
+            <a:off x="640080" y="1783080"/>
+            <a:ext cx="6583680" cy="2103120"/>
           </a:xfrm>
           <a:prstGeom prst="rect">
             <a:avLst/>
@@ -5966,7 +3420,7 @@
               </a:spcAft>
             </a:pPr>
             <a:r>
-              <a:rPr sz="3800" b="1" i="0">
+              <a:rPr sz="3900" b="1" i="0">
                 <a:solidFill>
                   <a:srgbClr val="FFFFFF"/>
                 </a:solidFill>
@@ -5988,7 +3442,7 @@
               </a:spcAft>
             </a:pPr>
             <a:r>
-              <a:rPr sz="3800" b="1" i="0">
+              <a:rPr sz="3900" b="1" i="0">
                 <a:solidFill>
                   <a:srgbClr val="FFFFFF"/>
                 </a:solidFill>
@@ -6001,14 +3455,14 @@
       </p:sp>
       <p:sp>
         <p:nvSpPr>
-          <p:cNvPr id="67" name="TextBox 66"/>
+          <p:cNvPr id="9" name="TextBox 8"/>
           <p:cNvSpPr txBox="1"/>
           <p:nvPr/>
         </p:nvSpPr>
         <p:spPr>
           <a:xfrm>
-            <a:off x="640080" y="4160520"/>
-            <a:ext cx="5852160" cy="1097280"/>
+            <a:off x="640080" y="3703320"/>
+            <a:ext cx="6035040" cy="1097280"/>
           </a:xfrm>
           <a:prstGeom prst="rect">
             <a:avLst/>
@@ -6033,26 +3487,26 @@
               </a:spcAft>
             </a:pPr>
             <a:r>
-              <a:rPr sz="2100" b="0" i="0">
-                <a:solidFill>
-                  <a:srgbClr val="9AA6C2"/>
+              <a:rPr sz="2000" b="0" i="0">
+                <a:solidFill>
+                  <a:srgbClr val="EAEFF8"/>
                 </a:solidFill>
                 <a:latin typeface="Calibri"/>
               </a:rPr>
-              <a:t>One Raspberry Pi. PiFinder answers “where am I pointing”, StellarMate drives everything else — joined over INDI.</a:t>
-            </a:r>
-          </a:p>
-        </p:txBody>
-      </p:sp>
-      <p:sp>
-        <p:nvSpPr>
-          <p:cNvPr id="68" name="TextBox 67"/>
+              <a:t>One Raspberry Pi. PiFinder answers “where am I pointing”; StellarMate drives the rest — over INDI.</a:t>
+            </a:r>
+          </a:p>
+        </p:txBody>
+      </p:sp>
+      <p:sp>
+        <p:nvSpPr>
+          <p:cNvPr id="10" name="TextBox 9"/>
           <p:cNvSpPr txBox="1"/>
           <p:nvPr/>
         </p:nvSpPr>
         <p:spPr>
           <a:xfrm>
-            <a:off x="640080" y="5989320"/>
+            <a:off x="640080" y="4983480"/>
             <a:ext cx="6400800" cy="320040"/>
           </a:xfrm>
           <a:prstGeom prst="rect">
@@ -6091,14 +3545,14 @@
       </p:sp>
       <p:sp>
         <p:nvSpPr>
-          <p:cNvPr id="69" name="TextBox 68"/>
+          <p:cNvPr id="11" name="TextBox 10"/>
           <p:cNvSpPr txBox="1"/>
           <p:nvPr/>
         </p:nvSpPr>
         <p:spPr>
           <a:xfrm>
-            <a:off x="640080" y="6309360"/>
-            <a:ext cx="6400800" cy="274320"/>
+            <a:off x="640080" y="5321808"/>
+            <a:ext cx="6949440" cy="274320"/>
           </a:xfrm>
           <a:prstGeom prst="rect">
             <a:avLst/>
@@ -6125,7 +3579,7 @@
             <a:r>
               <a:rPr sz="1200" b="0" i="0">
                 <a:solidFill>
-                  <a:srgbClr val="5C677B"/>
+                  <a:srgbClr val="C2CBDB"/>
                 </a:solidFill>
                 <a:latin typeface="Calibri"/>
               </a:rPr>
@@ -9008,8 +6462,8 @@
         </p:nvSpPr>
         <p:spPr>
           <a:xfrm>
-            <a:off x="640080" y="2103120"/>
-            <a:ext cx="6766560" cy="3657600"/>
+            <a:off x="640080" y="2148840"/>
+            <a:ext cx="5943600" cy="3840480"/>
           </a:xfrm>
           <a:prstGeom prst="rect">
             <a:avLst/>
@@ -9030,7 +6484,7 @@
                 <a:spcPts val="0"/>
               </a:spcBef>
               <a:spcAft>
-                <a:spcPts val="1800"/>
+                <a:spcPts val="2000"/>
               </a:spcAft>
             </a:pPr>
             <a:r>
@@ -9061,7 +6515,7 @@
                 <a:spcPts val="0"/>
               </a:spcBef>
               <a:spcAft>
-                <a:spcPts val="1800"/>
+                <a:spcPts val="2000"/>
               </a:spcAft>
             </a:pPr>
             <a:r>
@@ -9092,7 +6546,7 @@
                 <a:spcPts val="0"/>
               </a:spcBef>
               <a:spcAft>
-                <a:spcPts val="1800"/>
+                <a:spcPts val="2000"/>
               </a:spcAft>
             </a:pPr>
             <a:r>
@@ -9123,7 +6577,7 @@
                 <a:spcPts val="0"/>
               </a:spcBef>
               <a:spcAft>
-                <a:spcPts val="1800"/>
+                <a:spcPts val="2000"/>
               </a:spcAft>
             </a:pPr>
             <a:r>
@@ -9163,8 +6617,8 @@
         </p:blipFill>
         <p:spPr>
           <a:xfrm>
-            <a:off x="8366760" y="822960"/>
-            <a:ext cx="3383280" cy="4271391"/>
+            <a:off x="6796735" y="225456"/>
+            <a:ext cx="5074920" cy="6407086"/>
           </a:xfrm>
           <a:prstGeom prst="rect">
             <a:avLst/>
@@ -9433,7 +6887,7 @@
         <p:spPr>
           <a:xfrm>
             <a:off x="640080" y="2194560"/>
-            <a:ext cx="6949440" cy="2194560"/>
+            <a:ext cx="5943600" cy="2743200"/>
           </a:xfrm>
           <a:prstGeom prst="rect">
             <a:avLst/>
@@ -9477,8 +6931,8 @@
         </p:nvSpPr>
         <p:spPr>
           <a:xfrm>
-            <a:off x="640080" y="4206240"/>
-            <a:ext cx="6949440" cy="2011680"/>
+            <a:off x="640080" y="4572000"/>
+            <a:ext cx="5943600" cy="1828800"/>
           </a:xfrm>
           <a:prstGeom prst="rect">
             <a:avLst/>
@@ -9570,8 +7024,8 @@
         </p:blipFill>
         <p:spPr>
           <a:xfrm>
-            <a:off x="8366760" y="822960"/>
-            <a:ext cx="3383280" cy="4271391"/>
+            <a:off x="6796735" y="225456"/>
+            <a:ext cx="5074920" cy="6407086"/>
           </a:xfrm>
           <a:prstGeom prst="rect">
             <a:avLst/>
@@ -10517,8 +7971,8 @@
         </p:nvSpPr>
         <p:spPr>
           <a:xfrm>
-            <a:off x="640080" y="2103120"/>
-            <a:ext cx="6035040" cy="3840480"/>
+            <a:off x="640080" y="2331720"/>
+            <a:ext cx="4114800" cy="3840480"/>
           </a:xfrm>
           <a:prstGeom prst="rect">
             <a:avLst/>
@@ -10539,7 +7993,7 @@
                 <a:spcPts val="0"/>
               </a:spcBef>
               <a:spcAft>
-                <a:spcPts val="1600"/>
+                <a:spcPts val="2400"/>
               </a:spcAft>
             </a:pPr>
             <a:r>
@@ -10552,22 +8006,13 @@
               <a:t>▸  </a:t>
             </a:r>
             <a:r>
-              <a:rPr sz="2100" b="1" i="0">
+              <a:rPr sz="2100" b="0" i="0">
                 <a:solidFill>
                   <a:srgbClr val="182030"/>
                 </a:solidFill>
                 <a:latin typeface="Calibri"/>
               </a:rPr>
-              <a:t>Quick Actions </a:t>
-            </a:r>
-            <a:r>
-              <a:rPr sz="2100" b="0" i="0">
-                <a:solidFill>
-                  <a:srgbClr val="182030"/>
-                </a:solidFill>
-                <a:latin typeface="Calibri"/>
-              </a:rPr>
-              <a:t>— Sync from PiFinder, Goto Held Target, Stop.</a:t>
+              <a:t>Quick Actions — one-shots</a:t>
             </a:r>
           </a:p>
           <a:p>
@@ -10579,7 +8024,7 @@
                 <a:spcPts val="0"/>
               </a:spcBef>
               <a:spcAft>
-                <a:spcPts val="1600"/>
+                <a:spcPts val="2400"/>
               </a:spcAft>
             </a:pPr>
             <a:r>
@@ -10592,22 +8037,13 @@
               <a:t>▸  </a:t>
             </a:r>
             <a:r>
-              <a:rPr sz="2100" b="1" i="0">
+              <a:rPr sz="2100" b="0" i="0">
                 <a:solidFill>
                   <a:srgbClr val="182030"/>
                 </a:solidFill>
                 <a:latin typeface="Calibri"/>
               </a:rPr>
-              <a:t>Coupling presets </a:t>
-            </a:r>
-            <a:r>
-              <a:rPr sz="2100" b="0" i="0">
-                <a:solidFill>
-                  <a:srgbClr val="182030"/>
-                </a:solidFill>
-                <a:latin typeface="Calibri"/>
-              </a:rPr>
-              <a:t>— one click sets every INDI property.</a:t>
+              <a:t>Coupling presets — one click</a:t>
             </a:r>
           </a:p>
           <a:p>
@@ -10619,7 +8055,7 @@
                 <a:spcPts val="0"/>
               </a:spcBef>
               <a:spcAft>
-                <a:spcPts val="1600"/>
+                <a:spcPts val="2400"/>
               </a:spcAft>
             </a:pPr>
             <a:r>
@@ -10632,22 +8068,13 @@
               <a:t>▸  </a:t>
             </a:r>
             <a:r>
-              <a:rPr sz="2100" b="1" i="0">
+              <a:rPr sz="2100" b="0" i="0">
                 <a:solidFill>
                   <a:srgbClr val="182030"/>
                 </a:solidFill>
                 <a:latin typeface="Calibri"/>
               </a:rPr>
-              <a:t>Settings </a:t>
-            </a:r>
-            <a:r>
-              <a:rPr sz="2100" b="0" i="0">
-                <a:solidFill>
-                  <a:srgbClr val="182030"/>
-                </a:solidFill>
-                <a:latin typeface="Calibri"/>
-              </a:rPr>
-              <a:t>— one-time setup, collapsed away.</a:t>
+              <a:t>Settings — set once, hidden</a:t>
             </a:r>
           </a:p>
         </p:txBody>
@@ -10668,8 +8095,8 @@
         </p:blipFill>
         <p:spPr>
           <a:xfrm>
-            <a:off x="7315200" y="1463040"/>
-            <a:ext cx="4572000" cy="3546054"/>
+            <a:off x="4797927" y="685800"/>
+            <a:ext cx="7073727" cy="5486400"/>
           </a:xfrm>
           <a:prstGeom prst="rect">
             <a:avLst/>

--- a/docs/presentations/PFSM_overview.pptx
+++ b/docs/presentations/PFSM_overview.pptx
@@ -35,6 +35,7 @@
     <p:sldId id="283" r:id="rId34"/>
     <p:sldId id="284" r:id="rId35"/>
     <p:sldId id="285" r:id="rId36"/>
+    <p:sldId id="286" r:id="rId37"/>
   </p:sldIdLst>
   <p:sldSz cx="12191695" cy="6858000" type="screen4x3"/>
   <p:notesSz cx="6858000" cy="9144000"/>
@@ -3177,7 +3178,7 @@
         </p:blipFill>
         <p:spPr>
           <a:xfrm>
-            <a:off x="-1161851" y="0"/>
+            <a:off x="-580925" y="0"/>
             <a:ext cx="13353546" cy="6858000"/>
           </a:xfrm>
           <a:prstGeom prst="rect">
@@ -3193,209 +3194,52 @@
         </p:nvSpPr>
         <p:spPr>
           <a:xfrm>
-            <a:off x="0" y="0"/>
-            <a:ext cx="12191695" cy="6858000"/>
+            <a:off x="11414455" y="0"/>
+            <a:ext cx="777240" cy="6858000"/>
           </a:xfrm>
           <a:prstGeom prst="rect">
             <a:avLst/>
           </a:prstGeom>
           <a:solidFill>
-            <a:srgbClr val="0B1026">
-              <a:alpha val="16000"/>
-            </a:srgbClr>
-          </a:solidFill>
-          <a:ln>
-            <a:noFill/>
-          </a:ln>
-          <a:effectLst/>
-        </p:spPr>
-        <p:style>
-          <a:lnRef idx="1">
-            <a:schemeClr val="accent1"/>
-          </a:lnRef>
-          <a:fillRef idx="3">
-            <a:schemeClr val="accent1"/>
-          </a:fillRef>
-          <a:effectRef idx="2">
-            <a:schemeClr val="accent1"/>
-          </a:effectRef>
-          <a:fontRef idx="minor">
-            <a:schemeClr val="lt1"/>
-          </a:fontRef>
-        </p:style>
-        <p:txBody>
-          <a:bodyPr rtlCol="0" anchor="ctr"/>
-          <a:lstStyle/>
-          <a:p>
-            <a:pPr algn="ctr"/>
-          </a:p>
-        </p:txBody>
-      </p:sp>
-      <p:sp>
-        <p:nvSpPr>
-          <p:cNvPr id="5" name="Rectangle 4"/>
-          <p:cNvSpPr/>
-          <p:nvPr/>
-        </p:nvSpPr>
-        <p:spPr>
-          <a:xfrm>
-            <a:off x="0" y="0"/>
-            <a:ext cx="8778240" cy="6858000"/>
-          </a:xfrm>
-          <a:prstGeom prst="rect">
-            <a:avLst/>
-          </a:prstGeom>
-          <a:solidFill>
-            <a:srgbClr val="0B1026">
-              <a:alpha val="24000"/>
-            </a:srgbClr>
-          </a:solidFill>
-          <a:ln>
-            <a:noFill/>
-          </a:ln>
-          <a:effectLst/>
-        </p:spPr>
-        <p:style>
-          <a:lnRef idx="1">
-            <a:schemeClr val="accent1"/>
-          </a:lnRef>
-          <a:fillRef idx="3">
-            <a:schemeClr val="accent1"/>
-          </a:fillRef>
-          <a:effectRef idx="2">
-            <a:schemeClr val="accent1"/>
-          </a:effectRef>
-          <a:fontRef idx="minor">
-            <a:schemeClr val="lt1"/>
-          </a:fontRef>
-        </p:style>
-        <p:txBody>
-          <a:bodyPr rtlCol="0" anchor="ctr"/>
-          <a:lstStyle/>
-          <a:p>
-            <a:pPr algn="ctr"/>
-          </a:p>
-        </p:txBody>
-      </p:sp>
-      <p:sp>
-        <p:nvSpPr>
-          <p:cNvPr id="6" name="Rectangle 5"/>
-          <p:cNvSpPr/>
-          <p:nvPr/>
-        </p:nvSpPr>
-        <p:spPr>
-          <a:xfrm>
-            <a:off x="0" y="0"/>
-            <a:ext cx="6400800" cy="6858000"/>
-          </a:xfrm>
-          <a:prstGeom prst="rect">
-            <a:avLst/>
-          </a:prstGeom>
-          <a:solidFill>
-            <a:srgbClr val="0B1026">
-              <a:alpha val="26000"/>
-            </a:srgbClr>
-          </a:solidFill>
-          <a:ln>
-            <a:noFill/>
-          </a:ln>
-          <a:effectLst/>
-        </p:spPr>
-        <p:style>
-          <a:lnRef idx="1">
-            <a:schemeClr val="accent1"/>
-          </a:lnRef>
-          <a:fillRef idx="3">
-            <a:schemeClr val="accent1"/>
-          </a:fillRef>
-          <a:effectRef idx="2">
-            <a:schemeClr val="accent1"/>
-          </a:effectRef>
-          <a:fontRef idx="minor">
-            <a:schemeClr val="lt1"/>
-          </a:fontRef>
-        </p:style>
-        <p:txBody>
-          <a:bodyPr rtlCol="0" anchor="ctr"/>
-          <a:lstStyle/>
-          <a:p>
-            <a:pPr algn="ctr"/>
-          </a:p>
-        </p:txBody>
-      </p:sp>
-      <p:sp>
-        <p:nvSpPr>
-          <p:cNvPr id="7" name="TextBox 6"/>
+            <a:srgbClr val="0B1026"/>
+          </a:solidFill>
+          <a:ln>
+            <a:noFill/>
+          </a:ln>
+          <a:effectLst/>
+        </p:spPr>
+        <p:style>
+          <a:lnRef idx="1">
+            <a:schemeClr val="accent1"/>
+          </a:lnRef>
+          <a:fillRef idx="3">
+            <a:schemeClr val="accent1"/>
+          </a:fillRef>
+          <a:effectRef idx="2">
+            <a:schemeClr val="accent1"/>
+          </a:effectRef>
+          <a:fontRef idx="minor">
+            <a:schemeClr val="lt1"/>
+          </a:fontRef>
+        </p:style>
+        <p:txBody>
+          <a:bodyPr rtlCol="0" anchor="ctr"/>
+          <a:lstStyle/>
+          <a:p>
+            <a:pPr algn="ctr"/>
+          </a:p>
+        </p:txBody>
+      </p:sp>
+      <p:sp>
+        <p:nvSpPr>
+          <p:cNvPr id="5" name="TextBox 4"/>
           <p:cNvSpPr txBox="1"/>
           <p:nvPr/>
         </p:nvSpPr>
         <p:spPr>
           <a:xfrm>
-            <a:off x="640080" y="1325880"/>
-            <a:ext cx="6583680" cy="365760"/>
-          </a:xfrm>
-          <a:prstGeom prst="rect">
-            <a:avLst/>
-          </a:prstGeom>
-          <a:noFill/>
-        </p:spPr>
-        <p:txBody>
-          <a:bodyPr wrap="square" anchor="t" lIns="0" rIns="0" tIns="0" bIns="0">
-            <a:spAutoFit/>
-          </a:bodyPr>
-          <a:lstStyle/>
-          <a:p>
-            <a:pPr algn="l">
-              <a:lnSpc>
-                <a:spcPct val="100000"/>
-              </a:lnSpc>
-              <a:spcBef>
-                <a:spcPts val="0"/>
-              </a:spcBef>
-              <a:spcAft>
-                <a:spcPts val="400"/>
-              </a:spcAft>
-            </a:pPr>
-            <a:r>
-              <a:rPr sz="1800" b="1" i="0">
-                <a:solidFill>
-                  <a:srgbClr val="4EA8DE"/>
-                </a:solidFill>
-                <a:latin typeface="Calibri"/>
-              </a:rPr>
-              <a:t>PiFinder </a:t>
-            </a:r>
-            <a:r>
-              <a:rPr sz="1800" b="1" i="0">
-                <a:solidFill>
-                  <a:srgbClr val="EAEFF8"/>
-                </a:solidFill>
-                <a:latin typeface="Calibri"/>
-              </a:rPr>
-              <a:t>on </a:t>
-            </a:r>
-            <a:r>
-              <a:rPr sz="1800" b="1" i="0">
-                <a:solidFill>
-                  <a:srgbClr val="FFB703"/>
-                </a:solidFill>
-                <a:latin typeface="Calibri"/>
-              </a:rPr>
-              <a:t>StellarMate</a:t>
-            </a:r>
-          </a:p>
-        </p:txBody>
-      </p:sp>
-      <p:sp>
-        <p:nvSpPr>
-          <p:cNvPr id="8" name="TextBox 7"/>
-          <p:cNvSpPr txBox="1"/>
-          <p:nvPr/>
-        </p:nvSpPr>
-        <p:spPr>
-          <a:xfrm>
-            <a:off x="640080" y="1783080"/>
-            <a:ext cx="6583680" cy="2103120"/>
+            <a:off x="640080" y="640080"/>
+            <a:ext cx="7863840" cy="2103120"/>
           </a:xfrm>
           <a:prstGeom prst="rect">
             <a:avLst/>
@@ -3420,7 +3264,7 @@
               </a:spcAft>
             </a:pPr>
             <a:r>
-              <a:rPr sz="3900" b="1" i="0">
+              <a:rPr sz="4200" b="1" i="0">
                 <a:solidFill>
                   <a:srgbClr val="FFFFFF"/>
                 </a:solidFill>
@@ -3442,7 +3286,7 @@
               </a:spcAft>
             </a:pPr>
             <a:r>
-              <a:rPr sz="3900" b="1" i="0">
+              <a:rPr sz="4200" b="1" i="0">
                 <a:solidFill>
                   <a:srgbClr val="FFFFFF"/>
                 </a:solidFill>
@@ -3455,14 +3299,14 @@
       </p:sp>
       <p:sp>
         <p:nvSpPr>
-          <p:cNvPr id="9" name="TextBox 8"/>
+          <p:cNvPr id="6" name="TextBox 5"/>
           <p:cNvSpPr txBox="1"/>
           <p:nvPr/>
         </p:nvSpPr>
         <p:spPr>
           <a:xfrm>
-            <a:off x="640080" y="3703320"/>
-            <a:ext cx="6035040" cy="1097280"/>
+            <a:off x="640080" y="2514600"/>
+            <a:ext cx="7040880" cy="1371600"/>
           </a:xfrm>
           <a:prstGeom prst="rect">
             <a:avLst/>
@@ -3493,21 +3337,21 @@
                 </a:solidFill>
                 <a:latin typeface="Calibri"/>
               </a:rPr>
-              <a:t>One Raspberry Pi. PiFinder answers “where am I pointing”; StellarMate drives the rest — over INDI.</a:t>
-            </a:r>
-          </a:p>
-        </p:txBody>
-      </p:sp>
-      <p:sp>
-        <p:nvSpPr>
-          <p:cNvPr id="10" name="TextBox 9"/>
+              <a:t>One Raspberry Pi. PiFinder answers “where am I pointing”, StellarMate drives everything else — joined over INDI.</a:t>
+            </a:r>
+          </a:p>
+        </p:txBody>
+      </p:sp>
+      <p:sp>
+        <p:nvSpPr>
+          <p:cNvPr id="7" name="TextBox 6"/>
           <p:cNvSpPr txBox="1"/>
           <p:nvPr/>
         </p:nvSpPr>
         <p:spPr>
           <a:xfrm>
-            <a:off x="640080" y="4983480"/>
-            <a:ext cx="6400800" cy="320040"/>
+            <a:off x="5013655" y="5989320"/>
+            <a:ext cx="6217920" cy="310896"/>
           </a:xfrm>
           <a:prstGeom prst="rect">
             <a:avLst/>
@@ -3520,7 +3364,7 @@
           </a:bodyPr>
           <a:lstStyle/>
           <a:p>
-            <a:pPr algn="l">
+            <a:pPr algn="r">
               <a:lnSpc>
                 <a:spcPct val="100000"/>
               </a:lnSpc>
@@ -3545,14 +3389,14 @@
       </p:sp>
       <p:sp>
         <p:nvSpPr>
-          <p:cNvPr id="11" name="TextBox 10"/>
+          <p:cNvPr id="8" name="TextBox 7"/>
           <p:cNvSpPr txBox="1"/>
           <p:nvPr/>
         </p:nvSpPr>
         <p:spPr>
           <a:xfrm>
-            <a:off x="640080" y="5321808"/>
-            <a:ext cx="6949440" cy="274320"/>
+            <a:off x="4465015" y="6309360"/>
+            <a:ext cx="6766560" cy="274320"/>
           </a:xfrm>
           <a:prstGeom prst="rect">
             <a:avLst/>
@@ -3565,7 +3409,7 @@
           </a:bodyPr>
           <a:lstStyle/>
           <a:p>
-            <a:pPr algn="l">
+            <a:pPr algn="r">
               <a:lnSpc>
                 <a:spcPct val="100000"/>
               </a:lnSpc>
@@ -7971,8 +7815,8 @@
         </p:nvSpPr>
         <p:spPr>
           <a:xfrm>
-            <a:off x="640080" y="2331720"/>
-            <a:ext cx="4114800" cy="3840480"/>
+            <a:off x="640080" y="2743200"/>
+            <a:ext cx="5029200" cy="3657600"/>
           </a:xfrm>
           <a:prstGeom prst="rect">
             <a:avLst/>
@@ -7993,11 +7837,11 @@
                 <a:spcPts val="0"/>
               </a:spcBef>
               <a:spcAft>
-                <a:spcPts val="2400"/>
+                <a:spcPts val="3400"/>
               </a:spcAft>
             </a:pPr>
             <a:r>
-              <a:rPr sz="2100" b="1" i="0">
+              <a:rPr sz="2500" b="1" i="0">
                 <a:solidFill>
                   <a:srgbClr val="4EA8DE"/>
                 </a:solidFill>
@@ -8006,7 +7850,7 @@
               <a:t>▸  </a:t>
             </a:r>
             <a:r>
-              <a:rPr sz="2100" b="0" i="0">
+              <a:rPr sz="2500" b="0" i="0">
                 <a:solidFill>
                   <a:srgbClr val="182030"/>
                 </a:solidFill>
@@ -8024,11 +7868,11 @@
                 <a:spcPts val="0"/>
               </a:spcBef>
               <a:spcAft>
-                <a:spcPts val="2400"/>
+                <a:spcPts val="3400"/>
               </a:spcAft>
             </a:pPr>
             <a:r>
-              <a:rPr sz="2100" b="1" i="0">
+              <a:rPr sz="2500" b="1" i="0">
                 <a:solidFill>
                   <a:srgbClr val="4EA8DE"/>
                 </a:solidFill>
@@ -8037,7 +7881,7 @@
               <a:t>▸  </a:t>
             </a:r>
             <a:r>
-              <a:rPr sz="2100" b="0" i="0">
+              <a:rPr sz="2500" b="0" i="0">
                 <a:solidFill>
                   <a:srgbClr val="182030"/>
                 </a:solidFill>
@@ -8055,11 +7899,11 @@
                 <a:spcPts val="0"/>
               </a:spcBef>
               <a:spcAft>
-                <a:spcPts val="2400"/>
+                <a:spcPts val="3400"/>
               </a:spcAft>
             </a:pPr>
             <a:r>
-              <a:rPr sz="2100" b="1" i="0">
+              <a:rPr sz="2500" b="1" i="0">
                 <a:solidFill>
                   <a:srgbClr val="4EA8DE"/>
                 </a:solidFill>
@@ -8068,7 +7912,7 @@
               <a:t>▸  </a:t>
             </a:r>
             <a:r>
-              <a:rPr sz="2100" b="0" i="0">
+              <a:rPr sz="2500" b="0" i="0">
                 <a:solidFill>
                   <a:srgbClr val="182030"/>
                 </a:solidFill>
@@ -8095,8 +7939,8 @@
         </p:blipFill>
         <p:spPr>
           <a:xfrm>
-            <a:off x="4797927" y="685800"/>
-            <a:ext cx="7073727" cy="5486400"/>
+            <a:off x="5884288" y="1920240"/>
+            <a:ext cx="6307406" cy="4892040"/>
           </a:xfrm>
           <a:prstGeom prst="rect">
             <a:avLst/>
@@ -10536,58 +10380,14 @@
       </p:sp>
       <p:sp>
         <p:nvSpPr>
-          <p:cNvPr id="6" name="Oval 5"/>
-          <p:cNvSpPr/>
-          <p:nvPr/>
-        </p:nvSpPr>
-        <p:spPr>
-          <a:xfrm>
-            <a:off x="640080" y="2066544"/>
-            <a:ext cx="292608" cy="292608"/>
-          </a:xfrm>
-          <a:prstGeom prst="ellipse">
-            <a:avLst/>
-          </a:prstGeom>
-          <a:solidFill>
-            <a:srgbClr val="4EA8DE"/>
-          </a:solidFill>
-          <a:ln>
-            <a:noFill/>
-          </a:ln>
-          <a:effectLst/>
-        </p:spPr>
-        <p:style>
-          <a:lnRef idx="1">
-            <a:schemeClr val="accent1"/>
-          </a:lnRef>
-          <a:fillRef idx="3">
-            <a:schemeClr val="accent1"/>
-          </a:fillRef>
-          <a:effectRef idx="2">
-            <a:schemeClr val="accent1"/>
-          </a:effectRef>
-          <a:fontRef idx="minor">
-            <a:schemeClr val="lt1"/>
-          </a:fontRef>
-        </p:style>
-        <p:txBody>
-          <a:bodyPr rtlCol="0" anchor="ctr"/>
-          <a:lstStyle/>
-          <a:p>
-            <a:pPr algn="ctr"/>
-          </a:p>
-        </p:txBody>
-      </p:sp>
-      <p:sp>
-        <p:nvSpPr>
-          <p:cNvPr id="7" name="TextBox 6"/>
+          <p:cNvPr id="6" name="TextBox 5"/>
           <p:cNvSpPr txBox="1"/>
           <p:nvPr/>
         </p:nvSpPr>
         <p:spPr>
           <a:xfrm>
-            <a:off x="1188719" y="1975104"/>
-            <a:ext cx="10972800" cy="457200"/>
+            <a:off x="640080" y="1874519"/>
+            <a:ext cx="457200" cy="457200"/>
           </a:xfrm>
           <a:prstGeom prst="rect">
             <a:avLst/>
@@ -10614,113 +10414,24 @@
             <a:r>
               <a:rPr sz="2400" b="1" i="0">
                 <a:solidFill>
-                  <a:srgbClr val="182030"/>
+                  <a:srgbClr val="9AA6C2"/>
                 </a:solidFill>
                 <a:latin typeface="Calibri"/>
               </a:rPr>
-              <a:t>PiFinder LX200</a:t>
-            </a:r>
-          </a:p>
-        </p:txBody>
-      </p:sp>
-      <p:sp>
-        <p:nvSpPr>
-          <p:cNvPr id="8" name="TextBox 7"/>
+              <a:t>1</a:t>
+            </a:r>
+          </a:p>
+        </p:txBody>
+      </p:sp>
+      <p:sp>
+        <p:nvSpPr>
+          <p:cNvPr id="7" name="TextBox 6"/>
           <p:cNvSpPr txBox="1"/>
           <p:nvPr/>
         </p:nvSpPr>
         <p:spPr>
           <a:xfrm>
-            <a:off x="1188719" y="2487168"/>
-            <a:ext cx="10698480" cy="914400"/>
-          </a:xfrm>
-          <a:prstGeom prst="rect">
-            <a:avLst/>
-          </a:prstGeom>
-          <a:noFill/>
-        </p:spPr>
-        <p:txBody>
-          <a:bodyPr wrap="square" anchor="t" lIns="0" rIns="0" tIns="0" bIns="0">
-            <a:spAutoFit/>
-          </a:bodyPr>
-          <a:lstStyle/>
-          <a:p>
-            <a:pPr algn="l">
-              <a:lnSpc>
-                <a:spcPct val="122000"/>
-              </a:lnSpc>
-              <a:spcBef>
-                <a:spcPts val="0"/>
-              </a:spcBef>
-              <a:spcAft>
-                <a:spcPts val="400"/>
-              </a:spcAft>
-            </a:pPr>
-            <a:r>
-              <a:rPr sz="1900" b="0" i="0">
-                <a:solidFill>
-                  <a:srgbClr val="5C677B"/>
-                </a:solidFill>
-                <a:latin typeface="Calibri"/>
-              </a:rPr>
-              <a:t>INDI telescope. Reports the solved position; a GoTo becomes a push-to. Required.</a:t>
-            </a:r>
-          </a:p>
-        </p:txBody>
-      </p:sp>
-      <p:sp>
-        <p:nvSpPr>
-          <p:cNvPr id="9" name="Oval 8"/>
-          <p:cNvSpPr/>
-          <p:nvPr/>
-        </p:nvSpPr>
-        <p:spPr>
-          <a:xfrm>
-            <a:off x="640080" y="3547872"/>
-            <a:ext cx="292608" cy="292608"/>
-          </a:xfrm>
-          <a:prstGeom prst="ellipse">
-            <a:avLst/>
-          </a:prstGeom>
-          <a:solidFill>
-            <a:srgbClr val="FFB703"/>
-          </a:solidFill>
-          <a:ln>
-            <a:noFill/>
-          </a:ln>
-          <a:effectLst/>
-        </p:spPr>
-        <p:style>
-          <a:lnRef idx="1">
-            <a:schemeClr val="accent1"/>
-          </a:lnRef>
-          <a:fillRef idx="3">
-            <a:schemeClr val="accent1"/>
-          </a:fillRef>
-          <a:effectRef idx="2">
-            <a:schemeClr val="accent1"/>
-          </a:effectRef>
-          <a:fontRef idx="minor">
-            <a:schemeClr val="lt1"/>
-          </a:fontRef>
-        </p:style>
-        <p:txBody>
-          <a:bodyPr rtlCol="0" anchor="ctr"/>
-          <a:lstStyle/>
-          <a:p>
-            <a:pPr algn="ctr"/>
-          </a:p>
-        </p:txBody>
-      </p:sp>
-      <p:sp>
-        <p:nvSpPr>
-          <p:cNvPr id="10" name="TextBox 9"/>
-          <p:cNvSpPr txBox="1"/>
-          <p:nvPr/>
-        </p:nvSpPr>
-        <p:spPr>
-          <a:xfrm>
-            <a:off x="1188719" y="3456432"/>
+            <a:off x="1143000" y="1856231"/>
             <a:ext cx="10972800" cy="457200"/>
           </a:xfrm>
           <a:prstGeom prst="rect">
@@ -10746,27 +10457,27 @@
               </a:spcAft>
             </a:pPr>
             <a:r>
-              <a:rPr sz="2400" b="1" i="0">
+              <a:rPr sz="2300" b="1" i="0">
                 <a:solidFill>
                   <a:srgbClr val="182030"/>
                 </a:solidFill>
                 <a:latin typeface="Calibri"/>
               </a:rPr>
-              <a:t>PiFinder Mount Bridge</a:t>
-            </a:r>
-          </a:p>
-        </p:txBody>
-      </p:sp>
-      <p:sp>
-        <p:nvSpPr>
-          <p:cNvPr id="11" name="TextBox 10"/>
+              <a:t>PiFinder LX200</a:t>
+            </a:r>
+          </a:p>
+        </p:txBody>
+      </p:sp>
+      <p:sp>
+        <p:nvSpPr>
+          <p:cNvPr id="8" name="TextBox 7"/>
           <p:cNvSpPr txBox="1"/>
           <p:nvPr/>
         </p:nvSpPr>
         <p:spPr>
           <a:xfrm>
-            <a:off x="1188719" y="3968496"/>
-            <a:ext cx="10698480" cy="914400"/>
+            <a:off x="1143000" y="2295144"/>
+            <a:ext cx="10424160" cy="731520"/>
           </a:xfrm>
           <a:prstGeom prst="rect">
             <a:avLst/>
@@ -10781,7 +10492,7 @@
           <a:p>
             <a:pPr algn="l">
               <a:lnSpc>
-                <a:spcPct val="122000"/>
+                <a:spcPct val="115000"/>
               </a:lnSpc>
               <a:spcBef>
                 <a:spcPts val="0"/>
@@ -10791,71 +10502,27 @@
               </a:spcAft>
             </a:pPr>
             <a:r>
-              <a:rPr sz="1900" b="0" i="0">
+              <a:rPr sz="1800" b="0" i="0">
                 <a:solidFill>
                   <a:srgbClr val="5C677B"/>
                 </a:solidFill>
                 <a:latin typeface="Calibri"/>
               </a:rPr>
-              <a:t>Optional. Snoops PiFinder + the mount, couples them. Speaks only generic INDI.</a:t>
-            </a:r>
-          </a:p>
-        </p:txBody>
-      </p:sp>
-      <p:sp>
-        <p:nvSpPr>
-          <p:cNvPr id="12" name="Oval 11"/>
-          <p:cNvSpPr/>
-          <p:nvPr/>
-        </p:nvSpPr>
-        <p:spPr>
-          <a:xfrm>
-            <a:off x="640080" y="5029200"/>
-            <a:ext cx="292608" cy="292608"/>
-          </a:xfrm>
-          <a:prstGeom prst="ellipse">
-            <a:avLst/>
-          </a:prstGeom>
-          <a:solidFill>
-            <a:srgbClr val="8CD8B0"/>
-          </a:solidFill>
-          <a:ln>
-            <a:noFill/>
-          </a:ln>
-          <a:effectLst/>
-        </p:spPr>
-        <p:style>
-          <a:lnRef idx="1">
-            <a:schemeClr val="accent1"/>
-          </a:lnRef>
-          <a:fillRef idx="3">
-            <a:schemeClr val="accent1"/>
-          </a:fillRef>
-          <a:effectRef idx="2">
-            <a:schemeClr val="accent1"/>
-          </a:effectRef>
-          <a:fontRef idx="minor">
-            <a:schemeClr val="lt1"/>
-          </a:fontRef>
-        </p:style>
-        <p:txBody>
-          <a:bodyPr rtlCol="0" anchor="ctr"/>
-          <a:lstStyle/>
-          <a:p>
-            <a:pPr algn="ctr"/>
-          </a:p>
-        </p:txBody>
-      </p:sp>
-      <p:sp>
-        <p:nvSpPr>
-          <p:cNvPr id="13" name="TextBox 12"/>
+              <a:t>INDI telescope. Reports the solved position; a GoTo becomes a push-to. Required.</a:t>
+            </a:r>
+          </a:p>
+        </p:txBody>
+      </p:sp>
+      <p:sp>
+        <p:nvSpPr>
+          <p:cNvPr id="9" name="TextBox 8"/>
           <p:cNvSpPr txBox="1"/>
           <p:nvPr/>
         </p:nvSpPr>
         <p:spPr>
           <a:xfrm>
-            <a:off x="1188719" y="4937760"/>
-            <a:ext cx="10972800" cy="457200"/>
+            <a:off x="640080" y="2898648"/>
+            <a:ext cx="457200" cy="457200"/>
           </a:xfrm>
           <a:prstGeom prst="rect">
             <a:avLst/>
@@ -10882,70 +10549,25 @@
             <a:r>
               <a:rPr sz="2400" b="1" i="0">
                 <a:solidFill>
-                  <a:srgbClr val="182030"/>
+                  <a:srgbClr val="9AA6C2"/>
                 </a:solidFill>
                 <a:latin typeface="Calibri"/>
               </a:rPr>
-              <a:t>Your mount’s driver</a:t>
-            </a:r>
-          </a:p>
-        </p:txBody>
-      </p:sp>
-      <p:sp>
-        <p:nvSpPr>
-          <p:cNvPr id="14" name="TextBox 13"/>
+              <a:t>2</a:t>
+            </a:r>
+          </a:p>
+        </p:txBody>
+      </p:sp>
+      <p:sp>
+        <p:nvSpPr>
+          <p:cNvPr id="10" name="TextBox 9"/>
           <p:cNvSpPr txBox="1"/>
           <p:nvPr/>
         </p:nvSpPr>
         <p:spPr>
           <a:xfrm>
-            <a:off x="1188719" y="5449824"/>
-            <a:ext cx="10698480" cy="914400"/>
-          </a:xfrm>
-          <a:prstGeom prst="rect">
-            <a:avLst/>
-          </a:prstGeom>
-          <a:noFill/>
-        </p:spPr>
-        <p:txBody>
-          <a:bodyPr wrap="square" anchor="t" lIns="0" rIns="0" tIns="0" bIns="0">
-            <a:spAutoFit/>
-          </a:bodyPr>
-          <a:lstStyle/>
-          <a:p>
-            <a:pPr algn="l">
-              <a:lnSpc>
-                <a:spcPct val="122000"/>
-              </a:lnSpc>
-              <a:spcBef>
-                <a:spcPts val="0"/>
-              </a:spcBef>
-              <a:spcAft>
-                <a:spcPts val="400"/>
-              </a:spcAft>
-            </a:pPr>
-            <a:r>
-              <a:rPr sz="1900" b="0" i="0">
-                <a:solidFill>
-                  <a:srgbClr val="5C677B"/>
-                </a:solidFill>
-                <a:latin typeface="Calibri"/>
-              </a:rPr>
-              <a:t>Not ours — whatever your mount already uses. Only for a motorised mount.</a:t>
-            </a:r>
-          </a:p>
-        </p:txBody>
-      </p:sp>
-      <p:sp>
-        <p:nvSpPr>
-          <p:cNvPr id="15" name="TextBox 14"/>
-          <p:cNvSpPr txBox="1"/>
-          <p:nvPr/>
-        </p:nvSpPr>
-        <p:spPr>
-          <a:xfrm>
-            <a:off x="640080" y="6400800"/>
-            <a:ext cx="10911535" cy="274320"/>
+            <a:off x="1143000" y="2880360"/>
+            <a:ext cx="10972800" cy="457200"/>
           </a:xfrm>
           <a:prstGeom prst="rect">
             <a:avLst/>
@@ -10970,17 +10592,314 @@
               </a:spcAft>
             </a:pPr>
             <a:r>
-              <a:rPr sz="1200" b="0" i="0">
+              <a:rPr sz="2300" b="1" i="0">
+                <a:solidFill>
+                  <a:srgbClr val="182030"/>
+                </a:solidFill>
+                <a:latin typeface="Calibri"/>
+              </a:rPr>
+              <a:t>PiFinder Mount Bridge</a:t>
+            </a:r>
+          </a:p>
+        </p:txBody>
+      </p:sp>
+      <p:sp>
+        <p:nvSpPr>
+          <p:cNvPr id="11" name="TextBox 10"/>
+          <p:cNvSpPr txBox="1"/>
+          <p:nvPr/>
+        </p:nvSpPr>
+        <p:spPr>
+          <a:xfrm>
+            <a:off x="1143000" y="3319272"/>
+            <a:ext cx="10424160" cy="731520"/>
+          </a:xfrm>
+          <a:prstGeom prst="rect">
+            <a:avLst/>
+          </a:prstGeom>
+          <a:noFill/>
+        </p:spPr>
+        <p:txBody>
+          <a:bodyPr wrap="square" anchor="t" lIns="0" rIns="0" tIns="0" bIns="0">
+            <a:spAutoFit/>
+          </a:bodyPr>
+          <a:lstStyle/>
+          <a:p>
+            <a:pPr algn="l">
+              <a:lnSpc>
+                <a:spcPct val="115000"/>
+              </a:lnSpc>
+              <a:spcBef>
+                <a:spcPts val="0"/>
+              </a:spcBef>
+              <a:spcAft>
+                <a:spcPts val="400"/>
+              </a:spcAft>
+            </a:pPr>
+            <a:r>
+              <a:rPr sz="1800" b="0" i="0">
                 <a:solidFill>
                   <a:srgbClr val="5C677B"/>
                 </a:solidFill>
                 <a:latin typeface="Calibri"/>
               </a:rPr>
-              <a:t>Part 3 · LX200 &amp; Mount Bridge</a:t>
-            </a:r>
-          </a:p>
-        </p:txBody>
-      </p:sp>
+              <a:t>Optional. Snoops PiFinder + the mount and couples them. Generic INDI only.</a:t>
+            </a:r>
+          </a:p>
+        </p:txBody>
+      </p:sp>
+      <p:sp>
+        <p:nvSpPr>
+          <p:cNvPr id="12" name="TextBox 11"/>
+          <p:cNvSpPr txBox="1"/>
+          <p:nvPr/>
+        </p:nvSpPr>
+        <p:spPr>
+          <a:xfrm>
+            <a:off x="640080" y="3922776"/>
+            <a:ext cx="457200" cy="457200"/>
+          </a:xfrm>
+          <a:prstGeom prst="rect">
+            <a:avLst/>
+          </a:prstGeom>
+          <a:noFill/>
+        </p:spPr>
+        <p:txBody>
+          <a:bodyPr wrap="square" anchor="t" lIns="0" rIns="0" tIns="0" bIns="0">
+            <a:spAutoFit/>
+          </a:bodyPr>
+          <a:lstStyle/>
+          <a:p>
+            <a:pPr algn="l">
+              <a:lnSpc>
+                <a:spcPct val="100000"/>
+              </a:lnSpc>
+              <a:spcBef>
+                <a:spcPts val="0"/>
+              </a:spcBef>
+              <a:spcAft>
+                <a:spcPts val="400"/>
+              </a:spcAft>
+            </a:pPr>
+            <a:r>
+              <a:rPr sz="2400" b="1" i="0">
+                <a:solidFill>
+                  <a:srgbClr val="9AA6C2"/>
+                </a:solidFill>
+                <a:latin typeface="Calibri"/>
+              </a:rPr>
+              <a:t>3</a:t>
+            </a:r>
+          </a:p>
+        </p:txBody>
+      </p:sp>
+      <p:sp>
+        <p:nvSpPr>
+          <p:cNvPr id="13" name="TextBox 12"/>
+          <p:cNvSpPr txBox="1"/>
+          <p:nvPr/>
+        </p:nvSpPr>
+        <p:spPr>
+          <a:xfrm>
+            <a:off x="1143000" y="3904488"/>
+            <a:ext cx="10972800" cy="457200"/>
+          </a:xfrm>
+          <a:prstGeom prst="rect">
+            <a:avLst/>
+          </a:prstGeom>
+          <a:noFill/>
+        </p:spPr>
+        <p:txBody>
+          <a:bodyPr wrap="square" anchor="t" lIns="0" rIns="0" tIns="0" bIns="0">
+            <a:spAutoFit/>
+          </a:bodyPr>
+          <a:lstStyle/>
+          <a:p>
+            <a:pPr algn="l">
+              <a:lnSpc>
+                <a:spcPct val="100000"/>
+              </a:lnSpc>
+              <a:spcBef>
+                <a:spcPts val="0"/>
+              </a:spcBef>
+              <a:spcAft>
+                <a:spcPts val="400"/>
+              </a:spcAft>
+            </a:pPr>
+            <a:r>
+              <a:rPr sz="2300" b="1" i="0">
+                <a:solidFill>
+                  <a:srgbClr val="182030"/>
+                </a:solidFill>
+                <a:latin typeface="Calibri"/>
+              </a:rPr>
+              <a:t>Your mount’s driver</a:t>
+            </a:r>
+          </a:p>
+        </p:txBody>
+      </p:sp>
+      <p:sp>
+        <p:nvSpPr>
+          <p:cNvPr id="14" name="TextBox 13"/>
+          <p:cNvSpPr txBox="1"/>
+          <p:nvPr/>
+        </p:nvSpPr>
+        <p:spPr>
+          <a:xfrm>
+            <a:off x="1143000" y="4343400"/>
+            <a:ext cx="10424160" cy="731520"/>
+          </a:xfrm>
+          <a:prstGeom prst="rect">
+            <a:avLst/>
+          </a:prstGeom>
+          <a:noFill/>
+        </p:spPr>
+        <p:txBody>
+          <a:bodyPr wrap="square" anchor="t" lIns="0" rIns="0" tIns="0" bIns="0">
+            <a:spAutoFit/>
+          </a:bodyPr>
+          <a:lstStyle/>
+          <a:p>
+            <a:pPr algn="l">
+              <a:lnSpc>
+                <a:spcPct val="115000"/>
+              </a:lnSpc>
+              <a:spcBef>
+                <a:spcPts val="0"/>
+              </a:spcBef>
+              <a:spcAft>
+                <a:spcPts val="400"/>
+              </a:spcAft>
+            </a:pPr>
+            <a:r>
+              <a:rPr sz="1800" b="0" i="0">
+                <a:solidFill>
+                  <a:srgbClr val="5C677B"/>
+                </a:solidFill>
+                <a:latin typeface="Calibri"/>
+              </a:rPr>
+              <a:t>Not ours — whatever your mount already uses. Only for a motorised mount.</a:t>
+            </a:r>
+          </a:p>
+        </p:txBody>
+      </p:sp>
+      <p:sp>
+        <p:nvSpPr>
+          <p:cNvPr id="15" name="TextBox 14"/>
+          <p:cNvSpPr txBox="1"/>
+          <p:nvPr/>
+        </p:nvSpPr>
+        <p:spPr>
+          <a:xfrm>
+            <a:off x="640080" y="4983480"/>
+            <a:ext cx="10911535" cy="274320"/>
+          </a:xfrm>
+          <a:prstGeom prst="rect">
+            <a:avLst/>
+          </a:prstGeom>
+          <a:noFill/>
+        </p:spPr>
+        <p:txBody>
+          <a:bodyPr wrap="square" anchor="t" lIns="0" rIns="0" tIns="0" bIns="0">
+            <a:spAutoFit/>
+          </a:bodyPr>
+          <a:lstStyle/>
+          <a:p>
+            <a:pPr algn="l">
+              <a:lnSpc>
+                <a:spcPct val="100000"/>
+              </a:lnSpc>
+              <a:spcBef>
+                <a:spcPts val="0"/>
+              </a:spcBef>
+              <a:spcAft>
+                <a:spcPts val="400"/>
+              </a:spcAft>
+            </a:pPr>
+            <a:r>
+              <a:rPr sz="1500" b="0" i="0">
+                <a:solidFill>
+                  <a:srgbClr val="5C677B"/>
+                </a:solidFill>
+                <a:latin typeface="Calibri"/>
+              </a:rPr>
+              <a:t>The Mount Bridge status row — the three, wired together:</a:t>
+            </a:r>
+          </a:p>
+        </p:txBody>
+      </p:sp>
+      <p:sp>
+        <p:nvSpPr>
+          <p:cNvPr id="16" name="Rounded Rectangle 15"/>
+          <p:cNvSpPr/>
+          <p:nvPr/>
+        </p:nvSpPr>
+        <p:spPr>
+          <a:xfrm>
+            <a:off x="0" y="5285232"/>
+            <a:ext cx="12191695" cy="1572768"/>
+          </a:xfrm>
+          <a:prstGeom prst="roundRect">
+            <a:avLst>
+              <a:gd name="adj" fmla="val 4500"/>
+            </a:avLst>
+          </a:prstGeom>
+          <a:solidFill>
+            <a:srgbClr val="0B1026"/>
+          </a:solidFill>
+          <a:ln w="12700">
+            <a:solidFill>
+              <a:srgbClr val="0B1026"/>
+            </a:solidFill>
+          </a:ln>
+          <a:effectLst/>
+        </p:spPr>
+        <p:style>
+          <a:lnRef idx="1">
+            <a:schemeClr val="accent1"/>
+          </a:lnRef>
+          <a:fillRef idx="3">
+            <a:schemeClr val="accent1"/>
+          </a:fillRef>
+          <a:effectRef idx="2">
+            <a:schemeClr val="accent1"/>
+          </a:effectRef>
+          <a:fontRef idx="minor">
+            <a:schemeClr val="lt1"/>
+          </a:fontRef>
+        </p:style>
+        <p:txBody>
+          <a:bodyPr rtlCol="0" anchor="ctr"/>
+          <a:lstStyle/>
+          <a:p>
+            <a:pPr algn="ctr"/>
+          </a:p>
+        </p:txBody>
+      </p:sp>
+      <p:pic>
+        <p:nvPicPr>
+          <p:cNvPr id="17" name="Picture 16" descr="badge_mb_diagram.png"/>
+          <p:cNvPicPr>
+            <a:picLocks noChangeAspect="1"/>
+          </p:cNvPicPr>
+          <p:nvPr/>
+        </p:nvPicPr>
+        <p:blipFill>
+          <a:blip r:embed="rId2"/>
+          <a:stretch>
+            <a:fillRect/>
+          </a:stretch>
+        </p:blipFill>
+        <p:spPr>
+          <a:xfrm>
+            <a:off x="1249527" y="5486400"/>
+            <a:ext cx="9692640" cy="1179844"/>
+          </a:xfrm>
+          <a:prstGeom prst="rect">
+            <a:avLst/>
+          </a:prstGeom>
+        </p:spPr>
+      </p:pic>
     </p:spTree>
   </p:cSld>
   <p:clrMapOvr>
@@ -11185,8 +11104,8 @@
         </p:nvSpPr>
         <p:spPr>
           <a:xfrm>
-            <a:off x="640080" y="2103120"/>
-            <a:ext cx="10972800" cy="4023360"/>
+            <a:off x="640080" y="1828800"/>
+            <a:ext cx="11338560" cy="2011680"/>
           </a:xfrm>
           <a:prstGeom prst="rect">
             <a:avLst/>
@@ -11207,11 +11126,11 @@
                 <a:spcPts val="0"/>
               </a:spcBef>
               <a:spcAft>
-                <a:spcPts val="2000"/>
+                <a:spcPts val="900"/>
               </a:spcAft>
             </a:pPr>
             <a:r>
-              <a:rPr sz="2500" b="1" i="0">
+              <a:rPr sz="2100" b="1" i="0">
                 <a:solidFill>
                   <a:srgbClr val="4EA8DE"/>
                 </a:solidFill>
@@ -11220,7 +11139,7 @@
               <a:t>▸  </a:t>
             </a:r>
             <a:r>
-              <a:rPr sz="2500" b="1" i="0">
+              <a:rPr sz="2100" b="1" i="0">
                 <a:solidFill>
                   <a:srgbClr val="182030"/>
                 </a:solidFill>
@@ -11229,13 +11148,13 @@
               <a:t>Talks LX200 </a:t>
             </a:r>
             <a:r>
-              <a:rPr sz="2500" b="0" i="0">
+              <a:rPr sz="2100" b="0" i="0">
                 <a:solidFill>
                   <a:srgbClr val="182030"/>
                 </a:solidFill>
                 <a:latin typeface="Calibri"/>
               </a:rPr>
-              <a:t>to PiFinder’s pos_server.py on TCP 4030.</a:t>
+              <a:t>to PiFinder’s pos_server.py (TCP 4030).</a:t>
             </a:r>
           </a:p>
           <a:p>
@@ -11247,11 +11166,11 @@
                 <a:spcPts val="0"/>
               </a:spcBef>
               <a:spcAft>
-                <a:spcPts val="2000"/>
+                <a:spcPts val="900"/>
               </a:spcAft>
             </a:pPr>
             <a:r>
-              <a:rPr sz="2500" b="1" i="0">
+              <a:rPr sz="2100" b="1" i="0">
                 <a:solidFill>
                   <a:srgbClr val="4EA8DE"/>
                 </a:solidFill>
@@ -11260,22 +11179,22 @@
               <a:t>▸  </a:t>
             </a:r>
             <a:r>
-              <a:rPr sz="2500" b="1" i="0">
+              <a:rPr sz="2100" b="1" i="0">
                 <a:solidFill>
                   <a:srgbClr val="182030"/>
                 </a:solidFill>
                 <a:latin typeface="Calibri"/>
               </a:rPr>
-              <a:t>Reports the freshly solved position </a:t>
-            </a:r>
-            <a:r>
-              <a:rPr sz="2500" b="0" i="0">
+              <a:t>Reports the solved position </a:t>
+            </a:r>
+            <a:r>
+              <a:rPr sz="2100" b="0" i="0">
                 <a:solidFill>
                   <a:srgbClr val="182030"/>
                 </a:solidFill>
                 <a:latin typeface="Calibri"/>
               </a:rPr>
-              <a:t>every poll. A GoTo = a push-to target; nothing moves.</a:t>
+              <a:t>each poll; a GoTo is only a push-to.</a:t>
             </a:r>
           </a:p>
           <a:p>
@@ -11287,11 +11206,11 @@
                 <a:spcPts val="0"/>
               </a:spcBef>
               <a:spcAft>
-                <a:spcPts val="2000"/>
+                <a:spcPts val="900"/>
               </a:spcAft>
             </a:pPr>
             <a:r>
-              <a:rPr sz="2500" b="1" i="0">
+              <a:rPr sz="2100" b="1" i="0">
                 <a:solidFill>
                   <a:srgbClr val="4EA8DE"/>
                 </a:solidFill>
@@ -11300,7 +11219,7 @@
               <a:t>▸  </a:t>
             </a:r>
             <a:r>
-              <a:rPr sz="2500" b="1" i="0">
+              <a:rPr sz="2100" b="1" i="0">
                 <a:solidFill>
                   <a:srgbClr val="182030"/>
                 </a:solidFill>
@@ -11309,20 +11228,56 @@
               <a:t>No Sync </a:t>
             </a:r>
             <a:r>
-              <a:rPr sz="2500" b="0" i="0">
+              <a:rPr sz="2100" b="0" i="0">
                 <a:solidFill>
                   <a:srgbClr val="182030"/>
                 </a:solidFill>
                 <a:latin typeface="Calibri"/>
               </a:rPr>
-              <a:t>— PiFinder measures the truth every frame. Nothing to correct.</a:t>
-            </a:r>
-          </a:p>
-        </p:txBody>
-      </p:sp>
-      <p:sp>
-        <p:nvSpPr>
-          <p:cNvPr id="7" name="TextBox 6"/>
+              <a:t>— PiFinder measures the truth every frame.</a:t>
+            </a:r>
+          </a:p>
+        </p:txBody>
+      </p:sp>
+      <p:pic>
+        <p:nvPicPr>
+          <p:cNvPr id="7" name="Picture 6" descr="lx200_onset.png"/>
+          <p:cNvPicPr>
+            <a:picLocks noChangeAspect="1"/>
+          </p:cNvPicPr>
+          <p:nvPr/>
+        </p:nvPicPr>
+        <p:blipFill>
+          <a:blip r:embed="rId2"/>
+          <a:stretch>
+            <a:fillRect/>
+          </a:stretch>
+        </p:blipFill>
+        <p:spPr>
+          <a:xfrm>
+            <a:off x="929487" y="3200400"/>
+            <a:ext cx="10332720" cy="3077451"/>
+          </a:xfrm>
+          <a:prstGeom prst="rect">
+            <a:avLst/>
+          </a:prstGeom>
+          <a:ln w="12700">
+            <a:solidFill>
+              <a:srgbClr val="D8E0EC"/>
+            </a:solidFill>
+          </a:ln>
+          <a:effectLst>
+            <a:outerShdw blurRad="90000" dist="34000" dir="5400000" rotWithShape="0">
+              <a:srgbClr val="0B1026">
+                <a:alpha val="20000"/>
+              </a:srgbClr>
+            </a:outerShdw>
+          </a:effectLst>
+        </p:spPr>
+      </p:pic>
+      <p:sp>
+        <p:nvSpPr>
+          <p:cNvPr id="8" name="TextBox 7"/>
           <p:cNvSpPr txBox="1"/>
           <p:nvPr/>
         </p:nvSpPr>
@@ -11360,7 +11315,7 @@
                 </a:solidFill>
                 <a:latin typeface="Calibri"/>
               </a:rPr>
-              <a:t>Part 3 · LX200 &amp; Mount Bridge</a:t>
+              <a:t>Part 3 · INDI Control Panel — On Set: Track / Slew, no Sync</a:t>
             </a:r>
           </a:p>
         </p:txBody>
@@ -11563,550 +11518,14 @@
       </p:sp>
       <p:sp>
         <p:nvSpPr>
-          <p:cNvPr id="6" name="Oval 5"/>
-          <p:cNvSpPr/>
-          <p:nvPr/>
-        </p:nvSpPr>
-        <p:spPr>
-          <a:xfrm>
-            <a:off x="640080" y="2194560"/>
-            <a:ext cx="274320" cy="274320"/>
-          </a:xfrm>
-          <a:prstGeom prst="ellipse">
-            <a:avLst/>
-          </a:prstGeom>
-          <a:solidFill>
-            <a:srgbClr val="5C677B"/>
-          </a:solidFill>
-          <a:ln>
-            <a:noFill/>
-          </a:ln>
-          <a:effectLst/>
-        </p:spPr>
-        <p:style>
-          <a:lnRef idx="1">
-            <a:schemeClr val="accent1"/>
-          </a:lnRef>
-          <a:fillRef idx="3">
-            <a:schemeClr val="accent1"/>
-          </a:fillRef>
-          <a:effectRef idx="2">
-            <a:schemeClr val="accent1"/>
-          </a:effectRef>
-          <a:fontRef idx="minor">
-            <a:schemeClr val="lt1"/>
-          </a:fontRef>
-        </p:style>
-        <p:txBody>
-          <a:bodyPr rtlCol="0" anchor="ctr"/>
-          <a:lstStyle/>
-          <a:p>
-            <a:pPr algn="ctr"/>
-          </a:p>
-        </p:txBody>
-      </p:sp>
-      <p:sp>
-        <p:nvSpPr>
-          <p:cNvPr id="7" name="TextBox 6"/>
+          <p:cNvPr id="6" name="TextBox 5"/>
           <p:cNvSpPr txBox="1"/>
           <p:nvPr/>
         </p:nvSpPr>
         <p:spPr>
           <a:xfrm>
-            <a:off x="1152144" y="2103120"/>
-            <a:ext cx="4297680" cy="822960"/>
-          </a:xfrm>
-          <a:prstGeom prst="rect">
-            <a:avLst/>
-          </a:prstGeom>
-          <a:noFill/>
-        </p:spPr>
-        <p:txBody>
-          <a:bodyPr wrap="square" anchor="t" lIns="0" rIns="0" tIns="0" bIns="0">
-            <a:spAutoFit/>
-          </a:bodyPr>
-          <a:lstStyle/>
-          <a:p>
-            <a:pPr algn="l">
-              <a:lnSpc>
-                <a:spcPct val="105000"/>
-              </a:lnSpc>
-              <a:spcBef>
-                <a:spcPts val="0"/>
-              </a:spcBef>
-              <a:spcAft>
-                <a:spcPts val="400"/>
-              </a:spcAft>
-            </a:pPr>
-            <a:r>
-              <a:rPr sz="2300" b="1" i="0">
-                <a:solidFill>
-                  <a:srgbClr val="182030"/>
-                </a:solidFill>
-                <a:latin typeface="Calibri"/>
-              </a:rPr>
-              <a:t>Off</a:t>
-            </a:r>
-          </a:p>
-        </p:txBody>
-      </p:sp>
-      <p:sp>
-        <p:nvSpPr>
-          <p:cNvPr id="8" name="TextBox 7"/>
-          <p:cNvSpPr txBox="1"/>
-          <p:nvPr/>
-        </p:nvSpPr>
-        <p:spPr>
-          <a:xfrm>
-            <a:off x="5212080" y="2103120"/>
-            <a:ext cx="6492240" cy="822960"/>
-          </a:xfrm>
-          <a:prstGeom prst="rect">
-            <a:avLst/>
-          </a:prstGeom>
-          <a:noFill/>
-        </p:spPr>
-        <p:txBody>
-          <a:bodyPr wrap="square" anchor="t" lIns="0" rIns="0" tIns="0" bIns="0">
-            <a:spAutoFit/>
-          </a:bodyPr>
-          <a:lstStyle/>
-          <a:p>
-            <a:pPr algn="l">
-              <a:lnSpc>
-                <a:spcPct val="115000"/>
-              </a:lnSpc>
-              <a:spcBef>
-                <a:spcPts val="0"/>
-              </a:spcBef>
-              <a:spcAft>
-                <a:spcPts val="400"/>
-              </a:spcAft>
-            </a:pPr>
-            <a:r>
-              <a:rPr sz="1900" b="0" i="0">
-                <a:solidFill>
-                  <a:srgbClr val="5C677B"/>
-                </a:solidFill>
-                <a:latin typeface="Calibri"/>
-              </a:rPr>
-              <a:t>No coupling. Pure push-to.</a:t>
-            </a:r>
-          </a:p>
-        </p:txBody>
-      </p:sp>
-      <p:sp>
-        <p:nvSpPr>
-          <p:cNvPr id="9" name="Oval 8"/>
-          <p:cNvSpPr/>
-          <p:nvPr/>
-        </p:nvSpPr>
-        <p:spPr>
-          <a:xfrm>
-            <a:off x="640080" y="3218688"/>
-            <a:ext cx="274320" cy="274320"/>
-          </a:xfrm>
-          <a:prstGeom prst="ellipse">
-            <a:avLst/>
-          </a:prstGeom>
-          <a:solidFill>
-            <a:srgbClr val="4EA8DE"/>
-          </a:solidFill>
-          <a:ln>
-            <a:noFill/>
-          </a:ln>
-          <a:effectLst/>
-        </p:spPr>
-        <p:style>
-          <a:lnRef idx="1">
-            <a:schemeClr val="accent1"/>
-          </a:lnRef>
-          <a:fillRef idx="3">
-            <a:schemeClr val="accent1"/>
-          </a:fillRef>
-          <a:effectRef idx="2">
-            <a:schemeClr val="accent1"/>
-          </a:effectRef>
-          <a:fontRef idx="minor">
-            <a:schemeClr val="lt1"/>
-          </a:fontRef>
-        </p:style>
-        <p:txBody>
-          <a:bodyPr rtlCol="0" anchor="ctr"/>
-          <a:lstStyle/>
-          <a:p>
-            <a:pPr algn="ctr"/>
-          </a:p>
-        </p:txBody>
-      </p:sp>
-      <p:sp>
-        <p:nvSpPr>
-          <p:cNvPr id="10" name="TextBox 9"/>
-          <p:cNvSpPr txBox="1"/>
-          <p:nvPr/>
-        </p:nvSpPr>
-        <p:spPr>
-          <a:xfrm>
-            <a:off x="1152144" y="3127248"/>
-            <a:ext cx="4297680" cy="822960"/>
-          </a:xfrm>
-          <a:prstGeom prst="rect">
-            <a:avLst/>
-          </a:prstGeom>
-          <a:noFill/>
-        </p:spPr>
-        <p:txBody>
-          <a:bodyPr wrap="square" anchor="t" lIns="0" rIns="0" tIns="0" bIns="0">
-            <a:spAutoFit/>
-          </a:bodyPr>
-          <a:lstStyle/>
-          <a:p>
-            <a:pPr algn="l">
-              <a:lnSpc>
-                <a:spcPct val="105000"/>
-              </a:lnSpc>
-              <a:spcBef>
-                <a:spcPts val="0"/>
-              </a:spcBef>
-              <a:spcAft>
-                <a:spcPts val="400"/>
-              </a:spcAft>
-            </a:pPr>
-            <a:r>
-              <a:rPr sz="2300" b="1" i="0">
-                <a:solidFill>
-                  <a:srgbClr val="182030"/>
-                </a:solidFill>
-                <a:latin typeface="Calibri"/>
-              </a:rPr>
-              <a:t>Verify / Alert only</a:t>
-            </a:r>
-          </a:p>
-        </p:txBody>
-      </p:sp>
-      <p:sp>
-        <p:nvSpPr>
-          <p:cNvPr id="11" name="TextBox 10"/>
-          <p:cNvSpPr txBox="1"/>
-          <p:nvPr/>
-        </p:nvSpPr>
-        <p:spPr>
-          <a:xfrm>
-            <a:off x="5212080" y="3127248"/>
-            <a:ext cx="6492240" cy="822960"/>
-          </a:xfrm>
-          <a:prstGeom prst="rect">
-            <a:avLst/>
-          </a:prstGeom>
-          <a:noFill/>
-        </p:spPr>
-        <p:txBody>
-          <a:bodyPr wrap="square" anchor="t" lIns="0" rIns="0" tIns="0" bIns="0">
-            <a:spAutoFit/>
-          </a:bodyPr>
-          <a:lstStyle/>
-          <a:p>
-            <a:pPr algn="l">
-              <a:lnSpc>
-                <a:spcPct val="115000"/>
-              </a:lnSpc>
-              <a:spcBef>
-                <a:spcPts val="0"/>
-              </a:spcBef>
-              <a:spcAft>
-                <a:spcPts val="400"/>
-              </a:spcAft>
-            </a:pPr>
-            <a:r>
-              <a:rPr sz="1900" b="0" i="0">
-                <a:solidFill>
-                  <a:srgbClr val="5C677B"/>
-                </a:solidFill>
-                <a:latin typeface="Calibri"/>
-              </a:rPr>
-              <a:t>Warn on drift. Never touches the mount.</a:t>
-            </a:r>
-          </a:p>
-        </p:txBody>
-      </p:sp>
-      <p:sp>
-        <p:nvSpPr>
-          <p:cNvPr id="12" name="Oval 11"/>
-          <p:cNvSpPr/>
-          <p:nvPr/>
-        </p:nvSpPr>
-        <p:spPr>
-          <a:xfrm>
-            <a:off x="640080" y="4242816"/>
-            <a:ext cx="274320" cy="274320"/>
-          </a:xfrm>
-          <a:prstGeom prst="ellipse">
-            <a:avLst/>
-          </a:prstGeom>
-          <a:solidFill>
-            <a:srgbClr val="FFB703"/>
-          </a:solidFill>
-          <a:ln>
-            <a:noFill/>
-          </a:ln>
-          <a:effectLst/>
-        </p:spPr>
-        <p:style>
-          <a:lnRef idx="1">
-            <a:schemeClr val="accent1"/>
-          </a:lnRef>
-          <a:fillRef idx="3">
-            <a:schemeClr val="accent1"/>
-          </a:fillRef>
-          <a:effectRef idx="2">
-            <a:schemeClr val="accent1"/>
-          </a:effectRef>
-          <a:fontRef idx="minor">
-            <a:schemeClr val="lt1"/>
-          </a:fontRef>
-        </p:style>
-        <p:txBody>
-          <a:bodyPr rtlCol="0" anchor="ctr"/>
-          <a:lstStyle/>
-          <a:p>
-            <a:pPr algn="ctr"/>
-          </a:p>
-        </p:txBody>
-      </p:sp>
-      <p:sp>
-        <p:nvSpPr>
-          <p:cNvPr id="13" name="TextBox 12"/>
-          <p:cNvSpPr txBox="1"/>
-          <p:nvPr/>
-        </p:nvSpPr>
-        <p:spPr>
-          <a:xfrm>
-            <a:off x="1152144" y="4151376"/>
-            <a:ext cx="4297680" cy="822960"/>
-          </a:xfrm>
-          <a:prstGeom prst="rect">
-            <a:avLst/>
-          </a:prstGeom>
-          <a:noFill/>
-        </p:spPr>
-        <p:txBody>
-          <a:bodyPr wrap="square" anchor="t" lIns="0" rIns="0" tIns="0" bIns="0">
-            <a:spAutoFit/>
-          </a:bodyPr>
-          <a:lstStyle/>
-          <a:p>
-            <a:pPr algn="l">
-              <a:lnSpc>
-                <a:spcPct val="105000"/>
-              </a:lnSpc>
-              <a:spcBef>
-                <a:spcPts val="0"/>
-              </a:spcBef>
-              <a:spcAft>
-                <a:spcPts val="400"/>
-              </a:spcAft>
-            </a:pPr>
-            <a:r>
-              <a:rPr sz="2300" b="1" i="0">
-                <a:solidFill>
-                  <a:srgbClr val="182030"/>
-                </a:solidFill>
-                <a:latin typeface="Calibri"/>
-              </a:rPr>
-              <a:t>Auto-correct on drift</a:t>
-            </a:r>
-          </a:p>
-        </p:txBody>
-      </p:sp>
-      <p:sp>
-        <p:nvSpPr>
-          <p:cNvPr id="14" name="TextBox 13"/>
-          <p:cNvSpPr txBox="1"/>
-          <p:nvPr/>
-        </p:nvSpPr>
-        <p:spPr>
-          <a:xfrm>
-            <a:off x="5212080" y="4151376"/>
-            <a:ext cx="6492240" cy="822960"/>
-          </a:xfrm>
-          <a:prstGeom prst="rect">
-            <a:avLst/>
-          </a:prstGeom>
-          <a:noFill/>
-        </p:spPr>
-        <p:txBody>
-          <a:bodyPr wrap="square" anchor="t" lIns="0" rIns="0" tIns="0" bIns="0">
-            <a:spAutoFit/>
-          </a:bodyPr>
-          <a:lstStyle/>
-          <a:p>
-            <a:pPr algn="l">
-              <a:lnSpc>
-                <a:spcPct val="115000"/>
-              </a:lnSpc>
-              <a:spcBef>
-                <a:spcPts val="0"/>
-              </a:spcBef>
-              <a:spcAft>
-                <a:spcPts val="400"/>
-              </a:spcAft>
-            </a:pPr>
-            <a:r>
-              <a:rPr sz="1900" b="0" i="0">
-                <a:solidFill>
-                  <a:srgbClr val="5C677B"/>
-                </a:solidFill>
-                <a:latin typeface="Calibri"/>
-              </a:rPr>
-              <a:t>Past the threshold: Sync the mount to PiFinder.</a:t>
-            </a:r>
-          </a:p>
-        </p:txBody>
-      </p:sp>
-      <p:sp>
-        <p:nvSpPr>
-          <p:cNvPr id="15" name="Oval 14"/>
-          <p:cNvSpPr/>
-          <p:nvPr/>
-        </p:nvSpPr>
-        <p:spPr>
-          <a:xfrm>
-            <a:off x="640080" y="5266944"/>
-            <a:ext cx="274320" cy="274320"/>
-          </a:xfrm>
-          <a:prstGeom prst="ellipse">
-            <a:avLst/>
-          </a:prstGeom>
-          <a:solidFill>
-            <a:srgbClr val="8CD8B0"/>
-          </a:solidFill>
-          <a:ln>
-            <a:noFill/>
-          </a:ln>
-          <a:effectLst/>
-        </p:spPr>
-        <p:style>
-          <a:lnRef idx="1">
-            <a:schemeClr val="accent1"/>
-          </a:lnRef>
-          <a:fillRef idx="3">
-            <a:schemeClr val="accent1"/>
-          </a:fillRef>
-          <a:effectRef idx="2">
-            <a:schemeClr val="accent1"/>
-          </a:effectRef>
-          <a:fontRef idx="minor">
-            <a:schemeClr val="lt1"/>
-          </a:fontRef>
-        </p:style>
-        <p:txBody>
-          <a:bodyPr rtlCol="0" anchor="ctr"/>
-          <a:lstStyle/>
-          <a:p>
-            <a:pPr algn="ctr"/>
-          </a:p>
-        </p:txBody>
-      </p:sp>
-      <p:sp>
-        <p:nvSpPr>
-          <p:cNvPr id="16" name="TextBox 15"/>
-          <p:cNvSpPr txBox="1"/>
-          <p:nvPr/>
-        </p:nvSpPr>
-        <p:spPr>
-          <a:xfrm>
-            <a:off x="1152144" y="5175504"/>
-            <a:ext cx="4297680" cy="822960"/>
-          </a:xfrm>
-          <a:prstGeom prst="rect">
-            <a:avLst/>
-          </a:prstGeom>
-          <a:noFill/>
-        </p:spPr>
-        <p:txBody>
-          <a:bodyPr wrap="square" anchor="t" lIns="0" rIns="0" tIns="0" bIns="0">
-            <a:spAutoFit/>
-          </a:bodyPr>
-          <a:lstStyle/>
-          <a:p>
-            <a:pPr algn="l">
-              <a:lnSpc>
-                <a:spcPct val="105000"/>
-              </a:lnSpc>
-              <a:spcBef>
-                <a:spcPts val="0"/>
-              </a:spcBef>
-              <a:spcAft>
-                <a:spcPts val="400"/>
-              </a:spcAft>
-            </a:pPr>
-            <a:r>
-              <a:rPr sz="2300" b="1" i="0">
-                <a:solidFill>
-                  <a:srgbClr val="182030"/>
-                </a:solidFill>
-                <a:latin typeface="Calibri"/>
-              </a:rPr>
-              <a:t>Goto-Forward</a:t>
-            </a:r>
-          </a:p>
-        </p:txBody>
-      </p:sp>
-      <p:sp>
-        <p:nvSpPr>
-          <p:cNvPr id="17" name="TextBox 16"/>
-          <p:cNvSpPr txBox="1"/>
-          <p:nvPr/>
-        </p:nvSpPr>
-        <p:spPr>
-          <a:xfrm>
-            <a:off x="5212080" y="5175504"/>
-            <a:ext cx="6492240" cy="822960"/>
-          </a:xfrm>
-          <a:prstGeom prst="rect">
-            <a:avLst/>
-          </a:prstGeom>
-          <a:noFill/>
-        </p:spPr>
-        <p:txBody>
-          <a:bodyPr wrap="square" anchor="t" lIns="0" rIns="0" tIns="0" bIns="0">
-            <a:spAutoFit/>
-          </a:bodyPr>
-          <a:lstStyle/>
-          <a:p>
-            <a:pPr algn="l">
-              <a:lnSpc>
-                <a:spcPct val="115000"/>
-              </a:lnSpc>
-              <a:spcBef>
-                <a:spcPts val="0"/>
-              </a:spcBef>
-              <a:spcAft>
-                <a:spcPts val="400"/>
-              </a:spcAft>
-            </a:pPr>
-            <a:r>
-              <a:rPr sz="1900" b="0" i="0">
-                <a:solidFill>
-                  <a:srgbClr val="5C677B"/>
-                </a:solidFill>
-                <a:latin typeface="Calibri"/>
-              </a:rPr>
-              <a:t>New target → real Goto, then settle &amp; refine.</a:t>
-            </a:r>
-          </a:p>
-        </p:txBody>
-      </p:sp>
-      <p:sp>
-        <p:nvSpPr>
-          <p:cNvPr id="18" name="TextBox 17"/>
-          <p:cNvSpPr txBox="1"/>
-          <p:nvPr/>
-        </p:nvSpPr>
-        <p:spPr>
-          <a:xfrm>
-            <a:off x="640080" y="6400800"/>
-            <a:ext cx="10911535" cy="274320"/>
+            <a:off x="640080" y="2286000"/>
+            <a:ext cx="457200" cy="457200"/>
           </a:xfrm>
           <a:prstGeom prst="rect">
             <a:avLst/>
@@ -12131,13 +11550,643 @@
               </a:spcAft>
             </a:pPr>
             <a:r>
+              <a:rPr sz="2400" b="1" i="0">
+                <a:solidFill>
+                  <a:srgbClr val="9AA6C2"/>
+                </a:solidFill>
+                <a:latin typeface="Calibri"/>
+              </a:rPr>
+              <a:t>1</a:t>
+            </a:r>
+          </a:p>
+        </p:txBody>
+      </p:sp>
+      <p:sp>
+        <p:nvSpPr>
+          <p:cNvPr id="7" name="TextBox 6"/>
+          <p:cNvSpPr txBox="1"/>
+          <p:nvPr/>
+        </p:nvSpPr>
+        <p:spPr>
+          <a:xfrm>
+            <a:off x="1097280" y="2286000"/>
+            <a:ext cx="3474720" cy="548640"/>
+          </a:xfrm>
+          <a:prstGeom prst="rect">
+            <a:avLst/>
+          </a:prstGeom>
+          <a:noFill/>
+        </p:spPr>
+        <p:txBody>
+          <a:bodyPr wrap="square" anchor="t" lIns="0" rIns="0" tIns="0" bIns="0">
+            <a:spAutoFit/>
+          </a:bodyPr>
+          <a:lstStyle/>
+          <a:p>
+            <a:pPr algn="l">
+              <a:lnSpc>
+                <a:spcPct val="103000"/>
+              </a:lnSpc>
+              <a:spcBef>
+                <a:spcPts val="0"/>
+              </a:spcBef>
+              <a:spcAft>
+                <a:spcPts val="400"/>
+              </a:spcAft>
+            </a:pPr>
+            <a:r>
+              <a:rPr sz="2100" b="1" i="0">
+                <a:solidFill>
+                  <a:srgbClr val="182030"/>
+                </a:solidFill>
+                <a:latin typeface="Calibri"/>
+              </a:rPr>
+              <a:t>Off</a:t>
+            </a:r>
+          </a:p>
+        </p:txBody>
+      </p:sp>
+      <p:sp>
+        <p:nvSpPr>
+          <p:cNvPr id="8" name="TextBox 7"/>
+          <p:cNvSpPr txBox="1"/>
+          <p:nvPr/>
+        </p:nvSpPr>
+        <p:spPr>
+          <a:xfrm>
+            <a:off x="1097280" y="2688336"/>
+            <a:ext cx="3566160" cy="457200"/>
+          </a:xfrm>
+          <a:prstGeom prst="rect">
+            <a:avLst/>
+          </a:prstGeom>
+          <a:noFill/>
+        </p:spPr>
+        <p:txBody>
+          <a:bodyPr wrap="square" anchor="t" lIns="0" rIns="0" tIns="0" bIns="0">
+            <a:spAutoFit/>
+          </a:bodyPr>
+          <a:lstStyle/>
+          <a:p>
+            <a:pPr algn="l">
+              <a:lnSpc>
+                <a:spcPct val="100000"/>
+              </a:lnSpc>
+              <a:spcBef>
+                <a:spcPts val="0"/>
+              </a:spcBef>
+              <a:spcAft>
+                <a:spcPts val="400"/>
+              </a:spcAft>
+            </a:pPr>
+            <a:r>
+              <a:rPr sz="1800" b="0" i="0">
+                <a:solidFill>
+                  <a:srgbClr val="5C677B"/>
+                </a:solidFill>
+                <a:latin typeface="Calibri"/>
+              </a:rPr>
+              <a:t>pure push-to</a:t>
+            </a:r>
+          </a:p>
+        </p:txBody>
+      </p:sp>
+      <p:sp>
+        <p:nvSpPr>
+          <p:cNvPr id="9" name="TextBox 8"/>
+          <p:cNvSpPr txBox="1"/>
+          <p:nvPr/>
+        </p:nvSpPr>
+        <p:spPr>
+          <a:xfrm>
+            <a:off x="640080" y="3337560"/>
+            <a:ext cx="457200" cy="457200"/>
+          </a:xfrm>
+          <a:prstGeom prst="rect">
+            <a:avLst/>
+          </a:prstGeom>
+          <a:noFill/>
+        </p:spPr>
+        <p:txBody>
+          <a:bodyPr wrap="square" anchor="t" lIns="0" rIns="0" tIns="0" bIns="0">
+            <a:spAutoFit/>
+          </a:bodyPr>
+          <a:lstStyle/>
+          <a:p>
+            <a:pPr algn="l">
+              <a:lnSpc>
+                <a:spcPct val="100000"/>
+              </a:lnSpc>
+              <a:spcBef>
+                <a:spcPts val="0"/>
+              </a:spcBef>
+              <a:spcAft>
+                <a:spcPts val="400"/>
+              </a:spcAft>
+            </a:pPr>
+            <a:r>
+              <a:rPr sz="2400" b="1" i="0">
+                <a:solidFill>
+                  <a:srgbClr val="9AA6C2"/>
+                </a:solidFill>
+                <a:latin typeface="Calibri"/>
+              </a:rPr>
+              <a:t>2</a:t>
+            </a:r>
+          </a:p>
+        </p:txBody>
+      </p:sp>
+      <p:sp>
+        <p:nvSpPr>
+          <p:cNvPr id="10" name="TextBox 9"/>
+          <p:cNvSpPr txBox="1"/>
+          <p:nvPr/>
+        </p:nvSpPr>
+        <p:spPr>
+          <a:xfrm>
+            <a:off x="1097280" y="3337560"/>
+            <a:ext cx="3474720" cy="548640"/>
+          </a:xfrm>
+          <a:prstGeom prst="rect">
+            <a:avLst/>
+          </a:prstGeom>
+          <a:noFill/>
+        </p:spPr>
+        <p:txBody>
+          <a:bodyPr wrap="square" anchor="t" lIns="0" rIns="0" tIns="0" bIns="0">
+            <a:spAutoFit/>
+          </a:bodyPr>
+          <a:lstStyle/>
+          <a:p>
+            <a:pPr algn="l">
+              <a:lnSpc>
+                <a:spcPct val="103000"/>
+              </a:lnSpc>
+              <a:spcBef>
+                <a:spcPts val="0"/>
+              </a:spcBef>
+              <a:spcAft>
+                <a:spcPts val="400"/>
+              </a:spcAft>
+            </a:pPr>
+            <a:r>
+              <a:rPr sz="2100" b="1" i="0">
+                <a:solidFill>
+                  <a:srgbClr val="182030"/>
+                </a:solidFill>
+                <a:latin typeface="Calibri"/>
+              </a:rPr>
+              <a:t>Verify / Alert only</a:t>
+            </a:r>
+          </a:p>
+        </p:txBody>
+      </p:sp>
+      <p:sp>
+        <p:nvSpPr>
+          <p:cNvPr id="11" name="TextBox 10"/>
+          <p:cNvSpPr txBox="1"/>
+          <p:nvPr/>
+        </p:nvSpPr>
+        <p:spPr>
+          <a:xfrm>
+            <a:off x="1097280" y="3739896"/>
+            <a:ext cx="3566160" cy="457200"/>
+          </a:xfrm>
+          <a:prstGeom prst="rect">
+            <a:avLst/>
+          </a:prstGeom>
+          <a:noFill/>
+        </p:spPr>
+        <p:txBody>
+          <a:bodyPr wrap="square" anchor="t" lIns="0" rIns="0" tIns="0" bIns="0">
+            <a:spAutoFit/>
+          </a:bodyPr>
+          <a:lstStyle/>
+          <a:p>
+            <a:pPr algn="l">
+              <a:lnSpc>
+                <a:spcPct val="100000"/>
+              </a:lnSpc>
+              <a:spcBef>
+                <a:spcPts val="0"/>
+              </a:spcBef>
+              <a:spcAft>
+                <a:spcPts val="400"/>
+              </a:spcAft>
+            </a:pPr>
+            <a:r>
+              <a:rPr sz="1800" b="0" i="0">
+                <a:solidFill>
+                  <a:srgbClr val="5C677B"/>
+                </a:solidFill>
+                <a:latin typeface="Calibri"/>
+              </a:rPr>
+              <a:t>warn only, hands off</a:t>
+            </a:r>
+          </a:p>
+        </p:txBody>
+      </p:sp>
+      <p:sp>
+        <p:nvSpPr>
+          <p:cNvPr id="12" name="TextBox 11"/>
+          <p:cNvSpPr txBox="1"/>
+          <p:nvPr/>
+        </p:nvSpPr>
+        <p:spPr>
+          <a:xfrm>
+            <a:off x="640080" y="4389120"/>
+            <a:ext cx="457200" cy="457200"/>
+          </a:xfrm>
+          <a:prstGeom prst="rect">
+            <a:avLst/>
+          </a:prstGeom>
+          <a:noFill/>
+        </p:spPr>
+        <p:txBody>
+          <a:bodyPr wrap="square" anchor="t" lIns="0" rIns="0" tIns="0" bIns="0">
+            <a:spAutoFit/>
+          </a:bodyPr>
+          <a:lstStyle/>
+          <a:p>
+            <a:pPr algn="l">
+              <a:lnSpc>
+                <a:spcPct val="100000"/>
+              </a:lnSpc>
+              <a:spcBef>
+                <a:spcPts val="0"/>
+              </a:spcBef>
+              <a:spcAft>
+                <a:spcPts val="400"/>
+              </a:spcAft>
+            </a:pPr>
+            <a:r>
+              <a:rPr sz="2400" b="1" i="0">
+                <a:solidFill>
+                  <a:srgbClr val="9AA6C2"/>
+                </a:solidFill>
+                <a:latin typeface="Calibri"/>
+              </a:rPr>
+              <a:t>3</a:t>
+            </a:r>
+          </a:p>
+        </p:txBody>
+      </p:sp>
+      <p:sp>
+        <p:nvSpPr>
+          <p:cNvPr id="13" name="TextBox 12"/>
+          <p:cNvSpPr txBox="1"/>
+          <p:nvPr/>
+        </p:nvSpPr>
+        <p:spPr>
+          <a:xfrm>
+            <a:off x="1097280" y="4389120"/>
+            <a:ext cx="3474720" cy="548640"/>
+          </a:xfrm>
+          <a:prstGeom prst="rect">
+            <a:avLst/>
+          </a:prstGeom>
+          <a:noFill/>
+        </p:spPr>
+        <p:txBody>
+          <a:bodyPr wrap="square" anchor="t" lIns="0" rIns="0" tIns="0" bIns="0">
+            <a:spAutoFit/>
+          </a:bodyPr>
+          <a:lstStyle/>
+          <a:p>
+            <a:pPr algn="l">
+              <a:lnSpc>
+                <a:spcPct val="103000"/>
+              </a:lnSpc>
+              <a:spcBef>
+                <a:spcPts val="0"/>
+              </a:spcBef>
+              <a:spcAft>
+                <a:spcPts val="400"/>
+              </a:spcAft>
+            </a:pPr>
+            <a:r>
+              <a:rPr sz="2100" b="1" i="0">
+                <a:solidFill>
+                  <a:srgbClr val="182030"/>
+                </a:solidFill>
+                <a:latin typeface="Calibri"/>
+              </a:rPr>
+              <a:t>Auto-correct on drift</a:t>
+            </a:r>
+          </a:p>
+        </p:txBody>
+      </p:sp>
+      <p:sp>
+        <p:nvSpPr>
+          <p:cNvPr id="14" name="TextBox 13"/>
+          <p:cNvSpPr txBox="1"/>
+          <p:nvPr/>
+        </p:nvSpPr>
+        <p:spPr>
+          <a:xfrm>
+            <a:off x="1097280" y="4791456"/>
+            <a:ext cx="3566160" cy="457200"/>
+          </a:xfrm>
+          <a:prstGeom prst="rect">
+            <a:avLst/>
+          </a:prstGeom>
+          <a:noFill/>
+        </p:spPr>
+        <p:txBody>
+          <a:bodyPr wrap="square" anchor="t" lIns="0" rIns="0" tIns="0" bIns="0">
+            <a:spAutoFit/>
+          </a:bodyPr>
+          <a:lstStyle/>
+          <a:p>
+            <a:pPr algn="l">
+              <a:lnSpc>
+                <a:spcPct val="100000"/>
+              </a:lnSpc>
+              <a:spcBef>
+                <a:spcPts val="0"/>
+              </a:spcBef>
+              <a:spcAft>
+                <a:spcPts val="400"/>
+              </a:spcAft>
+            </a:pPr>
+            <a:r>
+              <a:rPr sz="1800" b="0" i="0">
+                <a:solidFill>
+                  <a:srgbClr val="5C677B"/>
+                </a:solidFill>
+                <a:latin typeface="Calibri"/>
+              </a:rPr>
+              <a:t>Sync past threshold</a:t>
+            </a:r>
+          </a:p>
+        </p:txBody>
+      </p:sp>
+      <p:sp>
+        <p:nvSpPr>
+          <p:cNvPr id="15" name="TextBox 14"/>
+          <p:cNvSpPr txBox="1"/>
+          <p:nvPr/>
+        </p:nvSpPr>
+        <p:spPr>
+          <a:xfrm>
+            <a:off x="640080" y="5440679"/>
+            <a:ext cx="457200" cy="457200"/>
+          </a:xfrm>
+          <a:prstGeom prst="rect">
+            <a:avLst/>
+          </a:prstGeom>
+          <a:noFill/>
+        </p:spPr>
+        <p:txBody>
+          <a:bodyPr wrap="square" anchor="t" lIns="0" rIns="0" tIns="0" bIns="0">
+            <a:spAutoFit/>
+          </a:bodyPr>
+          <a:lstStyle/>
+          <a:p>
+            <a:pPr algn="l">
+              <a:lnSpc>
+                <a:spcPct val="100000"/>
+              </a:lnSpc>
+              <a:spcBef>
+                <a:spcPts val="0"/>
+              </a:spcBef>
+              <a:spcAft>
+                <a:spcPts val="400"/>
+              </a:spcAft>
+            </a:pPr>
+            <a:r>
+              <a:rPr sz="2400" b="1" i="0">
+                <a:solidFill>
+                  <a:srgbClr val="9AA6C2"/>
+                </a:solidFill>
+                <a:latin typeface="Calibri"/>
+              </a:rPr>
+              <a:t>4</a:t>
+            </a:r>
+          </a:p>
+        </p:txBody>
+      </p:sp>
+      <p:sp>
+        <p:nvSpPr>
+          <p:cNvPr id="16" name="TextBox 15"/>
+          <p:cNvSpPr txBox="1"/>
+          <p:nvPr/>
+        </p:nvSpPr>
+        <p:spPr>
+          <a:xfrm>
+            <a:off x="1097280" y="5440679"/>
+            <a:ext cx="3474720" cy="548640"/>
+          </a:xfrm>
+          <a:prstGeom prst="rect">
+            <a:avLst/>
+          </a:prstGeom>
+          <a:noFill/>
+        </p:spPr>
+        <p:txBody>
+          <a:bodyPr wrap="square" anchor="t" lIns="0" rIns="0" tIns="0" bIns="0">
+            <a:spAutoFit/>
+          </a:bodyPr>
+          <a:lstStyle/>
+          <a:p>
+            <a:pPr algn="l">
+              <a:lnSpc>
+                <a:spcPct val="103000"/>
+              </a:lnSpc>
+              <a:spcBef>
+                <a:spcPts val="0"/>
+              </a:spcBef>
+              <a:spcAft>
+                <a:spcPts val="400"/>
+              </a:spcAft>
+            </a:pPr>
+            <a:r>
+              <a:rPr sz="2100" b="1" i="0">
+                <a:solidFill>
+                  <a:srgbClr val="182030"/>
+                </a:solidFill>
+                <a:latin typeface="Calibri"/>
+              </a:rPr>
+              <a:t>Goto-Forward</a:t>
+            </a:r>
+          </a:p>
+        </p:txBody>
+      </p:sp>
+      <p:sp>
+        <p:nvSpPr>
+          <p:cNvPr id="17" name="TextBox 16"/>
+          <p:cNvSpPr txBox="1"/>
+          <p:nvPr/>
+        </p:nvSpPr>
+        <p:spPr>
+          <a:xfrm>
+            <a:off x="1097280" y="5843016"/>
+            <a:ext cx="3566160" cy="457200"/>
+          </a:xfrm>
+          <a:prstGeom prst="rect">
+            <a:avLst/>
+          </a:prstGeom>
+          <a:noFill/>
+        </p:spPr>
+        <p:txBody>
+          <a:bodyPr wrap="square" anchor="t" lIns="0" rIns="0" tIns="0" bIns="0">
+            <a:spAutoFit/>
+          </a:bodyPr>
+          <a:lstStyle/>
+          <a:p>
+            <a:pPr algn="l">
+              <a:lnSpc>
+                <a:spcPct val="100000"/>
+              </a:lnSpc>
+              <a:spcBef>
+                <a:spcPts val="0"/>
+              </a:spcBef>
+              <a:spcAft>
+                <a:spcPts val="400"/>
+              </a:spcAft>
+            </a:pPr>
+            <a:r>
+              <a:rPr sz="1800" b="0" i="0">
+                <a:solidFill>
+                  <a:srgbClr val="5C677B"/>
+                </a:solidFill>
+                <a:latin typeface="Calibri"/>
+              </a:rPr>
+              <a:t>real slew, then refine</a:t>
+            </a:r>
+          </a:p>
+        </p:txBody>
+      </p:sp>
+      <p:pic>
+        <p:nvPicPr>
+          <p:cNvPr id="18" name="Picture 17" descr="cc_map.png"/>
+          <p:cNvPicPr>
+            <a:picLocks noChangeAspect="1"/>
+          </p:cNvPicPr>
+          <p:nvPr/>
+        </p:nvPicPr>
+        <p:blipFill>
+          <a:blip r:embed="rId2"/>
+          <a:stretch>
+            <a:fillRect/>
+          </a:stretch>
+        </p:blipFill>
+        <p:spPr>
+          <a:xfrm>
+            <a:off x="4739335" y="2194560"/>
+            <a:ext cx="7452360" cy="3446574"/>
+          </a:xfrm>
+          <a:prstGeom prst="rect">
+            <a:avLst/>
+          </a:prstGeom>
+          <a:ln w="12700">
+            <a:solidFill>
+              <a:srgbClr val="D8E0EC"/>
+            </a:solidFill>
+          </a:ln>
+          <a:effectLst>
+            <a:outerShdw blurRad="90000" dist="34000" dir="5400000" rotWithShape="0">
+              <a:srgbClr val="0B1026">
+                <a:alpha val="20000"/>
+              </a:srgbClr>
+            </a:outerShdw>
+          </a:effectLst>
+        </p:spPr>
+      </p:pic>
+      <p:sp>
+        <p:nvSpPr>
+          <p:cNvPr id="19" name="TextBox 18"/>
+          <p:cNvSpPr txBox="1"/>
+          <p:nvPr/>
+        </p:nvSpPr>
+        <p:spPr>
+          <a:xfrm>
+            <a:off x="4739335" y="5751263"/>
+            <a:ext cx="7452360" cy="274320"/>
+          </a:xfrm>
+          <a:prstGeom prst="rect">
+            <a:avLst/>
+          </a:prstGeom>
+          <a:noFill/>
+        </p:spPr>
+        <p:txBody>
+          <a:bodyPr wrap="square" anchor="t" lIns="0" rIns="0" tIns="0" bIns="0">
+            <a:spAutoFit/>
+          </a:bodyPr>
+          <a:lstStyle/>
+          <a:p>
+            <a:pPr algn="l">
+              <a:lnSpc>
+                <a:spcPct val="100000"/>
+              </a:lnSpc>
+              <a:spcBef>
+                <a:spcPts val="0"/>
+              </a:spcBef>
+              <a:spcAft>
+                <a:spcPts val="400"/>
+              </a:spcAft>
+            </a:pPr>
+            <a:r>
+              <a:rPr sz="1500" b="0" i="0">
+                <a:solidFill>
+                  <a:srgbClr val="5C677B"/>
+                </a:solidFill>
+                <a:latin typeface="Calibri"/>
+              </a:rPr>
+              <a:t>The dial in the Control Center — </a:t>
+            </a:r>
+            <a:r>
+              <a:rPr sz="1500" b="1" i="0">
+                <a:solidFill>
+                  <a:srgbClr val="182030"/>
+                </a:solidFill>
+                <a:latin typeface="Calibri"/>
+              </a:rPr>
+              <a:t>Decouple + the three presets.</a:t>
+            </a:r>
+          </a:p>
+        </p:txBody>
+      </p:sp>
+      <p:sp>
+        <p:nvSpPr>
+          <p:cNvPr id="20" name="TextBox 19"/>
+          <p:cNvSpPr txBox="1"/>
+          <p:nvPr/>
+        </p:nvSpPr>
+        <p:spPr>
+          <a:xfrm>
+            <a:off x="640080" y="6400800"/>
+            <a:ext cx="10911535" cy="274320"/>
+          </a:xfrm>
+          <a:prstGeom prst="rect">
+            <a:avLst/>
+          </a:prstGeom>
+          <a:noFill/>
+        </p:spPr>
+        <p:txBody>
+          <a:bodyPr wrap="square" anchor="t" lIns="0" rIns="0" tIns="0" bIns="0">
+            <a:spAutoFit/>
+          </a:bodyPr>
+          <a:lstStyle/>
+          <a:p>
+            <a:pPr algn="l">
+              <a:lnSpc>
+                <a:spcPct val="100000"/>
+              </a:lnSpc>
+              <a:spcBef>
+                <a:spcPts val="0"/>
+              </a:spcBef>
+              <a:spcAft>
+                <a:spcPts val="400"/>
+              </a:spcAft>
+            </a:pPr>
+            <a:r>
               <a:rPr sz="1200" b="0" i="0">
                 <a:solidFill>
                   <a:srgbClr val="5C677B"/>
                 </a:solidFill>
                 <a:latin typeface="Calibri"/>
               </a:rPr>
-              <a:t>Part 3 · Auto-correct action: Sync (any mount) or Goto/Track</a:t>
+              <a:t>Part 3 · Auto-correct → Sync (any mount); Goto-Forward → Goto / Track</a:t>
             </a:r>
           </a:p>
         </p:txBody>
@@ -12346,8 +12395,8 @@
         </p:nvSpPr>
         <p:spPr>
           <a:xfrm>
-            <a:off x="640080" y="2011680"/>
-            <a:ext cx="566928" cy="566928"/>
+            <a:off x="640080" y="1874519"/>
+            <a:ext cx="530352" cy="530352"/>
           </a:xfrm>
           <a:prstGeom prst="ellipse">
             <a:avLst/>
@@ -12380,7 +12429,7 @@
           <a:p>
             <a:pPr algn="ctr"/>
             <a:r>
-              <a:rPr sz="2400" b="1" i="0">
+              <a:rPr sz="2300" b="1" i="0">
                 <a:solidFill>
                   <a:srgbClr val="FFFFFF"/>
                 </a:solidFill>
@@ -12399,7 +12448,7 @@
         </p:nvSpPr>
         <p:spPr>
           <a:xfrm>
-            <a:off x="1508760" y="2039112"/>
+            <a:off x="1481328" y="1892807"/>
             <a:ext cx="10058400" cy="457200"/>
           </a:xfrm>
           <a:prstGeom prst="rect">
@@ -12444,8 +12493,8 @@
         </p:nvSpPr>
         <p:spPr>
           <a:xfrm>
-            <a:off x="640080" y="2944368"/>
-            <a:ext cx="566928" cy="566928"/>
+            <a:off x="640080" y="2715768"/>
+            <a:ext cx="530352" cy="530352"/>
           </a:xfrm>
           <a:prstGeom prst="ellipse">
             <a:avLst/>
@@ -12478,7 +12527,7 @@
           <a:p>
             <a:pPr algn="ctr"/>
             <a:r>
-              <a:rPr sz="2400" b="1" i="0">
+              <a:rPr sz="2300" b="1" i="0">
                 <a:solidFill>
                   <a:srgbClr val="FFFFFF"/>
                 </a:solidFill>
@@ -12497,7 +12546,7 @@
         </p:nvSpPr>
         <p:spPr>
           <a:xfrm>
-            <a:off x="1508760" y="2971800"/>
+            <a:off x="1481328" y="2734056"/>
             <a:ext cx="10058400" cy="457200"/>
           </a:xfrm>
           <a:prstGeom prst="rect">
@@ -12542,8 +12591,8 @@
         </p:nvSpPr>
         <p:spPr>
           <a:xfrm>
-            <a:off x="640080" y="3877056"/>
-            <a:ext cx="566928" cy="566928"/>
+            <a:off x="640080" y="3557015"/>
+            <a:ext cx="530352" cy="530352"/>
           </a:xfrm>
           <a:prstGeom prst="ellipse">
             <a:avLst/>
@@ -12576,7 +12625,7 @@
           <a:p>
             <a:pPr algn="ctr"/>
             <a:r>
-              <a:rPr sz="2400" b="1" i="0">
+              <a:rPr sz="2300" b="1" i="0">
                 <a:solidFill>
                   <a:srgbClr val="FFFFFF"/>
                 </a:solidFill>
@@ -12595,7 +12644,7 @@
         </p:nvSpPr>
         <p:spPr>
           <a:xfrm>
-            <a:off x="1508760" y="3904488"/>
+            <a:off x="1481328" y="3575303"/>
             <a:ext cx="10058400" cy="457200"/>
           </a:xfrm>
           <a:prstGeom prst="rect">
@@ -12640,8 +12689,8 @@
         </p:nvSpPr>
         <p:spPr>
           <a:xfrm>
-            <a:off x="640080" y="4809744"/>
-            <a:ext cx="566928" cy="566928"/>
+            <a:off x="640080" y="4398264"/>
+            <a:ext cx="530352" cy="530352"/>
           </a:xfrm>
           <a:prstGeom prst="ellipse">
             <a:avLst/>
@@ -12674,7 +12723,7 @@
           <a:p>
             <a:pPr algn="ctr"/>
             <a:r>
-              <a:rPr sz="2400" b="1" i="0">
+              <a:rPr sz="2300" b="1" i="0">
                 <a:solidFill>
                   <a:srgbClr val="FFFFFF"/>
                 </a:solidFill>
@@ -12693,7 +12742,7 @@
         </p:nvSpPr>
         <p:spPr>
           <a:xfrm>
-            <a:off x="1508760" y="4837176"/>
+            <a:off x="1481328" y="4416552"/>
             <a:ext cx="10058400" cy="457200"/>
           </a:xfrm>
           <a:prstGeom prst="rect">
@@ -12738,8 +12787,8 @@
         </p:nvSpPr>
         <p:spPr>
           <a:xfrm>
-            <a:off x="640080" y="5120640"/>
-            <a:ext cx="10911535" cy="1097280"/>
+            <a:off x="640080" y="5532120"/>
+            <a:ext cx="10911535" cy="914400"/>
           </a:xfrm>
           <a:prstGeom prst="rect">
             <a:avLst/>
@@ -13015,232 +13064,8 @@
         </p:nvSpPr>
         <p:spPr>
           <a:xfrm>
-            <a:off x="640080" y="2148840"/>
-            <a:ext cx="10972800" cy="1280160"/>
-          </a:xfrm>
-          <a:prstGeom prst="rect">
-            <a:avLst/>
-          </a:prstGeom>
-          <a:noFill/>
-        </p:spPr>
-        <p:txBody>
-          <a:bodyPr wrap="square" anchor="t" lIns="0" rIns="0" tIns="0" bIns="0">
-            <a:spAutoFit/>
-          </a:bodyPr>
-          <a:lstStyle/>
-          <a:p>
-            <a:pPr algn="l">
-              <a:lnSpc>
-                <a:spcPct val="120000"/>
-              </a:lnSpc>
-              <a:spcBef>
-                <a:spcPts val="0"/>
-              </a:spcBef>
-              <a:spcAft>
-                <a:spcPts val="400"/>
-              </a:spcAft>
-            </a:pPr>
-            <a:r>
-              <a:rPr sz="2600" b="0" i="0">
-                <a:solidFill>
-                  <a:srgbClr val="182030"/>
-                </a:solidFill>
-                <a:latin typeface="Calibri"/>
-              </a:rPr>
-              <a:t>Only </a:t>
-            </a:r>
-            <a:r>
-              <a:rPr sz="2600" b="1" i="0">
-                <a:solidFill>
-                  <a:srgbClr val="1B2A4A"/>
-                </a:solidFill>
-                <a:latin typeface="Calibri"/>
-              </a:rPr>
-              <a:t>EQUATORIAL_EOD_COORD</a:t>
-            </a:r>
-            <a:r>
-              <a:rPr sz="2600" b="0" i="0">
-                <a:solidFill>
-                  <a:srgbClr val="182030"/>
-                </a:solidFill>
-                <a:latin typeface="Calibri"/>
-              </a:rPr>
-              <a:t> + </a:t>
-            </a:r>
-            <a:r>
-              <a:rPr sz="2600" b="1" i="0">
-                <a:solidFill>
-                  <a:srgbClr val="1B2A4A"/>
-                </a:solidFill>
-                <a:latin typeface="Calibri"/>
-              </a:rPr>
-              <a:t>ON_COORD_SET</a:t>
-            </a:r>
-            <a:r>
-              <a:rPr sz="2600" b="0" i="0">
-                <a:solidFill>
-                  <a:srgbClr val="182030"/>
-                </a:solidFill>
-                <a:latin typeface="Calibri"/>
-              </a:rPr>
-              <a:t> — never a mount command.</a:t>
-            </a:r>
-          </a:p>
-        </p:txBody>
-      </p:sp>
-      <p:sp>
-        <p:nvSpPr>
-          <p:cNvPr id="7" name="TextBox 6"/>
-          <p:cNvSpPr txBox="1"/>
-          <p:nvPr/>
-        </p:nvSpPr>
-        <p:spPr>
-          <a:xfrm>
-            <a:off x="640080" y="3931920"/>
-            <a:ext cx="10972800" cy="2194560"/>
-          </a:xfrm>
-          <a:prstGeom prst="rect">
-            <a:avLst/>
-          </a:prstGeom>
-          <a:noFill/>
-        </p:spPr>
-        <p:txBody>
-          <a:bodyPr wrap="square" anchor="t" lIns="0" rIns="0" tIns="0" bIns="0">
-            <a:spAutoFit/>
-          </a:bodyPr>
-          <a:lstStyle/>
-          <a:p>
-            <a:pPr marL="384048" indent="-384048">
-              <a:lnSpc>
-                <a:spcPct val="112000"/>
-              </a:lnSpc>
-              <a:spcBef>
-                <a:spcPts val="0"/>
-              </a:spcBef>
-              <a:spcAft>
-                <a:spcPts val="1400"/>
-              </a:spcAft>
-            </a:pPr>
-            <a:r>
-              <a:rPr sz="2100" b="1" i="0">
-                <a:solidFill>
-                  <a:srgbClr val="4EA8DE"/>
-                </a:solidFill>
-                <a:latin typeface="Calibri"/>
-              </a:rPr>
-              <a:t>▸  </a:t>
-            </a:r>
-            <a:r>
-              <a:rPr sz="2100" b="1" i="0">
-                <a:solidFill>
-                  <a:srgbClr val="182030"/>
-                </a:solidFill>
-                <a:latin typeface="Calibri"/>
-              </a:rPr>
-              <a:t>Multi-Point Alignment </a:t>
-            </a:r>
-            <a:r>
-              <a:rPr sz="2100" b="0" i="0">
-                <a:solidFill>
-                  <a:srgbClr val="182030"/>
-                </a:solidFill>
-                <a:latin typeface="Calibri"/>
-              </a:rPr>
-              <a:t>(#191) — automated multi-star run.</a:t>
-            </a:r>
-          </a:p>
-          <a:p>
-            <a:pPr marL="384048" indent="-384048">
-              <a:lnSpc>
-                <a:spcPct val="112000"/>
-              </a:lnSpc>
-              <a:spcBef>
-                <a:spcPts val="0"/>
-              </a:spcBef>
-              <a:spcAft>
-                <a:spcPts val="1400"/>
-              </a:spcAft>
-            </a:pPr>
-            <a:r>
-              <a:rPr sz="2100" b="1" i="0">
-                <a:solidFill>
-                  <a:srgbClr val="4EA8DE"/>
-                </a:solidFill>
-                <a:latin typeface="Calibri"/>
-              </a:rPr>
-              <a:t>▸  </a:t>
-            </a:r>
-            <a:r>
-              <a:rPr sz="2100" b="1" i="0">
-                <a:solidFill>
-                  <a:srgbClr val="182030"/>
-                </a:solidFill>
-                <a:latin typeface="Calibri"/>
-              </a:rPr>
-              <a:t>Reposition detection </a:t>
-            </a:r>
-            <a:r>
-              <a:rPr sz="2100" b="0" i="0">
-                <a:solidFill>
-                  <a:srgbClr val="182030"/>
-                </a:solidFill>
-                <a:latin typeface="Calibri"/>
-              </a:rPr>
-              <a:t>— adopt an unexplained move, or revert.</a:t>
-            </a:r>
-          </a:p>
-          <a:p>
-            <a:pPr marL="384048" indent="-384048">
-              <a:lnSpc>
-                <a:spcPct val="112000"/>
-              </a:lnSpc>
-              <a:spcBef>
-                <a:spcPts val="0"/>
-              </a:spcBef>
-              <a:spcAft>
-                <a:spcPts val="1400"/>
-              </a:spcAft>
-            </a:pPr>
-            <a:r>
-              <a:rPr sz="2100" b="1" i="0">
-                <a:solidFill>
-                  <a:srgbClr val="4EA8DE"/>
-                </a:solidFill>
-                <a:latin typeface="Calibri"/>
-              </a:rPr>
-              <a:t>▸  </a:t>
-            </a:r>
-            <a:r>
-              <a:rPr sz="2100" b="1" i="0">
-                <a:solidFill>
-                  <a:srgbClr val="182030"/>
-                </a:solidFill>
-                <a:latin typeface="Calibri"/>
-              </a:rPr>
-              <a:t>Shadow Sync </a:t>
-            </a:r>
-            <a:r>
-              <a:rPr sz="2100" b="0" i="0">
-                <a:solidFill>
-                  <a:srgbClr val="182030"/>
-                </a:solidFill>
-                <a:latin typeface="Calibri"/>
-              </a:rPr>
-              <a:t>— mirror commands onto a non-driving device.</a:t>
-            </a:r>
-          </a:p>
-        </p:txBody>
-      </p:sp>
-      <p:sp>
-        <p:nvSpPr>
-          <p:cNvPr id="8" name="TextBox 7"/>
-          <p:cNvSpPr txBox="1"/>
-          <p:nvPr/>
-        </p:nvSpPr>
-        <p:spPr>
-          <a:xfrm>
-            <a:off x="640080" y="6400800"/>
-            <a:ext cx="10911535" cy="274320"/>
+            <a:off x="640080" y="1828800"/>
+            <a:ext cx="11247120" cy="548640"/>
           </a:xfrm>
           <a:prstGeom prst="rect">
             <a:avLst/>
@@ -13265,13 +13090,211 @@
               </a:spcAft>
             </a:pPr>
             <a:r>
+              <a:rPr sz="2300" b="0" i="0">
+                <a:solidFill>
+                  <a:srgbClr val="182030"/>
+                </a:solidFill>
+                <a:latin typeface="Calibri"/>
+              </a:rPr>
+              <a:t>Only </a:t>
+            </a:r>
+            <a:r>
+              <a:rPr sz="2300" b="1" i="0">
+                <a:solidFill>
+                  <a:srgbClr val="1B2A4A"/>
+                </a:solidFill>
+                <a:latin typeface="Calibri"/>
+              </a:rPr>
+              <a:t>EQUATORIAL_EOD_COORD</a:t>
+            </a:r>
+            <a:r>
+              <a:rPr sz="2300" b="0" i="0">
+                <a:solidFill>
+                  <a:srgbClr val="182030"/>
+                </a:solidFill>
+                <a:latin typeface="Calibri"/>
+              </a:rPr>
+              <a:t> + </a:t>
+            </a:r>
+            <a:r>
+              <a:rPr sz="2300" b="1" i="0">
+                <a:solidFill>
+                  <a:srgbClr val="1B2A4A"/>
+                </a:solidFill>
+                <a:latin typeface="Calibri"/>
+              </a:rPr>
+              <a:t>ON_COORD_SET</a:t>
+            </a:r>
+            <a:r>
+              <a:rPr sz="2300" b="0" i="0">
+                <a:solidFill>
+                  <a:srgbClr val="182030"/>
+                </a:solidFill>
+                <a:latin typeface="Calibri"/>
+              </a:rPr>
+              <a:t> — never a mount command.</a:t>
+            </a:r>
+          </a:p>
+        </p:txBody>
+      </p:sp>
+      <p:sp>
+        <p:nvSpPr>
+          <p:cNvPr id="7" name="TextBox 6"/>
+          <p:cNvSpPr txBox="1"/>
+          <p:nvPr/>
+        </p:nvSpPr>
+        <p:spPr>
+          <a:xfrm>
+            <a:off x="640080" y="2487168"/>
+            <a:ext cx="11338560" cy="457200"/>
+          </a:xfrm>
+          <a:prstGeom prst="rect">
+            <a:avLst/>
+          </a:prstGeom>
+          <a:noFill/>
+        </p:spPr>
+        <p:txBody>
+          <a:bodyPr wrap="square" anchor="t" lIns="0" rIns="0" tIns="0" bIns="0">
+            <a:spAutoFit/>
+          </a:bodyPr>
+          <a:lstStyle/>
+          <a:p>
+            <a:pPr algn="l">
+              <a:lnSpc>
+                <a:spcPct val="100000"/>
+              </a:lnSpc>
+              <a:spcBef>
+                <a:spcPts val="0"/>
+              </a:spcBef>
+              <a:spcAft>
+                <a:spcPts val="400"/>
+              </a:spcAft>
+            </a:pPr>
+            <a:r>
+              <a:rPr sz="2100" b="1" i="0">
+                <a:solidFill>
+                  <a:srgbClr val="182030"/>
+                </a:solidFill>
+                <a:latin typeface="Calibri"/>
+              </a:rPr>
+              <a:t>Multi-Point Alignment (#191)</a:t>
+            </a:r>
+            <a:r>
+              <a:rPr sz="2100" b="0" i="0">
+                <a:solidFill>
+                  <a:srgbClr val="5C677B"/>
+                </a:solidFill>
+                <a:latin typeface="Calibri"/>
+              </a:rPr>
+              <a:t>    ·    </a:t>
+            </a:r>
+            <a:r>
+              <a:rPr sz="2100" b="1" i="0">
+                <a:solidFill>
+                  <a:srgbClr val="182030"/>
+                </a:solidFill>
+                <a:latin typeface="Calibri"/>
+              </a:rPr>
+              <a:t>Reposition detection</a:t>
+            </a:r>
+            <a:r>
+              <a:rPr sz="2100" b="0" i="0">
+                <a:solidFill>
+                  <a:srgbClr val="5C677B"/>
+                </a:solidFill>
+                <a:latin typeface="Calibri"/>
+              </a:rPr>
+              <a:t>    ·    </a:t>
+            </a:r>
+            <a:r>
+              <a:rPr sz="2100" b="1" i="0">
+                <a:solidFill>
+                  <a:srgbClr val="182030"/>
+                </a:solidFill>
+                <a:latin typeface="Calibri"/>
+              </a:rPr>
+              <a:t>Shadow Sync</a:t>
+            </a:r>
+          </a:p>
+        </p:txBody>
+      </p:sp>
+      <p:pic>
+        <p:nvPicPr>
+          <p:cNvPr id="8" name="Picture 7" descr="kstars_both_c.png"/>
+          <p:cNvPicPr>
+            <a:picLocks noChangeAspect="1"/>
+          </p:cNvPicPr>
+          <p:nvPr/>
+        </p:nvPicPr>
+        <p:blipFill>
+          <a:blip r:embed="rId2"/>
+          <a:stretch>
+            <a:fillRect/>
+          </a:stretch>
+        </p:blipFill>
+        <p:spPr>
+          <a:xfrm>
+            <a:off x="1981047" y="2999232"/>
+            <a:ext cx="8229600" cy="3606310"/>
+          </a:xfrm>
+          <a:prstGeom prst="rect">
+            <a:avLst/>
+          </a:prstGeom>
+          <a:ln w="12700">
+            <a:solidFill>
+              <a:srgbClr val="D8E0EC"/>
+            </a:solidFill>
+          </a:ln>
+          <a:effectLst>
+            <a:outerShdw blurRad="90000" dist="34000" dir="5400000" rotWithShape="0">
+              <a:srgbClr val="0B1026">
+                <a:alpha val="20000"/>
+              </a:srgbClr>
+            </a:outerShdw>
+          </a:effectLst>
+        </p:spPr>
+      </p:pic>
+      <p:sp>
+        <p:nvSpPr>
+          <p:cNvPr id="9" name="TextBox 8"/>
+          <p:cNvSpPr txBox="1"/>
+          <p:nvPr/>
+        </p:nvSpPr>
+        <p:spPr>
+          <a:xfrm>
+            <a:off x="640080" y="6400800"/>
+            <a:ext cx="10911535" cy="274320"/>
+          </a:xfrm>
+          <a:prstGeom prst="rect">
+            <a:avLst/>
+          </a:prstGeom>
+          <a:noFill/>
+        </p:spPr>
+        <p:txBody>
+          <a:bodyPr wrap="square" anchor="t" lIns="0" rIns="0" tIns="0" bIns="0">
+            <a:spAutoFit/>
+          </a:bodyPr>
+          <a:lstStyle/>
+          <a:p>
+            <a:pPr algn="l">
+              <a:lnSpc>
+                <a:spcPct val="100000"/>
+              </a:lnSpc>
+              <a:spcBef>
+                <a:spcPts val="0"/>
+              </a:spcBef>
+              <a:spcAft>
+                <a:spcPts val="400"/>
+              </a:spcAft>
+            </a:pPr>
+            <a:r>
               <a:rPr sz="1200" b="0" i="0">
                 <a:solidFill>
                   <a:srgbClr val="5C677B"/>
                 </a:solidFill>
                 <a:latin typeface="Calibri"/>
               </a:rPr>
-              <a:t>Part 3 · LX200 &amp; Mount Bridge</a:t>
+              <a:t>Part 3 · PiFinder + the mount, co-located on the KStars sky map — right-click either</a:t>
             </a:r>
           </a:p>
         </p:txBody>
@@ -15658,8 +15681,8 @@
         </p:nvSpPr>
         <p:spPr>
           <a:xfrm>
-            <a:off x="640080" y="2011680"/>
-            <a:ext cx="5486400" cy="3566160"/>
+            <a:off x="320040" y="1783080"/>
+            <a:ext cx="5715000" cy="4572000"/>
           </a:xfrm>
           <a:prstGeom prst="roundRect">
             <a:avLst>
@@ -15706,8 +15729,8 @@
         </p:nvSpPr>
         <p:spPr>
           <a:xfrm>
-            <a:off x="1051560" y="2286000"/>
-            <a:ext cx="4572000" cy="457200"/>
+            <a:off x="640080" y="1965960"/>
+            <a:ext cx="4937760" cy="457200"/>
           </a:xfrm>
           <a:prstGeom prst="rect">
             <a:avLst/>
@@ -15751,8 +15774,8 @@
         </p:nvSpPr>
         <p:spPr>
           <a:xfrm>
-            <a:off x="1051560" y="3017520"/>
-            <a:ext cx="4754880" cy="2194560"/>
+            <a:off x="640080" y="2542032"/>
+            <a:ext cx="5120640" cy="731520"/>
           </a:xfrm>
           <a:prstGeom prst="rect">
             <a:avLst/>
@@ -15767,7 +15790,7 @@
           <a:p>
             <a:pPr algn="l">
               <a:lnSpc>
-                <a:spcPct val="128000"/>
+                <a:spcPct val="120000"/>
               </a:lnSpc>
               <a:spcBef>
                 <a:spcPts val="0"/>
@@ -15783,21 +15806,57 @@
                 </a:solidFill>
                 <a:latin typeface="Calibri"/>
               </a:rPr>
-              <a:t>The stock INDI Telescope Simulator — Sync it or GoTo it like a real mount.</a:t>
-            </a:r>
-          </a:p>
-        </p:txBody>
-      </p:sp>
-      <p:sp>
-        <p:nvSpPr>
-          <p:cNvPr id="9" name="Rounded Rectangle 8"/>
-          <p:cNvSpPr/>
-          <p:nvPr/>
-        </p:nvSpPr>
-        <p:spPr>
-          <a:xfrm>
-            <a:off x="6309360" y="2011680"/>
-            <a:ext cx="5486400" cy="3566160"/>
+              <a:t>Stock INDI Telescope Simulator — Sync or GoTo like a real mount.</a:t>
+            </a:r>
+          </a:p>
+        </p:txBody>
+      </p:sp>
+      <p:pic>
+        <p:nvPicPr>
+          <p:cNvPr id="9" name="Picture 8" descr="sim_mount_c.png"/>
+          <p:cNvPicPr>
+            <a:picLocks noChangeAspect="1"/>
+          </p:cNvPicPr>
+          <p:nvPr/>
+        </p:nvPicPr>
+        <p:blipFill>
+          <a:blip r:embed="rId2"/>
+          <a:stretch>
+            <a:fillRect/>
+          </a:stretch>
+        </p:blipFill>
+        <p:spPr>
+          <a:xfrm>
+            <a:off x="594359" y="3566160"/>
+            <a:ext cx="5166360" cy="2260282"/>
+          </a:xfrm>
+          <a:prstGeom prst="rect">
+            <a:avLst/>
+          </a:prstGeom>
+          <a:ln w="12700">
+            <a:solidFill>
+              <a:srgbClr val="D8E0EC"/>
+            </a:solidFill>
+          </a:ln>
+          <a:effectLst>
+            <a:outerShdw blurRad="90000" dist="34000" dir="5400000" rotWithShape="0">
+              <a:srgbClr val="0B1026">
+                <a:alpha val="20000"/>
+              </a:srgbClr>
+            </a:outerShdw>
+          </a:effectLst>
+        </p:spPr>
+      </p:pic>
+      <p:sp>
+        <p:nvSpPr>
+          <p:cNvPr id="10" name="Rounded Rectangle 9"/>
+          <p:cNvSpPr/>
+          <p:nvPr/>
+        </p:nvSpPr>
+        <p:spPr>
+          <a:xfrm>
+            <a:off x="6172200" y="1783080"/>
+            <a:ext cx="5715000" cy="4572000"/>
           </a:xfrm>
           <a:prstGeom prst="roundRect">
             <a:avLst>
@@ -15838,14 +15897,14 @@
       </p:sp>
       <p:sp>
         <p:nvSpPr>
-          <p:cNvPr id="10" name="TextBox 9"/>
+          <p:cNvPr id="11" name="TextBox 10"/>
           <p:cNvSpPr txBox="1"/>
           <p:nvPr/>
         </p:nvSpPr>
         <p:spPr>
           <a:xfrm>
-            <a:off x="6720840" y="2286000"/>
-            <a:ext cx="4572000" cy="457200"/>
+            <a:off x="6492240" y="1965960"/>
+            <a:ext cx="4754880" cy="457200"/>
           </a:xfrm>
           <a:prstGeom prst="rect">
             <a:avLst/>
@@ -15883,14 +15942,14 @@
       </p:sp>
       <p:sp>
         <p:nvSpPr>
-          <p:cNvPr id="11" name="TextBox 10"/>
+          <p:cNvPr id="12" name="TextBox 11"/>
           <p:cNvSpPr txBox="1"/>
           <p:nvPr/>
         </p:nvSpPr>
         <p:spPr>
           <a:xfrm>
-            <a:off x="6720840" y="3017520"/>
-            <a:ext cx="4754880" cy="2377440"/>
+            <a:off x="6492240" y="2542032"/>
+            <a:ext cx="5029200" cy="822960"/>
           </a:xfrm>
           <a:prstGeom prst="rect">
             <a:avLst/>
@@ -15911,7 +15970,7 @@
                 <a:spcPts val="0"/>
               </a:spcBef>
               <a:spcAft>
-                <a:spcPts val="1200"/>
+                <a:spcPts val="600"/>
               </a:spcAft>
             </a:pPr>
             <a:r>
@@ -15951,7 +16010,7 @@
                 <a:spcPts val="0"/>
               </a:spcBef>
               <a:spcAft>
-                <a:spcPts val="1200"/>
+                <a:spcPts val="600"/>
               </a:spcAft>
             </a:pPr>
             <a:r>
@@ -15979,14 +16038,50 @@
                 </a:solidFill>
                 <a:latin typeface="Calibri"/>
               </a:rPr>
-              <a:t>— POSTs it to /api/fake_solve every ~2 s.</a:t>
-            </a:r>
-          </a:p>
-        </p:txBody>
-      </p:sp>
-      <p:sp>
-        <p:nvSpPr>
-          <p:cNvPr id="12" name="TextBox 11"/>
+              <a:t>— POSTs to /api/fake_solve.</a:t>
+            </a:r>
+          </a:p>
+        </p:txBody>
+      </p:sp>
+      <p:pic>
+        <p:nvPicPr>
+          <p:cNvPr id="13" name="Picture 12" descr="sim_pf_c.png"/>
+          <p:cNvPicPr>
+            <a:picLocks noChangeAspect="1"/>
+          </p:cNvPicPr>
+          <p:nvPr/>
+        </p:nvPicPr>
+        <p:blipFill>
+          <a:blip r:embed="rId3"/>
+          <a:stretch>
+            <a:fillRect/>
+          </a:stretch>
+        </p:blipFill>
+        <p:spPr>
+          <a:xfrm>
+            <a:off x="6446520" y="3566160"/>
+            <a:ext cx="5166360" cy="2441105"/>
+          </a:xfrm>
+          <a:prstGeom prst="rect">
+            <a:avLst/>
+          </a:prstGeom>
+          <a:ln w="12700">
+            <a:solidFill>
+              <a:srgbClr val="D8E0EC"/>
+            </a:solidFill>
+          </a:ln>
+          <a:effectLst>
+            <a:outerShdw blurRad="90000" dist="34000" dir="5400000" rotWithShape="0">
+              <a:srgbClr val="0B1026">
+                <a:alpha val="20000"/>
+              </a:srgbClr>
+            </a:outerShdw>
+          </a:effectLst>
+        </p:spPr>
+      </p:pic>
+      <p:sp>
+        <p:nvSpPr>
+          <p:cNvPr id="14" name="TextBox 13"/>
           <p:cNvSpPr txBox="1"/>
           <p:nvPr/>
         </p:nvSpPr>
@@ -22263,8 +22358,8 @@
         </p:nvSpPr>
         <p:spPr>
           <a:xfrm>
-            <a:off x="640080" y="2286000"/>
-            <a:ext cx="4937760" cy="548640"/>
+            <a:off x="640080" y="2148840"/>
+            <a:ext cx="457200" cy="457200"/>
           </a:xfrm>
           <a:prstGeom prst="rect">
             <a:avLst/>
@@ -22291,69 +22386,25 @@
             <a:r>
               <a:rPr sz="2400" b="1" i="0">
                 <a:solidFill>
-                  <a:srgbClr val="182030"/>
+                  <a:srgbClr val="9AA6C2"/>
                 </a:solidFill>
                 <a:latin typeface="Calibri"/>
               </a:rPr>
-              <a:t>Status badges</a:t>
-            </a:r>
-          </a:p>
-        </p:txBody>
-      </p:sp>
-      <p:sp>
-        <p:nvSpPr>
-          <p:cNvPr id="7" name="Right Arrow 6"/>
-          <p:cNvSpPr/>
-          <p:nvPr/>
-        </p:nvSpPr>
-        <p:spPr>
-          <a:xfrm>
-            <a:off x="5212080" y="2340864"/>
-            <a:ext cx="457200" cy="384048"/>
-          </a:xfrm>
-          <a:prstGeom prst="rightArrow">
-            <a:avLst/>
-          </a:prstGeom>
-          <a:solidFill>
-            <a:srgbClr val="4EA8DE"/>
-          </a:solidFill>
-          <a:ln>
-            <a:noFill/>
-          </a:ln>
-          <a:effectLst/>
-        </p:spPr>
-        <p:style>
-          <a:lnRef idx="1">
-            <a:schemeClr val="accent1"/>
-          </a:lnRef>
-          <a:fillRef idx="3">
-            <a:schemeClr val="accent1"/>
-          </a:fillRef>
-          <a:effectRef idx="2">
-            <a:schemeClr val="accent1"/>
-          </a:effectRef>
-          <a:fontRef idx="minor">
-            <a:schemeClr val="lt1"/>
-          </a:fontRef>
-        </p:style>
-        <p:txBody>
-          <a:bodyPr rtlCol="0" anchor="ctr"/>
-          <a:lstStyle/>
-          <a:p>
-            <a:pPr algn="ctr"/>
-          </a:p>
-        </p:txBody>
-      </p:sp>
-      <p:sp>
-        <p:nvSpPr>
-          <p:cNvPr id="8" name="TextBox 7"/>
+              <a:t>1</a:t>
+            </a:r>
+          </a:p>
+        </p:txBody>
+      </p:sp>
+      <p:sp>
+        <p:nvSpPr>
+          <p:cNvPr id="7" name="TextBox 6"/>
           <p:cNvSpPr txBox="1"/>
           <p:nvPr/>
         </p:nvSpPr>
         <p:spPr>
           <a:xfrm>
-            <a:off x="5943600" y="2286000"/>
-            <a:ext cx="5669280" cy="548640"/>
+            <a:off x="1097280" y="2148840"/>
+            <a:ext cx="3474720" cy="457200"/>
           </a:xfrm>
           <a:prstGeom prst="rect">
             <a:avLst/>
@@ -22378,27 +22429,27 @@
               </a:spcAft>
             </a:pPr>
             <a:r>
-              <a:rPr sz="2400" b="0" i="0">
+              <a:rPr sz="2200" b="1" i="0">
                 <a:solidFill>
-                  <a:srgbClr val="5C677B"/>
+                  <a:srgbClr val="182030"/>
                 </a:solidFill>
                 <a:latin typeface="Calibri"/>
               </a:rPr>
-              <a:t>a read-only status card</a:t>
-            </a:r>
-          </a:p>
-        </p:txBody>
-      </p:sp>
-      <p:sp>
-        <p:nvSpPr>
-          <p:cNvPr id="9" name="TextBox 8"/>
+              <a:t>Status badges</a:t>
+            </a:r>
+          </a:p>
+        </p:txBody>
+      </p:sp>
+      <p:sp>
+        <p:nvSpPr>
+          <p:cNvPr id="8" name="TextBox 7"/>
           <p:cNvSpPr txBox="1"/>
           <p:nvPr/>
         </p:nvSpPr>
         <p:spPr>
           <a:xfrm>
-            <a:off x="640080" y="3337560"/>
-            <a:ext cx="4937760" cy="548640"/>
+            <a:off x="1097280" y="2569464"/>
+            <a:ext cx="3566160" cy="457200"/>
           </a:xfrm>
           <a:prstGeom prst="rect">
             <a:avLst/>
@@ -22423,71 +22474,27 @@
               </a:spcAft>
             </a:pPr>
             <a:r>
-              <a:rPr sz="2400" b="1" i="0">
+              <a:rPr sz="1800" b="0" i="0">
                 <a:solidFill>
-                  <a:srgbClr val="182030"/>
+                  <a:srgbClr val="5C677B"/>
                 </a:solidFill>
                 <a:latin typeface="Calibri"/>
               </a:rPr>
-              <a:t>Coupling presets</a:t>
-            </a:r>
-          </a:p>
-        </p:txBody>
-      </p:sp>
-      <p:sp>
-        <p:nvSpPr>
-          <p:cNvPr id="10" name="Right Arrow 9"/>
-          <p:cNvSpPr/>
-          <p:nvPr/>
-        </p:nvSpPr>
-        <p:spPr>
-          <a:xfrm>
-            <a:off x="5212080" y="3392424"/>
-            <a:ext cx="457200" cy="384048"/>
-          </a:xfrm>
-          <a:prstGeom prst="rightArrow">
-            <a:avLst/>
-          </a:prstGeom>
-          <a:solidFill>
-            <a:srgbClr val="4EA8DE"/>
-          </a:solidFill>
-          <a:ln>
-            <a:noFill/>
-          </a:ln>
-          <a:effectLst/>
-        </p:spPr>
-        <p:style>
-          <a:lnRef idx="1">
-            <a:schemeClr val="accent1"/>
-          </a:lnRef>
-          <a:fillRef idx="3">
-            <a:schemeClr val="accent1"/>
-          </a:fillRef>
-          <a:effectRef idx="2">
-            <a:schemeClr val="accent1"/>
-          </a:effectRef>
-          <a:fontRef idx="minor">
-            <a:schemeClr val="lt1"/>
-          </a:fontRef>
-        </p:style>
-        <p:txBody>
-          <a:bodyPr rtlCol="0" anchor="ctr"/>
-          <a:lstStyle/>
-          <a:p>
-            <a:pPr algn="ctr"/>
-          </a:p>
-        </p:txBody>
-      </p:sp>
-      <p:sp>
-        <p:nvSpPr>
-          <p:cNvPr id="11" name="TextBox 10"/>
+              <a:t>a read-only status card</a:t>
+            </a:r>
+          </a:p>
+        </p:txBody>
+      </p:sp>
+      <p:sp>
+        <p:nvSpPr>
+          <p:cNvPr id="9" name="TextBox 8"/>
           <p:cNvSpPr txBox="1"/>
           <p:nvPr/>
         </p:nvSpPr>
         <p:spPr>
           <a:xfrm>
-            <a:off x="5943600" y="3337560"/>
-            <a:ext cx="5669280" cy="548640"/>
+            <a:off x="640080" y="3246120"/>
+            <a:ext cx="457200" cy="457200"/>
           </a:xfrm>
           <a:prstGeom prst="rect">
             <a:avLst/>
@@ -22512,27 +22519,27 @@
               </a:spcAft>
             </a:pPr>
             <a:r>
-              <a:rPr sz="2400" b="0" i="0">
+              <a:rPr sz="2400" b="1" i="0">
                 <a:solidFill>
-                  <a:srgbClr val="5C677B"/>
+                  <a:srgbClr val="9AA6C2"/>
                 </a:solidFill>
                 <a:latin typeface="Calibri"/>
               </a:rPr>
-              <a:t>a segmented control</a:t>
-            </a:r>
-          </a:p>
-        </p:txBody>
-      </p:sp>
-      <p:sp>
-        <p:nvSpPr>
-          <p:cNvPr id="12" name="TextBox 11"/>
+              <a:t>2</a:t>
+            </a:r>
+          </a:p>
+        </p:txBody>
+      </p:sp>
+      <p:sp>
+        <p:nvSpPr>
+          <p:cNvPr id="10" name="TextBox 9"/>
           <p:cNvSpPr txBox="1"/>
           <p:nvPr/>
         </p:nvSpPr>
         <p:spPr>
           <a:xfrm>
-            <a:off x="640080" y="4389120"/>
-            <a:ext cx="4937760" cy="548640"/>
+            <a:off x="1097280" y="3246120"/>
+            <a:ext cx="3474720" cy="457200"/>
           </a:xfrm>
           <a:prstGeom prst="rect">
             <a:avLst/>
@@ -22557,71 +22564,27 @@
               </a:spcAft>
             </a:pPr>
             <a:r>
-              <a:rPr sz="2400" b="1" i="0">
+              <a:rPr sz="2200" b="1" i="0">
                 <a:solidFill>
                   <a:srgbClr val="182030"/>
                 </a:solidFill>
                 <a:latin typeface="Calibri"/>
               </a:rPr>
-              <a:t>Quick Actions</a:t>
-            </a:r>
-          </a:p>
-        </p:txBody>
-      </p:sp>
-      <p:sp>
-        <p:nvSpPr>
-          <p:cNvPr id="13" name="Right Arrow 12"/>
-          <p:cNvSpPr/>
-          <p:nvPr/>
-        </p:nvSpPr>
-        <p:spPr>
-          <a:xfrm>
-            <a:off x="5212080" y="4443983"/>
-            <a:ext cx="457200" cy="384048"/>
-          </a:xfrm>
-          <a:prstGeom prst="rightArrow">
-            <a:avLst/>
-          </a:prstGeom>
-          <a:solidFill>
-            <a:srgbClr val="4EA8DE"/>
-          </a:solidFill>
-          <a:ln>
-            <a:noFill/>
-          </a:ln>
-          <a:effectLst/>
-        </p:spPr>
-        <p:style>
-          <a:lnRef idx="1">
-            <a:schemeClr val="accent1"/>
-          </a:lnRef>
-          <a:fillRef idx="3">
-            <a:schemeClr val="accent1"/>
-          </a:fillRef>
-          <a:effectRef idx="2">
-            <a:schemeClr val="accent1"/>
-          </a:effectRef>
-          <a:fontRef idx="minor">
-            <a:schemeClr val="lt1"/>
-          </a:fontRef>
-        </p:style>
-        <p:txBody>
-          <a:bodyPr rtlCol="0" anchor="ctr"/>
-          <a:lstStyle/>
-          <a:p>
-            <a:pPr algn="ctr"/>
-          </a:p>
-        </p:txBody>
-      </p:sp>
-      <p:sp>
-        <p:nvSpPr>
-          <p:cNvPr id="14" name="TextBox 13"/>
+              <a:t>Coupling presets</a:t>
+            </a:r>
+          </a:p>
+        </p:txBody>
+      </p:sp>
+      <p:sp>
+        <p:nvSpPr>
+          <p:cNvPr id="11" name="TextBox 10"/>
           <p:cNvSpPr txBox="1"/>
           <p:nvPr/>
         </p:nvSpPr>
         <p:spPr>
           <a:xfrm>
-            <a:off x="5943600" y="4389120"/>
-            <a:ext cx="5669280" cy="548640"/>
+            <a:off x="1097280" y="3666744"/>
+            <a:ext cx="3566160" cy="457200"/>
           </a:xfrm>
           <a:prstGeom prst="rect">
             <a:avLst/>
@@ -22646,27 +22609,27 @@
               </a:spcAft>
             </a:pPr>
             <a:r>
-              <a:rPr sz="2400" b="0" i="0">
+              <a:rPr sz="1800" b="0" i="0">
                 <a:solidFill>
                   <a:srgbClr val="5C677B"/>
                 </a:solidFill>
                 <a:latin typeface="Calibri"/>
               </a:rPr>
-              <a:t>buttons on that card</a:t>
-            </a:r>
-          </a:p>
-        </p:txBody>
-      </p:sp>
-      <p:sp>
-        <p:nvSpPr>
-          <p:cNvPr id="15" name="TextBox 14"/>
+              <a:t>a segmented control</a:t>
+            </a:r>
+          </a:p>
+        </p:txBody>
+      </p:sp>
+      <p:sp>
+        <p:nvSpPr>
+          <p:cNvPr id="12" name="TextBox 11"/>
           <p:cNvSpPr txBox="1"/>
           <p:nvPr/>
         </p:nvSpPr>
         <p:spPr>
           <a:xfrm>
-            <a:off x="640080" y="5943600"/>
-            <a:ext cx="10972800" cy="548640"/>
+            <a:off x="640080" y="4343400"/>
+            <a:ext cx="457200" cy="457200"/>
           </a:xfrm>
           <a:prstGeom prst="rect">
             <a:avLst/>
@@ -22691,20 +22654,236 @@
               </a:spcAft>
             </a:pPr>
             <a:r>
+              <a:rPr sz="2400" b="1" i="0">
+                <a:solidFill>
+                  <a:srgbClr val="9AA6C2"/>
+                </a:solidFill>
+                <a:latin typeface="Calibri"/>
+              </a:rPr>
+              <a:t>3</a:t>
+            </a:r>
+          </a:p>
+        </p:txBody>
+      </p:sp>
+      <p:sp>
+        <p:nvSpPr>
+          <p:cNvPr id="13" name="TextBox 12"/>
+          <p:cNvSpPr txBox="1"/>
+          <p:nvPr/>
+        </p:nvSpPr>
+        <p:spPr>
+          <a:xfrm>
+            <a:off x="1097280" y="4343400"/>
+            <a:ext cx="3474720" cy="457200"/>
+          </a:xfrm>
+          <a:prstGeom prst="rect">
+            <a:avLst/>
+          </a:prstGeom>
+          <a:noFill/>
+        </p:spPr>
+        <p:txBody>
+          <a:bodyPr wrap="square" anchor="t" lIns="0" rIns="0" tIns="0" bIns="0">
+            <a:spAutoFit/>
+          </a:bodyPr>
+          <a:lstStyle/>
+          <a:p>
+            <a:pPr algn="l">
+              <a:lnSpc>
+                <a:spcPct val="100000"/>
+              </a:lnSpc>
+              <a:spcBef>
+                <a:spcPts val="0"/>
+              </a:spcBef>
+              <a:spcAft>
+                <a:spcPts val="400"/>
+              </a:spcAft>
+            </a:pPr>
+            <a:r>
+              <a:rPr sz="2200" b="1" i="0">
+                <a:solidFill>
+                  <a:srgbClr val="182030"/>
+                </a:solidFill>
+                <a:latin typeface="Calibri"/>
+              </a:rPr>
+              <a:t>Quick Actions</a:t>
+            </a:r>
+          </a:p>
+        </p:txBody>
+      </p:sp>
+      <p:sp>
+        <p:nvSpPr>
+          <p:cNvPr id="14" name="TextBox 13"/>
+          <p:cNvSpPr txBox="1"/>
+          <p:nvPr/>
+        </p:nvSpPr>
+        <p:spPr>
+          <a:xfrm>
+            <a:off x="1097280" y="4764024"/>
+            <a:ext cx="3566160" cy="457200"/>
+          </a:xfrm>
+          <a:prstGeom prst="rect">
+            <a:avLst/>
+          </a:prstGeom>
+          <a:noFill/>
+        </p:spPr>
+        <p:txBody>
+          <a:bodyPr wrap="square" anchor="t" lIns="0" rIns="0" tIns="0" bIns="0">
+            <a:spAutoFit/>
+          </a:bodyPr>
+          <a:lstStyle/>
+          <a:p>
+            <a:pPr algn="l">
+              <a:lnSpc>
+                <a:spcPct val="100000"/>
+              </a:lnSpc>
+              <a:spcBef>
+                <a:spcPts val="0"/>
+              </a:spcBef>
+              <a:spcAft>
+                <a:spcPts val="400"/>
+              </a:spcAft>
+            </a:pPr>
+            <a:r>
+              <a:rPr sz="1800" b="0" i="0">
+                <a:solidFill>
+                  <a:srgbClr val="5C677B"/>
+                </a:solidFill>
+                <a:latin typeface="Calibri"/>
+              </a:rPr>
+              <a:t>buttons on that card</a:t>
+            </a:r>
+          </a:p>
+        </p:txBody>
+      </p:sp>
+      <p:sp>
+        <p:nvSpPr>
+          <p:cNvPr id="15" name="TextBox 14"/>
+          <p:cNvSpPr txBox="1"/>
+          <p:nvPr/>
+        </p:nvSpPr>
+        <p:spPr>
+          <a:xfrm>
+            <a:off x="640080" y="6126480"/>
+            <a:ext cx="4206240" cy="457200"/>
+          </a:xfrm>
+          <a:prstGeom prst="rect">
+            <a:avLst/>
+          </a:prstGeom>
+          <a:noFill/>
+        </p:spPr>
+        <p:txBody>
+          <a:bodyPr wrap="square" anchor="t" lIns="0" rIns="0" tIns="0" bIns="0">
+            <a:spAutoFit/>
+          </a:bodyPr>
+          <a:lstStyle/>
+          <a:p>
+            <a:pPr algn="l">
+              <a:lnSpc>
+                <a:spcPct val="100000"/>
+              </a:lnSpc>
+              <a:spcBef>
+                <a:spcPts val="0"/>
+              </a:spcBef>
+              <a:spcAft>
+                <a:spcPts val="400"/>
+              </a:spcAft>
+            </a:pPr>
+            <a:r>
               <a:rPr sz="1500" b="0" i="0">
                 <a:solidFill>
                   <a:srgbClr val="5C677B"/>
                 </a:solidFill>
                 <a:latin typeface="Calibri"/>
               </a:rPr>
-              <a:t>APIs already exist: /api/mount_bridge_* , or the INDI properties directly.</a:t>
-            </a:r>
-          </a:p>
-        </p:txBody>
-      </p:sp>
-      <p:sp>
-        <p:nvSpPr>
-          <p:cNvPr id="16" name="TextBox 15"/>
+              <a:t>APIs: /api/mount_bridge_*, or INDI.</a:t>
+            </a:r>
+          </a:p>
+        </p:txBody>
+      </p:sp>
+      <p:pic>
+        <p:nvPicPr>
+          <p:cNvPr id="16" name="Picture 15" descr="cc_map.png"/>
+          <p:cNvPicPr>
+            <a:picLocks noChangeAspect="1"/>
+          </p:cNvPicPr>
+          <p:nvPr/>
+        </p:nvPicPr>
+        <p:blipFill>
+          <a:blip r:embed="rId2"/>
+          <a:stretch>
+            <a:fillRect/>
+          </a:stretch>
+        </p:blipFill>
+        <p:spPr>
+          <a:xfrm>
+            <a:off x="4739335" y="2148840"/>
+            <a:ext cx="7452360" cy="3446574"/>
+          </a:xfrm>
+          <a:prstGeom prst="rect">
+            <a:avLst/>
+          </a:prstGeom>
+          <a:ln w="12700">
+            <a:solidFill>
+              <a:srgbClr val="D8E0EC"/>
+            </a:solidFill>
+          </a:ln>
+          <a:effectLst>
+            <a:outerShdw blurRad="90000" dist="34000" dir="5400000" rotWithShape="0">
+              <a:srgbClr val="0B1026">
+                <a:alpha val="20000"/>
+              </a:srgbClr>
+            </a:outerShdw>
+          </a:effectLst>
+        </p:spPr>
+      </p:pic>
+      <p:sp>
+        <p:nvSpPr>
+          <p:cNvPr id="17" name="TextBox 16"/>
+          <p:cNvSpPr txBox="1"/>
+          <p:nvPr/>
+        </p:nvSpPr>
+        <p:spPr>
+          <a:xfrm>
+            <a:off x="4739335" y="5705543"/>
+            <a:ext cx="7452360" cy="274320"/>
+          </a:xfrm>
+          <a:prstGeom prst="rect">
+            <a:avLst/>
+          </a:prstGeom>
+          <a:noFill/>
+        </p:spPr>
+        <p:txBody>
+          <a:bodyPr wrap="square" anchor="t" lIns="0" rIns="0" tIns="0" bIns="0">
+            <a:spAutoFit/>
+          </a:bodyPr>
+          <a:lstStyle/>
+          <a:p>
+            <a:pPr algn="l">
+              <a:lnSpc>
+                <a:spcPct val="100000"/>
+              </a:lnSpc>
+              <a:spcBef>
+                <a:spcPts val="0"/>
+              </a:spcBef>
+              <a:spcAft>
+                <a:spcPts val="400"/>
+              </a:spcAft>
+            </a:pPr>
+            <a:r>
+              <a:rPr sz="1500" b="0" i="0">
+                <a:solidFill>
+                  <a:srgbClr val="5C677B"/>
+                </a:solidFill>
+                <a:latin typeface="Calibri"/>
+              </a:rPr>
+              <a:t>Where each maps from, in the Control Center</a:t>
+            </a:r>
+          </a:p>
+        </p:txBody>
+      </p:sp>
+      <p:sp>
+        <p:nvSpPr>
+          <p:cNvPr id="18" name="TextBox 17"/>
           <p:cNvSpPr txBox="1"/>
           <p:nvPr/>
         </p:nvSpPr>
@@ -25883,6 +26062,2563 @@
                 <a:latin typeface="Calibri"/>
               </a:rPr>
               <a:t>   ·   GitHub Project #15   ·   CHANGELOG.md</a:t>
+            </a:r>
+          </a:p>
+        </p:txBody>
+      </p:sp>
+    </p:spTree>
+  </p:cSld>
+  <p:clrMapOvr>
+    <a:masterClrMapping/>
+  </p:clrMapOvr>
+</p:sld>
+</file>
+
+<file path=ppt/slides/slide31.xml><?xml version="1.0" encoding="utf-8"?>
+<p:sld xmlns:a="http://schemas.openxmlformats.org/drawingml/2006/main" xmlns:p="http://schemas.openxmlformats.org/presentationml/2006/main" xmlns:r="http://schemas.openxmlformats.org/officeDocument/2006/relationships">
+  <p:cSld>
+    <p:spTree>
+      <p:nvGrpSpPr>
+        <p:cNvPr id="1" name=""/>
+        <p:cNvGrpSpPr/>
+        <p:nvPr/>
+      </p:nvGrpSpPr>
+      <p:grpSpPr/>
+      <p:sp>
+        <p:nvSpPr>
+          <p:cNvPr id="2" name="Rectangle 1"/>
+          <p:cNvSpPr/>
+          <p:nvPr/>
+        </p:nvSpPr>
+        <p:spPr>
+          <a:xfrm>
+            <a:off x="0" y="0"/>
+            <a:ext cx="12191695" cy="6858000"/>
+          </a:xfrm>
+          <a:prstGeom prst="rect">
+            <a:avLst/>
+          </a:prstGeom>
+          <a:solidFill>
+            <a:srgbClr val="0B1026"/>
+          </a:solidFill>
+          <a:ln>
+            <a:noFill/>
+          </a:ln>
+          <a:effectLst/>
+        </p:spPr>
+        <p:style>
+          <a:lnRef idx="1">
+            <a:schemeClr val="accent1"/>
+          </a:lnRef>
+          <a:fillRef idx="3">
+            <a:schemeClr val="accent1"/>
+          </a:fillRef>
+          <a:effectRef idx="2">
+            <a:schemeClr val="accent1"/>
+          </a:effectRef>
+          <a:fontRef idx="minor">
+            <a:schemeClr val="lt1"/>
+          </a:fontRef>
+        </p:style>
+        <p:txBody>
+          <a:bodyPr rtlCol="0" anchor="ctr"/>
+          <a:lstStyle/>
+          <a:p>
+            <a:pPr algn="ctr"/>
+          </a:p>
+        </p:txBody>
+      </p:sp>
+      <p:sp>
+        <p:nvSpPr>
+          <p:cNvPr id="3" name="Oval 2"/>
+          <p:cNvSpPr/>
+          <p:nvPr/>
+        </p:nvSpPr>
+        <p:spPr>
+          <a:xfrm>
+            <a:off x="283484" y="877158"/>
+            <a:ext cx="27432" cy="27432"/>
+          </a:xfrm>
+          <a:prstGeom prst="ellipse">
+            <a:avLst/>
+          </a:prstGeom>
+          <a:solidFill>
+            <a:srgbClr val="3A4A78"/>
+          </a:solidFill>
+          <a:ln>
+            <a:noFill/>
+          </a:ln>
+          <a:effectLst/>
+        </p:spPr>
+        <p:style>
+          <a:lnRef idx="1">
+            <a:schemeClr val="accent1"/>
+          </a:lnRef>
+          <a:fillRef idx="3">
+            <a:schemeClr val="accent1"/>
+          </a:fillRef>
+          <a:effectRef idx="2">
+            <a:schemeClr val="accent1"/>
+          </a:effectRef>
+          <a:fontRef idx="minor">
+            <a:schemeClr val="lt1"/>
+          </a:fontRef>
+        </p:style>
+        <p:txBody>
+          <a:bodyPr rtlCol="0" anchor="ctr"/>
+          <a:lstStyle/>
+          <a:p>
+            <a:pPr algn="ctr"/>
+          </a:p>
+        </p:txBody>
+      </p:sp>
+      <p:sp>
+        <p:nvSpPr>
+          <p:cNvPr id="4" name="Oval 3"/>
+          <p:cNvSpPr/>
+          <p:nvPr/>
+        </p:nvSpPr>
+        <p:spPr>
+          <a:xfrm>
+            <a:off x="1815784" y="422024"/>
+            <a:ext cx="18288" cy="18288"/>
+          </a:xfrm>
+          <a:prstGeom prst="ellipse">
+            <a:avLst/>
+          </a:prstGeom>
+          <a:solidFill>
+            <a:srgbClr val="3A4A78"/>
+          </a:solidFill>
+          <a:ln>
+            <a:noFill/>
+          </a:ln>
+          <a:effectLst/>
+        </p:spPr>
+        <p:style>
+          <a:lnRef idx="1">
+            <a:schemeClr val="accent1"/>
+          </a:lnRef>
+          <a:fillRef idx="3">
+            <a:schemeClr val="accent1"/>
+          </a:fillRef>
+          <a:effectRef idx="2">
+            <a:schemeClr val="accent1"/>
+          </a:effectRef>
+          <a:fontRef idx="minor">
+            <a:schemeClr val="lt1"/>
+          </a:fontRef>
+        </p:style>
+        <p:txBody>
+          <a:bodyPr rtlCol="0" anchor="ctr"/>
+          <a:lstStyle/>
+          <a:p>
+            <a:pPr algn="ctr"/>
+          </a:p>
+        </p:txBody>
+      </p:sp>
+      <p:sp>
+        <p:nvSpPr>
+          <p:cNvPr id="5" name="Oval 4"/>
+          <p:cNvSpPr/>
+          <p:nvPr/>
+        </p:nvSpPr>
+        <p:spPr>
+          <a:xfrm>
+            <a:off x="6515483" y="4821516"/>
+            <a:ext cx="18288" cy="18288"/>
+          </a:xfrm>
+          <a:prstGeom prst="ellipse">
+            <a:avLst/>
+          </a:prstGeom>
+          <a:solidFill>
+            <a:srgbClr val="3A4A78"/>
+          </a:solidFill>
+          <a:ln>
+            <a:noFill/>
+          </a:ln>
+          <a:effectLst/>
+        </p:spPr>
+        <p:style>
+          <a:lnRef idx="1">
+            <a:schemeClr val="accent1"/>
+          </a:lnRef>
+          <a:fillRef idx="3">
+            <a:schemeClr val="accent1"/>
+          </a:fillRef>
+          <a:effectRef idx="2">
+            <a:schemeClr val="accent1"/>
+          </a:effectRef>
+          <a:fontRef idx="minor">
+            <a:schemeClr val="lt1"/>
+          </a:fontRef>
+        </p:style>
+        <p:txBody>
+          <a:bodyPr rtlCol="0" anchor="ctr"/>
+          <a:lstStyle/>
+          <a:p>
+            <a:pPr algn="ctr"/>
+          </a:p>
+        </p:txBody>
+      </p:sp>
+      <p:sp>
+        <p:nvSpPr>
+          <p:cNvPr id="6" name="Oval 5"/>
+          <p:cNvSpPr/>
+          <p:nvPr/>
+        </p:nvSpPr>
+        <p:spPr>
+          <a:xfrm>
+            <a:off x="1893795" y="5013396"/>
+            <a:ext cx="41148" cy="41148"/>
+          </a:xfrm>
+          <a:prstGeom prst="ellipse">
+            <a:avLst/>
+          </a:prstGeom>
+          <a:solidFill>
+            <a:srgbClr val="3A4A78"/>
+          </a:solidFill>
+          <a:ln>
+            <a:noFill/>
+          </a:ln>
+          <a:effectLst/>
+        </p:spPr>
+        <p:style>
+          <a:lnRef idx="1">
+            <a:schemeClr val="accent1"/>
+          </a:lnRef>
+          <a:fillRef idx="3">
+            <a:schemeClr val="accent1"/>
+          </a:fillRef>
+          <a:effectRef idx="2">
+            <a:schemeClr val="accent1"/>
+          </a:effectRef>
+          <a:fontRef idx="minor">
+            <a:schemeClr val="lt1"/>
+          </a:fontRef>
+        </p:style>
+        <p:txBody>
+          <a:bodyPr rtlCol="0" anchor="ctr"/>
+          <a:lstStyle/>
+          <a:p>
+            <a:pPr algn="ctr"/>
+          </a:p>
+        </p:txBody>
+      </p:sp>
+      <p:sp>
+        <p:nvSpPr>
+          <p:cNvPr id="7" name="Oval 6"/>
+          <p:cNvSpPr/>
+          <p:nvPr/>
+        </p:nvSpPr>
+        <p:spPr>
+          <a:xfrm>
+            <a:off x="859559" y="1659104"/>
+            <a:ext cx="41148" cy="41148"/>
+          </a:xfrm>
+          <a:prstGeom prst="ellipse">
+            <a:avLst/>
+          </a:prstGeom>
+          <a:solidFill>
+            <a:srgbClr val="3A4A78"/>
+          </a:solidFill>
+          <a:ln>
+            <a:noFill/>
+          </a:ln>
+          <a:effectLst/>
+        </p:spPr>
+        <p:style>
+          <a:lnRef idx="1">
+            <a:schemeClr val="accent1"/>
+          </a:lnRef>
+          <a:fillRef idx="3">
+            <a:schemeClr val="accent1"/>
+          </a:fillRef>
+          <a:effectRef idx="2">
+            <a:schemeClr val="accent1"/>
+          </a:effectRef>
+          <a:fontRef idx="minor">
+            <a:schemeClr val="lt1"/>
+          </a:fontRef>
+        </p:style>
+        <p:txBody>
+          <a:bodyPr rtlCol="0" anchor="ctr"/>
+          <a:lstStyle/>
+          <a:p>
+            <a:pPr algn="ctr"/>
+          </a:p>
+        </p:txBody>
+      </p:sp>
+      <p:sp>
+        <p:nvSpPr>
+          <p:cNvPr id="8" name="Oval 7"/>
+          <p:cNvSpPr/>
+          <p:nvPr/>
+        </p:nvSpPr>
+        <p:spPr>
+          <a:xfrm>
+            <a:off x="5473175" y="2853389"/>
+            <a:ext cx="41148" cy="41148"/>
+          </a:xfrm>
+          <a:prstGeom prst="ellipse">
+            <a:avLst/>
+          </a:prstGeom>
+          <a:solidFill>
+            <a:srgbClr val="3A4A78"/>
+          </a:solidFill>
+          <a:ln>
+            <a:noFill/>
+          </a:ln>
+          <a:effectLst/>
+        </p:spPr>
+        <p:style>
+          <a:lnRef idx="1">
+            <a:schemeClr val="accent1"/>
+          </a:lnRef>
+          <a:fillRef idx="3">
+            <a:schemeClr val="accent1"/>
+          </a:fillRef>
+          <a:effectRef idx="2">
+            <a:schemeClr val="accent1"/>
+          </a:effectRef>
+          <a:fontRef idx="minor">
+            <a:schemeClr val="lt1"/>
+          </a:fontRef>
+        </p:style>
+        <p:txBody>
+          <a:bodyPr rtlCol="0" anchor="ctr"/>
+          <a:lstStyle/>
+          <a:p>
+            <a:pPr algn="ctr"/>
+          </a:p>
+        </p:txBody>
+      </p:sp>
+      <p:sp>
+        <p:nvSpPr>
+          <p:cNvPr id="9" name="Oval 8"/>
+          <p:cNvSpPr/>
+          <p:nvPr/>
+        </p:nvSpPr>
+        <p:spPr>
+          <a:xfrm>
+            <a:off x="1246803" y="271246"/>
+            <a:ext cx="27432" cy="27432"/>
+          </a:xfrm>
+          <a:prstGeom prst="ellipse">
+            <a:avLst/>
+          </a:prstGeom>
+          <a:solidFill>
+            <a:srgbClr val="3A4A78"/>
+          </a:solidFill>
+          <a:ln>
+            <a:noFill/>
+          </a:ln>
+          <a:effectLst/>
+        </p:spPr>
+        <p:style>
+          <a:lnRef idx="1">
+            <a:schemeClr val="accent1"/>
+          </a:lnRef>
+          <a:fillRef idx="3">
+            <a:schemeClr val="accent1"/>
+          </a:fillRef>
+          <a:effectRef idx="2">
+            <a:schemeClr val="accent1"/>
+          </a:effectRef>
+          <a:fontRef idx="minor">
+            <a:schemeClr val="lt1"/>
+          </a:fontRef>
+        </p:style>
+        <p:txBody>
+          <a:bodyPr rtlCol="0" anchor="ctr"/>
+          <a:lstStyle/>
+          <a:p>
+            <a:pPr algn="ctr"/>
+          </a:p>
+        </p:txBody>
+      </p:sp>
+      <p:sp>
+        <p:nvSpPr>
+          <p:cNvPr id="10" name="Oval 9"/>
+          <p:cNvSpPr/>
+          <p:nvPr/>
+        </p:nvSpPr>
+        <p:spPr>
+          <a:xfrm>
+            <a:off x="4207339" y="1492921"/>
+            <a:ext cx="27432" cy="27432"/>
+          </a:xfrm>
+          <a:prstGeom prst="ellipse">
+            <a:avLst/>
+          </a:prstGeom>
+          <a:solidFill>
+            <a:srgbClr val="3A4A78"/>
+          </a:solidFill>
+          <a:ln>
+            <a:noFill/>
+          </a:ln>
+          <a:effectLst/>
+        </p:spPr>
+        <p:style>
+          <a:lnRef idx="1">
+            <a:schemeClr val="accent1"/>
+          </a:lnRef>
+          <a:fillRef idx="3">
+            <a:schemeClr val="accent1"/>
+          </a:fillRef>
+          <a:effectRef idx="2">
+            <a:schemeClr val="accent1"/>
+          </a:effectRef>
+          <a:fontRef idx="minor">
+            <a:schemeClr val="lt1"/>
+          </a:fontRef>
+        </p:style>
+        <p:txBody>
+          <a:bodyPr rtlCol="0" anchor="ctr"/>
+          <a:lstStyle/>
+          <a:p>
+            <a:pPr algn="ctr"/>
+          </a:p>
+        </p:txBody>
+      </p:sp>
+      <p:sp>
+        <p:nvSpPr>
+          <p:cNvPr id="11" name="Oval 10"/>
+          <p:cNvSpPr/>
+          <p:nvPr/>
+        </p:nvSpPr>
+        <p:spPr>
+          <a:xfrm>
+            <a:off x="4485747" y="6425317"/>
+            <a:ext cx="18288" cy="18288"/>
+          </a:xfrm>
+          <a:prstGeom prst="ellipse">
+            <a:avLst/>
+          </a:prstGeom>
+          <a:solidFill>
+            <a:srgbClr val="3A4A78"/>
+          </a:solidFill>
+          <a:ln>
+            <a:noFill/>
+          </a:ln>
+          <a:effectLst/>
+        </p:spPr>
+        <p:style>
+          <a:lnRef idx="1">
+            <a:schemeClr val="accent1"/>
+          </a:lnRef>
+          <a:fillRef idx="3">
+            <a:schemeClr val="accent1"/>
+          </a:fillRef>
+          <a:effectRef idx="2">
+            <a:schemeClr val="accent1"/>
+          </a:effectRef>
+          <a:fontRef idx="minor">
+            <a:schemeClr val="lt1"/>
+          </a:fontRef>
+        </p:style>
+        <p:txBody>
+          <a:bodyPr rtlCol="0" anchor="ctr"/>
+          <a:lstStyle/>
+          <a:p>
+            <a:pPr algn="ctr"/>
+          </a:p>
+        </p:txBody>
+      </p:sp>
+      <p:sp>
+        <p:nvSpPr>
+          <p:cNvPr id="12" name="Oval 11"/>
+          <p:cNvSpPr/>
+          <p:nvPr/>
+        </p:nvSpPr>
+        <p:spPr>
+          <a:xfrm>
+            <a:off x="8765034" y="2878194"/>
+            <a:ext cx="41148" cy="41148"/>
+          </a:xfrm>
+          <a:prstGeom prst="ellipse">
+            <a:avLst/>
+          </a:prstGeom>
+          <a:solidFill>
+            <a:srgbClr val="3A4A78"/>
+          </a:solidFill>
+          <a:ln>
+            <a:noFill/>
+          </a:ln>
+          <a:effectLst/>
+        </p:spPr>
+        <p:style>
+          <a:lnRef idx="1">
+            <a:schemeClr val="accent1"/>
+          </a:lnRef>
+          <a:fillRef idx="3">
+            <a:schemeClr val="accent1"/>
+          </a:fillRef>
+          <a:effectRef idx="2">
+            <a:schemeClr val="accent1"/>
+          </a:effectRef>
+          <a:fontRef idx="minor">
+            <a:schemeClr val="lt1"/>
+          </a:fontRef>
+        </p:style>
+        <p:txBody>
+          <a:bodyPr rtlCol="0" anchor="ctr"/>
+          <a:lstStyle/>
+          <a:p>
+            <a:pPr algn="ctr"/>
+          </a:p>
+        </p:txBody>
+      </p:sp>
+      <p:sp>
+        <p:nvSpPr>
+          <p:cNvPr id="13" name="Oval 12"/>
+          <p:cNvSpPr/>
+          <p:nvPr/>
+        </p:nvSpPr>
+        <p:spPr>
+          <a:xfrm>
+            <a:off x="6660510" y="6416299"/>
+            <a:ext cx="18288" cy="18288"/>
+          </a:xfrm>
+          <a:prstGeom prst="ellipse">
+            <a:avLst/>
+          </a:prstGeom>
+          <a:solidFill>
+            <a:srgbClr val="3A4A78"/>
+          </a:solidFill>
+          <a:ln>
+            <a:noFill/>
+          </a:ln>
+          <a:effectLst/>
+        </p:spPr>
+        <p:style>
+          <a:lnRef idx="1">
+            <a:schemeClr val="accent1"/>
+          </a:lnRef>
+          <a:fillRef idx="3">
+            <a:schemeClr val="accent1"/>
+          </a:fillRef>
+          <a:effectRef idx="2">
+            <a:schemeClr val="accent1"/>
+          </a:effectRef>
+          <a:fontRef idx="minor">
+            <a:schemeClr val="lt1"/>
+          </a:fontRef>
+        </p:style>
+        <p:txBody>
+          <a:bodyPr rtlCol="0" anchor="ctr"/>
+          <a:lstStyle/>
+          <a:p>
+            <a:pPr algn="ctr"/>
+          </a:p>
+        </p:txBody>
+      </p:sp>
+      <p:sp>
+        <p:nvSpPr>
+          <p:cNvPr id="14" name="Oval 13"/>
+          <p:cNvSpPr/>
+          <p:nvPr/>
+        </p:nvSpPr>
+        <p:spPr>
+          <a:xfrm>
+            <a:off x="4373835" y="1479294"/>
+            <a:ext cx="27432" cy="27432"/>
+          </a:xfrm>
+          <a:prstGeom prst="ellipse">
+            <a:avLst/>
+          </a:prstGeom>
+          <a:solidFill>
+            <a:srgbClr val="3A4A78"/>
+          </a:solidFill>
+          <a:ln>
+            <a:noFill/>
+          </a:ln>
+          <a:effectLst/>
+        </p:spPr>
+        <p:style>
+          <a:lnRef idx="1">
+            <a:schemeClr val="accent1"/>
+          </a:lnRef>
+          <a:fillRef idx="3">
+            <a:schemeClr val="accent1"/>
+          </a:fillRef>
+          <a:effectRef idx="2">
+            <a:schemeClr val="accent1"/>
+          </a:effectRef>
+          <a:fontRef idx="minor">
+            <a:schemeClr val="lt1"/>
+          </a:fontRef>
+        </p:style>
+        <p:txBody>
+          <a:bodyPr rtlCol="0" anchor="ctr"/>
+          <a:lstStyle/>
+          <a:p>
+            <a:pPr algn="ctr"/>
+          </a:p>
+        </p:txBody>
+      </p:sp>
+      <p:sp>
+        <p:nvSpPr>
+          <p:cNvPr id="15" name="Oval 14"/>
+          <p:cNvSpPr/>
+          <p:nvPr/>
+        </p:nvSpPr>
+        <p:spPr>
+          <a:xfrm>
+            <a:off x="499087" y="4976466"/>
+            <a:ext cx="27432" cy="27432"/>
+          </a:xfrm>
+          <a:prstGeom prst="ellipse">
+            <a:avLst/>
+          </a:prstGeom>
+          <a:solidFill>
+            <a:srgbClr val="3A4A78"/>
+          </a:solidFill>
+          <a:ln>
+            <a:noFill/>
+          </a:ln>
+          <a:effectLst/>
+        </p:spPr>
+        <p:style>
+          <a:lnRef idx="1">
+            <a:schemeClr val="accent1"/>
+          </a:lnRef>
+          <a:fillRef idx="3">
+            <a:schemeClr val="accent1"/>
+          </a:fillRef>
+          <a:effectRef idx="2">
+            <a:schemeClr val="accent1"/>
+          </a:effectRef>
+          <a:fontRef idx="minor">
+            <a:schemeClr val="lt1"/>
+          </a:fontRef>
+        </p:style>
+        <p:txBody>
+          <a:bodyPr rtlCol="0" anchor="ctr"/>
+          <a:lstStyle/>
+          <a:p>
+            <a:pPr algn="ctr"/>
+          </a:p>
+        </p:txBody>
+      </p:sp>
+      <p:sp>
+        <p:nvSpPr>
+          <p:cNvPr id="16" name="Oval 15"/>
+          <p:cNvSpPr/>
+          <p:nvPr/>
+        </p:nvSpPr>
+        <p:spPr>
+          <a:xfrm>
+            <a:off x="7897167" y="1574766"/>
+            <a:ext cx="27432" cy="27432"/>
+          </a:xfrm>
+          <a:prstGeom prst="ellipse">
+            <a:avLst/>
+          </a:prstGeom>
+          <a:solidFill>
+            <a:srgbClr val="3A4A78"/>
+          </a:solidFill>
+          <a:ln>
+            <a:noFill/>
+          </a:ln>
+          <a:effectLst/>
+        </p:spPr>
+        <p:style>
+          <a:lnRef idx="1">
+            <a:schemeClr val="accent1"/>
+          </a:lnRef>
+          <a:fillRef idx="3">
+            <a:schemeClr val="accent1"/>
+          </a:fillRef>
+          <a:effectRef idx="2">
+            <a:schemeClr val="accent1"/>
+          </a:effectRef>
+          <a:fontRef idx="minor">
+            <a:schemeClr val="lt1"/>
+          </a:fontRef>
+        </p:style>
+        <p:txBody>
+          <a:bodyPr rtlCol="0" anchor="ctr"/>
+          <a:lstStyle/>
+          <a:p>
+            <a:pPr algn="ctr"/>
+          </a:p>
+        </p:txBody>
+      </p:sp>
+      <p:sp>
+        <p:nvSpPr>
+          <p:cNvPr id="17" name="Oval 16"/>
+          <p:cNvSpPr/>
+          <p:nvPr/>
+        </p:nvSpPr>
+        <p:spPr>
+          <a:xfrm>
+            <a:off x="8834678" y="1413155"/>
+            <a:ext cx="41148" cy="41148"/>
+          </a:xfrm>
+          <a:prstGeom prst="ellipse">
+            <a:avLst/>
+          </a:prstGeom>
+          <a:solidFill>
+            <a:srgbClr val="3A4A78"/>
+          </a:solidFill>
+          <a:ln>
+            <a:noFill/>
+          </a:ln>
+          <a:effectLst/>
+        </p:spPr>
+        <p:style>
+          <a:lnRef idx="1">
+            <a:schemeClr val="accent1"/>
+          </a:lnRef>
+          <a:fillRef idx="3">
+            <a:schemeClr val="accent1"/>
+          </a:fillRef>
+          <a:effectRef idx="2">
+            <a:schemeClr val="accent1"/>
+          </a:effectRef>
+          <a:fontRef idx="minor">
+            <a:schemeClr val="lt1"/>
+          </a:fontRef>
+        </p:style>
+        <p:txBody>
+          <a:bodyPr rtlCol="0" anchor="ctr"/>
+          <a:lstStyle/>
+          <a:p>
+            <a:pPr algn="ctr"/>
+          </a:p>
+        </p:txBody>
+      </p:sp>
+      <p:sp>
+        <p:nvSpPr>
+          <p:cNvPr id="18" name="Oval 17"/>
+          <p:cNvSpPr/>
+          <p:nvPr/>
+        </p:nvSpPr>
+        <p:spPr>
+          <a:xfrm>
+            <a:off x="9895373" y="3311113"/>
+            <a:ext cx="27432" cy="27432"/>
+          </a:xfrm>
+          <a:prstGeom prst="ellipse">
+            <a:avLst/>
+          </a:prstGeom>
+          <a:solidFill>
+            <a:srgbClr val="3A4A78"/>
+          </a:solidFill>
+          <a:ln>
+            <a:noFill/>
+          </a:ln>
+          <a:effectLst/>
+        </p:spPr>
+        <p:style>
+          <a:lnRef idx="1">
+            <a:schemeClr val="accent1"/>
+          </a:lnRef>
+          <a:fillRef idx="3">
+            <a:schemeClr val="accent1"/>
+          </a:fillRef>
+          <a:effectRef idx="2">
+            <a:schemeClr val="accent1"/>
+          </a:effectRef>
+          <a:fontRef idx="minor">
+            <a:schemeClr val="lt1"/>
+          </a:fontRef>
+        </p:style>
+        <p:txBody>
+          <a:bodyPr rtlCol="0" anchor="ctr"/>
+          <a:lstStyle/>
+          <a:p>
+            <a:pPr algn="ctr"/>
+          </a:p>
+        </p:txBody>
+      </p:sp>
+      <p:sp>
+        <p:nvSpPr>
+          <p:cNvPr id="19" name="Oval 18"/>
+          <p:cNvSpPr/>
+          <p:nvPr/>
+        </p:nvSpPr>
+        <p:spPr>
+          <a:xfrm>
+            <a:off x="4141517" y="2338365"/>
+            <a:ext cx="27432" cy="27432"/>
+          </a:xfrm>
+          <a:prstGeom prst="ellipse">
+            <a:avLst/>
+          </a:prstGeom>
+          <a:solidFill>
+            <a:srgbClr val="3A4A78"/>
+          </a:solidFill>
+          <a:ln>
+            <a:noFill/>
+          </a:ln>
+          <a:effectLst/>
+        </p:spPr>
+        <p:style>
+          <a:lnRef idx="1">
+            <a:schemeClr val="accent1"/>
+          </a:lnRef>
+          <a:fillRef idx="3">
+            <a:schemeClr val="accent1"/>
+          </a:fillRef>
+          <a:effectRef idx="2">
+            <a:schemeClr val="accent1"/>
+          </a:effectRef>
+          <a:fontRef idx="minor">
+            <a:schemeClr val="lt1"/>
+          </a:fontRef>
+        </p:style>
+        <p:txBody>
+          <a:bodyPr rtlCol="0" anchor="ctr"/>
+          <a:lstStyle/>
+          <a:p>
+            <a:pPr algn="ctr"/>
+          </a:p>
+        </p:txBody>
+      </p:sp>
+      <p:sp>
+        <p:nvSpPr>
+          <p:cNvPr id="20" name="Oval 19"/>
+          <p:cNvSpPr/>
+          <p:nvPr/>
+        </p:nvSpPr>
+        <p:spPr>
+          <a:xfrm>
+            <a:off x="5879237" y="4421541"/>
+            <a:ext cx="27432" cy="27432"/>
+          </a:xfrm>
+          <a:prstGeom prst="ellipse">
+            <a:avLst/>
+          </a:prstGeom>
+          <a:solidFill>
+            <a:srgbClr val="3A4A78"/>
+          </a:solidFill>
+          <a:ln>
+            <a:noFill/>
+          </a:ln>
+          <a:effectLst/>
+        </p:spPr>
+        <p:style>
+          <a:lnRef idx="1">
+            <a:schemeClr val="accent1"/>
+          </a:lnRef>
+          <a:fillRef idx="3">
+            <a:schemeClr val="accent1"/>
+          </a:fillRef>
+          <a:effectRef idx="2">
+            <a:schemeClr val="accent1"/>
+          </a:effectRef>
+          <a:fontRef idx="minor">
+            <a:schemeClr val="lt1"/>
+          </a:fontRef>
+        </p:style>
+        <p:txBody>
+          <a:bodyPr rtlCol="0" anchor="ctr"/>
+          <a:lstStyle/>
+          <a:p>
+            <a:pPr algn="ctr"/>
+          </a:p>
+        </p:txBody>
+      </p:sp>
+      <p:sp>
+        <p:nvSpPr>
+          <p:cNvPr id="21" name="Oval 20"/>
+          <p:cNvSpPr/>
+          <p:nvPr/>
+        </p:nvSpPr>
+        <p:spPr>
+          <a:xfrm>
+            <a:off x="11593612" y="6565667"/>
+            <a:ext cx="18288" cy="18288"/>
+          </a:xfrm>
+          <a:prstGeom prst="ellipse">
+            <a:avLst/>
+          </a:prstGeom>
+          <a:solidFill>
+            <a:srgbClr val="3A4A78"/>
+          </a:solidFill>
+          <a:ln>
+            <a:noFill/>
+          </a:ln>
+          <a:effectLst/>
+        </p:spPr>
+        <p:style>
+          <a:lnRef idx="1">
+            <a:schemeClr val="accent1"/>
+          </a:lnRef>
+          <a:fillRef idx="3">
+            <a:schemeClr val="accent1"/>
+          </a:fillRef>
+          <a:effectRef idx="2">
+            <a:schemeClr val="accent1"/>
+          </a:effectRef>
+          <a:fontRef idx="minor">
+            <a:schemeClr val="lt1"/>
+          </a:fontRef>
+        </p:style>
+        <p:txBody>
+          <a:bodyPr rtlCol="0" anchor="ctr"/>
+          <a:lstStyle/>
+          <a:p>
+            <a:pPr algn="ctr"/>
+          </a:p>
+        </p:txBody>
+      </p:sp>
+      <p:sp>
+        <p:nvSpPr>
+          <p:cNvPr id="22" name="Oval 21"/>
+          <p:cNvSpPr/>
+          <p:nvPr/>
+        </p:nvSpPr>
+        <p:spPr>
+          <a:xfrm>
+            <a:off x="9550069" y="2153827"/>
+            <a:ext cx="18288" cy="18288"/>
+          </a:xfrm>
+          <a:prstGeom prst="ellipse">
+            <a:avLst/>
+          </a:prstGeom>
+          <a:solidFill>
+            <a:srgbClr val="3A4A78"/>
+          </a:solidFill>
+          <a:ln>
+            <a:noFill/>
+          </a:ln>
+          <a:effectLst/>
+        </p:spPr>
+        <p:style>
+          <a:lnRef idx="1">
+            <a:schemeClr val="accent1"/>
+          </a:lnRef>
+          <a:fillRef idx="3">
+            <a:schemeClr val="accent1"/>
+          </a:fillRef>
+          <a:effectRef idx="2">
+            <a:schemeClr val="accent1"/>
+          </a:effectRef>
+          <a:fontRef idx="minor">
+            <a:schemeClr val="lt1"/>
+          </a:fontRef>
+        </p:style>
+        <p:txBody>
+          <a:bodyPr rtlCol="0" anchor="ctr"/>
+          <a:lstStyle/>
+          <a:p>
+            <a:pPr algn="ctr"/>
+          </a:p>
+        </p:txBody>
+      </p:sp>
+      <p:sp>
+        <p:nvSpPr>
+          <p:cNvPr id="23" name="Oval 22"/>
+          <p:cNvSpPr/>
+          <p:nvPr/>
+        </p:nvSpPr>
+        <p:spPr>
+          <a:xfrm>
+            <a:off x="6809532" y="6299236"/>
+            <a:ext cx="41148" cy="41148"/>
+          </a:xfrm>
+          <a:prstGeom prst="ellipse">
+            <a:avLst/>
+          </a:prstGeom>
+          <a:solidFill>
+            <a:srgbClr val="3A4A78"/>
+          </a:solidFill>
+          <a:ln>
+            <a:noFill/>
+          </a:ln>
+          <a:effectLst/>
+        </p:spPr>
+        <p:style>
+          <a:lnRef idx="1">
+            <a:schemeClr val="accent1"/>
+          </a:lnRef>
+          <a:fillRef idx="3">
+            <a:schemeClr val="accent1"/>
+          </a:fillRef>
+          <a:effectRef idx="2">
+            <a:schemeClr val="accent1"/>
+          </a:effectRef>
+          <a:fontRef idx="minor">
+            <a:schemeClr val="lt1"/>
+          </a:fontRef>
+        </p:style>
+        <p:txBody>
+          <a:bodyPr rtlCol="0" anchor="ctr"/>
+          <a:lstStyle/>
+          <a:p>
+            <a:pPr algn="ctr"/>
+          </a:p>
+        </p:txBody>
+      </p:sp>
+      <p:sp>
+        <p:nvSpPr>
+          <p:cNvPr id="24" name="Oval 23"/>
+          <p:cNvSpPr/>
+          <p:nvPr/>
+        </p:nvSpPr>
+        <p:spPr>
+          <a:xfrm>
+            <a:off x="3653743" y="1279948"/>
+            <a:ext cx="18288" cy="18288"/>
+          </a:xfrm>
+          <a:prstGeom prst="ellipse">
+            <a:avLst/>
+          </a:prstGeom>
+          <a:solidFill>
+            <a:srgbClr val="3A4A78"/>
+          </a:solidFill>
+          <a:ln>
+            <a:noFill/>
+          </a:ln>
+          <a:effectLst/>
+        </p:spPr>
+        <p:style>
+          <a:lnRef idx="1">
+            <a:schemeClr val="accent1"/>
+          </a:lnRef>
+          <a:fillRef idx="3">
+            <a:schemeClr val="accent1"/>
+          </a:fillRef>
+          <a:effectRef idx="2">
+            <a:schemeClr val="accent1"/>
+          </a:effectRef>
+          <a:fontRef idx="minor">
+            <a:schemeClr val="lt1"/>
+          </a:fontRef>
+        </p:style>
+        <p:txBody>
+          <a:bodyPr rtlCol="0" anchor="ctr"/>
+          <a:lstStyle/>
+          <a:p>
+            <a:pPr algn="ctr"/>
+          </a:p>
+        </p:txBody>
+      </p:sp>
+      <p:sp>
+        <p:nvSpPr>
+          <p:cNvPr id="25" name="Oval 24"/>
+          <p:cNvSpPr/>
+          <p:nvPr/>
+        </p:nvSpPr>
+        <p:spPr>
+          <a:xfrm>
+            <a:off x="11113266" y="4096516"/>
+            <a:ext cx="41148" cy="41148"/>
+          </a:xfrm>
+          <a:prstGeom prst="ellipse">
+            <a:avLst/>
+          </a:prstGeom>
+          <a:solidFill>
+            <a:srgbClr val="3A4A78"/>
+          </a:solidFill>
+          <a:ln>
+            <a:noFill/>
+          </a:ln>
+          <a:effectLst/>
+        </p:spPr>
+        <p:style>
+          <a:lnRef idx="1">
+            <a:schemeClr val="accent1"/>
+          </a:lnRef>
+          <a:fillRef idx="3">
+            <a:schemeClr val="accent1"/>
+          </a:fillRef>
+          <a:effectRef idx="2">
+            <a:schemeClr val="accent1"/>
+          </a:effectRef>
+          <a:fontRef idx="minor">
+            <a:schemeClr val="lt1"/>
+          </a:fontRef>
+        </p:style>
+        <p:txBody>
+          <a:bodyPr rtlCol="0" anchor="ctr"/>
+          <a:lstStyle/>
+          <a:p>
+            <a:pPr algn="ctr"/>
+          </a:p>
+        </p:txBody>
+      </p:sp>
+      <p:sp>
+        <p:nvSpPr>
+          <p:cNvPr id="26" name="Oval 25"/>
+          <p:cNvSpPr/>
+          <p:nvPr/>
+        </p:nvSpPr>
+        <p:spPr>
+          <a:xfrm>
+            <a:off x="11542366" y="4545417"/>
+            <a:ext cx="27432" cy="27432"/>
+          </a:xfrm>
+          <a:prstGeom prst="ellipse">
+            <a:avLst/>
+          </a:prstGeom>
+          <a:solidFill>
+            <a:srgbClr val="3A4A78"/>
+          </a:solidFill>
+          <a:ln>
+            <a:noFill/>
+          </a:ln>
+          <a:effectLst/>
+        </p:spPr>
+        <p:style>
+          <a:lnRef idx="1">
+            <a:schemeClr val="accent1"/>
+          </a:lnRef>
+          <a:fillRef idx="3">
+            <a:schemeClr val="accent1"/>
+          </a:fillRef>
+          <a:effectRef idx="2">
+            <a:schemeClr val="accent1"/>
+          </a:effectRef>
+          <a:fontRef idx="minor">
+            <a:schemeClr val="lt1"/>
+          </a:fontRef>
+        </p:style>
+        <p:txBody>
+          <a:bodyPr rtlCol="0" anchor="ctr"/>
+          <a:lstStyle/>
+          <a:p>
+            <a:pPr algn="ctr"/>
+          </a:p>
+        </p:txBody>
+      </p:sp>
+      <p:sp>
+        <p:nvSpPr>
+          <p:cNvPr id="27" name="Oval 26"/>
+          <p:cNvSpPr/>
+          <p:nvPr/>
+        </p:nvSpPr>
+        <p:spPr>
+          <a:xfrm>
+            <a:off x="10983082" y="4412140"/>
+            <a:ext cx="18288" cy="18288"/>
+          </a:xfrm>
+          <a:prstGeom prst="ellipse">
+            <a:avLst/>
+          </a:prstGeom>
+          <a:solidFill>
+            <a:srgbClr val="3A4A78"/>
+          </a:solidFill>
+          <a:ln>
+            <a:noFill/>
+          </a:ln>
+          <a:effectLst/>
+        </p:spPr>
+        <p:style>
+          <a:lnRef idx="1">
+            <a:schemeClr val="accent1"/>
+          </a:lnRef>
+          <a:fillRef idx="3">
+            <a:schemeClr val="accent1"/>
+          </a:fillRef>
+          <a:effectRef idx="2">
+            <a:schemeClr val="accent1"/>
+          </a:effectRef>
+          <a:fontRef idx="minor">
+            <a:schemeClr val="lt1"/>
+          </a:fontRef>
+        </p:style>
+        <p:txBody>
+          <a:bodyPr rtlCol="0" anchor="ctr"/>
+          <a:lstStyle/>
+          <a:p>
+            <a:pPr algn="ctr"/>
+          </a:p>
+        </p:txBody>
+      </p:sp>
+      <p:sp>
+        <p:nvSpPr>
+          <p:cNvPr id="28" name="Oval 27"/>
+          <p:cNvSpPr/>
+          <p:nvPr/>
+        </p:nvSpPr>
+        <p:spPr>
+          <a:xfrm>
+            <a:off x="1495680" y="1471019"/>
+            <a:ext cx="27432" cy="27432"/>
+          </a:xfrm>
+          <a:prstGeom prst="ellipse">
+            <a:avLst/>
+          </a:prstGeom>
+          <a:solidFill>
+            <a:srgbClr val="3A4A78"/>
+          </a:solidFill>
+          <a:ln>
+            <a:noFill/>
+          </a:ln>
+          <a:effectLst/>
+        </p:spPr>
+        <p:style>
+          <a:lnRef idx="1">
+            <a:schemeClr val="accent1"/>
+          </a:lnRef>
+          <a:fillRef idx="3">
+            <a:schemeClr val="accent1"/>
+          </a:fillRef>
+          <a:effectRef idx="2">
+            <a:schemeClr val="accent1"/>
+          </a:effectRef>
+          <a:fontRef idx="minor">
+            <a:schemeClr val="lt1"/>
+          </a:fontRef>
+        </p:style>
+        <p:txBody>
+          <a:bodyPr rtlCol="0" anchor="ctr"/>
+          <a:lstStyle/>
+          <a:p>
+            <a:pPr algn="ctr"/>
+          </a:p>
+        </p:txBody>
+      </p:sp>
+      <p:sp>
+        <p:nvSpPr>
+          <p:cNvPr id="29" name="Oval 28"/>
+          <p:cNvSpPr/>
+          <p:nvPr/>
+        </p:nvSpPr>
+        <p:spPr>
+          <a:xfrm>
+            <a:off x="5436538" y="5331120"/>
+            <a:ext cx="41148" cy="41148"/>
+          </a:xfrm>
+          <a:prstGeom prst="ellipse">
+            <a:avLst/>
+          </a:prstGeom>
+          <a:solidFill>
+            <a:srgbClr val="3A4A78"/>
+          </a:solidFill>
+          <a:ln>
+            <a:noFill/>
+          </a:ln>
+          <a:effectLst/>
+        </p:spPr>
+        <p:style>
+          <a:lnRef idx="1">
+            <a:schemeClr val="accent1"/>
+          </a:lnRef>
+          <a:fillRef idx="3">
+            <a:schemeClr val="accent1"/>
+          </a:fillRef>
+          <a:effectRef idx="2">
+            <a:schemeClr val="accent1"/>
+          </a:effectRef>
+          <a:fontRef idx="minor">
+            <a:schemeClr val="lt1"/>
+          </a:fontRef>
+        </p:style>
+        <p:txBody>
+          <a:bodyPr rtlCol="0" anchor="ctr"/>
+          <a:lstStyle/>
+          <a:p>
+            <a:pPr algn="ctr"/>
+          </a:p>
+        </p:txBody>
+      </p:sp>
+      <p:sp>
+        <p:nvSpPr>
+          <p:cNvPr id="30" name="Oval 29"/>
+          <p:cNvSpPr/>
+          <p:nvPr/>
+        </p:nvSpPr>
+        <p:spPr>
+          <a:xfrm>
+            <a:off x="8646151" y="1899560"/>
+            <a:ext cx="41148" cy="41148"/>
+          </a:xfrm>
+          <a:prstGeom prst="ellipse">
+            <a:avLst/>
+          </a:prstGeom>
+          <a:solidFill>
+            <a:srgbClr val="3A4A78"/>
+          </a:solidFill>
+          <a:ln>
+            <a:noFill/>
+          </a:ln>
+          <a:effectLst/>
+        </p:spPr>
+        <p:style>
+          <a:lnRef idx="1">
+            <a:schemeClr val="accent1"/>
+          </a:lnRef>
+          <a:fillRef idx="3">
+            <a:schemeClr val="accent1"/>
+          </a:fillRef>
+          <a:effectRef idx="2">
+            <a:schemeClr val="accent1"/>
+          </a:effectRef>
+          <a:fontRef idx="minor">
+            <a:schemeClr val="lt1"/>
+          </a:fontRef>
+        </p:style>
+        <p:txBody>
+          <a:bodyPr rtlCol="0" anchor="ctr"/>
+          <a:lstStyle/>
+          <a:p>
+            <a:pPr algn="ctr"/>
+          </a:p>
+        </p:txBody>
+      </p:sp>
+      <p:sp>
+        <p:nvSpPr>
+          <p:cNvPr id="31" name="Oval 30"/>
+          <p:cNvSpPr/>
+          <p:nvPr/>
+        </p:nvSpPr>
+        <p:spPr>
+          <a:xfrm>
+            <a:off x="1559132" y="1415099"/>
+            <a:ext cx="27432" cy="27432"/>
+          </a:xfrm>
+          <a:prstGeom prst="ellipse">
+            <a:avLst/>
+          </a:prstGeom>
+          <a:solidFill>
+            <a:srgbClr val="3A4A78"/>
+          </a:solidFill>
+          <a:ln>
+            <a:noFill/>
+          </a:ln>
+          <a:effectLst/>
+        </p:spPr>
+        <p:style>
+          <a:lnRef idx="1">
+            <a:schemeClr val="accent1"/>
+          </a:lnRef>
+          <a:fillRef idx="3">
+            <a:schemeClr val="accent1"/>
+          </a:fillRef>
+          <a:effectRef idx="2">
+            <a:schemeClr val="accent1"/>
+          </a:effectRef>
+          <a:fontRef idx="minor">
+            <a:schemeClr val="lt1"/>
+          </a:fontRef>
+        </p:style>
+        <p:txBody>
+          <a:bodyPr rtlCol="0" anchor="ctr"/>
+          <a:lstStyle/>
+          <a:p>
+            <a:pPr algn="ctr"/>
+          </a:p>
+        </p:txBody>
+      </p:sp>
+      <p:sp>
+        <p:nvSpPr>
+          <p:cNvPr id="32" name="Oval 31"/>
+          <p:cNvSpPr/>
+          <p:nvPr/>
+        </p:nvSpPr>
+        <p:spPr>
+          <a:xfrm>
+            <a:off x="2071938" y="6655949"/>
+            <a:ext cx="18288" cy="18288"/>
+          </a:xfrm>
+          <a:prstGeom prst="ellipse">
+            <a:avLst/>
+          </a:prstGeom>
+          <a:solidFill>
+            <a:srgbClr val="3A4A78"/>
+          </a:solidFill>
+          <a:ln>
+            <a:noFill/>
+          </a:ln>
+          <a:effectLst/>
+        </p:spPr>
+        <p:style>
+          <a:lnRef idx="1">
+            <a:schemeClr val="accent1"/>
+          </a:lnRef>
+          <a:fillRef idx="3">
+            <a:schemeClr val="accent1"/>
+          </a:fillRef>
+          <a:effectRef idx="2">
+            <a:schemeClr val="accent1"/>
+          </a:effectRef>
+          <a:fontRef idx="minor">
+            <a:schemeClr val="lt1"/>
+          </a:fontRef>
+        </p:style>
+        <p:txBody>
+          <a:bodyPr rtlCol="0" anchor="ctr"/>
+          <a:lstStyle/>
+          <a:p>
+            <a:pPr algn="ctr"/>
+          </a:p>
+        </p:txBody>
+      </p:sp>
+      <p:sp>
+        <p:nvSpPr>
+          <p:cNvPr id="33" name="Oval 32"/>
+          <p:cNvSpPr/>
+          <p:nvPr/>
+        </p:nvSpPr>
+        <p:spPr>
+          <a:xfrm>
+            <a:off x="5806094" y="3416804"/>
+            <a:ext cx="41148" cy="41148"/>
+          </a:xfrm>
+          <a:prstGeom prst="ellipse">
+            <a:avLst/>
+          </a:prstGeom>
+          <a:solidFill>
+            <a:srgbClr val="3A4A78"/>
+          </a:solidFill>
+          <a:ln>
+            <a:noFill/>
+          </a:ln>
+          <a:effectLst/>
+        </p:spPr>
+        <p:style>
+          <a:lnRef idx="1">
+            <a:schemeClr val="accent1"/>
+          </a:lnRef>
+          <a:fillRef idx="3">
+            <a:schemeClr val="accent1"/>
+          </a:fillRef>
+          <a:effectRef idx="2">
+            <a:schemeClr val="accent1"/>
+          </a:effectRef>
+          <a:fontRef idx="minor">
+            <a:schemeClr val="lt1"/>
+          </a:fontRef>
+        </p:style>
+        <p:txBody>
+          <a:bodyPr rtlCol="0" anchor="ctr"/>
+          <a:lstStyle/>
+          <a:p>
+            <a:pPr algn="ctr"/>
+          </a:p>
+        </p:txBody>
+      </p:sp>
+      <p:sp>
+        <p:nvSpPr>
+          <p:cNvPr id="34" name="Oval 33"/>
+          <p:cNvSpPr/>
+          <p:nvPr/>
+        </p:nvSpPr>
+        <p:spPr>
+          <a:xfrm>
+            <a:off x="3450208" y="2588925"/>
+            <a:ext cx="41148" cy="41148"/>
+          </a:xfrm>
+          <a:prstGeom prst="ellipse">
+            <a:avLst/>
+          </a:prstGeom>
+          <a:solidFill>
+            <a:srgbClr val="3A4A78"/>
+          </a:solidFill>
+          <a:ln>
+            <a:noFill/>
+          </a:ln>
+          <a:effectLst/>
+        </p:spPr>
+        <p:style>
+          <a:lnRef idx="1">
+            <a:schemeClr val="accent1"/>
+          </a:lnRef>
+          <a:fillRef idx="3">
+            <a:schemeClr val="accent1"/>
+          </a:fillRef>
+          <a:effectRef idx="2">
+            <a:schemeClr val="accent1"/>
+          </a:effectRef>
+          <a:fontRef idx="minor">
+            <a:schemeClr val="lt1"/>
+          </a:fontRef>
+        </p:style>
+        <p:txBody>
+          <a:bodyPr rtlCol="0" anchor="ctr"/>
+          <a:lstStyle/>
+          <a:p>
+            <a:pPr algn="ctr"/>
+          </a:p>
+        </p:txBody>
+      </p:sp>
+      <p:sp>
+        <p:nvSpPr>
+          <p:cNvPr id="35" name="Oval 34"/>
+          <p:cNvSpPr/>
+          <p:nvPr/>
+        </p:nvSpPr>
+        <p:spPr>
+          <a:xfrm>
+            <a:off x="5979714" y="4026040"/>
+            <a:ext cx="18288" cy="18288"/>
+          </a:xfrm>
+          <a:prstGeom prst="ellipse">
+            <a:avLst/>
+          </a:prstGeom>
+          <a:solidFill>
+            <a:srgbClr val="3A4A78"/>
+          </a:solidFill>
+          <a:ln>
+            <a:noFill/>
+          </a:ln>
+          <a:effectLst/>
+        </p:spPr>
+        <p:style>
+          <a:lnRef idx="1">
+            <a:schemeClr val="accent1"/>
+          </a:lnRef>
+          <a:fillRef idx="3">
+            <a:schemeClr val="accent1"/>
+          </a:fillRef>
+          <a:effectRef idx="2">
+            <a:schemeClr val="accent1"/>
+          </a:effectRef>
+          <a:fontRef idx="minor">
+            <a:schemeClr val="lt1"/>
+          </a:fontRef>
+        </p:style>
+        <p:txBody>
+          <a:bodyPr rtlCol="0" anchor="ctr"/>
+          <a:lstStyle/>
+          <a:p>
+            <a:pPr algn="ctr"/>
+          </a:p>
+        </p:txBody>
+      </p:sp>
+      <p:sp>
+        <p:nvSpPr>
+          <p:cNvPr id="36" name="Oval 35"/>
+          <p:cNvSpPr/>
+          <p:nvPr/>
+        </p:nvSpPr>
+        <p:spPr>
+          <a:xfrm>
+            <a:off x="5922123" y="5386327"/>
+            <a:ext cx="41148" cy="41148"/>
+          </a:xfrm>
+          <a:prstGeom prst="ellipse">
+            <a:avLst/>
+          </a:prstGeom>
+          <a:solidFill>
+            <a:srgbClr val="3A4A78"/>
+          </a:solidFill>
+          <a:ln>
+            <a:noFill/>
+          </a:ln>
+          <a:effectLst/>
+        </p:spPr>
+        <p:style>
+          <a:lnRef idx="1">
+            <a:schemeClr val="accent1"/>
+          </a:lnRef>
+          <a:fillRef idx="3">
+            <a:schemeClr val="accent1"/>
+          </a:fillRef>
+          <a:effectRef idx="2">
+            <a:schemeClr val="accent1"/>
+          </a:effectRef>
+          <a:fontRef idx="minor">
+            <a:schemeClr val="lt1"/>
+          </a:fontRef>
+        </p:style>
+        <p:txBody>
+          <a:bodyPr rtlCol="0" anchor="ctr"/>
+          <a:lstStyle/>
+          <a:p>
+            <a:pPr algn="ctr"/>
+          </a:p>
+        </p:txBody>
+      </p:sp>
+      <p:sp>
+        <p:nvSpPr>
+          <p:cNvPr id="37" name="Oval 36"/>
+          <p:cNvSpPr/>
+          <p:nvPr/>
+        </p:nvSpPr>
+        <p:spPr>
+          <a:xfrm>
+            <a:off x="8394952" y="6544097"/>
+            <a:ext cx="18288" cy="18288"/>
+          </a:xfrm>
+          <a:prstGeom prst="ellipse">
+            <a:avLst/>
+          </a:prstGeom>
+          <a:solidFill>
+            <a:srgbClr val="3A4A78"/>
+          </a:solidFill>
+          <a:ln>
+            <a:noFill/>
+          </a:ln>
+          <a:effectLst/>
+        </p:spPr>
+        <p:style>
+          <a:lnRef idx="1">
+            <a:schemeClr val="accent1"/>
+          </a:lnRef>
+          <a:fillRef idx="3">
+            <a:schemeClr val="accent1"/>
+          </a:fillRef>
+          <a:effectRef idx="2">
+            <a:schemeClr val="accent1"/>
+          </a:effectRef>
+          <a:fontRef idx="minor">
+            <a:schemeClr val="lt1"/>
+          </a:fontRef>
+        </p:style>
+        <p:txBody>
+          <a:bodyPr rtlCol="0" anchor="ctr"/>
+          <a:lstStyle/>
+          <a:p>
+            <a:pPr algn="ctr"/>
+          </a:p>
+        </p:txBody>
+      </p:sp>
+      <p:sp>
+        <p:nvSpPr>
+          <p:cNvPr id="38" name="Oval 37"/>
+          <p:cNvSpPr/>
+          <p:nvPr/>
+        </p:nvSpPr>
+        <p:spPr>
+          <a:xfrm>
+            <a:off x="3173159" y="5176962"/>
+            <a:ext cx="27432" cy="27432"/>
+          </a:xfrm>
+          <a:prstGeom prst="ellipse">
+            <a:avLst/>
+          </a:prstGeom>
+          <a:solidFill>
+            <a:srgbClr val="3A4A78"/>
+          </a:solidFill>
+          <a:ln>
+            <a:noFill/>
+          </a:ln>
+          <a:effectLst/>
+        </p:spPr>
+        <p:style>
+          <a:lnRef idx="1">
+            <a:schemeClr val="accent1"/>
+          </a:lnRef>
+          <a:fillRef idx="3">
+            <a:schemeClr val="accent1"/>
+          </a:fillRef>
+          <a:effectRef idx="2">
+            <a:schemeClr val="accent1"/>
+          </a:effectRef>
+          <a:fontRef idx="minor">
+            <a:schemeClr val="lt1"/>
+          </a:fontRef>
+        </p:style>
+        <p:txBody>
+          <a:bodyPr rtlCol="0" anchor="ctr"/>
+          <a:lstStyle/>
+          <a:p>
+            <a:pPr algn="ctr"/>
+          </a:p>
+        </p:txBody>
+      </p:sp>
+      <p:sp>
+        <p:nvSpPr>
+          <p:cNvPr id="39" name="Oval 38"/>
+          <p:cNvSpPr/>
+          <p:nvPr/>
+        </p:nvSpPr>
+        <p:spPr>
+          <a:xfrm>
+            <a:off x="4292683" y="210808"/>
+            <a:ext cx="27432" cy="27432"/>
+          </a:xfrm>
+          <a:prstGeom prst="ellipse">
+            <a:avLst/>
+          </a:prstGeom>
+          <a:solidFill>
+            <a:srgbClr val="3A4A78"/>
+          </a:solidFill>
+          <a:ln>
+            <a:noFill/>
+          </a:ln>
+          <a:effectLst/>
+        </p:spPr>
+        <p:style>
+          <a:lnRef idx="1">
+            <a:schemeClr val="accent1"/>
+          </a:lnRef>
+          <a:fillRef idx="3">
+            <a:schemeClr val="accent1"/>
+          </a:fillRef>
+          <a:effectRef idx="2">
+            <a:schemeClr val="accent1"/>
+          </a:effectRef>
+          <a:fontRef idx="minor">
+            <a:schemeClr val="lt1"/>
+          </a:fontRef>
+        </p:style>
+        <p:txBody>
+          <a:bodyPr rtlCol="0" anchor="ctr"/>
+          <a:lstStyle/>
+          <a:p>
+            <a:pPr algn="ctr"/>
+          </a:p>
+        </p:txBody>
+      </p:sp>
+      <p:sp>
+        <p:nvSpPr>
+          <p:cNvPr id="40" name="Oval 39"/>
+          <p:cNvSpPr/>
+          <p:nvPr/>
+        </p:nvSpPr>
+        <p:spPr>
+          <a:xfrm>
+            <a:off x="7081266" y="3072443"/>
+            <a:ext cx="18288" cy="18288"/>
+          </a:xfrm>
+          <a:prstGeom prst="ellipse">
+            <a:avLst/>
+          </a:prstGeom>
+          <a:solidFill>
+            <a:srgbClr val="3A4A78"/>
+          </a:solidFill>
+          <a:ln>
+            <a:noFill/>
+          </a:ln>
+          <a:effectLst/>
+        </p:spPr>
+        <p:style>
+          <a:lnRef idx="1">
+            <a:schemeClr val="accent1"/>
+          </a:lnRef>
+          <a:fillRef idx="3">
+            <a:schemeClr val="accent1"/>
+          </a:fillRef>
+          <a:effectRef idx="2">
+            <a:schemeClr val="accent1"/>
+          </a:effectRef>
+          <a:fontRef idx="minor">
+            <a:schemeClr val="lt1"/>
+          </a:fontRef>
+        </p:style>
+        <p:txBody>
+          <a:bodyPr rtlCol="0" anchor="ctr"/>
+          <a:lstStyle/>
+          <a:p>
+            <a:pPr algn="ctr"/>
+          </a:p>
+        </p:txBody>
+      </p:sp>
+      <p:sp>
+        <p:nvSpPr>
+          <p:cNvPr id="41" name="Oval 40"/>
+          <p:cNvSpPr/>
+          <p:nvPr/>
+        </p:nvSpPr>
+        <p:spPr>
+          <a:xfrm>
+            <a:off x="1711974" y="3871203"/>
+            <a:ext cx="41148" cy="41148"/>
+          </a:xfrm>
+          <a:prstGeom prst="ellipse">
+            <a:avLst/>
+          </a:prstGeom>
+          <a:solidFill>
+            <a:srgbClr val="3A4A78"/>
+          </a:solidFill>
+          <a:ln>
+            <a:noFill/>
+          </a:ln>
+          <a:effectLst/>
+        </p:spPr>
+        <p:style>
+          <a:lnRef idx="1">
+            <a:schemeClr val="accent1"/>
+          </a:lnRef>
+          <a:fillRef idx="3">
+            <a:schemeClr val="accent1"/>
+          </a:fillRef>
+          <a:effectRef idx="2">
+            <a:schemeClr val="accent1"/>
+          </a:effectRef>
+          <a:fontRef idx="minor">
+            <a:schemeClr val="lt1"/>
+          </a:fontRef>
+        </p:style>
+        <p:txBody>
+          <a:bodyPr rtlCol="0" anchor="ctr"/>
+          <a:lstStyle/>
+          <a:p>
+            <a:pPr algn="ctr"/>
+          </a:p>
+        </p:txBody>
+      </p:sp>
+      <p:sp>
+        <p:nvSpPr>
+          <p:cNvPr id="42" name="Oval 41"/>
+          <p:cNvSpPr/>
+          <p:nvPr/>
+        </p:nvSpPr>
+        <p:spPr>
+          <a:xfrm>
+            <a:off x="732887" y="4179216"/>
+            <a:ext cx="18288" cy="18288"/>
+          </a:xfrm>
+          <a:prstGeom prst="ellipse">
+            <a:avLst/>
+          </a:prstGeom>
+          <a:solidFill>
+            <a:srgbClr val="3A4A78"/>
+          </a:solidFill>
+          <a:ln>
+            <a:noFill/>
+          </a:ln>
+          <a:effectLst/>
+        </p:spPr>
+        <p:style>
+          <a:lnRef idx="1">
+            <a:schemeClr val="accent1"/>
+          </a:lnRef>
+          <a:fillRef idx="3">
+            <a:schemeClr val="accent1"/>
+          </a:fillRef>
+          <a:effectRef idx="2">
+            <a:schemeClr val="accent1"/>
+          </a:effectRef>
+          <a:fontRef idx="minor">
+            <a:schemeClr val="lt1"/>
+          </a:fontRef>
+        </p:style>
+        <p:txBody>
+          <a:bodyPr rtlCol="0" anchor="ctr"/>
+          <a:lstStyle/>
+          <a:p>
+            <a:pPr algn="ctr"/>
+          </a:p>
+        </p:txBody>
+      </p:sp>
+      <p:sp>
+        <p:nvSpPr>
+          <p:cNvPr id="43" name="Oval 42"/>
+          <p:cNvSpPr/>
+          <p:nvPr/>
+        </p:nvSpPr>
+        <p:spPr>
+          <a:xfrm>
+            <a:off x="9539041" y="6369694"/>
+            <a:ext cx="27432" cy="27432"/>
+          </a:xfrm>
+          <a:prstGeom prst="ellipse">
+            <a:avLst/>
+          </a:prstGeom>
+          <a:solidFill>
+            <a:srgbClr val="3A4A78"/>
+          </a:solidFill>
+          <a:ln>
+            <a:noFill/>
+          </a:ln>
+          <a:effectLst/>
+        </p:spPr>
+        <p:style>
+          <a:lnRef idx="1">
+            <a:schemeClr val="accent1"/>
+          </a:lnRef>
+          <a:fillRef idx="3">
+            <a:schemeClr val="accent1"/>
+          </a:fillRef>
+          <a:effectRef idx="2">
+            <a:schemeClr val="accent1"/>
+          </a:effectRef>
+          <a:fontRef idx="minor">
+            <a:schemeClr val="lt1"/>
+          </a:fontRef>
+        </p:style>
+        <p:txBody>
+          <a:bodyPr rtlCol="0" anchor="ctr"/>
+          <a:lstStyle/>
+          <a:p>
+            <a:pPr algn="ctr"/>
+          </a:p>
+        </p:txBody>
+      </p:sp>
+      <p:sp>
+        <p:nvSpPr>
+          <p:cNvPr id="44" name="Oval 43"/>
+          <p:cNvSpPr/>
+          <p:nvPr/>
+        </p:nvSpPr>
+        <p:spPr>
+          <a:xfrm>
+            <a:off x="8351925" y="3787763"/>
+            <a:ext cx="41148" cy="41148"/>
+          </a:xfrm>
+          <a:prstGeom prst="ellipse">
+            <a:avLst/>
+          </a:prstGeom>
+          <a:solidFill>
+            <a:srgbClr val="3A4A78"/>
+          </a:solidFill>
+          <a:ln>
+            <a:noFill/>
+          </a:ln>
+          <a:effectLst/>
+        </p:spPr>
+        <p:style>
+          <a:lnRef idx="1">
+            <a:schemeClr val="accent1"/>
+          </a:lnRef>
+          <a:fillRef idx="3">
+            <a:schemeClr val="accent1"/>
+          </a:fillRef>
+          <a:effectRef idx="2">
+            <a:schemeClr val="accent1"/>
+          </a:effectRef>
+          <a:fontRef idx="minor">
+            <a:schemeClr val="lt1"/>
+          </a:fontRef>
+        </p:style>
+        <p:txBody>
+          <a:bodyPr rtlCol="0" anchor="ctr"/>
+          <a:lstStyle/>
+          <a:p>
+            <a:pPr algn="ctr"/>
+          </a:p>
+        </p:txBody>
+      </p:sp>
+      <p:sp>
+        <p:nvSpPr>
+          <p:cNvPr id="45" name="Oval 44"/>
+          <p:cNvSpPr/>
+          <p:nvPr/>
+        </p:nvSpPr>
+        <p:spPr>
+          <a:xfrm>
+            <a:off x="8418955" y="3589529"/>
+            <a:ext cx="41148" cy="41148"/>
+          </a:xfrm>
+          <a:prstGeom prst="ellipse">
+            <a:avLst/>
+          </a:prstGeom>
+          <a:solidFill>
+            <a:srgbClr val="3A4A78"/>
+          </a:solidFill>
+          <a:ln>
+            <a:noFill/>
+          </a:ln>
+          <a:effectLst/>
+        </p:spPr>
+        <p:style>
+          <a:lnRef idx="1">
+            <a:schemeClr val="accent1"/>
+          </a:lnRef>
+          <a:fillRef idx="3">
+            <a:schemeClr val="accent1"/>
+          </a:fillRef>
+          <a:effectRef idx="2">
+            <a:schemeClr val="accent1"/>
+          </a:effectRef>
+          <a:fontRef idx="minor">
+            <a:schemeClr val="lt1"/>
+          </a:fontRef>
+        </p:style>
+        <p:txBody>
+          <a:bodyPr rtlCol="0" anchor="ctr"/>
+          <a:lstStyle/>
+          <a:p>
+            <a:pPr algn="ctr"/>
+          </a:p>
+        </p:txBody>
+      </p:sp>
+      <p:sp>
+        <p:nvSpPr>
+          <p:cNvPr id="46" name="Oval 45"/>
+          <p:cNvSpPr/>
+          <p:nvPr/>
+        </p:nvSpPr>
+        <p:spPr>
+          <a:xfrm>
+            <a:off x="4920778" y="3587271"/>
+            <a:ext cx="41148" cy="41148"/>
+          </a:xfrm>
+          <a:prstGeom prst="ellipse">
+            <a:avLst/>
+          </a:prstGeom>
+          <a:solidFill>
+            <a:srgbClr val="3A4A78"/>
+          </a:solidFill>
+          <a:ln>
+            <a:noFill/>
+          </a:ln>
+          <a:effectLst/>
+        </p:spPr>
+        <p:style>
+          <a:lnRef idx="1">
+            <a:schemeClr val="accent1"/>
+          </a:lnRef>
+          <a:fillRef idx="3">
+            <a:schemeClr val="accent1"/>
+          </a:fillRef>
+          <a:effectRef idx="2">
+            <a:schemeClr val="accent1"/>
+          </a:effectRef>
+          <a:fontRef idx="minor">
+            <a:schemeClr val="lt1"/>
+          </a:fontRef>
+        </p:style>
+        <p:txBody>
+          <a:bodyPr rtlCol="0" anchor="ctr"/>
+          <a:lstStyle/>
+          <a:p>
+            <a:pPr algn="ctr"/>
+          </a:p>
+        </p:txBody>
+      </p:sp>
+      <p:sp>
+        <p:nvSpPr>
+          <p:cNvPr id="47" name="Oval 46"/>
+          <p:cNvSpPr/>
+          <p:nvPr/>
+        </p:nvSpPr>
+        <p:spPr>
+          <a:xfrm>
+            <a:off x="7460800" y="2168084"/>
+            <a:ext cx="27432" cy="27432"/>
+          </a:xfrm>
+          <a:prstGeom prst="ellipse">
+            <a:avLst/>
+          </a:prstGeom>
+          <a:solidFill>
+            <a:srgbClr val="3A4A78"/>
+          </a:solidFill>
+          <a:ln>
+            <a:noFill/>
+          </a:ln>
+          <a:effectLst/>
+        </p:spPr>
+        <p:style>
+          <a:lnRef idx="1">
+            <a:schemeClr val="accent1"/>
+          </a:lnRef>
+          <a:fillRef idx="3">
+            <a:schemeClr val="accent1"/>
+          </a:fillRef>
+          <a:effectRef idx="2">
+            <a:schemeClr val="accent1"/>
+          </a:effectRef>
+          <a:fontRef idx="minor">
+            <a:schemeClr val="lt1"/>
+          </a:fontRef>
+        </p:style>
+        <p:txBody>
+          <a:bodyPr rtlCol="0" anchor="ctr"/>
+          <a:lstStyle/>
+          <a:p>
+            <a:pPr algn="ctr"/>
+          </a:p>
+        </p:txBody>
+      </p:sp>
+      <p:sp>
+        <p:nvSpPr>
+          <p:cNvPr id="48" name="Oval 47"/>
+          <p:cNvSpPr/>
+          <p:nvPr/>
+        </p:nvSpPr>
+        <p:spPr>
+          <a:xfrm>
+            <a:off x="4021700" y="2583485"/>
+            <a:ext cx="41148" cy="41148"/>
+          </a:xfrm>
+          <a:prstGeom prst="ellipse">
+            <a:avLst/>
+          </a:prstGeom>
+          <a:solidFill>
+            <a:srgbClr val="3A4A78"/>
+          </a:solidFill>
+          <a:ln>
+            <a:noFill/>
+          </a:ln>
+          <a:effectLst/>
+        </p:spPr>
+        <p:style>
+          <a:lnRef idx="1">
+            <a:schemeClr val="accent1"/>
+          </a:lnRef>
+          <a:fillRef idx="3">
+            <a:schemeClr val="accent1"/>
+          </a:fillRef>
+          <a:effectRef idx="2">
+            <a:schemeClr val="accent1"/>
+          </a:effectRef>
+          <a:fontRef idx="minor">
+            <a:schemeClr val="lt1"/>
+          </a:fontRef>
+        </p:style>
+        <p:txBody>
+          <a:bodyPr rtlCol="0" anchor="ctr"/>
+          <a:lstStyle/>
+          <a:p>
+            <a:pPr algn="ctr"/>
+          </a:p>
+        </p:txBody>
+      </p:sp>
+      <p:sp>
+        <p:nvSpPr>
+          <p:cNvPr id="49" name="Oval 48"/>
+          <p:cNvSpPr/>
+          <p:nvPr/>
+        </p:nvSpPr>
+        <p:spPr>
+          <a:xfrm>
+            <a:off x="9469867" y="5040993"/>
+            <a:ext cx="27432" cy="27432"/>
+          </a:xfrm>
+          <a:prstGeom prst="ellipse">
+            <a:avLst/>
+          </a:prstGeom>
+          <a:solidFill>
+            <a:srgbClr val="3A4A78"/>
+          </a:solidFill>
+          <a:ln>
+            <a:noFill/>
+          </a:ln>
+          <a:effectLst/>
+        </p:spPr>
+        <p:style>
+          <a:lnRef idx="1">
+            <a:schemeClr val="accent1"/>
+          </a:lnRef>
+          <a:fillRef idx="3">
+            <a:schemeClr val="accent1"/>
+          </a:fillRef>
+          <a:effectRef idx="2">
+            <a:schemeClr val="accent1"/>
+          </a:effectRef>
+          <a:fontRef idx="minor">
+            <a:schemeClr val="lt1"/>
+          </a:fontRef>
+        </p:style>
+        <p:txBody>
+          <a:bodyPr rtlCol="0" anchor="ctr"/>
+          <a:lstStyle/>
+          <a:p>
+            <a:pPr algn="ctr"/>
+          </a:p>
+        </p:txBody>
+      </p:sp>
+      <p:sp>
+        <p:nvSpPr>
+          <p:cNvPr id="50" name="Oval 49"/>
+          <p:cNvSpPr/>
+          <p:nvPr/>
+        </p:nvSpPr>
+        <p:spPr>
+          <a:xfrm>
+            <a:off x="8361673" y="3954008"/>
+            <a:ext cx="18288" cy="18288"/>
+          </a:xfrm>
+          <a:prstGeom prst="ellipse">
+            <a:avLst/>
+          </a:prstGeom>
+          <a:solidFill>
+            <a:srgbClr val="3A4A78"/>
+          </a:solidFill>
+          <a:ln>
+            <a:noFill/>
+          </a:ln>
+          <a:effectLst/>
+        </p:spPr>
+        <p:style>
+          <a:lnRef idx="1">
+            <a:schemeClr val="accent1"/>
+          </a:lnRef>
+          <a:fillRef idx="3">
+            <a:schemeClr val="accent1"/>
+          </a:fillRef>
+          <a:effectRef idx="2">
+            <a:schemeClr val="accent1"/>
+          </a:effectRef>
+          <a:fontRef idx="minor">
+            <a:schemeClr val="lt1"/>
+          </a:fontRef>
+        </p:style>
+        <p:txBody>
+          <a:bodyPr rtlCol="0" anchor="ctr"/>
+          <a:lstStyle/>
+          <a:p>
+            <a:pPr algn="ctr"/>
+          </a:p>
+        </p:txBody>
+      </p:sp>
+      <p:sp>
+        <p:nvSpPr>
+          <p:cNvPr id="51" name="Oval 50"/>
+          <p:cNvSpPr/>
+          <p:nvPr/>
+        </p:nvSpPr>
+        <p:spPr>
+          <a:xfrm>
+            <a:off x="637780" y="4535475"/>
+            <a:ext cx="41148" cy="41148"/>
+          </a:xfrm>
+          <a:prstGeom prst="ellipse">
+            <a:avLst/>
+          </a:prstGeom>
+          <a:solidFill>
+            <a:srgbClr val="3A4A78"/>
+          </a:solidFill>
+          <a:ln>
+            <a:noFill/>
+          </a:ln>
+          <a:effectLst/>
+        </p:spPr>
+        <p:style>
+          <a:lnRef idx="1">
+            <a:schemeClr val="accent1"/>
+          </a:lnRef>
+          <a:fillRef idx="3">
+            <a:schemeClr val="accent1"/>
+          </a:fillRef>
+          <a:effectRef idx="2">
+            <a:schemeClr val="accent1"/>
+          </a:effectRef>
+          <a:fontRef idx="minor">
+            <a:schemeClr val="lt1"/>
+          </a:fontRef>
+        </p:style>
+        <p:txBody>
+          <a:bodyPr rtlCol="0" anchor="ctr"/>
+          <a:lstStyle/>
+          <a:p>
+            <a:pPr algn="ctr"/>
+          </a:p>
+        </p:txBody>
+      </p:sp>
+      <p:sp>
+        <p:nvSpPr>
+          <p:cNvPr id="52" name="Oval 51"/>
+          <p:cNvSpPr/>
+          <p:nvPr/>
+        </p:nvSpPr>
+        <p:spPr>
+          <a:xfrm>
+            <a:off x="5200537" y="1063024"/>
+            <a:ext cx="27432" cy="27432"/>
+          </a:xfrm>
+          <a:prstGeom prst="ellipse">
+            <a:avLst/>
+          </a:prstGeom>
+          <a:solidFill>
+            <a:srgbClr val="3A4A78"/>
+          </a:solidFill>
+          <a:ln>
+            <a:noFill/>
+          </a:ln>
+          <a:effectLst/>
+        </p:spPr>
+        <p:style>
+          <a:lnRef idx="1">
+            <a:schemeClr val="accent1"/>
+          </a:lnRef>
+          <a:fillRef idx="3">
+            <a:schemeClr val="accent1"/>
+          </a:fillRef>
+          <a:effectRef idx="2">
+            <a:schemeClr val="accent1"/>
+          </a:effectRef>
+          <a:fontRef idx="minor">
+            <a:schemeClr val="lt1"/>
+          </a:fontRef>
+        </p:style>
+        <p:txBody>
+          <a:bodyPr rtlCol="0" anchor="ctr"/>
+          <a:lstStyle/>
+          <a:p>
+            <a:pPr algn="ctr"/>
+          </a:p>
+        </p:txBody>
+      </p:sp>
+      <p:sp>
+        <p:nvSpPr>
+          <p:cNvPr id="53" name="Oval 52"/>
+          <p:cNvSpPr/>
+          <p:nvPr/>
+        </p:nvSpPr>
+        <p:spPr>
+          <a:xfrm>
+            <a:off x="10653938" y="1485672"/>
+            <a:ext cx="41148" cy="41148"/>
+          </a:xfrm>
+          <a:prstGeom prst="ellipse">
+            <a:avLst/>
+          </a:prstGeom>
+          <a:solidFill>
+            <a:srgbClr val="3A4A78"/>
+          </a:solidFill>
+          <a:ln>
+            <a:noFill/>
+          </a:ln>
+          <a:effectLst/>
+        </p:spPr>
+        <p:style>
+          <a:lnRef idx="1">
+            <a:schemeClr val="accent1"/>
+          </a:lnRef>
+          <a:fillRef idx="3">
+            <a:schemeClr val="accent1"/>
+          </a:fillRef>
+          <a:effectRef idx="2">
+            <a:schemeClr val="accent1"/>
+          </a:effectRef>
+          <a:fontRef idx="minor">
+            <a:schemeClr val="lt1"/>
+          </a:fontRef>
+        </p:style>
+        <p:txBody>
+          <a:bodyPr rtlCol="0" anchor="ctr"/>
+          <a:lstStyle/>
+          <a:p>
+            <a:pPr algn="ctr"/>
+          </a:p>
+        </p:txBody>
+      </p:sp>
+      <p:sp>
+        <p:nvSpPr>
+          <p:cNvPr id="54" name="Oval 53"/>
+          <p:cNvSpPr/>
+          <p:nvPr/>
+        </p:nvSpPr>
+        <p:spPr>
+          <a:xfrm>
+            <a:off x="3795357" y="4003720"/>
+            <a:ext cx="27432" cy="27432"/>
+          </a:xfrm>
+          <a:prstGeom prst="ellipse">
+            <a:avLst/>
+          </a:prstGeom>
+          <a:solidFill>
+            <a:srgbClr val="3A4A78"/>
+          </a:solidFill>
+          <a:ln>
+            <a:noFill/>
+          </a:ln>
+          <a:effectLst/>
+        </p:spPr>
+        <p:style>
+          <a:lnRef idx="1">
+            <a:schemeClr val="accent1"/>
+          </a:lnRef>
+          <a:fillRef idx="3">
+            <a:schemeClr val="accent1"/>
+          </a:fillRef>
+          <a:effectRef idx="2">
+            <a:schemeClr val="accent1"/>
+          </a:effectRef>
+          <a:fontRef idx="minor">
+            <a:schemeClr val="lt1"/>
+          </a:fontRef>
+        </p:style>
+        <p:txBody>
+          <a:bodyPr rtlCol="0" anchor="ctr"/>
+          <a:lstStyle/>
+          <a:p>
+            <a:pPr algn="ctr"/>
+          </a:p>
+        </p:txBody>
+      </p:sp>
+      <p:pic>
+        <p:nvPicPr>
+          <p:cNvPr id="55" name="Picture 54" descr="PiFinder-Stellarmate_Wortmarke_Negativ_fuer-dunklen-hg.png"/>
+          <p:cNvPicPr>
+            <a:picLocks noChangeAspect="1"/>
+          </p:cNvPicPr>
+          <p:nvPr/>
+        </p:nvPicPr>
+        <p:blipFill>
+          <a:blip r:embed="rId2"/>
+          <a:stretch>
+            <a:fillRect/>
+          </a:stretch>
+        </p:blipFill>
+        <p:spPr>
+          <a:xfrm>
+            <a:off x="2986887" y="1965960"/>
+            <a:ext cx="6217920" cy="1171587"/>
+          </a:xfrm>
+          <a:prstGeom prst="rect">
+            <a:avLst/>
+          </a:prstGeom>
+        </p:spPr>
+      </p:pic>
+      <p:sp>
+        <p:nvSpPr>
+          <p:cNvPr id="56" name="TextBox 55"/>
+          <p:cNvSpPr txBox="1"/>
+          <p:nvPr/>
+        </p:nvSpPr>
+        <p:spPr>
+          <a:xfrm>
+            <a:off x="640080" y="3611880"/>
+            <a:ext cx="10911535" cy="365760"/>
+          </a:xfrm>
+          <a:prstGeom prst="rect">
+            <a:avLst/>
+          </a:prstGeom>
+          <a:noFill/>
+        </p:spPr>
+        <p:txBody>
+          <a:bodyPr wrap="square" anchor="t" lIns="0" rIns="0" tIns="0" bIns="0">
+            <a:spAutoFit/>
+          </a:bodyPr>
+          <a:lstStyle/>
+          <a:p>
+            <a:pPr algn="ctr">
+              <a:lnSpc>
+                <a:spcPct val="100000"/>
+              </a:lnSpc>
+              <a:spcBef>
+                <a:spcPts val="0"/>
+              </a:spcBef>
+              <a:spcAft>
+                <a:spcPts val="400"/>
+              </a:spcAft>
+            </a:pPr>
+            <a:r>
+              <a:rPr sz="2100" b="0" i="0">
+                <a:solidFill>
+                  <a:srgbClr val="9AA6C2"/>
+                </a:solidFill>
+                <a:latin typeface="Calibri"/>
+              </a:rPr>
+              <a:t>© github.com/apos 2026</a:t>
+            </a:r>
+          </a:p>
+        </p:txBody>
+      </p:sp>
+      <p:sp>
+        <p:nvSpPr>
+          <p:cNvPr id="57" name="TextBox 56"/>
+          <p:cNvSpPr txBox="1"/>
+          <p:nvPr/>
+        </p:nvSpPr>
+        <p:spPr>
+          <a:xfrm>
+            <a:off x="640080" y="4069080"/>
+            <a:ext cx="10911535" cy="365760"/>
+          </a:xfrm>
+          <a:prstGeom prst="rect">
+            <a:avLst/>
+          </a:prstGeom>
+          <a:noFill/>
+        </p:spPr>
+        <p:txBody>
+          <a:bodyPr wrap="square" anchor="t" lIns="0" rIns="0" tIns="0" bIns="0">
+            <a:spAutoFit/>
+          </a:bodyPr>
+          <a:lstStyle/>
+          <a:p>
+            <a:pPr algn="ctr">
+              <a:lnSpc>
+                <a:spcPct val="100000"/>
+              </a:lnSpc>
+              <a:spcBef>
+                <a:spcPts val="0"/>
+              </a:spcBef>
+              <a:spcAft>
+                <a:spcPts val="400"/>
+              </a:spcAft>
+            </a:pPr>
+            <a:r>
+              <a:rPr sz="1600" b="0" i="0">
+                <a:solidFill>
+                  <a:srgbClr val="5C677B"/>
+                </a:solidFill>
+                <a:latin typeface="Calibri"/>
+              </a:rPr>
+              <a:t>Unofficial community project — not affiliated with StellarMate or PiFinder.</a:t>
+            </a:r>
+          </a:p>
+        </p:txBody>
+      </p:sp>
+      <p:pic>
+        <p:nvPicPr>
+          <p:cNvPr id="58" name="Picture 57" descr="HeyApos_Wortmarke_logo_thumb.png"/>
+          <p:cNvPicPr>
+            <a:picLocks noChangeAspect="1"/>
+          </p:cNvPicPr>
+          <p:nvPr/>
+        </p:nvPicPr>
+        <p:blipFill>
+          <a:blip r:embed="rId3"/>
+          <a:stretch>
+            <a:fillRect/>
+          </a:stretch>
+        </p:blipFill>
+        <p:spPr>
+          <a:xfrm>
+            <a:off x="4043527" y="5074920"/>
+            <a:ext cx="1869439" cy="1051559"/>
+          </a:xfrm>
+          <a:prstGeom prst="rect">
+            <a:avLst/>
+          </a:prstGeom>
+        </p:spPr>
+      </p:pic>
+      <p:pic>
+        <p:nvPicPr>
+          <p:cNvPr id="59" name="Picture 58" descr="avvp_2019_logo_wortmarke_neg.png"/>
+          <p:cNvPicPr>
+            <a:picLocks noChangeAspect="1"/>
+          </p:cNvPicPr>
+          <p:nvPr/>
+        </p:nvPicPr>
+        <p:blipFill>
+          <a:blip r:embed="rId4"/>
+          <a:stretch>
+            <a:fillRect/>
+          </a:stretch>
+        </p:blipFill>
+        <p:spPr>
+          <a:xfrm>
+            <a:off x="6278727" y="5230368"/>
+            <a:ext cx="2103120" cy="522544"/>
+          </a:xfrm>
+          <a:prstGeom prst="rect">
+            <a:avLst/>
+          </a:prstGeom>
+        </p:spPr>
+      </p:pic>
+      <p:sp>
+        <p:nvSpPr>
+          <p:cNvPr id="60" name="TextBox 59"/>
+          <p:cNvSpPr txBox="1"/>
+          <p:nvPr/>
+        </p:nvSpPr>
+        <p:spPr>
+          <a:xfrm>
+            <a:off x="640080" y="6355080"/>
+            <a:ext cx="10911535" cy="274320"/>
+          </a:xfrm>
+          <a:prstGeom prst="rect">
+            <a:avLst/>
+          </a:prstGeom>
+          <a:noFill/>
+        </p:spPr>
+        <p:txBody>
+          <a:bodyPr wrap="square" anchor="t" lIns="0" rIns="0" tIns="0" bIns="0">
+            <a:spAutoFit/>
+          </a:bodyPr>
+          <a:lstStyle/>
+          <a:p>
+            <a:pPr algn="ctr">
+              <a:lnSpc>
+                <a:spcPct val="100000"/>
+              </a:lnSpc>
+              <a:spcBef>
+                <a:spcPts val="0"/>
+              </a:spcBef>
+              <a:spcAft>
+                <a:spcPts val="400"/>
+              </a:spcAft>
+            </a:pPr>
+            <a:r>
+              <a:rPr sz="1500" b="0" i="0">
+                <a:solidFill>
+                  <a:srgbClr val="9AA6C2"/>
+                </a:solidFill>
+                <a:latin typeface="Calibri"/>
+              </a:rPr>
+              <a:t>youtube.com/heyapos   ·   avvp.de</a:t>
             </a:r>
           </a:p>
         </p:txBody>

--- a/docs/presentations/PFSM_overview.pptx
+++ b/docs/presentations/PFSM_overview.pptx
@@ -5,39 +5,39 @@
     <p:sldMasterId id="2147483648" r:id="rId1"/>
   </p:sldMasterIdLst>
   <p:sldIdLst>
-    <p:sldId id="256" r:id="rId7"/>
-    <p:sldId id="257" r:id="rId8"/>
-    <p:sldId id="258" r:id="rId9"/>
-    <p:sldId id="259" r:id="rId10"/>
-    <p:sldId id="260" r:id="rId11"/>
-    <p:sldId id="261" r:id="rId12"/>
-    <p:sldId id="262" r:id="rId13"/>
-    <p:sldId id="263" r:id="rId14"/>
-    <p:sldId id="264" r:id="rId15"/>
-    <p:sldId id="265" r:id="rId16"/>
-    <p:sldId id="266" r:id="rId17"/>
-    <p:sldId id="267" r:id="rId18"/>
-    <p:sldId id="268" r:id="rId19"/>
-    <p:sldId id="269" r:id="rId20"/>
-    <p:sldId id="270" r:id="rId21"/>
-    <p:sldId id="271" r:id="rId22"/>
-    <p:sldId id="272" r:id="rId23"/>
-    <p:sldId id="273" r:id="rId24"/>
-    <p:sldId id="274" r:id="rId25"/>
-    <p:sldId id="275" r:id="rId26"/>
-    <p:sldId id="276" r:id="rId27"/>
-    <p:sldId id="277" r:id="rId28"/>
-    <p:sldId id="278" r:id="rId29"/>
-    <p:sldId id="279" r:id="rId30"/>
-    <p:sldId id="280" r:id="rId31"/>
-    <p:sldId id="281" r:id="rId32"/>
-    <p:sldId id="282" r:id="rId33"/>
-    <p:sldId id="283" r:id="rId34"/>
-    <p:sldId id="284" r:id="rId35"/>
-    <p:sldId id="285" r:id="rId36"/>
-    <p:sldId id="286" r:id="rId37"/>
+    <p:sldId id="256" r:id="rId2"/>
+    <p:sldId id="257" r:id="rId3"/>
+    <p:sldId id="258" r:id="rId4"/>
+    <p:sldId id="259" r:id="rId5"/>
+    <p:sldId id="260" r:id="rId6"/>
+    <p:sldId id="261" r:id="rId7"/>
+    <p:sldId id="262" r:id="rId8"/>
+    <p:sldId id="263" r:id="rId9"/>
+    <p:sldId id="264" r:id="rId10"/>
+    <p:sldId id="265" r:id="rId11"/>
+    <p:sldId id="266" r:id="rId12"/>
+    <p:sldId id="267" r:id="rId13"/>
+    <p:sldId id="268" r:id="rId14"/>
+    <p:sldId id="269" r:id="rId15"/>
+    <p:sldId id="270" r:id="rId16"/>
+    <p:sldId id="271" r:id="rId17"/>
+    <p:sldId id="272" r:id="rId18"/>
+    <p:sldId id="273" r:id="rId19"/>
+    <p:sldId id="274" r:id="rId20"/>
+    <p:sldId id="275" r:id="rId21"/>
+    <p:sldId id="276" r:id="rId22"/>
+    <p:sldId id="277" r:id="rId23"/>
+    <p:sldId id="278" r:id="rId24"/>
+    <p:sldId id="279" r:id="rId25"/>
+    <p:sldId id="280" r:id="rId26"/>
+    <p:sldId id="281" r:id="rId27"/>
+    <p:sldId id="282" r:id="rId28"/>
+    <p:sldId id="283" r:id="rId29"/>
+    <p:sldId id="284" r:id="rId30"/>
+    <p:sldId id="285" r:id="rId31"/>
+    <p:sldId id="286" r:id="rId32"/>
   </p:sldIdLst>
-  <p:sldSz cx="12191695" cy="6858000" type="screen4x3"/>
+  <p:sldSz cx="12192000" cy="6858000"/>
   <p:notesSz cx="6858000" cy="9144000"/>
   <p:defaultTextStyle>
     <a:defPPr>
@@ -134,6 +134,22 @@
       </a:defRPr>
     </a:lvl9pPr>
   </p:defaultTextStyle>
+  <p:extLst>
+    <p:ext uri="{EFAFB233-063F-42B5-8137-9DF3F51BA10A}">
+      <p15:sldGuideLst xmlns:p15="http://schemas.microsoft.com/office/powerpoint/2012/main">
+        <p15:guide id="1" orient="horz" pos="2160">
+          <p15:clr>
+            <a:srgbClr val="A4A3A4"/>
+          </p15:clr>
+        </p15:guide>
+        <p15:guide id="2" pos="2880">
+          <p15:clr>
+            <a:srgbClr val="A4A3A4"/>
+          </p15:clr>
+        </p15:guide>
+      </p15:sldGuideLst>
+    </p:ext>
+  </p:extLst>
 </p:presentation>
 </file>
 
@@ -175,10 +191,9 @@
           <a:lstStyle/>
           <a:p>
             <a:r>
-              <a:rPr lang="en-US" smtClean="0"/>
+              <a:rPr lang="en-US"/>
               <a:t>Click to edit Master title style</a:t>
             </a:r>
-            <a:endParaRPr lang="en-US"/>
           </a:p>
         </p:txBody>
       </p:sp>
@@ -294,10 +309,9 @@
           </a:lstStyle>
           <a:p>
             <a:r>
-              <a:rPr lang="en-US" smtClean="0"/>
+              <a:rPr lang="en-US"/>
               <a:t>Click to edit Master subtitle style</a:t>
             </a:r>
-            <a:endParaRPr lang="en-US"/>
           </a:p>
         </p:txBody>
       </p:sp>
@@ -318,7 +332,7 @@
           <a:p>
             <a:fld id="{5BCAD085-E8A6-8845-BD4E-CB4CCA059FC4}" type="datetimeFigureOut">
               <a:rPr lang="en-US" smtClean="0"/>
-              <a:t>1/27/13</a:t>
+              <a:t>9/10/26</a:t>
             </a:fld>
             <a:endParaRPr lang="en-US"/>
           </a:p>
@@ -360,7 +374,7 @@
           <a:p>
             <a:fld id="{C1FF6DA9-008F-8B48-92A6-B652298478BF}" type="slidenum">
               <a:rPr lang="en-US" smtClean="0"/>
-              <a:t>‹#›</a:t>
+              <a:t>‹Nr.›</a:t>
             </a:fld>
             <a:endParaRPr lang="en-US"/>
           </a:p>
@@ -412,10 +426,9 @@
           <a:lstStyle/>
           <a:p>
             <a:r>
-              <a:rPr lang="en-US" smtClean="0"/>
+              <a:rPr lang="en-US"/>
               <a:t>Click to edit Master title style</a:t>
             </a:r>
-            <a:endParaRPr lang="en-US"/>
           </a:p>
         </p:txBody>
       </p:sp>
@@ -436,38 +449,37 @@
           <a:p>
             <a:pPr lvl="0"/>
             <a:r>
-              <a:rPr lang="en-US" smtClean="0"/>
+              <a:rPr lang="en-US"/>
               <a:t>Click to edit Master text styles</a:t>
             </a:r>
           </a:p>
           <a:p>
             <a:pPr lvl="1"/>
             <a:r>
-              <a:rPr lang="en-US" smtClean="0"/>
+              <a:rPr lang="en-US"/>
               <a:t>Second level</a:t>
             </a:r>
           </a:p>
           <a:p>
             <a:pPr lvl="2"/>
             <a:r>
-              <a:rPr lang="en-US" smtClean="0"/>
+              <a:rPr lang="en-US"/>
               <a:t>Third level</a:t>
             </a:r>
           </a:p>
           <a:p>
             <a:pPr lvl="3"/>
             <a:r>
-              <a:rPr lang="en-US" smtClean="0"/>
+              <a:rPr lang="en-US"/>
               <a:t>Fourth level</a:t>
             </a:r>
           </a:p>
           <a:p>
             <a:pPr lvl="4"/>
             <a:r>
-              <a:rPr lang="en-US" smtClean="0"/>
+              <a:rPr lang="en-US"/>
               <a:t>Fifth level</a:t>
             </a:r>
-            <a:endParaRPr lang="en-US"/>
           </a:p>
         </p:txBody>
       </p:sp>
@@ -488,7 +500,7 @@
           <a:p>
             <a:fld id="{5BCAD085-E8A6-8845-BD4E-CB4CCA059FC4}" type="datetimeFigureOut">
               <a:rPr lang="en-US" smtClean="0"/>
-              <a:t>1/27/13</a:t>
+              <a:t>9/10/26</a:t>
             </a:fld>
             <a:endParaRPr lang="en-US"/>
           </a:p>
@@ -530,7 +542,7 @@
           <a:p>
             <a:fld id="{C1FF6DA9-008F-8B48-92A6-B652298478BF}" type="slidenum">
               <a:rPr lang="en-US" smtClean="0"/>
-              <a:t>‹#›</a:t>
+              <a:t>‹Nr.›</a:t>
             </a:fld>
             <a:endParaRPr lang="en-US"/>
           </a:p>
@@ -587,10 +599,9 @@
           <a:lstStyle/>
           <a:p>
             <a:r>
-              <a:rPr lang="en-US" smtClean="0"/>
+              <a:rPr lang="en-US"/>
               <a:t>Click to edit Master title style</a:t>
             </a:r>
-            <a:endParaRPr lang="en-US"/>
           </a:p>
         </p:txBody>
       </p:sp>
@@ -616,38 +627,37 @@
           <a:p>
             <a:pPr lvl="0"/>
             <a:r>
-              <a:rPr lang="en-US" smtClean="0"/>
+              <a:rPr lang="en-US"/>
               <a:t>Click to edit Master text styles</a:t>
             </a:r>
           </a:p>
           <a:p>
             <a:pPr lvl="1"/>
             <a:r>
-              <a:rPr lang="en-US" smtClean="0"/>
+              <a:rPr lang="en-US"/>
               <a:t>Second level</a:t>
             </a:r>
           </a:p>
           <a:p>
             <a:pPr lvl="2"/>
             <a:r>
-              <a:rPr lang="en-US" smtClean="0"/>
+              <a:rPr lang="en-US"/>
               <a:t>Third level</a:t>
             </a:r>
           </a:p>
           <a:p>
             <a:pPr lvl="3"/>
             <a:r>
-              <a:rPr lang="en-US" smtClean="0"/>
+              <a:rPr lang="en-US"/>
               <a:t>Fourth level</a:t>
             </a:r>
           </a:p>
           <a:p>
             <a:pPr lvl="4"/>
             <a:r>
-              <a:rPr lang="en-US" smtClean="0"/>
+              <a:rPr lang="en-US"/>
               <a:t>Fifth level</a:t>
             </a:r>
-            <a:endParaRPr lang="en-US"/>
           </a:p>
         </p:txBody>
       </p:sp>
@@ -668,7 +678,7 @@
           <a:p>
             <a:fld id="{5BCAD085-E8A6-8845-BD4E-CB4CCA059FC4}" type="datetimeFigureOut">
               <a:rPr lang="en-US" smtClean="0"/>
-              <a:t>1/27/13</a:t>
+              <a:t>9/10/26</a:t>
             </a:fld>
             <a:endParaRPr lang="en-US"/>
           </a:p>
@@ -710,7 +720,7 @@
           <a:p>
             <a:fld id="{C1FF6DA9-008F-8B48-92A6-B652298478BF}" type="slidenum">
               <a:rPr lang="en-US" smtClean="0"/>
-              <a:t>‹#›</a:t>
+              <a:t>‹Nr.›</a:t>
             </a:fld>
             <a:endParaRPr lang="en-US"/>
           </a:p>
@@ -762,10 +772,9 @@
           <a:lstStyle/>
           <a:p>
             <a:r>
-              <a:rPr lang="en-US" smtClean="0"/>
+              <a:rPr lang="en-US"/>
               <a:t>Click to edit Master title style</a:t>
             </a:r>
-            <a:endParaRPr lang="en-US"/>
           </a:p>
         </p:txBody>
       </p:sp>
@@ -786,38 +795,37 @@
           <a:p>
             <a:pPr lvl="0"/>
             <a:r>
-              <a:rPr lang="en-US" smtClean="0"/>
+              <a:rPr lang="en-US"/>
               <a:t>Click to edit Master text styles</a:t>
             </a:r>
           </a:p>
           <a:p>
             <a:pPr lvl="1"/>
             <a:r>
-              <a:rPr lang="en-US" smtClean="0"/>
+              <a:rPr lang="en-US"/>
               <a:t>Second level</a:t>
             </a:r>
           </a:p>
           <a:p>
             <a:pPr lvl="2"/>
             <a:r>
-              <a:rPr lang="en-US" smtClean="0"/>
+              <a:rPr lang="en-US"/>
               <a:t>Third level</a:t>
             </a:r>
           </a:p>
           <a:p>
             <a:pPr lvl="3"/>
             <a:r>
-              <a:rPr lang="en-US" smtClean="0"/>
+              <a:rPr lang="en-US"/>
               <a:t>Fourth level</a:t>
             </a:r>
           </a:p>
           <a:p>
             <a:pPr lvl="4"/>
             <a:r>
-              <a:rPr lang="en-US" smtClean="0"/>
+              <a:rPr lang="en-US"/>
               <a:t>Fifth level</a:t>
             </a:r>
-            <a:endParaRPr lang="en-US"/>
           </a:p>
         </p:txBody>
       </p:sp>
@@ -838,7 +846,7 @@
           <a:p>
             <a:fld id="{5BCAD085-E8A6-8845-BD4E-CB4CCA059FC4}" type="datetimeFigureOut">
               <a:rPr lang="en-US" smtClean="0"/>
-              <a:t>1/27/13</a:t>
+              <a:t>9/10/26</a:t>
             </a:fld>
             <a:endParaRPr lang="en-US"/>
           </a:p>
@@ -880,7 +888,7 @@
           <a:p>
             <a:fld id="{C1FF6DA9-008F-8B48-92A6-B652298478BF}" type="slidenum">
               <a:rPr lang="en-US" smtClean="0"/>
-              <a:t>‹#›</a:t>
+              <a:t>‹Nr.›</a:t>
             </a:fld>
             <a:endParaRPr lang="en-US"/>
           </a:p>
@@ -941,10 +949,9 @@
           </a:lstStyle>
           <a:p>
             <a:r>
-              <a:rPr lang="en-US" smtClean="0"/>
+              <a:rPr lang="en-US"/>
               <a:t>Click to edit Master title style</a:t>
             </a:r>
-            <a:endParaRPr lang="en-US"/>
           </a:p>
         </p:txBody>
       </p:sp>
@@ -1061,7 +1068,7 @@
           <a:p>
             <a:pPr lvl="0"/>
             <a:r>
-              <a:rPr lang="en-US" smtClean="0"/>
+              <a:rPr lang="en-US"/>
               <a:t>Click to edit Master text styles</a:t>
             </a:r>
           </a:p>
@@ -1084,7 +1091,7 @@
           <a:p>
             <a:fld id="{5BCAD085-E8A6-8845-BD4E-CB4CCA059FC4}" type="datetimeFigureOut">
               <a:rPr lang="en-US" smtClean="0"/>
-              <a:t>1/27/13</a:t>
+              <a:t>9/10/26</a:t>
             </a:fld>
             <a:endParaRPr lang="en-US"/>
           </a:p>
@@ -1126,7 +1133,7 @@
           <a:p>
             <a:fld id="{C1FF6DA9-008F-8B48-92A6-B652298478BF}" type="slidenum">
               <a:rPr lang="en-US" smtClean="0"/>
-              <a:t>‹#›</a:t>
+              <a:t>‹Nr.›</a:t>
             </a:fld>
             <a:endParaRPr lang="en-US"/>
           </a:p>
@@ -1178,10 +1185,9 @@
           <a:lstStyle/>
           <a:p>
             <a:r>
-              <a:rPr lang="en-US" smtClean="0"/>
+              <a:rPr lang="en-US"/>
               <a:t>Click to edit Master title style</a:t>
             </a:r>
-            <a:endParaRPr lang="en-US"/>
           </a:p>
         </p:txBody>
       </p:sp>
@@ -1235,38 +1241,37 @@
           <a:p>
             <a:pPr lvl="0"/>
             <a:r>
-              <a:rPr lang="en-US" smtClean="0"/>
+              <a:rPr lang="en-US"/>
               <a:t>Click to edit Master text styles</a:t>
             </a:r>
           </a:p>
           <a:p>
             <a:pPr lvl="1"/>
             <a:r>
-              <a:rPr lang="en-US" smtClean="0"/>
+              <a:rPr lang="en-US"/>
               <a:t>Second level</a:t>
             </a:r>
           </a:p>
           <a:p>
             <a:pPr lvl="2"/>
             <a:r>
-              <a:rPr lang="en-US" smtClean="0"/>
+              <a:rPr lang="en-US"/>
               <a:t>Third level</a:t>
             </a:r>
           </a:p>
           <a:p>
             <a:pPr lvl="3"/>
             <a:r>
-              <a:rPr lang="en-US" smtClean="0"/>
+              <a:rPr lang="en-US"/>
               <a:t>Fourth level</a:t>
             </a:r>
           </a:p>
           <a:p>
             <a:pPr lvl="4"/>
             <a:r>
-              <a:rPr lang="en-US" smtClean="0"/>
+              <a:rPr lang="en-US"/>
               <a:t>Fifth level</a:t>
             </a:r>
-            <a:endParaRPr lang="en-US"/>
           </a:p>
         </p:txBody>
       </p:sp>
@@ -1320,38 +1325,37 @@
           <a:p>
             <a:pPr lvl="0"/>
             <a:r>
-              <a:rPr lang="en-US" smtClean="0"/>
+              <a:rPr lang="en-US"/>
               <a:t>Click to edit Master text styles</a:t>
             </a:r>
           </a:p>
           <a:p>
             <a:pPr lvl="1"/>
             <a:r>
-              <a:rPr lang="en-US" smtClean="0"/>
+              <a:rPr lang="en-US"/>
               <a:t>Second level</a:t>
             </a:r>
           </a:p>
           <a:p>
             <a:pPr lvl="2"/>
             <a:r>
-              <a:rPr lang="en-US" smtClean="0"/>
+              <a:rPr lang="en-US"/>
               <a:t>Third level</a:t>
             </a:r>
           </a:p>
           <a:p>
             <a:pPr lvl="3"/>
             <a:r>
-              <a:rPr lang="en-US" smtClean="0"/>
+              <a:rPr lang="en-US"/>
               <a:t>Fourth level</a:t>
             </a:r>
           </a:p>
           <a:p>
             <a:pPr lvl="4"/>
             <a:r>
-              <a:rPr lang="en-US" smtClean="0"/>
+              <a:rPr lang="en-US"/>
               <a:t>Fifth level</a:t>
             </a:r>
-            <a:endParaRPr lang="en-US"/>
           </a:p>
         </p:txBody>
       </p:sp>
@@ -1372,7 +1376,7 @@
           <a:p>
             <a:fld id="{5BCAD085-E8A6-8845-BD4E-CB4CCA059FC4}" type="datetimeFigureOut">
               <a:rPr lang="en-US" smtClean="0"/>
-              <a:t>1/27/13</a:t>
+              <a:t>9/10/26</a:t>
             </a:fld>
             <a:endParaRPr lang="en-US"/>
           </a:p>
@@ -1414,7 +1418,7 @@
           <a:p>
             <a:fld id="{C1FF6DA9-008F-8B48-92A6-B652298478BF}" type="slidenum">
               <a:rPr lang="en-US" smtClean="0"/>
-              <a:t>‹#›</a:t>
+              <a:t>‹Nr.›</a:t>
             </a:fld>
             <a:endParaRPr lang="en-US"/>
           </a:p>
@@ -1470,10 +1474,9 @@
           </a:lstStyle>
           <a:p>
             <a:r>
-              <a:rPr lang="en-US" smtClean="0"/>
+              <a:rPr lang="en-US"/>
               <a:t>Click to edit Master title style</a:t>
             </a:r>
-            <a:endParaRPr lang="en-US"/>
           </a:p>
         </p:txBody>
       </p:sp>
@@ -1536,7 +1539,7 @@
           <a:p>
             <a:pPr lvl="0"/>
             <a:r>
-              <a:rPr lang="en-US" smtClean="0"/>
+              <a:rPr lang="en-US"/>
               <a:t>Click to edit Master text styles</a:t>
             </a:r>
           </a:p>
@@ -1592,38 +1595,37 @@
           <a:p>
             <a:pPr lvl="0"/>
             <a:r>
-              <a:rPr lang="en-US" smtClean="0"/>
+              <a:rPr lang="en-US"/>
               <a:t>Click to edit Master text styles</a:t>
             </a:r>
           </a:p>
           <a:p>
             <a:pPr lvl="1"/>
             <a:r>
-              <a:rPr lang="en-US" smtClean="0"/>
+              <a:rPr lang="en-US"/>
               <a:t>Second level</a:t>
             </a:r>
           </a:p>
           <a:p>
             <a:pPr lvl="2"/>
             <a:r>
-              <a:rPr lang="en-US" smtClean="0"/>
+              <a:rPr lang="en-US"/>
               <a:t>Third level</a:t>
             </a:r>
           </a:p>
           <a:p>
             <a:pPr lvl="3"/>
             <a:r>
-              <a:rPr lang="en-US" smtClean="0"/>
+              <a:rPr lang="en-US"/>
               <a:t>Fourth level</a:t>
             </a:r>
           </a:p>
           <a:p>
             <a:pPr lvl="4"/>
             <a:r>
-              <a:rPr lang="en-US" smtClean="0"/>
+              <a:rPr lang="en-US"/>
               <a:t>Fifth level</a:t>
             </a:r>
-            <a:endParaRPr lang="en-US"/>
           </a:p>
         </p:txBody>
       </p:sp>
@@ -1686,7 +1688,7 @@
           <a:p>
             <a:pPr lvl="0"/>
             <a:r>
-              <a:rPr lang="en-US" smtClean="0"/>
+              <a:rPr lang="en-US"/>
               <a:t>Click to edit Master text styles</a:t>
             </a:r>
           </a:p>
@@ -1742,38 +1744,37 @@
           <a:p>
             <a:pPr lvl="0"/>
             <a:r>
-              <a:rPr lang="en-US" smtClean="0"/>
+              <a:rPr lang="en-US"/>
               <a:t>Click to edit Master text styles</a:t>
             </a:r>
           </a:p>
           <a:p>
             <a:pPr lvl="1"/>
             <a:r>
-              <a:rPr lang="en-US" smtClean="0"/>
+              <a:rPr lang="en-US"/>
               <a:t>Second level</a:t>
             </a:r>
           </a:p>
           <a:p>
             <a:pPr lvl="2"/>
             <a:r>
-              <a:rPr lang="en-US" smtClean="0"/>
+              <a:rPr lang="en-US"/>
               <a:t>Third level</a:t>
             </a:r>
           </a:p>
           <a:p>
             <a:pPr lvl="3"/>
             <a:r>
-              <a:rPr lang="en-US" smtClean="0"/>
+              <a:rPr lang="en-US"/>
               <a:t>Fourth level</a:t>
             </a:r>
           </a:p>
           <a:p>
             <a:pPr lvl="4"/>
             <a:r>
-              <a:rPr lang="en-US" smtClean="0"/>
+              <a:rPr lang="en-US"/>
               <a:t>Fifth level</a:t>
             </a:r>
-            <a:endParaRPr lang="en-US"/>
           </a:p>
         </p:txBody>
       </p:sp>
@@ -1794,7 +1795,7 @@
           <a:p>
             <a:fld id="{5BCAD085-E8A6-8845-BD4E-CB4CCA059FC4}" type="datetimeFigureOut">
               <a:rPr lang="en-US" smtClean="0"/>
-              <a:t>1/27/13</a:t>
+              <a:t>9/10/26</a:t>
             </a:fld>
             <a:endParaRPr lang="en-US"/>
           </a:p>
@@ -1836,7 +1837,7 @@
           <a:p>
             <a:fld id="{C1FF6DA9-008F-8B48-92A6-B652298478BF}" type="slidenum">
               <a:rPr lang="en-US" smtClean="0"/>
-              <a:t>‹#›</a:t>
+              <a:t>‹Nr.›</a:t>
             </a:fld>
             <a:endParaRPr lang="en-US"/>
           </a:p>
@@ -1888,10 +1889,9 @@
           <a:lstStyle/>
           <a:p>
             <a:r>
-              <a:rPr lang="en-US" smtClean="0"/>
+              <a:rPr lang="en-US"/>
               <a:t>Click to edit Master title style</a:t>
             </a:r>
-            <a:endParaRPr lang="en-US"/>
           </a:p>
         </p:txBody>
       </p:sp>
@@ -1912,7 +1912,7 @@
           <a:p>
             <a:fld id="{5BCAD085-E8A6-8845-BD4E-CB4CCA059FC4}" type="datetimeFigureOut">
               <a:rPr lang="en-US" smtClean="0"/>
-              <a:t>1/27/13</a:t>
+              <a:t>9/10/26</a:t>
             </a:fld>
             <a:endParaRPr lang="en-US"/>
           </a:p>
@@ -1954,7 +1954,7 @@
           <a:p>
             <a:fld id="{C1FF6DA9-008F-8B48-92A6-B652298478BF}" type="slidenum">
               <a:rPr lang="en-US" smtClean="0"/>
-              <a:t>‹#›</a:t>
+              <a:t>‹Nr.›</a:t>
             </a:fld>
             <a:endParaRPr lang="en-US"/>
           </a:p>
@@ -2007,7 +2007,7 @@
           <a:p>
             <a:fld id="{5BCAD085-E8A6-8845-BD4E-CB4CCA059FC4}" type="datetimeFigureOut">
               <a:rPr lang="en-US" smtClean="0"/>
-              <a:t>1/27/13</a:t>
+              <a:t>9/10/26</a:t>
             </a:fld>
             <a:endParaRPr lang="en-US"/>
           </a:p>
@@ -2049,7 +2049,7 @@
           <a:p>
             <a:fld id="{C1FF6DA9-008F-8B48-92A6-B652298478BF}" type="slidenum">
               <a:rPr lang="en-US" smtClean="0"/>
-              <a:t>‹#›</a:t>
+              <a:t>‹Nr.›</a:t>
             </a:fld>
             <a:endParaRPr lang="en-US"/>
           </a:p>
@@ -2110,10 +2110,9 @@
           </a:lstStyle>
           <a:p>
             <a:r>
-              <a:rPr lang="en-US" smtClean="0"/>
+              <a:rPr lang="en-US"/>
               <a:t>Click to edit Master title style</a:t>
             </a:r>
-            <a:endParaRPr lang="en-US"/>
           </a:p>
         </p:txBody>
       </p:sp>
@@ -2167,38 +2166,37 @@
           <a:p>
             <a:pPr lvl="0"/>
             <a:r>
-              <a:rPr lang="en-US" smtClean="0"/>
+              <a:rPr lang="en-US"/>
               <a:t>Click to edit Master text styles</a:t>
             </a:r>
           </a:p>
           <a:p>
             <a:pPr lvl="1"/>
             <a:r>
-              <a:rPr lang="en-US" smtClean="0"/>
+              <a:rPr lang="en-US"/>
               <a:t>Second level</a:t>
             </a:r>
           </a:p>
           <a:p>
             <a:pPr lvl="2"/>
             <a:r>
-              <a:rPr lang="en-US" smtClean="0"/>
+              <a:rPr lang="en-US"/>
               <a:t>Third level</a:t>
             </a:r>
           </a:p>
           <a:p>
             <a:pPr lvl="3"/>
             <a:r>
-              <a:rPr lang="en-US" smtClean="0"/>
+              <a:rPr lang="en-US"/>
               <a:t>Fourth level</a:t>
             </a:r>
           </a:p>
           <a:p>
             <a:pPr lvl="4"/>
             <a:r>
-              <a:rPr lang="en-US" smtClean="0"/>
+              <a:rPr lang="en-US"/>
               <a:t>Fifth level</a:t>
             </a:r>
-            <a:endParaRPr lang="en-US"/>
           </a:p>
         </p:txBody>
       </p:sp>
@@ -2261,7 +2259,7 @@
           <a:p>
             <a:pPr lvl="0"/>
             <a:r>
-              <a:rPr lang="en-US" smtClean="0"/>
+              <a:rPr lang="en-US"/>
               <a:t>Click to edit Master text styles</a:t>
             </a:r>
           </a:p>
@@ -2284,7 +2282,7 @@
           <a:p>
             <a:fld id="{5BCAD085-E8A6-8845-BD4E-CB4CCA059FC4}" type="datetimeFigureOut">
               <a:rPr lang="en-US" smtClean="0"/>
-              <a:t>1/27/13</a:t>
+              <a:t>9/10/26</a:t>
             </a:fld>
             <a:endParaRPr lang="en-US"/>
           </a:p>
@@ -2326,7 +2324,7 @@
           <a:p>
             <a:fld id="{C1FF6DA9-008F-8B48-92A6-B652298478BF}" type="slidenum">
               <a:rPr lang="en-US" smtClean="0"/>
-              <a:t>‹#›</a:t>
+              <a:t>‹Nr.›</a:t>
             </a:fld>
             <a:endParaRPr lang="en-US"/>
           </a:p>
@@ -2387,10 +2385,9 @@
           </a:lstStyle>
           <a:p>
             <a:r>
-              <a:rPr lang="en-US" smtClean="0"/>
+              <a:rPr lang="en-US"/>
               <a:t>Click to edit Master title style</a:t>
             </a:r>
-            <a:endParaRPr lang="en-US"/>
           </a:p>
         </p:txBody>
       </p:sp>
@@ -2514,7 +2511,7 @@
           <a:p>
             <a:pPr lvl="0"/>
             <a:r>
-              <a:rPr lang="en-US" smtClean="0"/>
+              <a:rPr lang="en-US"/>
               <a:t>Click to edit Master text styles</a:t>
             </a:r>
           </a:p>
@@ -2537,7 +2534,7 @@
           <a:p>
             <a:fld id="{5BCAD085-E8A6-8845-BD4E-CB4CCA059FC4}" type="datetimeFigureOut">
               <a:rPr lang="en-US" smtClean="0"/>
-              <a:t>1/27/13</a:t>
+              <a:t>9/10/26</a:t>
             </a:fld>
             <a:endParaRPr lang="en-US"/>
           </a:p>
@@ -2579,7 +2576,7 @@
           <a:p>
             <a:fld id="{C1FF6DA9-008F-8B48-92A6-B652298478BF}" type="slidenum">
               <a:rPr lang="en-US" smtClean="0"/>
-              <a:t>‹#›</a:t>
+              <a:t>‹Nr.›</a:t>
             </a:fld>
             <a:endParaRPr lang="en-US"/>
           </a:p>
@@ -2646,10 +2643,9 @@
           <a:lstStyle/>
           <a:p>
             <a:r>
-              <a:rPr lang="en-US" smtClean="0"/>
+              <a:rPr lang="en-US"/>
               <a:t>Click to edit Master title style</a:t>
             </a:r>
-            <a:endParaRPr lang="en-US"/>
           </a:p>
         </p:txBody>
       </p:sp>
@@ -2680,38 +2676,37 @@
           <a:p>
             <a:pPr lvl="0"/>
             <a:r>
-              <a:rPr lang="en-US" smtClean="0"/>
+              <a:rPr lang="en-US"/>
               <a:t>Click to edit Master text styles</a:t>
             </a:r>
           </a:p>
           <a:p>
             <a:pPr lvl="1"/>
             <a:r>
-              <a:rPr lang="en-US" smtClean="0"/>
+              <a:rPr lang="en-US"/>
               <a:t>Second level</a:t>
             </a:r>
           </a:p>
           <a:p>
             <a:pPr lvl="2"/>
             <a:r>
-              <a:rPr lang="en-US" smtClean="0"/>
+              <a:rPr lang="en-US"/>
               <a:t>Third level</a:t>
             </a:r>
           </a:p>
           <a:p>
             <a:pPr lvl="3"/>
             <a:r>
-              <a:rPr lang="en-US" smtClean="0"/>
+              <a:rPr lang="en-US"/>
               <a:t>Fourth level</a:t>
             </a:r>
           </a:p>
           <a:p>
             <a:pPr lvl="4"/>
             <a:r>
-              <a:rPr lang="en-US" smtClean="0"/>
+              <a:rPr lang="en-US"/>
               <a:t>Fifth level</a:t>
             </a:r>
-            <a:endParaRPr lang="en-US"/>
           </a:p>
         </p:txBody>
       </p:sp>
@@ -2750,7 +2745,7 @@
           <a:p>
             <a:fld id="{5BCAD085-E8A6-8845-BD4E-CB4CCA059FC4}" type="datetimeFigureOut">
               <a:rPr lang="en-US" smtClean="0"/>
-              <a:t>1/27/13</a:t>
+              <a:t>9/10/26</a:t>
             </a:fld>
             <a:endParaRPr lang="en-US"/>
           </a:p>
@@ -2828,9 +2823,57 @@
           <a:p>
             <a:fld id="{C1FF6DA9-008F-8B48-92A6-B652298478BF}" type="slidenum">
               <a:rPr lang="en-US" smtClean="0"/>
-              <a:t>‹#›</a:t>
+              <a:t>‹Nr.›</a:t>
             </a:fld>
             <a:endParaRPr lang="en-US"/>
+          </a:p>
+        </p:txBody>
+      </p:sp>
+      <p:sp>
+        <p:nvSpPr>
+          <p:cNvPr id="8" name="Textfeld 7">
+            <a:extLst>
+              <a:ext uri="{FF2B5EF4-FFF2-40B4-BE49-F238E27FC236}">
+                <a16:creationId xmlns:a16="http://schemas.microsoft.com/office/drawing/2014/main" id="{2B28A7A1-5F3F-7F0C-856F-3DB32976E01C}"/>
+              </a:ext>
+            </a:extLst>
+          </p:cNvPr>
+          <p:cNvSpPr txBox="1"/>
+          <p:nvPr userDrawn="1">
+            <p:extLst>
+              <p:ext uri="{1162E1C5-73C7-4A58-AE30-91384D911F3F}">
+                <p184:classification xmlns:p184="http://schemas.microsoft.com/office/powerpoint/2018/4/main" val="ftr"/>
+              </p:ext>
+            </p:extLst>
+          </p:nvPr>
+        </p:nvSpPr>
+        <p:spPr>
+          <a:xfrm>
+            <a:off x="10599738" y="6687820"/>
+            <a:ext cx="1546225" cy="106680"/>
+          </a:xfrm>
+          <a:prstGeom prst="rect">
+            <a:avLst/>
+          </a:prstGeom>
+        </p:spPr>
+        <p:txBody>
+          <a:bodyPr horzOverflow="overflow" lIns="0" tIns="0" rIns="0" bIns="0">
+            <a:spAutoFit/>
+          </a:bodyPr>
+          <a:lstStyle/>
+          <a:p>
+            <a:pPr algn="l"/>
+            <a:r>
+              <a:rPr lang="de-DE" sz="700">
+                <a:solidFill>
+                  <a:srgbClr val="000000">
+                    <a:alpha val="50000"/>
+                  </a:srgbClr>
+                </a:solidFill>
+                <a:latin typeface="Aptos" panose="020B0004020202020204" pitchFamily="34" charset="0"/>
+              </a:rPr>
+              <a:t>Klassifizierung: Vertraulich/Confidential</a:t>
+            </a:r>
           </a:p>
         </p:txBody>
       </p:sp>
@@ -3109,7 +3152,7 @@
 </file>
 
 <file path=ppt/slides/slide1.xml><?xml version="1.0" encoding="utf-8"?>
-<p:sld xmlns:a="http://schemas.openxmlformats.org/drawingml/2006/main" xmlns:p="http://schemas.openxmlformats.org/presentationml/2006/main" xmlns:r="http://schemas.openxmlformats.org/officeDocument/2006/relationships">
+<p:sld xmlns:a="http://schemas.openxmlformats.org/drawingml/2006/main" xmlns:r="http://schemas.openxmlformats.org/officeDocument/2006/relationships" xmlns:p="http://schemas.openxmlformats.org/presentationml/2006/main">
   <p:cSld>
     <p:spTree>
       <p:nvGrpSpPr>
@@ -3117,7 +3160,14 @@
         <p:cNvGrpSpPr/>
         <p:nvPr/>
       </p:nvGrpSpPr>
-      <p:grpSpPr/>
+      <p:grpSpPr>
+        <a:xfrm>
+          <a:off x="0" y="0"/>
+          <a:ext cx="0" cy="0"/>
+          <a:chOff x="0" y="0"/>
+          <a:chExt cx="0" cy="0"/>
+        </a:xfrm>
+      </p:grpSpPr>
       <p:sp>
         <p:nvSpPr>
           <p:cNvPr id="2" name="Rectangle 1"/>
@@ -3159,6 +3209,7 @@
           <a:lstStyle/>
           <a:p>
             <a:pPr algn="ctr"/>
+            <a:endParaRPr/>
           </a:p>
         </p:txBody>
       </p:sp>
@@ -3172,14 +3223,15 @@
         </p:nvPicPr>
         <p:blipFill>
           <a:blip r:embed="rId2"/>
+          <a:srcRect r="4352"/>
           <a:stretch>
             <a:fillRect/>
           </a:stretch>
         </p:blipFill>
         <p:spPr>
           <a:xfrm>
-            <a:off x="-580925" y="0"/>
-            <a:ext cx="13353546" cy="6858000"/>
+            <a:off x="-580773" y="0"/>
+            <a:ext cx="12772468" cy="6858000"/>
           </a:xfrm>
           <a:prstGeom prst="rect">
             <a:avLst/>
@@ -3227,6 +3279,7 @@
           <a:lstStyle/>
           <a:p>
             <a:pPr algn="ctr"/>
+            <a:endParaRPr/>
           </a:p>
         </p:txBody>
       </p:sp>
@@ -3247,7 +3300,7 @@
           <a:noFill/>
         </p:spPr>
         <p:txBody>
-          <a:bodyPr wrap="square" anchor="t" lIns="0" rIns="0" tIns="0" bIns="0">
+          <a:bodyPr wrap="square" lIns="0" tIns="0" rIns="0" bIns="0" anchor="t">
             <a:spAutoFit/>
           </a:bodyPr>
           <a:lstStyle/>
@@ -3314,7 +3367,7 @@
           <a:noFill/>
         </p:spPr>
         <p:txBody>
-          <a:bodyPr wrap="square" anchor="t" lIns="0" rIns="0" tIns="0" bIns="0">
+          <a:bodyPr wrap="square" lIns="0" tIns="0" rIns="0" bIns="0" anchor="t">
             <a:spAutoFit/>
           </a:bodyPr>
           <a:lstStyle/>
@@ -3359,7 +3412,7 @@
           <a:noFill/>
         </p:spPr>
         <p:txBody>
-          <a:bodyPr wrap="square" anchor="t" lIns="0" rIns="0" tIns="0" bIns="0">
+          <a:bodyPr wrap="square" lIns="0" tIns="0" rIns="0" bIns="0" anchor="t">
             <a:spAutoFit/>
           </a:bodyPr>
           <a:lstStyle/>
@@ -3404,7 +3457,7 @@
           <a:noFill/>
         </p:spPr>
         <p:txBody>
-          <a:bodyPr wrap="square" anchor="t" lIns="0" rIns="0" tIns="0" bIns="0">
+          <a:bodyPr wrap="square" lIns="0" tIns="0" rIns="0" bIns="0" anchor="t">
             <a:spAutoFit/>
           </a:bodyPr>
           <a:lstStyle/>
@@ -3441,7 +3494,7 @@
 </file>
 
 <file path=ppt/slides/slide10.xml><?xml version="1.0" encoding="utf-8"?>
-<p:sld xmlns:a="http://schemas.openxmlformats.org/drawingml/2006/main" xmlns:p="http://schemas.openxmlformats.org/presentationml/2006/main" xmlns:r="http://schemas.openxmlformats.org/officeDocument/2006/relationships">
+<p:sld xmlns:a="http://schemas.openxmlformats.org/drawingml/2006/main" xmlns:r="http://schemas.openxmlformats.org/officeDocument/2006/relationships" xmlns:p="http://schemas.openxmlformats.org/presentationml/2006/main">
   <p:cSld>
     <p:spTree>
       <p:nvGrpSpPr>
@@ -3449,7 +3502,14 @@
         <p:cNvGrpSpPr/>
         <p:nvPr/>
       </p:nvGrpSpPr>
-      <p:grpSpPr/>
+      <p:grpSpPr>
+        <a:xfrm>
+          <a:off x="0" y="0"/>
+          <a:ext cx="0" cy="0"/>
+          <a:chOff x="0" y="0"/>
+          <a:chExt cx="0" cy="0"/>
+        </a:xfrm>
+      </p:grpSpPr>
       <p:sp>
         <p:nvSpPr>
           <p:cNvPr id="2" name="Rectangle 1"/>
@@ -3491,6 +3551,7 @@
           <a:lstStyle/>
           <a:p>
             <a:pPr algn="ctr"/>
+            <a:endParaRPr/>
           </a:p>
         </p:txBody>
       </p:sp>
@@ -3535,6 +3596,7 @@
           <a:lstStyle/>
           <a:p>
             <a:pPr algn="ctr"/>
+            <a:endParaRPr/>
           </a:p>
         </p:txBody>
       </p:sp>
@@ -3555,7 +3617,7 @@
           <a:noFill/>
         </p:spPr>
         <p:txBody>
-          <a:bodyPr wrap="square" anchor="t" lIns="0" rIns="0" tIns="0" bIns="0">
+          <a:bodyPr wrap="square" lIns="0" tIns="0" rIns="0" bIns="0" anchor="t">
             <a:spAutoFit/>
           </a:bodyPr>
           <a:lstStyle/>
@@ -3600,7 +3662,7 @@
           <a:noFill/>
         </p:spPr>
         <p:txBody>
-          <a:bodyPr wrap="square" anchor="t" lIns="0" rIns="0" tIns="0" bIns="0">
+          <a:bodyPr wrap="square" lIns="0" tIns="0" rIns="0" bIns="0" anchor="t">
             <a:spAutoFit/>
           </a:bodyPr>
           <a:lstStyle/>
@@ -3645,7 +3707,7 @@
           <a:noFill/>
         </p:spPr>
         <p:txBody>
-          <a:bodyPr wrap="square" anchor="t" lIns="0" rIns="0" tIns="0" bIns="0">
+          <a:bodyPr wrap="square" lIns="0" tIns="0" rIns="0" bIns="0" anchor="t">
             <a:spAutoFit/>
           </a:bodyPr>
           <a:lstStyle/>
@@ -3690,7 +3752,7 @@
           <a:noFill/>
         </p:spPr>
         <p:txBody>
-          <a:bodyPr wrap="square" anchor="t" lIns="0" rIns="0" tIns="0" bIns="0">
+          <a:bodyPr wrap="square" lIns="0" tIns="0" rIns="0" bIns="0" anchor="t">
             <a:spAutoFit/>
           </a:bodyPr>
           <a:lstStyle/>
@@ -3833,7 +3895,7 @@
           <a:noFill/>
         </p:spPr>
         <p:txBody>
-          <a:bodyPr wrap="square" anchor="t" lIns="0" rIns="0" tIns="0" bIns="0">
+          <a:bodyPr wrap="square" lIns="0" tIns="0" rIns="0" bIns="0" anchor="t">
             <a:spAutoFit/>
           </a:bodyPr>
           <a:lstStyle/>
@@ -3896,7 +3958,7 @@
           <a:noFill/>
         </p:spPr>
         <p:txBody>
-          <a:bodyPr wrap="square" anchor="t" lIns="0" rIns="0" tIns="0" bIns="0">
+          <a:bodyPr wrap="square" lIns="0" tIns="0" rIns="0" bIns="0" anchor="t">
             <a:spAutoFit/>
           </a:bodyPr>
           <a:lstStyle/>
@@ -3933,7 +3995,7 @@
 </file>
 
 <file path=ppt/slides/slide11.xml><?xml version="1.0" encoding="utf-8"?>
-<p:sld xmlns:a="http://schemas.openxmlformats.org/drawingml/2006/main" xmlns:p="http://schemas.openxmlformats.org/presentationml/2006/main" xmlns:r="http://schemas.openxmlformats.org/officeDocument/2006/relationships">
+<p:sld xmlns:a="http://schemas.openxmlformats.org/drawingml/2006/main" xmlns:r="http://schemas.openxmlformats.org/officeDocument/2006/relationships" xmlns:p="http://schemas.openxmlformats.org/presentationml/2006/main">
   <p:cSld>
     <p:spTree>
       <p:nvGrpSpPr>
@@ -3941,7 +4003,14 @@
         <p:cNvGrpSpPr/>
         <p:nvPr/>
       </p:nvGrpSpPr>
-      <p:grpSpPr/>
+      <p:grpSpPr>
+        <a:xfrm>
+          <a:off x="0" y="0"/>
+          <a:ext cx="0" cy="0"/>
+          <a:chOff x="0" y="0"/>
+          <a:chExt cx="0" cy="0"/>
+        </a:xfrm>
+      </p:grpSpPr>
       <p:sp>
         <p:nvSpPr>
           <p:cNvPr id="2" name="Rectangle 1"/>
@@ -3983,6 +4052,7 @@
           <a:lstStyle/>
           <a:p>
             <a:pPr algn="ctr"/>
+            <a:endParaRPr/>
           </a:p>
         </p:txBody>
       </p:sp>
@@ -4027,6 +4097,7 @@
           <a:lstStyle/>
           <a:p>
             <a:pPr algn="ctr"/>
+            <a:endParaRPr/>
           </a:p>
         </p:txBody>
       </p:sp>
@@ -4071,6 +4142,7 @@
           <a:lstStyle/>
           <a:p>
             <a:pPr algn="ctr"/>
+            <a:endParaRPr/>
           </a:p>
         </p:txBody>
       </p:sp>
@@ -4115,6 +4187,7 @@
           <a:lstStyle/>
           <a:p>
             <a:pPr algn="ctr"/>
+            <a:endParaRPr/>
           </a:p>
         </p:txBody>
       </p:sp>
@@ -4159,6 +4232,7 @@
           <a:lstStyle/>
           <a:p>
             <a:pPr algn="ctr"/>
+            <a:endParaRPr/>
           </a:p>
         </p:txBody>
       </p:sp>
@@ -4203,6 +4277,7 @@
           <a:lstStyle/>
           <a:p>
             <a:pPr algn="ctr"/>
+            <a:endParaRPr/>
           </a:p>
         </p:txBody>
       </p:sp>
@@ -4247,6 +4322,7 @@
           <a:lstStyle/>
           <a:p>
             <a:pPr algn="ctr"/>
+            <a:endParaRPr/>
           </a:p>
         </p:txBody>
       </p:sp>
@@ -4291,6 +4367,7 @@
           <a:lstStyle/>
           <a:p>
             <a:pPr algn="ctr"/>
+            <a:endParaRPr/>
           </a:p>
         </p:txBody>
       </p:sp>
@@ -4335,6 +4412,7 @@
           <a:lstStyle/>
           <a:p>
             <a:pPr algn="ctr"/>
+            <a:endParaRPr/>
           </a:p>
         </p:txBody>
       </p:sp>
@@ -4379,6 +4457,7 @@
           <a:lstStyle/>
           <a:p>
             <a:pPr algn="ctr"/>
+            <a:endParaRPr/>
           </a:p>
         </p:txBody>
       </p:sp>
@@ -4423,6 +4502,7 @@
           <a:lstStyle/>
           <a:p>
             <a:pPr algn="ctr"/>
+            <a:endParaRPr/>
           </a:p>
         </p:txBody>
       </p:sp>
@@ -4467,6 +4547,7 @@
           <a:lstStyle/>
           <a:p>
             <a:pPr algn="ctr"/>
+            <a:endParaRPr/>
           </a:p>
         </p:txBody>
       </p:sp>
@@ -4511,6 +4592,7 @@
           <a:lstStyle/>
           <a:p>
             <a:pPr algn="ctr"/>
+            <a:endParaRPr/>
           </a:p>
         </p:txBody>
       </p:sp>
@@ -4555,6 +4637,7 @@
           <a:lstStyle/>
           <a:p>
             <a:pPr algn="ctr"/>
+            <a:endParaRPr/>
           </a:p>
         </p:txBody>
       </p:sp>
@@ -4599,6 +4682,7 @@
           <a:lstStyle/>
           <a:p>
             <a:pPr algn="ctr"/>
+            <a:endParaRPr/>
           </a:p>
         </p:txBody>
       </p:sp>
@@ -4643,6 +4727,7 @@
           <a:lstStyle/>
           <a:p>
             <a:pPr algn="ctr"/>
+            <a:endParaRPr/>
           </a:p>
         </p:txBody>
       </p:sp>
@@ -4687,6 +4772,7 @@
           <a:lstStyle/>
           <a:p>
             <a:pPr algn="ctr"/>
+            <a:endParaRPr/>
           </a:p>
         </p:txBody>
       </p:sp>
@@ -4731,6 +4817,7 @@
           <a:lstStyle/>
           <a:p>
             <a:pPr algn="ctr"/>
+            <a:endParaRPr/>
           </a:p>
         </p:txBody>
       </p:sp>
@@ -4775,6 +4862,7 @@
           <a:lstStyle/>
           <a:p>
             <a:pPr algn="ctr"/>
+            <a:endParaRPr/>
           </a:p>
         </p:txBody>
       </p:sp>
@@ -4819,6 +4907,7 @@
           <a:lstStyle/>
           <a:p>
             <a:pPr algn="ctr"/>
+            <a:endParaRPr/>
           </a:p>
         </p:txBody>
       </p:sp>
@@ -4863,6 +4952,7 @@
           <a:lstStyle/>
           <a:p>
             <a:pPr algn="ctr"/>
+            <a:endParaRPr/>
           </a:p>
         </p:txBody>
       </p:sp>
@@ -4907,6 +4997,7 @@
           <a:lstStyle/>
           <a:p>
             <a:pPr algn="ctr"/>
+            <a:endParaRPr/>
           </a:p>
         </p:txBody>
       </p:sp>
@@ -4951,6 +5042,7 @@
           <a:lstStyle/>
           <a:p>
             <a:pPr algn="ctr"/>
+            <a:endParaRPr/>
           </a:p>
         </p:txBody>
       </p:sp>
@@ -4995,6 +5087,7 @@
           <a:lstStyle/>
           <a:p>
             <a:pPr algn="ctr"/>
+            <a:endParaRPr/>
           </a:p>
         </p:txBody>
       </p:sp>
@@ -5039,6 +5132,7 @@
           <a:lstStyle/>
           <a:p>
             <a:pPr algn="ctr"/>
+            <a:endParaRPr/>
           </a:p>
         </p:txBody>
       </p:sp>
@@ -5083,6 +5177,7 @@
           <a:lstStyle/>
           <a:p>
             <a:pPr algn="ctr"/>
+            <a:endParaRPr/>
           </a:p>
         </p:txBody>
       </p:sp>
@@ -5127,6 +5222,7 @@
           <a:lstStyle/>
           <a:p>
             <a:pPr algn="ctr"/>
+            <a:endParaRPr/>
           </a:p>
         </p:txBody>
       </p:sp>
@@ -5171,6 +5267,7 @@
           <a:lstStyle/>
           <a:p>
             <a:pPr algn="ctr"/>
+            <a:endParaRPr/>
           </a:p>
         </p:txBody>
       </p:sp>
@@ -5215,6 +5312,7 @@
           <a:lstStyle/>
           <a:p>
             <a:pPr algn="ctr"/>
+            <a:endParaRPr/>
           </a:p>
         </p:txBody>
       </p:sp>
@@ -5259,6 +5357,7 @@
           <a:lstStyle/>
           <a:p>
             <a:pPr algn="ctr"/>
+            <a:endParaRPr/>
           </a:p>
         </p:txBody>
       </p:sp>
@@ -5303,6 +5402,7 @@
           <a:lstStyle/>
           <a:p>
             <a:pPr algn="ctr"/>
+            <a:endParaRPr/>
           </a:p>
         </p:txBody>
       </p:sp>
@@ -5347,6 +5447,7 @@
           <a:lstStyle/>
           <a:p>
             <a:pPr algn="ctr"/>
+            <a:endParaRPr/>
           </a:p>
         </p:txBody>
       </p:sp>
@@ -5391,6 +5492,7 @@
           <a:lstStyle/>
           <a:p>
             <a:pPr algn="ctr"/>
+            <a:endParaRPr/>
           </a:p>
         </p:txBody>
       </p:sp>
@@ -5435,6 +5537,7 @@
           <a:lstStyle/>
           <a:p>
             <a:pPr algn="ctr"/>
+            <a:endParaRPr/>
           </a:p>
         </p:txBody>
       </p:sp>
@@ -5479,6 +5582,7 @@
           <a:lstStyle/>
           <a:p>
             <a:pPr algn="ctr"/>
+            <a:endParaRPr/>
           </a:p>
         </p:txBody>
       </p:sp>
@@ -5523,6 +5627,7 @@
           <a:lstStyle/>
           <a:p>
             <a:pPr algn="ctr"/>
+            <a:endParaRPr/>
           </a:p>
         </p:txBody>
       </p:sp>
@@ -5567,6 +5672,7 @@
           <a:lstStyle/>
           <a:p>
             <a:pPr algn="ctr"/>
+            <a:endParaRPr/>
           </a:p>
         </p:txBody>
       </p:sp>
@@ -5611,6 +5717,7 @@
           <a:lstStyle/>
           <a:p>
             <a:pPr algn="ctr"/>
+            <a:endParaRPr/>
           </a:p>
         </p:txBody>
       </p:sp>
@@ -5655,6 +5762,7 @@
           <a:lstStyle/>
           <a:p>
             <a:pPr algn="ctr"/>
+            <a:endParaRPr/>
           </a:p>
         </p:txBody>
       </p:sp>
@@ -5699,6 +5807,7 @@
           <a:lstStyle/>
           <a:p>
             <a:pPr algn="ctr"/>
+            <a:endParaRPr/>
           </a:p>
         </p:txBody>
       </p:sp>
@@ -5743,6 +5852,7 @@
           <a:lstStyle/>
           <a:p>
             <a:pPr algn="ctr"/>
+            <a:endParaRPr/>
           </a:p>
         </p:txBody>
       </p:sp>
@@ -5787,6 +5897,7 @@
           <a:lstStyle/>
           <a:p>
             <a:pPr algn="ctr"/>
+            <a:endParaRPr/>
           </a:p>
         </p:txBody>
       </p:sp>
@@ -5831,6 +5942,7 @@
           <a:lstStyle/>
           <a:p>
             <a:pPr algn="ctr"/>
+            <a:endParaRPr/>
           </a:p>
         </p:txBody>
       </p:sp>
@@ -5875,6 +5987,7 @@
           <a:lstStyle/>
           <a:p>
             <a:pPr algn="ctr"/>
+            <a:endParaRPr/>
           </a:p>
         </p:txBody>
       </p:sp>
@@ -5919,6 +6032,7 @@
           <a:lstStyle/>
           <a:p>
             <a:pPr algn="ctr"/>
+            <a:endParaRPr/>
           </a:p>
         </p:txBody>
       </p:sp>
@@ -5939,7 +6053,7 @@
           <a:noFill/>
         </p:spPr>
         <p:txBody>
-          <a:bodyPr wrap="square" anchor="t" lIns="0" rIns="0" tIns="0" bIns="0">
+          <a:bodyPr wrap="square" lIns="0" tIns="0" rIns="0" bIns="0" anchor="t">
             <a:spAutoFit/>
           </a:bodyPr>
           <a:lstStyle/>
@@ -5984,7 +6098,7 @@
           <a:noFill/>
         </p:spPr>
         <p:txBody>
-          <a:bodyPr wrap="square" anchor="t" lIns="0" rIns="0" tIns="0" bIns="0">
+          <a:bodyPr wrap="square" lIns="0" tIns="0" rIns="0" bIns="0" anchor="t">
             <a:spAutoFit/>
           </a:bodyPr>
           <a:lstStyle/>
@@ -6029,7 +6143,7 @@
           <a:noFill/>
         </p:spPr>
         <p:txBody>
-          <a:bodyPr wrap="square" anchor="t" lIns="0" rIns="0" tIns="0" bIns="0">
+          <a:bodyPr wrap="square" lIns="0" tIns="0" rIns="0" bIns="0" anchor="t">
             <a:spAutoFit/>
           </a:bodyPr>
           <a:lstStyle/>
@@ -6074,7 +6188,7 @@
           <a:noFill/>
         </p:spPr>
         <p:txBody>
-          <a:bodyPr wrap="square" anchor="t" lIns="0" rIns="0" tIns="0" bIns="0">
+          <a:bodyPr wrap="square" lIns="0" tIns="0" rIns="0" bIns="0" anchor="t">
             <a:spAutoFit/>
           </a:bodyPr>
           <a:lstStyle/>
@@ -6111,7 +6225,7 @@
 </file>
 
 <file path=ppt/slides/slide12.xml><?xml version="1.0" encoding="utf-8"?>
-<p:sld xmlns:a="http://schemas.openxmlformats.org/drawingml/2006/main" xmlns:p="http://schemas.openxmlformats.org/presentationml/2006/main" xmlns:r="http://schemas.openxmlformats.org/officeDocument/2006/relationships">
+<p:sld xmlns:a="http://schemas.openxmlformats.org/drawingml/2006/main" xmlns:r="http://schemas.openxmlformats.org/officeDocument/2006/relationships" xmlns:p="http://schemas.openxmlformats.org/presentationml/2006/main">
   <p:cSld>
     <p:spTree>
       <p:nvGrpSpPr>
@@ -6119,7 +6233,14 @@
         <p:cNvGrpSpPr/>
         <p:nvPr/>
       </p:nvGrpSpPr>
-      <p:grpSpPr/>
+      <p:grpSpPr>
+        <a:xfrm>
+          <a:off x="0" y="0"/>
+          <a:ext cx="0" cy="0"/>
+          <a:chOff x="0" y="0"/>
+          <a:chExt cx="0" cy="0"/>
+        </a:xfrm>
+      </p:grpSpPr>
       <p:sp>
         <p:nvSpPr>
           <p:cNvPr id="2" name="Rectangle 1"/>
@@ -6161,6 +6282,7 @@
           <a:lstStyle/>
           <a:p>
             <a:pPr algn="ctr"/>
+            <a:endParaRPr/>
           </a:p>
         </p:txBody>
       </p:sp>
@@ -6205,6 +6327,7 @@
           <a:lstStyle/>
           <a:p>
             <a:pPr algn="ctr"/>
+            <a:endParaRPr/>
           </a:p>
         </p:txBody>
       </p:sp>
@@ -6225,7 +6348,7 @@
           <a:noFill/>
         </p:spPr>
         <p:txBody>
-          <a:bodyPr wrap="square" anchor="t" lIns="0" rIns="0" tIns="0" bIns="0">
+          <a:bodyPr wrap="square" lIns="0" tIns="0" rIns="0" bIns="0" anchor="t">
             <a:spAutoFit/>
           </a:bodyPr>
           <a:lstStyle/>
@@ -6270,7 +6393,7 @@
           <a:noFill/>
         </p:spPr>
         <p:txBody>
-          <a:bodyPr wrap="square" anchor="t" lIns="0" rIns="0" tIns="0" bIns="0">
+          <a:bodyPr wrap="square" lIns="0" tIns="0" rIns="0" bIns="0" anchor="t">
             <a:spAutoFit/>
           </a:bodyPr>
           <a:lstStyle/>
@@ -6315,7 +6438,7 @@
           <a:noFill/>
         </p:spPr>
         <p:txBody>
-          <a:bodyPr wrap="square" anchor="t" lIns="0" rIns="0" tIns="0" bIns="0">
+          <a:bodyPr wrap="square" lIns="0" tIns="0" rIns="0" bIns="0" anchor="t">
             <a:spAutoFit/>
           </a:bodyPr>
           <a:lstStyle/>
@@ -6445,42 +6568,6 @@
           </a:p>
         </p:txBody>
       </p:sp>
-      <p:pic>
-        <p:nvPicPr>
-          <p:cNvPr id="7" name="Picture 6" descr="cc_full_page.png"/>
-          <p:cNvPicPr>
-            <a:picLocks noChangeAspect="1"/>
-          </p:cNvPicPr>
-          <p:nvPr/>
-        </p:nvPicPr>
-        <p:blipFill>
-          <a:blip r:embed="rId2"/>
-          <a:stretch>
-            <a:fillRect/>
-          </a:stretch>
-        </p:blipFill>
-        <p:spPr>
-          <a:xfrm>
-            <a:off x="6796735" y="225456"/>
-            <a:ext cx="5074920" cy="6407086"/>
-          </a:xfrm>
-          <a:prstGeom prst="rect">
-            <a:avLst/>
-          </a:prstGeom>
-          <a:ln w="12700">
-            <a:solidFill>
-              <a:srgbClr val="D8E0EC"/>
-            </a:solidFill>
-          </a:ln>
-          <a:effectLst>
-            <a:outerShdw blurRad="90000" dist="34000" dir="5400000" rotWithShape="0">
-              <a:srgbClr val="0B1026">
-                <a:alpha val="20000"/>
-              </a:srgbClr>
-            </a:outerShdw>
-          </a:effectLst>
-        </p:spPr>
-      </p:pic>
       <p:sp>
         <p:nvSpPr>
           <p:cNvPr id="8" name="TextBox 7"/>
@@ -6498,7 +6585,7 @@
           <a:noFill/>
         </p:spPr>
         <p:txBody>
-          <a:bodyPr wrap="square" anchor="t" lIns="0" rIns="0" tIns="0" bIns="0">
+          <a:bodyPr wrap="square" lIns="0" tIns="0" rIns="0" bIns="0" anchor="t">
             <a:spAutoFit/>
           </a:bodyPr>
           <a:lstStyle/>
@@ -6526,6 +6613,48 @@
           </a:p>
         </p:txBody>
       </p:sp>
+      <p:pic>
+        <p:nvPicPr>
+          <p:cNvPr id="9" name="Picture 7" descr="cc_full_page.png">
+            <a:extLst>
+              <a:ext uri="{FF2B5EF4-FFF2-40B4-BE49-F238E27FC236}">
+                <a16:creationId xmlns:a16="http://schemas.microsoft.com/office/drawing/2014/main" id="{B8930D96-151B-222F-9C0E-A9741919E212}"/>
+              </a:ext>
+            </a:extLst>
+          </p:cNvPr>
+          <p:cNvPicPr>
+            <a:picLocks noChangeAspect="1"/>
+          </p:cNvPicPr>
+          <p:nvPr/>
+        </p:nvPicPr>
+        <p:blipFill>
+          <a:blip r:embed="rId2"/>
+          <a:stretch>
+            <a:fillRect/>
+          </a:stretch>
+        </p:blipFill>
+        <p:spPr>
+          <a:xfrm>
+            <a:off x="6720840" y="0"/>
+            <a:ext cx="5471160" cy="6907339"/>
+          </a:xfrm>
+          <a:prstGeom prst="rect">
+            <a:avLst/>
+          </a:prstGeom>
+          <a:ln w="12700">
+            <a:solidFill>
+              <a:srgbClr val="D8E0EC"/>
+            </a:solidFill>
+          </a:ln>
+          <a:effectLst>
+            <a:outerShdw blurRad="90000" dist="34000" dir="5400000" rotWithShape="0">
+              <a:srgbClr val="0B1026">
+                <a:alpha val="20000"/>
+              </a:srgbClr>
+            </a:outerShdw>
+          </a:effectLst>
+        </p:spPr>
+      </p:pic>
     </p:spTree>
   </p:cSld>
   <p:clrMapOvr>
@@ -6535,7 +6664,7 @@
 </file>
 
 <file path=ppt/slides/slide13.xml><?xml version="1.0" encoding="utf-8"?>
-<p:sld xmlns:a="http://schemas.openxmlformats.org/drawingml/2006/main" xmlns:p="http://schemas.openxmlformats.org/presentationml/2006/main" xmlns:r="http://schemas.openxmlformats.org/officeDocument/2006/relationships">
+<p:sld xmlns:a="http://schemas.openxmlformats.org/drawingml/2006/main" xmlns:r="http://schemas.openxmlformats.org/officeDocument/2006/relationships" xmlns:p="http://schemas.openxmlformats.org/presentationml/2006/main">
   <p:cSld>
     <p:spTree>
       <p:nvGrpSpPr>
@@ -6543,7 +6672,14 @@
         <p:cNvGrpSpPr/>
         <p:nvPr/>
       </p:nvGrpSpPr>
-      <p:grpSpPr/>
+      <p:grpSpPr>
+        <a:xfrm>
+          <a:off x="0" y="0"/>
+          <a:ext cx="0" cy="0"/>
+          <a:chOff x="0" y="0"/>
+          <a:chExt cx="0" cy="0"/>
+        </a:xfrm>
+      </p:grpSpPr>
       <p:sp>
         <p:nvSpPr>
           <p:cNvPr id="2" name="Rectangle 1"/>
@@ -6585,6 +6721,7 @@
           <a:lstStyle/>
           <a:p>
             <a:pPr algn="ctr"/>
+            <a:endParaRPr/>
           </a:p>
         </p:txBody>
       </p:sp>
@@ -6629,6 +6766,7 @@
           <a:lstStyle/>
           <a:p>
             <a:pPr algn="ctr"/>
+            <a:endParaRPr/>
           </a:p>
         </p:txBody>
       </p:sp>
@@ -6649,7 +6787,7 @@
           <a:noFill/>
         </p:spPr>
         <p:txBody>
-          <a:bodyPr wrap="square" anchor="t" lIns="0" rIns="0" tIns="0" bIns="0">
+          <a:bodyPr wrap="square" lIns="0" tIns="0" rIns="0" bIns="0" anchor="t">
             <a:spAutoFit/>
           </a:bodyPr>
           <a:lstStyle/>
@@ -6694,7 +6832,7 @@
           <a:noFill/>
         </p:spPr>
         <p:txBody>
-          <a:bodyPr wrap="square" anchor="t" lIns="0" rIns="0" tIns="0" bIns="0">
+          <a:bodyPr wrap="square" lIns="0" tIns="0" rIns="0" bIns="0" anchor="t">
             <a:spAutoFit/>
           </a:bodyPr>
           <a:lstStyle/>
@@ -6739,7 +6877,7 @@
           <a:noFill/>
         </p:spPr>
         <p:txBody>
-          <a:bodyPr wrap="square" anchor="t" lIns="0" rIns="0" tIns="0" bIns="0">
+          <a:bodyPr wrap="square" lIns="0" tIns="0" rIns="0" bIns="0" anchor="t">
             <a:spAutoFit/>
           </a:bodyPr>
           <a:lstStyle/>
@@ -6776,7 +6914,7 @@
         <p:spPr>
           <a:xfrm>
             <a:off x="640080" y="4572000"/>
-            <a:ext cx="5943600" cy="1828800"/>
+            <a:ext cx="5548069" cy="1246047"/>
           </a:xfrm>
           <a:prstGeom prst="rect">
             <a:avLst/>
@@ -6784,7 +6922,7 @@
           <a:noFill/>
         </p:spPr>
         <p:txBody>
-          <a:bodyPr wrap="square" anchor="t" lIns="0" rIns="0" tIns="0" bIns="0">
+          <a:bodyPr wrap="square" lIns="0" tIns="0" rIns="0" bIns="0" anchor="t">
             <a:spAutoFit/>
           </a:bodyPr>
           <a:lstStyle/>
@@ -6801,7 +6939,7 @@
               </a:spcAft>
             </a:pPr>
             <a:r>
-              <a:rPr sz="2100" b="1" i="0">
+              <a:rPr sz="2100" b="1" i="0" dirty="0">
                 <a:solidFill>
                   <a:srgbClr val="4EA8DE"/>
                 </a:solidFill>
@@ -6810,13 +6948,22 @@
               <a:t>▸  </a:t>
             </a:r>
             <a:r>
-              <a:rPr sz="2100" b="0" i="0">
+              <a:rPr sz="2100" b="0" i="0" dirty="0" err="1">
                 <a:solidFill>
                   <a:srgbClr val="182030"/>
                 </a:solidFill>
                 <a:latin typeface="Calibri"/>
               </a:rPr>
-              <a:t>http.server on :8765, polled every 1–2 s.</a:t>
+              <a:t>http.server</a:t>
+            </a:r>
+            <a:r>
+              <a:rPr sz="2100" b="0" i="0" dirty="0">
+                <a:solidFill>
+                  <a:srgbClr val="182030"/>
+                </a:solidFill>
+                <a:latin typeface="Calibri"/>
+              </a:rPr>
+              <a:t> on :8765, polled every 1–2 s.</a:t>
             </a:r>
           </a:p>
           <a:p>
@@ -6832,7 +6979,7 @@
               </a:spcAft>
             </a:pPr>
             <a:r>
-              <a:rPr sz="2100" b="1" i="0">
+              <a:rPr sz="2100" b="1" i="0" dirty="0">
                 <a:solidFill>
                   <a:srgbClr val="4EA8DE"/>
                 </a:solidFill>
@@ -6841,7 +6988,7 @@
               <a:t>▸  </a:t>
             </a:r>
             <a:r>
-              <a:rPr sz="2100" b="0" i="0">
+              <a:rPr sz="2100" b="0" i="0" dirty="0">
                 <a:solidFill>
                   <a:srgbClr val="182030"/>
                 </a:solidFill>
@@ -6868,8 +7015,8 @@
         </p:blipFill>
         <p:spPr>
           <a:xfrm>
-            <a:off x="6796735" y="225456"/>
-            <a:ext cx="5074920" cy="6407086"/>
+            <a:off x="6720840" y="0"/>
+            <a:ext cx="5471160" cy="6907339"/>
           </a:xfrm>
           <a:prstGeom prst="rect">
             <a:avLst/>
@@ -6905,7 +7052,7 @@
           <a:noFill/>
         </p:spPr>
         <p:txBody>
-          <a:bodyPr wrap="square" anchor="t" lIns="0" rIns="0" tIns="0" bIns="0">
+          <a:bodyPr wrap="square" lIns="0" tIns="0" rIns="0" bIns="0" anchor="t">
             <a:spAutoFit/>
           </a:bodyPr>
           <a:lstStyle/>
@@ -6942,7 +7089,7 @@
 </file>
 
 <file path=ppt/slides/slide14.xml><?xml version="1.0" encoding="utf-8"?>
-<p:sld xmlns:a="http://schemas.openxmlformats.org/drawingml/2006/main" xmlns:p="http://schemas.openxmlformats.org/presentationml/2006/main" xmlns:r="http://schemas.openxmlformats.org/officeDocument/2006/relationships">
+<p:sld xmlns:a="http://schemas.openxmlformats.org/drawingml/2006/main" xmlns:r="http://schemas.openxmlformats.org/officeDocument/2006/relationships" xmlns:p="http://schemas.openxmlformats.org/presentationml/2006/main">
   <p:cSld>
     <p:spTree>
       <p:nvGrpSpPr>
@@ -6950,7 +7097,14 @@
         <p:cNvGrpSpPr/>
         <p:nvPr/>
       </p:nvGrpSpPr>
-      <p:grpSpPr/>
+      <p:grpSpPr>
+        <a:xfrm>
+          <a:off x="0" y="0"/>
+          <a:ext cx="0" cy="0"/>
+          <a:chOff x="0" y="0"/>
+          <a:chExt cx="0" cy="0"/>
+        </a:xfrm>
+      </p:grpSpPr>
       <p:sp>
         <p:nvSpPr>
           <p:cNvPr id="2" name="Rectangle 1"/>
@@ -6992,6 +7146,7 @@
           <a:lstStyle/>
           <a:p>
             <a:pPr algn="ctr"/>
+            <a:endParaRPr/>
           </a:p>
         </p:txBody>
       </p:sp>
@@ -7036,6 +7191,7 @@
           <a:lstStyle/>
           <a:p>
             <a:pPr algn="ctr"/>
+            <a:endParaRPr/>
           </a:p>
         </p:txBody>
       </p:sp>
@@ -7056,7 +7212,7 @@
           <a:noFill/>
         </p:spPr>
         <p:txBody>
-          <a:bodyPr wrap="square" anchor="t" lIns="0" rIns="0" tIns="0" bIns="0">
+          <a:bodyPr wrap="square" lIns="0" tIns="0" rIns="0" bIns="0" anchor="t">
             <a:spAutoFit/>
           </a:bodyPr>
           <a:lstStyle/>
@@ -7101,7 +7257,7 @@
           <a:noFill/>
         </p:spPr>
         <p:txBody>
-          <a:bodyPr wrap="square" anchor="t" lIns="0" rIns="0" tIns="0" bIns="0">
+          <a:bodyPr wrap="square" lIns="0" tIns="0" rIns="0" bIns="0" anchor="t">
             <a:spAutoFit/>
           </a:bodyPr>
           <a:lstStyle/>
@@ -7170,6 +7326,7 @@
           <a:lstStyle/>
           <a:p>
             <a:pPr algn="ctr"/>
+            <a:endParaRPr/>
           </a:p>
         </p:txBody>
       </p:sp>
@@ -7190,7 +7347,7 @@
           <a:noFill/>
         </p:spPr>
         <p:txBody>
-          <a:bodyPr wrap="square" anchor="t" lIns="0" rIns="0" tIns="0" bIns="0">
+          <a:bodyPr wrap="square" lIns="0" tIns="0" rIns="0" bIns="0" anchor="t">
             <a:spAutoFit/>
           </a:bodyPr>
           <a:lstStyle/>
@@ -7268,6 +7425,7 @@
           <a:lstStyle/>
           <a:p>
             <a:pPr algn="ctr"/>
+            <a:endParaRPr/>
           </a:p>
         </p:txBody>
       </p:sp>
@@ -7288,7 +7446,7 @@
           <a:noFill/>
         </p:spPr>
         <p:txBody>
-          <a:bodyPr wrap="square" anchor="t" lIns="0" rIns="0" tIns="0" bIns="0">
+          <a:bodyPr wrap="square" lIns="0" tIns="0" rIns="0" bIns="0" anchor="t">
             <a:spAutoFit/>
           </a:bodyPr>
           <a:lstStyle/>
@@ -7366,6 +7524,7 @@
           <a:lstStyle/>
           <a:p>
             <a:pPr algn="ctr"/>
+            <a:endParaRPr/>
           </a:p>
         </p:txBody>
       </p:sp>
@@ -7386,7 +7545,7 @@
           <a:noFill/>
         </p:spPr>
         <p:txBody>
-          <a:bodyPr wrap="square" anchor="t" lIns="0" rIns="0" tIns="0" bIns="0">
+          <a:bodyPr wrap="square" lIns="0" tIns="0" rIns="0" bIns="0" anchor="t">
             <a:spAutoFit/>
           </a:bodyPr>
           <a:lstStyle/>
@@ -7464,6 +7623,7 @@
           <a:lstStyle/>
           <a:p>
             <a:pPr algn="ctr"/>
+            <a:endParaRPr/>
           </a:p>
         </p:txBody>
       </p:sp>
@@ -7484,7 +7644,7 @@
           <a:noFill/>
         </p:spPr>
         <p:txBody>
-          <a:bodyPr wrap="square" anchor="t" lIns="0" rIns="0" tIns="0" bIns="0">
+          <a:bodyPr wrap="square" lIns="0" tIns="0" rIns="0" bIns="0" anchor="t">
             <a:spAutoFit/>
           </a:bodyPr>
           <a:lstStyle/>
@@ -7538,7 +7698,7 @@
           <a:noFill/>
         </p:spPr>
         <p:txBody>
-          <a:bodyPr wrap="square" anchor="t" lIns="0" rIns="0" tIns="0" bIns="0">
+          <a:bodyPr wrap="square" lIns="0" tIns="0" rIns="0" bIns="0" anchor="t">
             <a:spAutoFit/>
           </a:bodyPr>
           <a:lstStyle/>
@@ -7583,7 +7743,7 @@
           <a:noFill/>
         </p:spPr>
         <p:txBody>
-          <a:bodyPr wrap="square" anchor="t" lIns="0" rIns="0" tIns="0" bIns="0">
+          <a:bodyPr wrap="square" lIns="0" tIns="0" rIns="0" bIns="0" anchor="t">
             <a:spAutoFit/>
           </a:bodyPr>
           <a:lstStyle/>
@@ -7620,7 +7780,7 @@
 </file>
 
 <file path=ppt/slides/slide15.xml><?xml version="1.0" encoding="utf-8"?>
-<p:sld xmlns:a="http://schemas.openxmlformats.org/drawingml/2006/main" xmlns:p="http://schemas.openxmlformats.org/presentationml/2006/main" xmlns:r="http://schemas.openxmlformats.org/officeDocument/2006/relationships">
+<p:sld xmlns:a="http://schemas.openxmlformats.org/drawingml/2006/main" xmlns:r="http://schemas.openxmlformats.org/officeDocument/2006/relationships" xmlns:p="http://schemas.openxmlformats.org/presentationml/2006/main">
   <p:cSld>
     <p:spTree>
       <p:nvGrpSpPr>
@@ -7628,7 +7788,14 @@
         <p:cNvGrpSpPr/>
         <p:nvPr/>
       </p:nvGrpSpPr>
-      <p:grpSpPr/>
+      <p:grpSpPr>
+        <a:xfrm>
+          <a:off x="0" y="0"/>
+          <a:ext cx="0" cy="0"/>
+          <a:chOff x="0" y="0"/>
+          <a:chExt cx="0" cy="0"/>
+        </a:xfrm>
+      </p:grpSpPr>
       <p:sp>
         <p:nvSpPr>
           <p:cNvPr id="2" name="Rectangle 1"/>
@@ -7670,6 +7837,7 @@
           <a:lstStyle/>
           <a:p>
             <a:pPr algn="ctr"/>
+            <a:endParaRPr/>
           </a:p>
         </p:txBody>
       </p:sp>
@@ -7714,6 +7882,7 @@
           <a:lstStyle/>
           <a:p>
             <a:pPr algn="ctr"/>
+            <a:endParaRPr/>
           </a:p>
         </p:txBody>
       </p:sp>
@@ -7734,7 +7903,7 @@
           <a:noFill/>
         </p:spPr>
         <p:txBody>
-          <a:bodyPr wrap="square" anchor="t" lIns="0" rIns="0" tIns="0" bIns="0">
+          <a:bodyPr wrap="square" lIns="0" tIns="0" rIns="0" bIns="0" anchor="t">
             <a:spAutoFit/>
           </a:bodyPr>
           <a:lstStyle/>
@@ -7779,7 +7948,7 @@
           <a:noFill/>
         </p:spPr>
         <p:txBody>
-          <a:bodyPr wrap="square" anchor="t" lIns="0" rIns="0" tIns="0" bIns="0">
+          <a:bodyPr wrap="square" lIns="0" tIns="0" rIns="0" bIns="0" anchor="t">
             <a:spAutoFit/>
           </a:bodyPr>
           <a:lstStyle/>
@@ -7824,7 +7993,7 @@
           <a:noFill/>
         </p:spPr>
         <p:txBody>
-          <a:bodyPr wrap="square" anchor="t" lIns="0" rIns="0" tIns="0" bIns="0">
+          <a:bodyPr wrap="square" lIns="0" tIns="0" rIns="0" bIns="0" anchor="t">
             <a:spAutoFit/>
           </a:bodyPr>
           <a:lstStyle/>
@@ -7976,7 +8145,7 @@
           <a:noFill/>
         </p:spPr>
         <p:txBody>
-          <a:bodyPr wrap="square" anchor="t" lIns="0" rIns="0" tIns="0" bIns="0">
+          <a:bodyPr wrap="square" lIns="0" tIns="0" rIns="0" bIns="0" anchor="t">
             <a:spAutoFit/>
           </a:bodyPr>
           <a:lstStyle/>
@@ -8013,7 +8182,7 @@
 </file>
 
 <file path=ppt/slides/slide16.xml><?xml version="1.0" encoding="utf-8"?>
-<p:sld xmlns:a="http://schemas.openxmlformats.org/drawingml/2006/main" xmlns:p="http://schemas.openxmlformats.org/presentationml/2006/main" xmlns:r="http://schemas.openxmlformats.org/officeDocument/2006/relationships">
+<p:sld xmlns:a="http://schemas.openxmlformats.org/drawingml/2006/main" xmlns:r="http://schemas.openxmlformats.org/officeDocument/2006/relationships" xmlns:p="http://schemas.openxmlformats.org/presentationml/2006/main">
   <p:cSld>
     <p:spTree>
       <p:nvGrpSpPr>
@@ -8021,7 +8190,14 @@
         <p:cNvGrpSpPr/>
         <p:nvPr/>
       </p:nvGrpSpPr>
-      <p:grpSpPr/>
+      <p:grpSpPr>
+        <a:xfrm>
+          <a:off x="0" y="0"/>
+          <a:ext cx="0" cy="0"/>
+          <a:chOff x="0" y="0"/>
+          <a:chExt cx="0" cy="0"/>
+        </a:xfrm>
+      </p:grpSpPr>
       <p:sp>
         <p:nvSpPr>
           <p:cNvPr id="2" name="Rectangle 1"/>
@@ -8063,6 +8239,7 @@
           <a:lstStyle/>
           <a:p>
             <a:pPr algn="ctr"/>
+            <a:endParaRPr/>
           </a:p>
         </p:txBody>
       </p:sp>
@@ -8107,6 +8284,7 @@
           <a:lstStyle/>
           <a:p>
             <a:pPr algn="ctr"/>
+            <a:endParaRPr/>
           </a:p>
         </p:txBody>
       </p:sp>
@@ -8151,6 +8329,7 @@
           <a:lstStyle/>
           <a:p>
             <a:pPr algn="ctr"/>
+            <a:endParaRPr/>
           </a:p>
         </p:txBody>
       </p:sp>
@@ -8195,6 +8374,7 @@
           <a:lstStyle/>
           <a:p>
             <a:pPr algn="ctr"/>
+            <a:endParaRPr/>
           </a:p>
         </p:txBody>
       </p:sp>
@@ -8239,6 +8419,7 @@
           <a:lstStyle/>
           <a:p>
             <a:pPr algn="ctr"/>
+            <a:endParaRPr/>
           </a:p>
         </p:txBody>
       </p:sp>
@@ -8283,6 +8464,7 @@
           <a:lstStyle/>
           <a:p>
             <a:pPr algn="ctr"/>
+            <a:endParaRPr/>
           </a:p>
         </p:txBody>
       </p:sp>
@@ -8327,6 +8509,7 @@
           <a:lstStyle/>
           <a:p>
             <a:pPr algn="ctr"/>
+            <a:endParaRPr/>
           </a:p>
         </p:txBody>
       </p:sp>
@@ -8371,6 +8554,7 @@
           <a:lstStyle/>
           <a:p>
             <a:pPr algn="ctr"/>
+            <a:endParaRPr/>
           </a:p>
         </p:txBody>
       </p:sp>
@@ -8415,6 +8599,7 @@
           <a:lstStyle/>
           <a:p>
             <a:pPr algn="ctr"/>
+            <a:endParaRPr/>
           </a:p>
         </p:txBody>
       </p:sp>
@@ -8459,6 +8644,7 @@
           <a:lstStyle/>
           <a:p>
             <a:pPr algn="ctr"/>
+            <a:endParaRPr/>
           </a:p>
         </p:txBody>
       </p:sp>
@@ -8503,6 +8689,7 @@
           <a:lstStyle/>
           <a:p>
             <a:pPr algn="ctr"/>
+            <a:endParaRPr/>
           </a:p>
         </p:txBody>
       </p:sp>
@@ -8547,6 +8734,7 @@
           <a:lstStyle/>
           <a:p>
             <a:pPr algn="ctr"/>
+            <a:endParaRPr/>
           </a:p>
         </p:txBody>
       </p:sp>
@@ -8591,6 +8779,7 @@
           <a:lstStyle/>
           <a:p>
             <a:pPr algn="ctr"/>
+            <a:endParaRPr/>
           </a:p>
         </p:txBody>
       </p:sp>
@@ -8635,6 +8824,7 @@
           <a:lstStyle/>
           <a:p>
             <a:pPr algn="ctr"/>
+            <a:endParaRPr/>
           </a:p>
         </p:txBody>
       </p:sp>
@@ -8679,6 +8869,7 @@
           <a:lstStyle/>
           <a:p>
             <a:pPr algn="ctr"/>
+            <a:endParaRPr/>
           </a:p>
         </p:txBody>
       </p:sp>
@@ -8723,6 +8914,7 @@
           <a:lstStyle/>
           <a:p>
             <a:pPr algn="ctr"/>
+            <a:endParaRPr/>
           </a:p>
         </p:txBody>
       </p:sp>
@@ -8767,6 +8959,7 @@
           <a:lstStyle/>
           <a:p>
             <a:pPr algn="ctr"/>
+            <a:endParaRPr/>
           </a:p>
         </p:txBody>
       </p:sp>
@@ -8811,6 +9004,7 @@
           <a:lstStyle/>
           <a:p>
             <a:pPr algn="ctr"/>
+            <a:endParaRPr/>
           </a:p>
         </p:txBody>
       </p:sp>
@@ -8855,6 +9049,7 @@
           <a:lstStyle/>
           <a:p>
             <a:pPr algn="ctr"/>
+            <a:endParaRPr/>
           </a:p>
         </p:txBody>
       </p:sp>
@@ -8899,6 +9094,7 @@
           <a:lstStyle/>
           <a:p>
             <a:pPr algn="ctr"/>
+            <a:endParaRPr/>
           </a:p>
         </p:txBody>
       </p:sp>
@@ -8943,6 +9139,7 @@
           <a:lstStyle/>
           <a:p>
             <a:pPr algn="ctr"/>
+            <a:endParaRPr/>
           </a:p>
         </p:txBody>
       </p:sp>
@@ -8987,6 +9184,7 @@
           <a:lstStyle/>
           <a:p>
             <a:pPr algn="ctr"/>
+            <a:endParaRPr/>
           </a:p>
         </p:txBody>
       </p:sp>
@@ -9031,6 +9229,7 @@
           <a:lstStyle/>
           <a:p>
             <a:pPr algn="ctr"/>
+            <a:endParaRPr/>
           </a:p>
         </p:txBody>
       </p:sp>
@@ -9075,6 +9274,7 @@
           <a:lstStyle/>
           <a:p>
             <a:pPr algn="ctr"/>
+            <a:endParaRPr/>
           </a:p>
         </p:txBody>
       </p:sp>
@@ -9119,6 +9319,7 @@
           <a:lstStyle/>
           <a:p>
             <a:pPr algn="ctr"/>
+            <a:endParaRPr/>
           </a:p>
         </p:txBody>
       </p:sp>
@@ -9163,6 +9364,7 @@
           <a:lstStyle/>
           <a:p>
             <a:pPr algn="ctr"/>
+            <a:endParaRPr/>
           </a:p>
         </p:txBody>
       </p:sp>
@@ -9207,6 +9409,7 @@
           <a:lstStyle/>
           <a:p>
             <a:pPr algn="ctr"/>
+            <a:endParaRPr/>
           </a:p>
         </p:txBody>
       </p:sp>
@@ -9251,6 +9454,7 @@
           <a:lstStyle/>
           <a:p>
             <a:pPr algn="ctr"/>
+            <a:endParaRPr/>
           </a:p>
         </p:txBody>
       </p:sp>
@@ -9295,6 +9499,7 @@
           <a:lstStyle/>
           <a:p>
             <a:pPr algn="ctr"/>
+            <a:endParaRPr/>
           </a:p>
         </p:txBody>
       </p:sp>
@@ -9339,6 +9544,7 @@
           <a:lstStyle/>
           <a:p>
             <a:pPr algn="ctr"/>
+            <a:endParaRPr/>
           </a:p>
         </p:txBody>
       </p:sp>
@@ -9383,6 +9589,7 @@
           <a:lstStyle/>
           <a:p>
             <a:pPr algn="ctr"/>
+            <a:endParaRPr/>
           </a:p>
         </p:txBody>
       </p:sp>
@@ -9427,6 +9634,7 @@
           <a:lstStyle/>
           <a:p>
             <a:pPr algn="ctr"/>
+            <a:endParaRPr/>
           </a:p>
         </p:txBody>
       </p:sp>
@@ -9471,6 +9679,7 @@
           <a:lstStyle/>
           <a:p>
             <a:pPr algn="ctr"/>
+            <a:endParaRPr/>
           </a:p>
         </p:txBody>
       </p:sp>
@@ -9515,6 +9724,7 @@
           <a:lstStyle/>
           <a:p>
             <a:pPr algn="ctr"/>
+            <a:endParaRPr/>
           </a:p>
         </p:txBody>
       </p:sp>
@@ -9559,6 +9769,7 @@
           <a:lstStyle/>
           <a:p>
             <a:pPr algn="ctr"/>
+            <a:endParaRPr/>
           </a:p>
         </p:txBody>
       </p:sp>
@@ -9603,6 +9814,7 @@
           <a:lstStyle/>
           <a:p>
             <a:pPr algn="ctr"/>
+            <a:endParaRPr/>
           </a:p>
         </p:txBody>
       </p:sp>
@@ -9647,6 +9859,7 @@
           <a:lstStyle/>
           <a:p>
             <a:pPr algn="ctr"/>
+            <a:endParaRPr/>
           </a:p>
         </p:txBody>
       </p:sp>
@@ -9691,6 +9904,7 @@
           <a:lstStyle/>
           <a:p>
             <a:pPr algn="ctr"/>
+            <a:endParaRPr/>
           </a:p>
         </p:txBody>
       </p:sp>
@@ -9735,6 +9949,7 @@
           <a:lstStyle/>
           <a:p>
             <a:pPr algn="ctr"/>
+            <a:endParaRPr/>
           </a:p>
         </p:txBody>
       </p:sp>
@@ -9779,6 +9994,7 @@
           <a:lstStyle/>
           <a:p>
             <a:pPr algn="ctr"/>
+            <a:endParaRPr/>
           </a:p>
         </p:txBody>
       </p:sp>
@@ -9823,6 +10039,7 @@
           <a:lstStyle/>
           <a:p>
             <a:pPr algn="ctr"/>
+            <a:endParaRPr/>
           </a:p>
         </p:txBody>
       </p:sp>
@@ -9867,6 +10084,7 @@
           <a:lstStyle/>
           <a:p>
             <a:pPr algn="ctr"/>
+            <a:endParaRPr/>
           </a:p>
         </p:txBody>
       </p:sp>
@@ -9911,6 +10129,7 @@
           <a:lstStyle/>
           <a:p>
             <a:pPr algn="ctr"/>
+            <a:endParaRPr/>
           </a:p>
         </p:txBody>
       </p:sp>
@@ -9955,6 +10174,7 @@
           <a:lstStyle/>
           <a:p>
             <a:pPr algn="ctr"/>
+            <a:endParaRPr/>
           </a:p>
         </p:txBody>
       </p:sp>
@@ -9999,6 +10219,7 @@
           <a:lstStyle/>
           <a:p>
             <a:pPr algn="ctr"/>
+            <a:endParaRPr/>
           </a:p>
         </p:txBody>
       </p:sp>
@@ -10019,7 +10240,7 @@
           <a:noFill/>
         </p:spPr>
         <p:txBody>
-          <a:bodyPr wrap="square" anchor="t" lIns="0" rIns="0" tIns="0" bIns="0">
+          <a:bodyPr wrap="square" lIns="0" tIns="0" rIns="0" bIns="0" anchor="t">
             <a:spAutoFit/>
           </a:bodyPr>
           <a:lstStyle/>
@@ -10064,7 +10285,7 @@
           <a:noFill/>
         </p:spPr>
         <p:txBody>
-          <a:bodyPr wrap="square" anchor="t" lIns="0" rIns="0" tIns="0" bIns="0">
+          <a:bodyPr wrap="square" lIns="0" tIns="0" rIns="0" bIns="0" anchor="t">
             <a:spAutoFit/>
           </a:bodyPr>
           <a:lstStyle/>
@@ -10109,7 +10330,7 @@
           <a:noFill/>
         </p:spPr>
         <p:txBody>
-          <a:bodyPr wrap="square" anchor="t" lIns="0" rIns="0" tIns="0" bIns="0">
+          <a:bodyPr wrap="square" lIns="0" tIns="0" rIns="0" bIns="0" anchor="t">
             <a:spAutoFit/>
           </a:bodyPr>
           <a:lstStyle/>
@@ -10154,7 +10375,7 @@
           <a:noFill/>
         </p:spPr>
         <p:txBody>
-          <a:bodyPr wrap="square" anchor="t" lIns="0" rIns="0" tIns="0" bIns="0">
+          <a:bodyPr wrap="square" lIns="0" tIns="0" rIns="0" bIns="0" anchor="t">
             <a:spAutoFit/>
           </a:bodyPr>
           <a:lstStyle/>
@@ -10191,7 +10412,7 @@
 </file>
 
 <file path=ppt/slides/slide17.xml><?xml version="1.0" encoding="utf-8"?>
-<p:sld xmlns:a="http://schemas.openxmlformats.org/drawingml/2006/main" xmlns:p="http://schemas.openxmlformats.org/presentationml/2006/main" xmlns:r="http://schemas.openxmlformats.org/officeDocument/2006/relationships">
+<p:sld xmlns:a="http://schemas.openxmlformats.org/drawingml/2006/main" xmlns:r="http://schemas.openxmlformats.org/officeDocument/2006/relationships" xmlns:p="http://schemas.openxmlformats.org/presentationml/2006/main">
   <p:cSld>
     <p:spTree>
       <p:nvGrpSpPr>
@@ -10199,7 +10420,14 @@
         <p:cNvGrpSpPr/>
         <p:nvPr/>
       </p:nvGrpSpPr>
-      <p:grpSpPr/>
+      <p:grpSpPr>
+        <a:xfrm>
+          <a:off x="0" y="0"/>
+          <a:ext cx="0" cy="0"/>
+          <a:chOff x="0" y="0"/>
+          <a:chExt cx="0" cy="0"/>
+        </a:xfrm>
+      </p:grpSpPr>
       <p:sp>
         <p:nvSpPr>
           <p:cNvPr id="2" name="Rectangle 1"/>
@@ -10241,6 +10469,7 @@
           <a:lstStyle/>
           <a:p>
             <a:pPr algn="ctr"/>
+            <a:endParaRPr/>
           </a:p>
         </p:txBody>
       </p:sp>
@@ -10285,6 +10514,7 @@
           <a:lstStyle/>
           <a:p>
             <a:pPr algn="ctr"/>
+            <a:endParaRPr/>
           </a:p>
         </p:txBody>
       </p:sp>
@@ -10305,7 +10535,7 @@
           <a:noFill/>
         </p:spPr>
         <p:txBody>
-          <a:bodyPr wrap="square" anchor="t" lIns="0" rIns="0" tIns="0" bIns="0">
+          <a:bodyPr wrap="square" lIns="0" tIns="0" rIns="0" bIns="0" anchor="t">
             <a:spAutoFit/>
           </a:bodyPr>
           <a:lstStyle/>
@@ -10350,7 +10580,7 @@
           <a:noFill/>
         </p:spPr>
         <p:txBody>
-          <a:bodyPr wrap="square" anchor="t" lIns="0" rIns="0" tIns="0" bIns="0">
+          <a:bodyPr wrap="square" lIns="0" tIns="0" rIns="0" bIns="0" anchor="t">
             <a:spAutoFit/>
           </a:bodyPr>
           <a:lstStyle/>
@@ -10395,7 +10625,7 @@
           <a:noFill/>
         </p:spPr>
         <p:txBody>
-          <a:bodyPr wrap="square" anchor="t" lIns="0" rIns="0" tIns="0" bIns="0">
+          <a:bodyPr wrap="square" lIns="0" tIns="0" rIns="0" bIns="0" anchor="t">
             <a:spAutoFit/>
           </a:bodyPr>
           <a:lstStyle/>
@@ -10440,7 +10670,7 @@
           <a:noFill/>
         </p:spPr>
         <p:txBody>
-          <a:bodyPr wrap="square" anchor="t" lIns="0" rIns="0" tIns="0" bIns="0">
+          <a:bodyPr wrap="square" lIns="0" tIns="0" rIns="0" bIns="0" anchor="t">
             <a:spAutoFit/>
           </a:bodyPr>
           <a:lstStyle/>
@@ -10485,7 +10715,7 @@
           <a:noFill/>
         </p:spPr>
         <p:txBody>
-          <a:bodyPr wrap="square" anchor="t" lIns="0" rIns="0" tIns="0" bIns="0">
+          <a:bodyPr wrap="square" lIns="0" tIns="0" rIns="0" bIns="0" anchor="t">
             <a:spAutoFit/>
           </a:bodyPr>
           <a:lstStyle/>
@@ -10530,7 +10760,7 @@
           <a:noFill/>
         </p:spPr>
         <p:txBody>
-          <a:bodyPr wrap="square" anchor="t" lIns="0" rIns="0" tIns="0" bIns="0">
+          <a:bodyPr wrap="square" lIns="0" tIns="0" rIns="0" bIns="0" anchor="t">
             <a:spAutoFit/>
           </a:bodyPr>
           <a:lstStyle/>
@@ -10575,7 +10805,7 @@
           <a:noFill/>
         </p:spPr>
         <p:txBody>
-          <a:bodyPr wrap="square" anchor="t" lIns="0" rIns="0" tIns="0" bIns="0">
+          <a:bodyPr wrap="square" lIns="0" tIns="0" rIns="0" bIns="0" anchor="t">
             <a:spAutoFit/>
           </a:bodyPr>
           <a:lstStyle/>
@@ -10620,7 +10850,7 @@
           <a:noFill/>
         </p:spPr>
         <p:txBody>
-          <a:bodyPr wrap="square" anchor="t" lIns="0" rIns="0" tIns="0" bIns="0">
+          <a:bodyPr wrap="square" lIns="0" tIns="0" rIns="0" bIns="0" anchor="t">
             <a:spAutoFit/>
           </a:bodyPr>
           <a:lstStyle/>
@@ -10665,7 +10895,7 @@
           <a:noFill/>
         </p:spPr>
         <p:txBody>
-          <a:bodyPr wrap="square" anchor="t" lIns="0" rIns="0" tIns="0" bIns="0">
+          <a:bodyPr wrap="square" lIns="0" tIns="0" rIns="0" bIns="0" anchor="t">
             <a:spAutoFit/>
           </a:bodyPr>
           <a:lstStyle/>
@@ -10710,7 +10940,7 @@
           <a:noFill/>
         </p:spPr>
         <p:txBody>
-          <a:bodyPr wrap="square" anchor="t" lIns="0" rIns="0" tIns="0" bIns="0">
+          <a:bodyPr wrap="square" lIns="0" tIns="0" rIns="0" bIns="0" anchor="t">
             <a:spAutoFit/>
           </a:bodyPr>
           <a:lstStyle/>
@@ -10755,7 +10985,7 @@
           <a:noFill/>
         </p:spPr>
         <p:txBody>
-          <a:bodyPr wrap="square" anchor="t" lIns="0" rIns="0" tIns="0" bIns="0">
+          <a:bodyPr wrap="square" lIns="0" tIns="0" rIns="0" bIns="0" anchor="t">
             <a:spAutoFit/>
           </a:bodyPr>
           <a:lstStyle/>
@@ -10800,7 +11030,7 @@
           <a:noFill/>
         </p:spPr>
         <p:txBody>
-          <a:bodyPr wrap="square" anchor="t" lIns="0" rIns="0" tIns="0" bIns="0">
+          <a:bodyPr wrap="square" lIns="0" tIns="0" rIns="0" bIns="0" anchor="t">
             <a:spAutoFit/>
           </a:bodyPr>
           <a:lstStyle/>
@@ -10873,6 +11103,7 @@
           <a:lstStyle/>
           <a:p>
             <a:pPr algn="ctr"/>
+            <a:endParaRPr/>
           </a:p>
         </p:txBody>
       </p:sp>
@@ -10909,7 +11140,7 @@
 </file>
 
 <file path=ppt/slides/slide18.xml><?xml version="1.0" encoding="utf-8"?>
-<p:sld xmlns:a="http://schemas.openxmlformats.org/drawingml/2006/main" xmlns:p="http://schemas.openxmlformats.org/presentationml/2006/main" xmlns:r="http://schemas.openxmlformats.org/officeDocument/2006/relationships">
+<p:sld xmlns:a="http://schemas.openxmlformats.org/drawingml/2006/main" xmlns:r="http://schemas.openxmlformats.org/officeDocument/2006/relationships" xmlns:p="http://schemas.openxmlformats.org/presentationml/2006/main">
   <p:cSld>
     <p:spTree>
       <p:nvGrpSpPr>
@@ -10917,7 +11148,14 @@
         <p:cNvGrpSpPr/>
         <p:nvPr/>
       </p:nvGrpSpPr>
-      <p:grpSpPr/>
+      <p:grpSpPr>
+        <a:xfrm>
+          <a:off x="0" y="0"/>
+          <a:ext cx="0" cy="0"/>
+          <a:chOff x="0" y="0"/>
+          <a:chExt cx="0" cy="0"/>
+        </a:xfrm>
+      </p:grpSpPr>
       <p:sp>
         <p:nvSpPr>
           <p:cNvPr id="2" name="Rectangle 1"/>
@@ -10959,6 +11197,7 @@
           <a:lstStyle/>
           <a:p>
             <a:pPr algn="ctr"/>
+            <a:endParaRPr/>
           </a:p>
         </p:txBody>
       </p:sp>
@@ -11003,6 +11242,7 @@
           <a:lstStyle/>
           <a:p>
             <a:pPr algn="ctr"/>
+            <a:endParaRPr/>
           </a:p>
         </p:txBody>
       </p:sp>
@@ -11023,7 +11263,7 @@
           <a:noFill/>
         </p:spPr>
         <p:txBody>
-          <a:bodyPr wrap="square" anchor="t" lIns="0" rIns="0" tIns="0" bIns="0">
+          <a:bodyPr wrap="square" lIns="0" tIns="0" rIns="0" bIns="0" anchor="t">
             <a:spAutoFit/>
           </a:bodyPr>
           <a:lstStyle/>
@@ -11068,7 +11308,7 @@
           <a:noFill/>
         </p:spPr>
         <p:txBody>
-          <a:bodyPr wrap="square" anchor="t" lIns="0" rIns="0" tIns="0" bIns="0">
+          <a:bodyPr wrap="square" lIns="0" tIns="0" rIns="0" bIns="0" anchor="t">
             <a:spAutoFit/>
           </a:bodyPr>
           <a:lstStyle/>
@@ -11104,8 +11344,8 @@
         </p:nvSpPr>
         <p:spPr>
           <a:xfrm>
-            <a:off x="640080" y="1828800"/>
-            <a:ext cx="11338560" cy="2011680"/>
+            <a:off x="640079" y="1828800"/>
+            <a:ext cx="11449139" cy="1311669"/>
           </a:xfrm>
           <a:prstGeom prst="rect">
             <a:avLst/>
@@ -11113,7 +11353,7 @@
           <a:noFill/>
         </p:spPr>
         <p:txBody>
-          <a:bodyPr wrap="square" anchor="t" lIns="0" rIns="0" tIns="0" bIns="0">
+          <a:bodyPr wrap="square" lIns="0" tIns="0" rIns="0" bIns="0" anchor="t">
             <a:spAutoFit/>
           </a:bodyPr>
           <a:lstStyle/>
@@ -11130,7 +11370,7 @@
               </a:spcAft>
             </a:pPr>
             <a:r>
-              <a:rPr sz="2100" b="1" i="0">
+              <a:rPr sz="2100" b="1" i="0" dirty="0">
                 <a:solidFill>
                   <a:srgbClr val="4EA8DE"/>
                 </a:solidFill>
@@ -11139,7 +11379,7 @@
               <a:t>▸  </a:t>
             </a:r>
             <a:r>
-              <a:rPr sz="2100" b="1" i="0">
+              <a:rPr sz="2100" b="1" i="0" dirty="0">
                 <a:solidFill>
                   <a:srgbClr val="182030"/>
                 </a:solidFill>
@@ -11148,13 +11388,49 @@
               <a:t>Talks LX200 </a:t>
             </a:r>
             <a:r>
-              <a:rPr sz="2100" b="0" i="0">
+              <a:rPr sz="2100" b="0" i="0" dirty="0">
                 <a:solidFill>
                   <a:srgbClr val="182030"/>
                 </a:solidFill>
                 <a:latin typeface="Calibri"/>
               </a:rPr>
-              <a:t>to PiFinder’s pos_server.py (TCP 4030).</a:t>
+              <a:t>to </a:t>
+            </a:r>
+            <a:r>
+              <a:rPr sz="2100" b="0" i="0" dirty="0" err="1">
+                <a:solidFill>
+                  <a:srgbClr val="182030"/>
+                </a:solidFill>
+                <a:latin typeface="Calibri"/>
+              </a:rPr>
+              <a:t>PiFinder’s</a:t>
+            </a:r>
+            <a:r>
+              <a:rPr sz="2100" b="0" i="0" dirty="0">
+                <a:solidFill>
+                  <a:srgbClr val="182030"/>
+                </a:solidFill>
+                <a:latin typeface="Calibri"/>
+              </a:rPr>
+              <a:t> </a:t>
+            </a:r>
+            <a:r>
+              <a:rPr sz="2100" b="0" i="0" dirty="0" err="1">
+                <a:solidFill>
+                  <a:srgbClr val="182030"/>
+                </a:solidFill>
+                <a:latin typeface="Calibri"/>
+              </a:rPr>
+              <a:t>pos_server.py</a:t>
+            </a:r>
+            <a:r>
+              <a:rPr sz="2100" b="0" i="0" dirty="0">
+                <a:solidFill>
+                  <a:srgbClr val="182030"/>
+                </a:solidFill>
+                <a:latin typeface="Calibri"/>
+              </a:rPr>
+              <a:t> (TCP 4030).</a:t>
             </a:r>
           </a:p>
           <a:p>
@@ -11170,7 +11446,7 @@
               </a:spcAft>
             </a:pPr>
             <a:r>
-              <a:rPr sz="2100" b="1" i="0">
+              <a:rPr sz="2100" b="1" i="0" dirty="0">
                 <a:solidFill>
                   <a:srgbClr val="4EA8DE"/>
                 </a:solidFill>
@@ -11179,7 +11455,7 @@
               <a:t>▸  </a:t>
             </a:r>
             <a:r>
-              <a:rPr sz="2100" b="1" i="0">
+              <a:rPr sz="2100" b="1" i="0" dirty="0">
                 <a:solidFill>
                   <a:srgbClr val="182030"/>
                 </a:solidFill>
@@ -11188,13 +11464,31 @@
               <a:t>Reports the solved position </a:t>
             </a:r>
             <a:r>
-              <a:rPr sz="2100" b="0" i="0">
+              <a:rPr sz="2100" b="0" i="0" dirty="0">
                 <a:solidFill>
                   <a:srgbClr val="182030"/>
                 </a:solidFill>
                 <a:latin typeface="Calibri"/>
               </a:rPr>
-              <a:t>each poll; a GoTo is only a push-to.</a:t>
+              <a:t>each poll; a </a:t>
+            </a:r>
+            <a:r>
+              <a:rPr sz="2100" b="0" i="0" dirty="0" err="1">
+                <a:solidFill>
+                  <a:srgbClr val="182030"/>
+                </a:solidFill>
+                <a:latin typeface="Calibri"/>
+              </a:rPr>
+              <a:t>GoTo</a:t>
+            </a:r>
+            <a:r>
+              <a:rPr sz="2100" b="0" i="0" dirty="0">
+                <a:solidFill>
+                  <a:srgbClr val="182030"/>
+                </a:solidFill>
+                <a:latin typeface="Calibri"/>
+              </a:rPr>
+              <a:t> is only a push-to.</a:t>
             </a:r>
           </a:p>
           <a:p>
@@ -11210,7 +11504,7 @@
               </a:spcAft>
             </a:pPr>
             <a:r>
-              <a:rPr sz="2100" b="1" i="0">
+              <a:rPr sz="2100" b="1" i="0" dirty="0">
                 <a:solidFill>
                   <a:srgbClr val="4EA8DE"/>
                 </a:solidFill>
@@ -11219,7 +11513,7 @@
               <a:t>▸  </a:t>
             </a:r>
             <a:r>
-              <a:rPr sz="2100" b="1" i="0">
+              <a:rPr sz="2100" b="1" i="0" dirty="0">
                 <a:solidFill>
                   <a:srgbClr val="182030"/>
                 </a:solidFill>
@@ -11228,13 +11522,31 @@
               <a:t>No Sync </a:t>
             </a:r>
             <a:r>
-              <a:rPr sz="2100" b="0" i="0">
+              <a:rPr sz="2100" b="0" i="0" dirty="0">
                 <a:solidFill>
                   <a:srgbClr val="182030"/>
                 </a:solidFill>
                 <a:latin typeface="Calibri"/>
               </a:rPr>
-              <a:t>— PiFinder measures the truth every frame.</a:t>
+              <a:t>— </a:t>
+            </a:r>
+            <a:r>
+              <a:rPr sz="2100" b="0" i="0" dirty="0" err="1">
+                <a:solidFill>
+                  <a:srgbClr val="182030"/>
+                </a:solidFill>
+                <a:latin typeface="Calibri"/>
+              </a:rPr>
+              <a:t>PiFinder</a:t>
+            </a:r>
+            <a:r>
+              <a:rPr sz="2100" b="0" i="0" dirty="0">
+                <a:solidFill>
+                  <a:srgbClr val="182030"/>
+                </a:solidFill>
+                <a:latin typeface="Calibri"/>
+              </a:rPr>
+              <a:t> measures the truth every frame.</a:t>
             </a:r>
           </a:p>
         </p:txBody>
@@ -11255,7 +11567,7 @@
         </p:blipFill>
         <p:spPr>
           <a:xfrm>
-            <a:off x="929487" y="3200400"/>
+            <a:off x="1859280" y="3231909"/>
             <a:ext cx="10332720" cy="3077451"/>
           </a:xfrm>
           <a:prstGeom prst="rect">
@@ -11292,7 +11604,7 @@
           <a:noFill/>
         </p:spPr>
         <p:txBody>
-          <a:bodyPr wrap="square" anchor="t" lIns="0" rIns="0" tIns="0" bIns="0">
+          <a:bodyPr wrap="square" lIns="0" tIns="0" rIns="0" bIns="0" anchor="t">
             <a:spAutoFit/>
           </a:bodyPr>
           <a:lstStyle/>
@@ -11329,7 +11641,7 @@
 </file>
 
 <file path=ppt/slides/slide19.xml><?xml version="1.0" encoding="utf-8"?>
-<p:sld xmlns:a="http://schemas.openxmlformats.org/drawingml/2006/main" xmlns:p="http://schemas.openxmlformats.org/presentationml/2006/main" xmlns:r="http://schemas.openxmlformats.org/officeDocument/2006/relationships">
+<p:sld xmlns:a="http://schemas.openxmlformats.org/drawingml/2006/main" xmlns:r="http://schemas.openxmlformats.org/officeDocument/2006/relationships" xmlns:p="http://schemas.openxmlformats.org/presentationml/2006/main">
   <p:cSld>
     <p:spTree>
       <p:nvGrpSpPr>
@@ -11337,7 +11649,14 @@
         <p:cNvGrpSpPr/>
         <p:nvPr/>
       </p:nvGrpSpPr>
-      <p:grpSpPr/>
+      <p:grpSpPr>
+        <a:xfrm>
+          <a:off x="0" y="0"/>
+          <a:ext cx="0" cy="0"/>
+          <a:chOff x="0" y="0"/>
+          <a:chExt cx="0" cy="0"/>
+        </a:xfrm>
+      </p:grpSpPr>
       <p:sp>
         <p:nvSpPr>
           <p:cNvPr id="2" name="Rectangle 1"/>
@@ -11346,7 +11665,7 @@
         </p:nvSpPr>
         <p:spPr>
           <a:xfrm>
-            <a:off x="0" y="0"/>
+            <a:off x="305" y="310896"/>
             <a:ext cx="12191695" cy="6858000"/>
           </a:xfrm>
           <a:prstGeom prst="rect">
@@ -11379,6 +11698,7 @@
           <a:lstStyle/>
           <a:p>
             <a:pPr algn="ctr"/>
+            <a:endParaRPr/>
           </a:p>
         </p:txBody>
       </p:sp>
@@ -11423,6 +11743,7 @@
           <a:lstStyle/>
           <a:p>
             <a:pPr algn="ctr"/>
+            <a:endParaRPr/>
           </a:p>
         </p:txBody>
       </p:sp>
@@ -11443,7 +11764,7 @@
           <a:noFill/>
         </p:spPr>
         <p:txBody>
-          <a:bodyPr wrap="square" anchor="t" lIns="0" rIns="0" tIns="0" bIns="0">
+          <a:bodyPr wrap="square" lIns="0" tIns="0" rIns="0" bIns="0" anchor="t">
             <a:spAutoFit/>
           </a:bodyPr>
           <a:lstStyle/>
@@ -11488,7 +11809,7 @@
           <a:noFill/>
         </p:spPr>
         <p:txBody>
-          <a:bodyPr wrap="square" anchor="t" lIns="0" rIns="0" tIns="0" bIns="0">
+          <a:bodyPr wrap="square" lIns="0" tIns="0" rIns="0" bIns="0" anchor="t">
             <a:spAutoFit/>
           </a:bodyPr>
           <a:lstStyle/>
@@ -11533,7 +11854,7 @@
           <a:noFill/>
         </p:spPr>
         <p:txBody>
-          <a:bodyPr wrap="square" anchor="t" lIns="0" rIns="0" tIns="0" bIns="0">
+          <a:bodyPr wrap="square" lIns="0" tIns="0" rIns="0" bIns="0" anchor="t">
             <a:spAutoFit/>
           </a:bodyPr>
           <a:lstStyle/>
@@ -11578,7 +11899,7 @@
           <a:noFill/>
         </p:spPr>
         <p:txBody>
-          <a:bodyPr wrap="square" anchor="t" lIns="0" rIns="0" tIns="0" bIns="0">
+          <a:bodyPr wrap="square" lIns="0" tIns="0" rIns="0" bIns="0" anchor="t">
             <a:spAutoFit/>
           </a:bodyPr>
           <a:lstStyle/>
@@ -11623,7 +11944,7 @@
           <a:noFill/>
         </p:spPr>
         <p:txBody>
-          <a:bodyPr wrap="square" anchor="t" lIns="0" rIns="0" tIns="0" bIns="0">
+          <a:bodyPr wrap="square" lIns="0" tIns="0" rIns="0" bIns="0" anchor="t">
             <a:spAutoFit/>
           </a:bodyPr>
           <a:lstStyle/>
@@ -11668,7 +11989,7 @@
           <a:noFill/>
         </p:spPr>
         <p:txBody>
-          <a:bodyPr wrap="square" anchor="t" lIns="0" rIns="0" tIns="0" bIns="0">
+          <a:bodyPr wrap="square" lIns="0" tIns="0" rIns="0" bIns="0" anchor="t">
             <a:spAutoFit/>
           </a:bodyPr>
           <a:lstStyle/>
@@ -11713,7 +12034,7 @@
           <a:noFill/>
         </p:spPr>
         <p:txBody>
-          <a:bodyPr wrap="square" anchor="t" lIns="0" rIns="0" tIns="0" bIns="0">
+          <a:bodyPr wrap="square" lIns="0" tIns="0" rIns="0" bIns="0" anchor="t">
             <a:spAutoFit/>
           </a:bodyPr>
           <a:lstStyle/>
@@ -11758,7 +12079,7 @@
           <a:noFill/>
         </p:spPr>
         <p:txBody>
-          <a:bodyPr wrap="square" anchor="t" lIns="0" rIns="0" tIns="0" bIns="0">
+          <a:bodyPr wrap="square" lIns="0" tIns="0" rIns="0" bIns="0" anchor="t">
             <a:spAutoFit/>
           </a:bodyPr>
           <a:lstStyle/>
@@ -11803,7 +12124,7 @@
           <a:noFill/>
         </p:spPr>
         <p:txBody>
-          <a:bodyPr wrap="square" anchor="t" lIns="0" rIns="0" tIns="0" bIns="0">
+          <a:bodyPr wrap="square" lIns="0" tIns="0" rIns="0" bIns="0" anchor="t">
             <a:spAutoFit/>
           </a:bodyPr>
           <a:lstStyle/>
@@ -11848,7 +12169,7 @@
           <a:noFill/>
         </p:spPr>
         <p:txBody>
-          <a:bodyPr wrap="square" anchor="t" lIns="0" rIns="0" tIns="0" bIns="0">
+          <a:bodyPr wrap="square" lIns="0" tIns="0" rIns="0" bIns="0" anchor="t">
             <a:spAutoFit/>
           </a:bodyPr>
           <a:lstStyle/>
@@ -11893,7 +12214,7 @@
           <a:noFill/>
         </p:spPr>
         <p:txBody>
-          <a:bodyPr wrap="square" anchor="t" lIns="0" rIns="0" tIns="0" bIns="0">
+          <a:bodyPr wrap="square" lIns="0" tIns="0" rIns="0" bIns="0" anchor="t">
             <a:spAutoFit/>
           </a:bodyPr>
           <a:lstStyle/>
@@ -11938,7 +12259,7 @@
           <a:noFill/>
         </p:spPr>
         <p:txBody>
-          <a:bodyPr wrap="square" anchor="t" lIns="0" rIns="0" tIns="0" bIns="0">
+          <a:bodyPr wrap="square" lIns="0" tIns="0" rIns="0" bIns="0" anchor="t">
             <a:spAutoFit/>
           </a:bodyPr>
           <a:lstStyle/>
@@ -11983,7 +12304,7 @@
           <a:noFill/>
         </p:spPr>
         <p:txBody>
-          <a:bodyPr wrap="square" anchor="t" lIns="0" rIns="0" tIns="0" bIns="0">
+          <a:bodyPr wrap="square" lIns="0" tIns="0" rIns="0" bIns="0" anchor="t">
             <a:spAutoFit/>
           </a:bodyPr>
           <a:lstStyle/>
@@ -12028,7 +12349,7 @@
           <a:noFill/>
         </p:spPr>
         <p:txBody>
-          <a:bodyPr wrap="square" anchor="t" lIns="0" rIns="0" tIns="0" bIns="0">
+          <a:bodyPr wrap="square" lIns="0" tIns="0" rIns="0" bIns="0" anchor="t">
             <a:spAutoFit/>
           </a:bodyPr>
           <a:lstStyle/>
@@ -12072,7 +12393,7 @@
         </p:blipFill>
         <p:spPr>
           <a:xfrm>
-            <a:off x="4739335" y="2194560"/>
+            <a:off x="4739335" y="1705713"/>
             <a:ext cx="7452360" cy="3446574"/>
           </a:xfrm>
           <a:prstGeom prst="rect">
@@ -12100,7 +12421,7 @@
         </p:nvSpPr>
         <p:spPr>
           <a:xfrm>
-            <a:off x="4739335" y="5751263"/>
+            <a:off x="4739335" y="5365063"/>
             <a:ext cx="7452360" cy="274320"/>
           </a:xfrm>
           <a:prstGeom prst="rect">
@@ -12109,7 +12430,7 @@
           <a:noFill/>
         </p:spPr>
         <p:txBody>
-          <a:bodyPr wrap="square" anchor="t" lIns="0" rIns="0" tIns="0" bIns="0">
+          <a:bodyPr wrap="square" lIns="0" tIns="0" rIns="0" bIns="0" anchor="t">
             <a:spAutoFit/>
           </a:bodyPr>
           <a:lstStyle/>
@@ -12126,7 +12447,7 @@
               </a:spcAft>
             </a:pPr>
             <a:r>
-              <a:rPr sz="1500" b="0" i="0">
+              <a:rPr sz="1500" b="0" i="0" dirty="0">
                 <a:solidFill>
                   <a:srgbClr val="5C677B"/>
                 </a:solidFill>
@@ -12135,7 +12456,7 @@
               <a:t>The dial in the Control Center — </a:t>
             </a:r>
             <a:r>
-              <a:rPr sz="1500" b="1" i="0">
+              <a:rPr sz="1500" b="1" i="0" dirty="0">
                 <a:solidFill>
                   <a:srgbClr val="182030"/>
                 </a:solidFill>
@@ -12163,7 +12484,7 @@
           <a:noFill/>
         </p:spPr>
         <p:txBody>
-          <a:bodyPr wrap="square" anchor="t" lIns="0" rIns="0" tIns="0" bIns="0">
+          <a:bodyPr wrap="square" lIns="0" tIns="0" rIns="0" bIns="0" anchor="t">
             <a:spAutoFit/>
           </a:bodyPr>
           <a:lstStyle/>
@@ -12200,7 +12521,7 @@
 </file>
 
 <file path=ppt/slides/slide2.xml><?xml version="1.0" encoding="utf-8"?>
-<p:sld xmlns:a="http://schemas.openxmlformats.org/drawingml/2006/main" xmlns:p="http://schemas.openxmlformats.org/presentationml/2006/main" xmlns:r="http://schemas.openxmlformats.org/officeDocument/2006/relationships">
+<p:sld xmlns:a="http://schemas.openxmlformats.org/drawingml/2006/main" xmlns:r="http://schemas.openxmlformats.org/officeDocument/2006/relationships" xmlns:p="http://schemas.openxmlformats.org/presentationml/2006/main">
   <p:cSld>
     <p:spTree>
       <p:nvGrpSpPr>
@@ -12208,7 +12529,14 @@
         <p:cNvGrpSpPr/>
         <p:nvPr/>
       </p:nvGrpSpPr>
-      <p:grpSpPr/>
+      <p:grpSpPr>
+        <a:xfrm>
+          <a:off x="0" y="0"/>
+          <a:ext cx="0" cy="0"/>
+          <a:chOff x="0" y="0"/>
+          <a:chExt cx="0" cy="0"/>
+        </a:xfrm>
+      </p:grpSpPr>
       <p:sp>
         <p:nvSpPr>
           <p:cNvPr id="2" name="Rectangle 1"/>
@@ -12250,6 +12578,7 @@
           <a:lstStyle/>
           <a:p>
             <a:pPr algn="ctr"/>
+            <a:endParaRPr/>
           </a:p>
         </p:txBody>
       </p:sp>
@@ -12294,6 +12623,7 @@
           <a:lstStyle/>
           <a:p>
             <a:pPr algn="ctr"/>
+            <a:endParaRPr/>
           </a:p>
         </p:txBody>
       </p:sp>
@@ -12314,7 +12644,7 @@
           <a:noFill/>
         </p:spPr>
         <p:txBody>
-          <a:bodyPr wrap="square" anchor="t" lIns="0" rIns="0" tIns="0" bIns="0">
+          <a:bodyPr wrap="square" lIns="0" tIns="0" rIns="0" bIns="0" anchor="t">
             <a:spAutoFit/>
           </a:bodyPr>
           <a:lstStyle/>
@@ -12359,7 +12689,7 @@
           <a:noFill/>
         </p:spPr>
         <p:txBody>
-          <a:bodyPr wrap="square" anchor="t" lIns="0" rIns="0" tIns="0" bIns="0">
+          <a:bodyPr wrap="square" lIns="0" tIns="0" rIns="0" bIns="0" anchor="t">
             <a:spAutoFit/>
           </a:bodyPr>
           <a:lstStyle/>
@@ -12424,7 +12754,7 @@
           </a:fontRef>
         </p:style>
         <p:txBody>
-          <a:bodyPr rtlCol="0" anchor="ctr" wrap="none" lIns="0" rIns="0" tIns="0" bIns="0"/>
+          <a:bodyPr wrap="none" lIns="0" tIns="0" rIns="0" bIns="0" rtlCol="0" anchor="ctr"/>
           <a:lstStyle/>
           <a:p>
             <a:pPr algn="ctr"/>
@@ -12457,7 +12787,7 @@
           <a:noFill/>
         </p:spPr>
         <p:txBody>
-          <a:bodyPr wrap="square" anchor="t" lIns="0" rIns="0" tIns="0" bIns="0">
+          <a:bodyPr wrap="square" lIns="0" tIns="0" rIns="0" bIns="0" anchor="t">
             <a:spAutoFit/>
           </a:bodyPr>
           <a:lstStyle/>
@@ -12522,7 +12852,7 @@
           </a:fontRef>
         </p:style>
         <p:txBody>
-          <a:bodyPr rtlCol="0" anchor="ctr" wrap="none" lIns="0" rIns="0" tIns="0" bIns="0"/>
+          <a:bodyPr wrap="none" lIns="0" tIns="0" rIns="0" bIns="0" rtlCol="0" anchor="ctr"/>
           <a:lstStyle/>
           <a:p>
             <a:pPr algn="ctr"/>
@@ -12555,7 +12885,7 @@
           <a:noFill/>
         </p:spPr>
         <p:txBody>
-          <a:bodyPr wrap="square" anchor="t" lIns="0" rIns="0" tIns="0" bIns="0">
+          <a:bodyPr wrap="square" lIns="0" tIns="0" rIns="0" bIns="0" anchor="t">
             <a:spAutoFit/>
           </a:bodyPr>
           <a:lstStyle/>
@@ -12620,7 +12950,7 @@
           </a:fontRef>
         </p:style>
         <p:txBody>
-          <a:bodyPr rtlCol="0" anchor="ctr" wrap="none" lIns="0" rIns="0" tIns="0" bIns="0"/>
+          <a:bodyPr wrap="none" lIns="0" tIns="0" rIns="0" bIns="0" rtlCol="0" anchor="ctr"/>
           <a:lstStyle/>
           <a:p>
             <a:pPr algn="ctr"/>
@@ -12653,7 +12983,7 @@
           <a:noFill/>
         </p:spPr>
         <p:txBody>
-          <a:bodyPr wrap="square" anchor="t" lIns="0" rIns="0" tIns="0" bIns="0">
+          <a:bodyPr wrap="square" lIns="0" tIns="0" rIns="0" bIns="0" anchor="t">
             <a:spAutoFit/>
           </a:bodyPr>
           <a:lstStyle/>
@@ -12718,7 +13048,7 @@
           </a:fontRef>
         </p:style>
         <p:txBody>
-          <a:bodyPr rtlCol="0" anchor="ctr" wrap="none" lIns="0" rIns="0" tIns="0" bIns="0"/>
+          <a:bodyPr wrap="none" lIns="0" tIns="0" rIns="0" bIns="0" rtlCol="0" anchor="ctr"/>
           <a:lstStyle/>
           <a:p>
             <a:pPr algn="ctr"/>
@@ -12751,7 +13081,7 @@
           <a:noFill/>
         </p:spPr>
         <p:txBody>
-          <a:bodyPr wrap="square" anchor="t" lIns="0" rIns="0" tIns="0" bIns="0">
+          <a:bodyPr wrap="square" lIns="0" tIns="0" rIns="0" bIns="0" anchor="t">
             <a:spAutoFit/>
           </a:bodyPr>
           <a:lstStyle/>
@@ -12796,7 +13126,7 @@
           <a:noFill/>
         </p:spPr>
         <p:txBody>
-          <a:bodyPr wrap="square" anchor="t" lIns="0" rIns="0" tIns="0" bIns="0">
+          <a:bodyPr wrap="square" lIns="0" tIns="0" rIns="0" bIns="0" anchor="t">
             <a:spAutoFit/>
           </a:bodyPr>
           <a:lstStyle/>
@@ -12869,7 +13199,7 @@
 </file>
 
 <file path=ppt/slides/slide20.xml><?xml version="1.0" encoding="utf-8"?>
-<p:sld xmlns:a="http://schemas.openxmlformats.org/drawingml/2006/main" xmlns:p="http://schemas.openxmlformats.org/presentationml/2006/main" xmlns:r="http://schemas.openxmlformats.org/officeDocument/2006/relationships">
+<p:sld xmlns:a="http://schemas.openxmlformats.org/drawingml/2006/main" xmlns:r="http://schemas.openxmlformats.org/officeDocument/2006/relationships" xmlns:p="http://schemas.openxmlformats.org/presentationml/2006/main">
   <p:cSld>
     <p:spTree>
       <p:nvGrpSpPr>
@@ -12877,7 +13207,14 @@
         <p:cNvGrpSpPr/>
         <p:nvPr/>
       </p:nvGrpSpPr>
-      <p:grpSpPr/>
+      <p:grpSpPr>
+        <a:xfrm>
+          <a:off x="0" y="0"/>
+          <a:ext cx="0" cy="0"/>
+          <a:chOff x="0" y="0"/>
+          <a:chExt cx="0" cy="0"/>
+        </a:xfrm>
+      </p:grpSpPr>
       <p:sp>
         <p:nvSpPr>
           <p:cNvPr id="2" name="Rectangle 1"/>
@@ -12919,6 +13256,7 @@
           <a:lstStyle/>
           <a:p>
             <a:pPr algn="ctr"/>
+            <a:endParaRPr/>
           </a:p>
         </p:txBody>
       </p:sp>
@@ -12963,6 +13301,7 @@
           <a:lstStyle/>
           <a:p>
             <a:pPr algn="ctr"/>
+            <a:endParaRPr/>
           </a:p>
         </p:txBody>
       </p:sp>
@@ -12983,7 +13322,7 @@
           <a:noFill/>
         </p:spPr>
         <p:txBody>
-          <a:bodyPr wrap="square" anchor="t" lIns="0" rIns="0" tIns="0" bIns="0">
+          <a:bodyPr wrap="square" lIns="0" tIns="0" rIns="0" bIns="0" anchor="t">
             <a:spAutoFit/>
           </a:bodyPr>
           <a:lstStyle/>
@@ -13028,7 +13367,7 @@
           <a:noFill/>
         </p:spPr>
         <p:txBody>
-          <a:bodyPr wrap="square" anchor="t" lIns="0" rIns="0" tIns="0" bIns="0">
+          <a:bodyPr wrap="square" lIns="0" tIns="0" rIns="0" bIns="0" anchor="t">
             <a:spAutoFit/>
           </a:bodyPr>
           <a:lstStyle/>
@@ -13073,7 +13412,7 @@
           <a:noFill/>
         </p:spPr>
         <p:txBody>
-          <a:bodyPr wrap="square" anchor="t" lIns="0" rIns="0" tIns="0" bIns="0">
+          <a:bodyPr wrap="square" lIns="0" tIns="0" rIns="0" bIns="0" anchor="t">
             <a:spAutoFit/>
           </a:bodyPr>
           <a:lstStyle/>
@@ -13154,7 +13493,7 @@
           <a:noFill/>
         </p:spPr>
         <p:txBody>
-          <a:bodyPr wrap="square" anchor="t" lIns="0" rIns="0" tIns="0" bIns="0">
+          <a:bodyPr wrap="square" lIns="0" tIns="0" rIns="0" bIns="0" anchor="t">
             <a:spAutoFit/>
           </a:bodyPr>
           <a:lstStyle/>
@@ -13234,7 +13573,7 @@
         </p:blipFill>
         <p:spPr>
           <a:xfrm>
-            <a:off x="1981047" y="2999232"/>
+            <a:off x="3962400" y="3260834"/>
             <a:ext cx="8229600" cy="3606310"/>
           </a:xfrm>
           <a:prstGeom prst="rect">
@@ -13263,7 +13602,7 @@
         <p:spPr>
           <a:xfrm>
             <a:off x="640080" y="6400800"/>
-            <a:ext cx="10911535" cy="274320"/>
+            <a:ext cx="2879297" cy="369332"/>
           </a:xfrm>
           <a:prstGeom prst="rect">
             <a:avLst/>
@@ -13271,7 +13610,7 @@
           <a:noFill/>
         </p:spPr>
         <p:txBody>
-          <a:bodyPr wrap="square" anchor="t" lIns="0" rIns="0" tIns="0" bIns="0">
+          <a:bodyPr wrap="square" lIns="0" tIns="0" rIns="0" bIns="0" anchor="t">
             <a:spAutoFit/>
           </a:bodyPr>
           <a:lstStyle/>
@@ -13288,13 +13627,49 @@
               </a:spcAft>
             </a:pPr>
             <a:r>
-              <a:rPr sz="1200" b="0" i="0">
+              <a:rPr sz="1200" b="0" i="0" dirty="0">
                 <a:solidFill>
                   <a:srgbClr val="5C677B"/>
                 </a:solidFill>
                 <a:latin typeface="Calibri"/>
               </a:rPr>
-              <a:t>Part 3 · PiFinder + the mount, co-located on the KStars sky map — right-click either</a:t>
+              <a:t>Part 3 · </a:t>
+            </a:r>
+            <a:r>
+              <a:rPr sz="1200" b="0" i="0" dirty="0" err="1">
+                <a:solidFill>
+                  <a:srgbClr val="5C677B"/>
+                </a:solidFill>
+                <a:latin typeface="Calibri"/>
+              </a:rPr>
+              <a:t>PiFinder</a:t>
+            </a:r>
+            <a:r>
+              <a:rPr sz="1200" b="0" i="0" dirty="0">
+                <a:solidFill>
+                  <a:srgbClr val="5C677B"/>
+                </a:solidFill>
+                <a:latin typeface="Calibri"/>
+              </a:rPr>
+              <a:t> + the mount, co-located on the </a:t>
+            </a:r>
+            <a:r>
+              <a:rPr sz="1200" b="0" i="0" dirty="0" err="1">
+                <a:solidFill>
+                  <a:srgbClr val="5C677B"/>
+                </a:solidFill>
+                <a:latin typeface="Calibri"/>
+              </a:rPr>
+              <a:t>KStars</a:t>
+            </a:r>
+            <a:r>
+              <a:rPr sz="1200" b="0" i="0" dirty="0">
+                <a:solidFill>
+                  <a:srgbClr val="5C677B"/>
+                </a:solidFill>
+                <a:latin typeface="Calibri"/>
+              </a:rPr>
+              <a:t> sky map — right-click either</a:t>
             </a:r>
           </a:p>
         </p:txBody>
@@ -13308,7 +13683,7 @@
 </file>
 
 <file path=ppt/slides/slide21.xml><?xml version="1.0" encoding="utf-8"?>
-<p:sld xmlns:a="http://schemas.openxmlformats.org/drawingml/2006/main" xmlns:p="http://schemas.openxmlformats.org/presentationml/2006/main" xmlns:r="http://schemas.openxmlformats.org/officeDocument/2006/relationships">
+<p:sld xmlns:a="http://schemas.openxmlformats.org/drawingml/2006/main" xmlns:r="http://schemas.openxmlformats.org/officeDocument/2006/relationships" xmlns:p="http://schemas.openxmlformats.org/presentationml/2006/main">
   <p:cSld>
     <p:spTree>
       <p:nvGrpSpPr>
@@ -13316,7 +13691,14 @@
         <p:cNvGrpSpPr/>
         <p:nvPr/>
       </p:nvGrpSpPr>
-      <p:grpSpPr/>
+      <p:grpSpPr>
+        <a:xfrm>
+          <a:off x="0" y="0"/>
+          <a:ext cx="0" cy="0"/>
+          <a:chOff x="0" y="0"/>
+          <a:chExt cx="0" cy="0"/>
+        </a:xfrm>
+      </p:grpSpPr>
       <p:sp>
         <p:nvSpPr>
           <p:cNvPr id="2" name="Rectangle 1"/>
@@ -13358,6 +13740,7 @@
           <a:lstStyle/>
           <a:p>
             <a:pPr algn="ctr"/>
+            <a:endParaRPr/>
           </a:p>
         </p:txBody>
       </p:sp>
@@ -13402,6 +13785,7 @@
           <a:lstStyle/>
           <a:p>
             <a:pPr algn="ctr"/>
+            <a:endParaRPr/>
           </a:p>
         </p:txBody>
       </p:sp>
@@ -13446,6 +13830,7 @@
           <a:lstStyle/>
           <a:p>
             <a:pPr algn="ctr"/>
+            <a:endParaRPr/>
           </a:p>
         </p:txBody>
       </p:sp>
@@ -13490,6 +13875,7 @@
           <a:lstStyle/>
           <a:p>
             <a:pPr algn="ctr"/>
+            <a:endParaRPr/>
           </a:p>
         </p:txBody>
       </p:sp>
@@ -13534,6 +13920,7 @@
           <a:lstStyle/>
           <a:p>
             <a:pPr algn="ctr"/>
+            <a:endParaRPr/>
           </a:p>
         </p:txBody>
       </p:sp>
@@ -13578,6 +13965,7 @@
           <a:lstStyle/>
           <a:p>
             <a:pPr algn="ctr"/>
+            <a:endParaRPr/>
           </a:p>
         </p:txBody>
       </p:sp>
@@ -13622,6 +14010,7 @@
           <a:lstStyle/>
           <a:p>
             <a:pPr algn="ctr"/>
+            <a:endParaRPr/>
           </a:p>
         </p:txBody>
       </p:sp>
@@ -13666,6 +14055,7 @@
           <a:lstStyle/>
           <a:p>
             <a:pPr algn="ctr"/>
+            <a:endParaRPr/>
           </a:p>
         </p:txBody>
       </p:sp>
@@ -13710,6 +14100,7 @@
           <a:lstStyle/>
           <a:p>
             <a:pPr algn="ctr"/>
+            <a:endParaRPr/>
           </a:p>
         </p:txBody>
       </p:sp>
@@ -13754,6 +14145,7 @@
           <a:lstStyle/>
           <a:p>
             <a:pPr algn="ctr"/>
+            <a:endParaRPr/>
           </a:p>
         </p:txBody>
       </p:sp>
@@ -13798,6 +14190,7 @@
           <a:lstStyle/>
           <a:p>
             <a:pPr algn="ctr"/>
+            <a:endParaRPr/>
           </a:p>
         </p:txBody>
       </p:sp>
@@ -13842,6 +14235,7 @@
           <a:lstStyle/>
           <a:p>
             <a:pPr algn="ctr"/>
+            <a:endParaRPr/>
           </a:p>
         </p:txBody>
       </p:sp>
@@ -13886,6 +14280,7 @@
           <a:lstStyle/>
           <a:p>
             <a:pPr algn="ctr"/>
+            <a:endParaRPr/>
           </a:p>
         </p:txBody>
       </p:sp>
@@ -13930,6 +14325,7 @@
           <a:lstStyle/>
           <a:p>
             <a:pPr algn="ctr"/>
+            <a:endParaRPr/>
           </a:p>
         </p:txBody>
       </p:sp>
@@ -13974,6 +14370,7 @@
           <a:lstStyle/>
           <a:p>
             <a:pPr algn="ctr"/>
+            <a:endParaRPr/>
           </a:p>
         </p:txBody>
       </p:sp>
@@ -14018,6 +14415,7 @@
           <a:lstStyle/>
           <a:p>
             <a:pPr algn="ctr"/>
+            <a:endParaRPr/>
           </a:p>
         </p:txBody>
       </p:sp>
@@ -14062,6 +14460,7 @@
           <a:lstStyle/>
           <a:p>
             <a:pPr algn="ctr"/>
+            <a:endParaRPr/>
           </a:p>
         </p:txBody>
       </p:sp>
@@ -14106,6 +14505,7 @@
           <a:lstStyle/>
           <a:p>
             <a:pPr algn="ctr"/>
+            <a:endParaRPr/>
           </a:p>
         </p:txBody>
       </p:sp>
@@ -14150,6 +14550,7 @@
           <a:lstStyle/>
           <a:p>
             <a:pPr algn="ctr"/>
+            <a:endParaRPr/>
           </a:p>
         </p:txBody>
       </p:sp>
@@ -14194,6 +14595,7 @@
           <a:lstStyle/>
           <a:p>
             <a:pPr algn="ctr"/>
+            <a:endParaRPr/>
           </a:p>
         </p:txBody>
       </p:sp>
@@ -14238,6 +14640,7 @@
           <a:lstStyle/>
           <a:p>
             <a:pPr algn="ctr"/>
+            <a:endParaRPr/>
           </a:p>
         </p:txBody>
       </p:sp>
@@ -14282,6 +14685,7 @@
           <a:lstStyle/>
           <a:p>
             <a:pPr algn="ctr"/>
+            <a:endParaRPr/>
           </a:p>
         </p:txBody>
       </p:sp>
@@ -14326,6 +14730,7 @@
           <a:lstStyle/>
           <a:p>
             <a:pPr algn="ctr"/>
+            <a:endParaRPr/>
           </a:p>
         </p:txBody>
       </p:sp>
@@ -14370,6 +14775,7 @@
           <a:lstStyle/>
           <a:p>
             <a:pPr algn="ctr"/>
+            <a:endParaRPr/>
           </a:p>
         </p:txBody>
       </p:sp>
@@ -14414,6 +14820,7 @@
           <a:lstStyle/>
           <a:p>
             <a:pPr algn="ctr"/>
+            <a:endParaRPr/>
           </a:p>
         </p:txBody>
       </p:sp>
@@ -14458,6 +14865,7 @@
           <a:lstStyle/>
           <a:p>
             <a:pPr algn="ctr"/>
+            <a:endParaRPr/>
           </a:p>
         </p:txBody>
       </p:sp>
@@ -14502,6 +14910,7 @@
           <a:lstStyle/>
           <a:p>
             <a:pPr algn="ctr"/>
+            <a:endParaRPr/>
           </a:p>
         </p:txBody>
       </p:sp>
@@ -14546,6 +14955,7 @@
           <a:lstStyle/>
           <a:p>
             <a:pPr algn="ctr"/>
+            <a:endParaRPr/>
           </a:p>
         </p:txBody>
       </p:sp>
@@ -14590,6 +15000,7 @@
           <a:lstStyle/>
           <a:p>
             <a:pPr algn="ctr"/>
+            <a:endParaRPr/>
           </a:p>
         </p:txBody>
       </p:sp>
@@ -14634,6 +15045,7 @@
           <a:lstStyle/>
           <a:p>
             <a:pPr algn="ctr"/>
+            <a:endParaRPr/>
           </a:p>
         </p:txBody>
       </p:sp>
@@ -14678,6 +15090,7 @@
           <a:lstStyle/>
           <a:p>
             <a:pPr algn="ctr"/>
+            <a:endParaRPr/>
           </a:p>
         </p:txBody>
       </p:sp>
@@ -14722,6 +15135,7 @@
           <a:lstStyle/>
           <a:p>
             <a:pPr algn="ctr"/>
+            <a:endParaRPr/>
           </a:p>
         </p:txBody>
       </p:sp>
@@ -14766,6 +15180,7 @@
           <a:lstStyle/>
           <a:p>
             <a:pPr algn="ctr"/>
+            <a:endParaRPr/>
           </a:p>
         </p:txBody>
       </p:sp>
@@ -14810,6 +15225,7 @@
           <a:lstStyle/>
           <a:p>
             <a:pPr algn="ctr"/>
+            <a:endParaRPr/>
           </a:p>
         </p:txBody>
       </p:sp>
@@ -14854,6 +15270,7 @@
           <a:lstStyle/>
           <a:p>
             <a:pPr algn="ctr"/>
+            <a:endParaRPr/>
           </a:p>
         </p:txBody>
       </p:sp>
@@ -14898,6 +15315,7 @@
           <a:lstStyle/>
           <a:p>
             <a:pPr algn="ctr"/>
+            <a:endParaRPr/>
           </a:p>
         </p:txBody>
       </p:sp>
@@ -14942,6 +15360,7 @@
           <a:lstStyle/>
           <a:p>
             <a:pPr algn="ctr"/>
+            <a:endParaRPr/>
           </a:p>
         </p:txBody>
       </p:sp>
@@ -14986,6 +15405,7 @@
           <a:lstStyle/>
           <a:p>
             <a:pPr algn="ctr"/>
+            <a:endParaRPr/>
           </a:p>
         </p:txBody>
       </p:sp>
@@ -15030,6 +15450,7 @@
           <a:lstStyle/>
           <a:p>
             <a:pPr algn="ctr"/>
+            <a:endParaRPr/>
           </a:p>
         </p:txBody>
       </p:sp>
@@ -15074,6 +15495,7 @@
           <a:lstStyle/>
           <a:p>
             <a:pPr algn="ctr"/>
+            <a:endParaRPr/>
           </a:p>
         </p:txBody>
       </p:sp>
@@ -15118,6 +15540,7 @@
           <a:lstStyle/>
           <a:p>
             <a:pPr algn="ctr"/>
+            <a:endParaRPr/>
           </a:p>
         </p:txBody>
       </p:sp>
@@ -15162,6 +15585,7 @@
           <a:lstStyle/>
           <a:p>
             <a:pPr algn="ctr"/>
+            <a:endParaRPr/>
           </a:p>
         </p:txBody>
       </p:sp>
@@ -15206,6 +15630,7 @@
           <a:lstStyle/>
           <a:p>
             <a:pPr algn="ctr"/>
+            <a:endParaRPr/>
           </a:p>
         </p:txBody>
       </p:sp>
@@ -15250,6 +15675,7 @@
           <a:lstStyle/>
           <a:p>
             <a:pPr algn="ctr"/>
+            <a:endParaRPr/>
           </a:p>
         </p:txBody>
       </p:sp>
@@ -15294,6 +15720,7 @@
           <a:lstStyle/>
           <a:p>
             <a:pPr algn="ctr"/>
+            <a:endParaRPr/>
           </a:p>
         </p:txBody>
       </p:sp>
@@ -15314,7 +15741,7 @@
           <a:noFill/>
         </p:spPr>
         <p:txBody>
-          <a:bodyPr wrap="square" anchor="t" lIns="0" rIns="0" tIns="0" bIns="0">
+          <a:bodyPr wrap="square" lIns="0" tIns="0" rIns="0" bIns="0" anchor="t">
             <a:spAutoFit/>
           </a:bodyPr>
           <a:lstStyle/>
@@ -15359,7 +15786,7 @@
           <a:noFill/>
         </p:spPr>
         <p:txBody>
-          <a:bodyPr wrap="square" anchor="t" lIns="0" rIns="0" tIns="0" bIns="0">
+          <a:bodyPr wrap="square" lIns="0" tIns="0" rIns="0" bIns="0" anchor="t">
             <a:spAutoFit/>
           </a:bodyPr>
           <a:lstStyle/>
@@ -15404,7 +15831,7 @@
           <a:noFill/>
         </p:spPr>
         <p:txBody>
-          <a:bodyPr wrap="square" anchor="t" lIns="0" rIns="0" tIns="0" bIns="0">
+          <a:bodyPr wrap="square" lIns="0" tIns="0" rIns="0" bIns="0" anchor="t">
             <a:spAutoFit/>
           </a:bodyPr>
           <a:lstStyle/>
@@ -15449,7 +15876,7 @@
           <a:noFill/>
         </p:spPr>
         <p:txBody>
-          <a:bodyPr wrap="square" anchor="t" lIns="0" rIns="0" tIns="0" bIns="0">
+          <a:bodyPr wrap="square" lIns="0" tIns="0" rIns="0" bIns="0" anchor="t">
             <a:spAutoFit/>
           </a:bodyPr>
           <a:lstStyle/>
@@ -15486,7 +15913,7 @@
 </file>
 
 <file path=ppt/slides/slide22.xml><?xml version="1.0" encoding="utf-8"?>
-<p:sld xmlns:a="http://schemas.openxmlformats.org/drawingml/2006/main" xmlns:p="http://schemas.openxmlformats.org/presentationml/2006/main" xmlns:r="http://schemas.openxmlformats.org/officeDocument/2006/relationships">
+<p:sld xmlns:a="http://schemas.openxmlformats.org/drawingml/2006/main" xmlns:r="http://schemas.openxmlformats.org/officeDocument/2006/relationships" xmlns:p="http://schemas.openxmlformats.org/presentationml/2006/main">
   <p:cSld>
     <p:spTree>
       <p:nvGrpSpPr>
@@ -15494,7 +15921,14 @@
         <p:cNvGrpSpPr/>
         <p:nvPr/>
       </p:nvGrpSpPr>
-      <p:grpSpPr/>
+      <p:grpSpPr>
+        <a:xfrm>
+          <a:off x="0" y="0"/>
+          <a:ext cx="0" cy="0"/>
+          <a:chOff x="0" y="0"/>
+          <a:chExt cx="0" cy="0"/>
+        </a:xfrm>
+      </p:grpSpPr>
       <p:sp>
         <p:nvSpPr>
           <p:cNvPr id="2" name="Rectangle 1"/>
@@ -15536,6 +15970,7 @@
           <a:lstStyle/>
           <a:p>
             <a:pPr algn="ctr"/>
+            <a:endParaRPr/>
           </a:p>
         </p:txBody>
       </p:sp>
@@ -15580,6 +16015,7 @@
           <a:lstStyle/>
           <a:p>
             <a:pPr algn="ctr"/>
+            <a:endParaRPr/>
           </a:p>
         </p:txBody>
       </p:sp>
@@ -15600,7 +16036,7 @@
           <a:noFill/>
         </p:spPr>
         <p:txBody>
-          <a:bodyPr wrap="square" anchor="t" lIns="0" rIns="0" tIns="0" bIns="0">
+          <a:bodyPr wrap="square" lIns="0" tIns="0" rIns="0" bIns="0" anchor="t">
             <a:spAutoFit/>
           </a:bodyPr>
           <a:lstStyle/>
@@ -15645,7 +16081,7 @@
           <a:noFill/>
         </p:spPr>
         <p:txBody>
-          <a:bodyPr wrap="square" anchor="t" lIns="0" rIns="0" tIns="0" bIns="0">
+          <a:bodyPr wrap="square" lIns="0" tIns="0" rIns="0" bIns="0" anchor="t">
             <a:spAutoFit/>
           </a:bodyPr>
           <a:lstStyle/>
@@ -15718,6 +16154,7 @@
           <a:lstStyle/>
           <a:p>
             <a:pPr algn="ctr"/>
+            <a:endParaRPr/>
           </a:p>
         </p:txBody>
       </p:sp>
@@ -15738,7 +16175,7 @@
           <a:noFill/>
         </p:spPr>
         <p:txBody>
-          <a:bodyPr wrap="square" anchor="t" lIns="0" rIns="0" tIns="0" bIns="0">
+          <a:bodyPr wrap="square" lIns="0" tIns="0" rIns="0" bIns="0" anchor="t">
             <a:spAutoFit/>
           </a:bodyPr>
           <a:lstStyle/>
@@ -15783,7 +16220,7 @@
           <a:noFill/>
         </p:spPr>
         <p:txBody>
-          <a:bodyPr wrap="square" anchor="t" lIns="0" rIns="0" tIns="0" bIns="0">
+          <a:bodyPr wrap="square" lIns="0" tIns="0" rIns="0" bIns="0" anchor="t">
             <a:spAutoFit/>
           </a:bodyPr>
           <a:lstStyle/>
@@ -15892,6 +16329,7 @@
           <a:lstStyle/>
           <a:p>
             <a:pPr algn="ctr"/>
+            <a:endParaRPr/>
           </a:p>
         </p:txBody>
       </p:sp>
@@ -15912,7 +16350,7 @@
           <a:noFill/>
         </p:spPr>
         <p:txBody>
-          <a:bodyPr wrap="square" anchor="t" lIns="0" rIns="0" tIns="0" bIns="0">
+          <a:bodyPr wrap="square" lIns="0" tIns="0" rIns="0" bIns="0" anchor="t">
             <a:spAutoFit/>
           </a:bodyPr>
           <a:lstStyle/>
@@ -15957,7 +16395,7 @@
           <a:noFill/>
         </p:spPr>
         <p:txBody>
-          <a:bodyPr wrap="square" anchor="t" lIns="0" rIns="0" tIns="0" bIns="0">
+          <a:bodyPr wrap="square" lIns="0" tIns="0" rIns="0" bIns="0" anchor="t">
             <a:spAutoFit/>
           </a:bodyPr>
           <a:lstStyle/>
@@ -16096,7 +16534,7 @@
           <a:noFill/>
         </p:spPr>
         <p:txBody>
-          <a:bodyPr wrap="square" anchor="t" lIns="0" rIns="0" tIns="0" bIns="0">
+          <a:bodyPr wrap="square" lIns="0" tIns="0" rIns="0" bIns="0" anchor="t">
             <a:spAutoFit/>
           </a:bodyPr>
           <a:lstStyle/>
@@ -16133,7 +16571,7 @@
 </file>
 
 <file path=ppt/slides/slide23.xml><?xml version="1.0" encoding="utf-8"?>
-<p:sld xmlns:a="http://schemas.openxmlformats.org/drawingml/2006/main" xmlns:p="http://schemas.openxmlformats.org/presentationml/2006/main" xmlns:r="http://schemas.openxmlformats.org/officeDocument/2006/relationships">
+<p:sld xmlns:a="http://schemas.openxmlformats.org/drawingml/2006/main" xmlns:r="http://schemas.openxmlformats.org/officeDocument/2006/relationships" xmlns:p="http://schemas.openxmlformats.org/presentationml/2006/main">
   <p:cSld>
     <p:spTree>
       <p:nvGrpSpPr>
@@ -16141,7 +16579,14 @@
         <p:cNvGrpSpPr/>
         <p:nvPr/>
       </p:nvGrpSpPr>
-      <p:grpSpPr/>
+      <p:grpSpPr>
+        <a:xfrm>
+          <a:off x="0" y="0"/>
+          <a:ext cx="0" cy="0"/>
+          <a:chOff x="0" y="0"/>
+          <a:chExt cx="0" cy="0"/>
+        </a:xfrm>
+      </p:grpSpPr>
       <p:sp>
         <p:nvSpPr>
           <p:cNvPr id="2" name="Rectangle 1"/>
@@ -16183,6 +16628,7 @@
           <a:lstStyle/>
           <a:p>
             <a:pPr algn="ctr"/>
+            <a:endParaRPr/>
           </a:p>
         </p:txBody>
       </p:sp>
@@ -16227,6 +16673,7 @@
           <a:lstStyle/>
           <a:p>
             <a:pPr algn="ctr"/>
+            <a:endParaRPr/>
           </a:p>
         </p:txBody>
       </p:sp>
@@ -16247,7 +16694,7 @@
           <a:noFill/>
         </p:spPr>
         <p:txBody>
-          <a:bodyPr wrap="square" anchor="t" lIns="0" rIns="0" tIns="0" bIns="0">
+          <a:bodyPr wrap="square" lIns="0" tIns="0" rIns="0" bIns="0" anchor="t">
             <a:spAutoFit/>
           </a:bodyPr>
           <a:lstStyle/>
@@ -16292,7 +16739,7 @@
           <a:noFill/>
         </p:spPr>
         <p:txBody>
-          <a:bodyPr wrap="square" anchor="t" lIns="0" rIns="0" tIns="0" bIns="0">
+          <a:bodyPr wrap="square" lIns="0" tIns="0" rIns="0" bIns="0" anchor="t">
             <a:spAutoFit/>
           </a:bodyPr>
           <a:lstStyle/>
@@ -16337,7 +16784,7 @@
           <a:noFill/>
         </p:spPr>
         <p:txBody>
-          <a:bodyPr wrap="square" anchor="t" lIns="0" rIns="0" tIns="0" bIns="0">
+          <a:bodyPr wrap="square" lIns="0" tIns="0" rIns="0" bIns="0" anchor="t">
             <a:spAutoFit/>
           </a:bodyPr>
           <a:lstStyle/>
@@ -16480,7 +16927,7 @@
           <a:noFill/>
         </p:spPr>
         <p:txBody>
-          <a:bodyPr wrap="square" anchor="t" lIns="0" rIns="0" tIns="0" bIns="0">
+          <a:bodyPr wrap="square" lIns="0" tIns="0" rIns="0" bIns="0" anchor="t">
             <a:spAutoFit/>
           </a:bodyPr>
           <a:lstStyle/>
@@ -16534,7 +16981,7 @@
           <a:noFill/>
         </p:spPr>
         <p:txBody>
-          <a:bodyPr wrap="square" anchor="t" lIns="0" rIns="0" tIns="0" bIns="0">
+          <a:bodyPr wrap="square" lIns="0" tIns="0" rIns="0" bIns="0" anchor="t">
             <a:spAutoFit/>
           </a:bodyPr>
           <a:lstStyle/>
@@ -16571,7 +17018,7 @@
 </file>
 
 <file path=ppt/slides/slide24.xml><?xml version="1.0" encoding="utf-8"?>
-<p:sld xmlns:a="http://schemas.openxmlformats.org/drawingml/2006/main" xmlns:p="http://schemas.openxmlformats.org/presentationml/2006/main" xmlns:r="http://schemas.openxmlformats.org/officeDocument/2006/relationships">
+<p:sld xmlns:a="http://schemas.openxmlformats.org/drawingml/2006/main" xmlns:r="http://schemas.openxmlformats.org/officeDocument/2006/relationships" xmlns:p="http://schemas.openxmlformats.org/presentationml/2006/main">
   <p:cSld>
     <p:spTree>
       <p:nvGrpSpPr>
@@ -16579,7 +17026,14 @@
         <p:cNvGrpSpPr/>
         <p:nvPr/>
       </p:nvGrpSpPr>
-      <p:grpSpPr/>
+      <p:grpSpPr>
+        <a:xfrm>
+          <a:off x="0" y="0"/>
+          <a:ext cx="0" cy="0"/>
+          <a:chOff x="0" y="0"/>
+          <a:chExt cx="0" cy="0"/>
+        </a:xfrm>
+      </p:grpSpPr>
       <p:sp>
         <p:nvSpPr>
           <p:cNvPr id="2" name="Rectangle 1"/>
@@ -16621,6 +17075,7 @@
           <a:lstStyle/>
           <a:p>
             <a:pPr algn="ctr"/>
+            <a:endParaRPr/>
           </a:p>
         </p:txBody>
       </p:sp>
@@ -16665,6 +17120,7 @@
           <a:lstStyle/>
           <a:p>
             <a:pPr algn="ctr"/>
+            <a:endParaRPr/>
           </a:p>
         </p:txBody>
       </p:sp>
@@ -16709,6 +17165,7 @@
           <a:lstStyle/>
           <a:p>
             <a:pPr algn="ctr"/>
+            <a:endParaRPr/>
           </a:p>
         </p:txBody>
       </p:sp>
@@ -16753,6 +17210,7 @@
           <a:lstStyle/>
           <a:p>
             <a:pPr algn="ctr"/>
+            <a:endParaRPr/>
           </a:p>
         </p:txBody>
       </p:sp>
@@ -16797,6 +17255,7 @@
           <a:lstStyle/>
           <a:p>
             <a:pPr algn="ctr"/>
+            <a:endParaRPr/>
           </a:p>
         </p:txBody>
       </p:sp>
@@ -16841,6 +17300,7 @@
           <a:lstStyle/>
           <a:p>
             <a:pPr algn="ctr"/>
+            <a:endParaRPr/>
           </a:p>
         </p:txBody>
       </p:sp>
@@ -16885,6 +17345,7 @@
           <a:lstStyle/>
           <a:p>
             <a:pPr algn="ctr"/>
+            <a:endParaRPr/>
           </a:p>
         </p:txBody>
       </p:sp>
@@ -16929,6 +17390,7 @@
           <a:lstStyle/>
           <a:p>
             <a:pPr algn="ctr"/>
+            <a:endParaRPr/>
           </a:p>
         </p:txBody>
       </p:sp>
@@ -16973,6 +17435,7 @@
           <a:lstStyle/>
           <a:p>
             <a:pPr algn="ctr"/>
+            <a:endParaRPr/>
           </a:p>
         </p:txBody>
       </p:sp>
@@ -17017,6 +17480,7 @@
           <a:lstStyle/>
           <a:p>
             <a:pPr algn="ctr"/>
+            <a:endParaRPr/>
           </a:p>
         </p:txBody>
       </p:sp>
@@ -17061,6 +17525,7 @@
           <a:lstStyle/>
           <a:p>
             <a:pPr algn="ctr"/>
+            <a:endParaRPr/>
           </a:p>
         </p:txBody>
       </p:sp>
@@ -17105,6 +17570,7 @@
           <a:lstStyle/>
           <a:p>
             <a:pPr algn="ctr"/>
+            <a:endParaRPr/>
           </a:p>
         </p:txBody>
       </p:sp>
@@ -17149,6 +17615,7 @@
           <a:lstStyle/>
           <a:p>
             <a:pPr algn="ctr"/>
+            <a:endParaRPr/>
           </a:p>
         </p:txBody>
       </p:sp>
@@ -17193,6 +17660,7 @@
           <a:lstStyle/>
           <a:p>
             <a:pPr algn="ctr"/>
+            <a:endParaRPr/>
           </a:p>
         </p:txBody>
       </p:sp>
@@ -17237,6 +17705,7 @@
           <a:lstStyle/>
           <a:p>
             <a:pPr algn="ctr"/>
+            <a:endParaRPr/>
           </a:p>
         </p:txBody>
       </p:sp>
@@ -17281,6 +17750,7 @@
           <a:lstStyle/>
           <a:p>
             <a:pPr algn="ctr"/>
+            <a:endParaRPr/>
           </a:p>
         </p:txBody>
       </p:sp>
@@ -17325,6 +17795,7 @@
           <a:lstStyle/>
           <a:p>
             <a:pPr algn="ctr"/>
+            <a:endParaRPr/>
           </a:p>
         </p:txBody>
       </p:sp>
@@ -17369,6 +17840,7 @@
           <a:lstStyle/>
           <a:p>
             <a:pPr algn="ctr"/>
+            <a:endParaRPr/>
           </a:p>
         </p:txBody>
       </p:sp>
@@ -17413,6 +17885,7 @@
           <a:lstStyle/>
           <a:p>
             <a:pPr algn="ctr"/>
+            <a:endParaRPr/>
           </a:p>
         </p:txBody>
       </p:sp>
@@ -17457,6 +17930,7 @@
           <a:lstStyle/>
           <a:p>
             <a:pPr algn="ctr"/>
+            <a:endParaRPr/>
           </a:p>
         </p:txBody>
       </p:sp>
@@ -17501,6 +17975,7 @@
           <a:lstStyle/>
           <a:p>
             <a:pPr algn="ctr"/>
+            <a:endParaRPr/>
           </a:p>
         </p:txBody>
       </p:sp>
@@ -17545,6 +18020,7 @@
           <a:lstStyle/>
           <a:p>
             <a:pPr algn="ctr"/>
+            <a:endParaRPr/>
           </a:p>
         </p:txBody>
       </p:sp>
@@ -17589,6 +18065,7 @@
           <a:lstStyle/>
           <a:p>
             <a:pPr algn="ctr"/>
+            <a:endParaRPr/>
           </a:p>
         </p:txBody>
       </p:sp>
@@ -17633,6 +18110,7 @@
           <a:lstStyle/>
           <a:p>
             <a:pPr algn="ctr"/>
+            <a:endParaRPr/>
           </a:p>
         </p:txBody>
       </p:sp>
@@ -17677,6 +18155,7 @@
           <a:lstStyle/>
           <a:p>
             <a:pPr algn="ctr"/>
+            <a:endParaRPr/>
           </a:p>
         </p:txBody>
       </p:sp>
@@ -17721,6 +18200,7 @@
           <a:lstStyle/>
           <a:p>
             <a:pPr algn="ctr"/>
+            <a:endParaRPr/>
           </a:p>
         </p:txBody>
       </p:sp>
@@ -17765,6 +18245,7 @@
           <a:lstStyle/>
           <a:p>
             <a:pPr algn="ctr"/>
+            <a:endParaRPr/>
           </a:p>
         </p:txBody>
       </p:sp>
@@ -17809,6 +18290,7 @@
           <a:lstStyle/>
           <a:p>
             <a:pPr algn="ctr"/>
+            <a:endParaRPr/>
           </a:p>
         </p:txBody>
       </p:sp>
@@ -17853,6 +18335,7 @@
           <a:lstStyle/>
           <a:p>
             <a:pPr algn="ctr"/>
+            <a:endParaRPr/>
           </a:p>
         </p:txBody>
       </p:sp>
@@ -17897,6 +18380,7 @@
           <a:lstStyle/>
           <a:p>
             <a:pPr algn="ctr"/>
+            <a:endParaRPr/>
           </a:p>
         </p:txBody>
       </p:sp>
@@ -17941,6 +18425,7 @@
           <a:lstStyle/>
           <a:p>
             <a:pPr algn="ctr"/>
+            <a:endParaRPr/>
           </a:p>
         </p:txBody>
       </p:sp>
@@ -17985,6 +18470,7 @@
           <a:lstStyle/>
           <a:p>
             <a:pPr algn="ctr"/>
+            <a:endParaRPr/>
           </a:p>
         </p:txBody>
       </p:sp>
@@ -18029,6 +18515,7 @@
           <a:lstStyle/>
           <a:p>
             <a:pPr algn="ctr"/>
+            <a:endParaRPr/>
           </a:p>
         </p:txBody>
       </p:sp>
@@ -18073,6 +18560,7 @@
           <a:lstStyle/>
           <a:p>
             <a:pPr algn="ctr"/>
+            <a:endParaRPr/>
           </a:p>
         </p:txBody>
       </p:sp>
@@ -18117,6 +18605,7 @@
           <a:lstStyle/>
           <a:p>
             <a:pPr algn="ctr"/>
+            <a:endParaRPr/>
           </a:p>
         </p:txBody>
       </p:sp>
@@ -18161,6 +18650,7 @@
           <a:lstStyle/>
           <a:p>
             <a:pPr algn="ctr"/>
+            <a:endParaRPr/>
           </a:p>
         </p:txBody>
       </p:sp>
@@ -18205,6 +18695,7 @@
           <a:lstStyle/>
           <a:p>
             <a:pPr algn="ctr"/>
+            <a:endParaRPr/>
           </a:p>
         </p:txBody>
       </p:sp>
@@ -18249,6 +18740,7 @@
           <a:lstStyle/>
           <a:p>
             <a:pPr algn="ctr"/>
+            <a:endParaRPr/>
           </a:p>
         </p:txBody>
       </p:sp>
@@ -18293,6 +18785,7 @@
           <a:lstStyle/>
           <a:p>
             <a:pPr algn="ctr"/>
+            <a:endParaRPr/>
           </a:p>
         </p:txBody>
       </p:sp>
@@ -18337,6 +18830,7 @@
           <a:lstStyle/>
           <a:p>
             <a:pPr algn="ctr"/>
+            <a:endParaRPr/>
           </a:p>
         </p:txBody>
       </p:sp>
@@ -18381,6 +18875,7 @@
           <a:lstStyle/>
           <a:p>
             <a:pPr algn="ctr"/>
+            <a:endParaRPr/>
           </a:p>
         </p:txBody>
       </p:sp>
@@ -18425,6 +18920,7 @@
           <a:lstStyle/>
           <a:p>
             <a:pPr algn="ctr"/>
+            <a:endParaRPr/>
           </a:p>
         </p:txBody>
       </p:sp>
@@ -18469,6 +18965,7 @@
           <a:lstStyle/>
           <a:p>
             <a:pPr algn="ctr"/>
+            <a:endParaRPr/>
           </a:p>
         </p:txBody>
       </p:sp>
@@ -18513,6 +19010,7 @@
           <a:lstStyle/>
           <a:p>
             <a:pPr algn="ctr"/>
+            <a:endParaRPr/>
           </a:p>
         </p:txBody>
       </p:sp>
@@ -18557,6 +19055,7 @@
           <a:lstStyle/>
           <a:p>
             <a:pPr algn="ctr"/>
+            <a:endParaRPr/>
           </a:p>
         </p:txBody>
       </p:sp>
@@ -18577,7 +19076,7 @@
           <a:noFill/>
         </p:spPr>
         <p:txBody>
-          <a:bodyPr wrap="square" anchor="t" lIns="0" rIns="0" tIns="0" bIns="0">
+          <a:bodyPr wrap="square" lIns="0" tIns="0" rIns="0" bIns="0" anchor="t">
             <a:spAutoFit/>
           </a:bodyPr>
           <a:lstStyle/>
@@ -18622,7 +19121,7 @@
           <a:noFill/>
         </p:spPr>
         <p:txBody>
-          <a:bodyPr wrap="square" anchor="t" lIns="0" rIns="0" tIns="0" bIns="0">
+          <a:bodyPr wrap="square" lIns="0" tIns="0" rIns="0" bIns="0" anchor="t">
             <a:spAutoFit/>
           </a:bodyPr>
           <a:lstStyle/>
@@ -18667,7 +19166,7 @@
           <a:noFill/>
         </p:spPr>
         <p:txBody>
-          <a:bodyPr wrap="square" anchor="t" lIns="0" rIns="0" tIns="0" bIns="0">
+          <a:bodyPr wrap="square" lIns="0" tIns="0" rIns="0" bIns="0" anchor="t">
             <a:spAutoFit/>
           </a:bodyPr>
           <a:lstStyle/>
@@ -18704,7 +19203,7 @@
 </file>
 
 <file path=ppt/slides/slide25.xml><?xml version="1.0" encoding="utf-8"?>
-<p:sld xmlns:a="http://schemas.openxmlformats.org/drawingml/2006/main" xmlns:p="http://schemas.openxmlformats.org/presentationml/2006/main" xmlns:r="http://schemas.openxmlformats.org/officeDocument/2006/relationships">
+<p:sld xmlns:a="http://schemas.openxmlformats.org/drawingml/2006/main" xmlns:r="http://schemas.openxmlformats.org/officeDocument/2006/relationships" xmlns:p="http://schemas.openxmlformats.org/presentationml/2006/main">
   <p:cSld>
     <p:spTree>
       <p:nvGrpSpPr>
@@ -18712,7 +19211,14 @@
         <p:cNvGrpSpPr/>
         <p:nvPr/>
       </p:nvGrpSpPr>
-      <p:grpSpPr/>
+      <p:grpSpPr>
+        <a:xfrm>
+          <a:off x="0" y="0"/>
+          <a:ext cx="0" cy="0"/>
+          <a:chOff x="0" y="0"/>
+          <a:chExt cx="0" cy="0"/>
+        </a:xfrm>
+      </p:grpSpPr>
       <p:sp>
         <p:nvSpPr>
           <p:cNvPr id="2" name="Rectangle 1"/>
@@ -18754,6 +19260,7 @@
           <a:lstStyle/>
           <a:p>
             <a:pPr algn="ctr"/>
+            <a:endParaRPr/>
           </a:p>
         </p:txBody>
       </p:sp>
@@ -18798,6 +19305,7 @@
           <a:lstStyle/>
           <a:p>
             <a:pPr algn="ctr"/>
+            <a:endParaRPr/>
           </a:p>
         </p:txBody>
       </p:sp>
@@ -18818,7 +19326,7 @@
           <a:noFill/>
         </p:spPr>
         <p:txBody>
-          <a:bodyPr wrap="square" anchor="t" lIns="0" rIns="0" tIns="0" bIns="0">
+          <a:bodyPr wrap="square" lIns="0" tIns="0" rIns="0" bIns="0" anchor="t">
             <a:spAutoFit/>
           </a:bodyPr>
           <a:lstStyle/>
@@ -18863,7 +19371,7 @@
           <a:noFill/>
         </p:spPr>
         <p:txBody>
-          <a:bodyPr wrap="square" anchor="t" lIns="0" rIns="0" tIns="0" bIns="0">
+          <a:bodyPr wrap="square" lIns="0" tIns="0" rIns="0" bIns="0" anchor="t">
             <a:spAutoFit/>
           </a:bodyPr>
           <a:lstStyle/>
@@ -18908,7 +19416,7 @@
           <a:noFill/>
         </p:spPr>
         <p:txBody>
-          <a:bodyPr wrap="square" anchor="t" lIns="0" rIns="0" tIns="0" bIns="0">
+          <a:bodyPr wrap="square" lIns="0" tIns="0" rIns="0" bIns="0" anchor="t">
             <a:spAutoFit/>
           </a:bodyPr>
           <a:lstStyle/>
@@ -19131,7 +19639,7 @@
           <a:noFill/>
         </p:spPr>
         <p:txBody>
-          <a:bodyPr wrap="square" anchor="t" lIns="0" rIns="0" tIns="0" bIns="0">
+          <a:bodyPr wrap="square" lIns="0" tIns="0" rIns="0" bIns="0" anchor="t">
             <a:spAutoFit/>
           </a:bodyPr>
           <a:lstStyle/>
@@ -19176,7 +19684,7 @@
           <a:noFill/>
         </p:spPr>
         <p:txBody>
-          <a:bodyPr wrap="square" anchor="t" lIns="0" rIns="0" tIns="0" bIns="0">
+          <a:bodyPr wrap="square" lIns="0" tIns="0" rIns="0" bIns="0" anchor="t">
             <a:spAutoFit/>
           </a:bodyPr>
           <a:lstStyle/>
@@ -19213,7 +19721,7 @@
 </file>
 
 <file path=ppt/slides/slide26.xml><?xml version="1.0" encoding="utf-8"?>
-<p:sld xmlns:a="http://schemas.openxmlformats.org/drawingml/2006/main" xmlns:p="http://schemas.openxmlformats.org/presentationml/2006/main" xmlns:r="http://schemas.openxmlformats.org/officeDocument/2006/relationships">
+<p:sld xmlns:a="http://schemas.openxmlformats.org/drawingml/2006/main" xmlns:r="http://schemas.openxmlformats.org/officeDocument/2006/relationships" xmlns:p="http://schemas.openxmlformats.org/presentationml/2006/main">
   <p:cSld>
     <p:spTree>
       <p:nvGrpSpPr>
@@ -19221,7 +19729,14 @@
         <p:cNvGrpSpPr/>
         <p:nvPr/>
       </p:nvGrpSpPr>
-      <p:grpSpPr/>
+      <p:grpSpPr>
+        <a:xfrm>
+          <a:off x="0" y="0"/>
+          <a:ext cx="0" cy="0"/>
+          <a:chOff x="0" y="0"/>
+          <a:chExt cx="0" cy="0"/>
+        </a:xfrm>
+      </p:grpSpPr>
       <p:sp>
         <p:nvSpPr>
           <p:cNvPr id="2" name="Rectangle 1"/>
@@ -19263,6 +19778,7 @@
           <a:lstStyle/>
           <a:p>
             <a:pPr algn="ctr"/>
+            <a:endParaRPr/>
           </a:p>
         </p:txBody>
       </p:sp>
@@ -19307,6 +19823,7 @@
           <a:lstStyle/>
           <a:p>
             <a:pPr algn="ctr"/>
+            <a:endParaRPr/>
           </a:p>
         </p:txBody>
       </p:sp>
@@ -19327,7 +19844,7 @@
           <a:noFill/>
         </p:spPr>
         <p:txBody>
-          <a:bodyPr wrap="square" anchor="t" lIns="0" rIns="0" tIns="0" bIns="0">
+          <a:bodyPr wrap="square" lIns="0" tIns="0" rIns="0" bIns="0" anchor="t">
             <a:spAutoFit/>
           </a:bodyPr>
           <a:lstStyle/>
@@ -19372,7 +19889,7 @@
           <a:noFill/>
         </p:spPr>
         <p:txBody>
-          <a:bodyPr wrap="square" anchor="t" lIns="0" rIns="0" tIns="0" bIns="0">
+          <a:bodyPr wrap="square" lIns="0" tIns="0" rIns="0" bIns="0" anchor="t">
             <a:spAutoFit/>
           </a:bodyPr>
           <a:lstStyle/>
@@ -19417,7 +19934,7 @@
           <a:noFill/>
         </p:spPr>
         <p:txBody>
-          <a:bodyPr wrap="square" anchor="t" lIns="0" rIns="0" tIns="0" bIns="0">
+          <a:bodyPr wrap="square" lIns="0" tIns="0" rIns="0" bIns="0" anchor="t">
             <a:spAutoFit/>
           </a:bodyPr>
           <a:lstStyle/>
@@ -19560,7 +20077,7 @@
           <a:noFill/>
         </p:spPr>
         <p:txBody>
-          <a:bodyPr wrap="square" anchor="t" lIns="0" rIns="0" tIns="0" bIns="0">
+          <a:bodyPr wrap="square" lIns="0" tIns="0" rIns="0" bIns="0" anchor="t">
             <a:spAutoFit/>
           </a:bodyPr>
           <a:lstStyle/>
@@ -19597,7 +20114,7 @@
 </file>
 
 <file path=ppt/slides/slide27.xml><?xml version="1.0" encoding="utf-8"?>
-<p:sld xmlns:a="http://schemas.openxmlformats.org/drawingml/2006/main" xmlns:p="http://schemas.openxmlformats.org/presentationml/2006/main" xmlns:r="http://schemas.openxmlformats.org/officeDocument/2006/relationships">
+<p:sld xmlns:a="http://schemas.openxmlformats.org/drawingml/2006/main" xmlns:r="http://schemas.openxmlformats.org/officeDocument/2006/relationships" xmlns:p="http://schemas.openxmlformats.org/presentationml/2006/main">
   <p:cSld>
     <p:spTree>
       <p:nvGrpSpPr>
@@ -19605,7 +20122,14 @@
         <p:cNvGrpSpPr/>
         <p:nvPr/>
       </p:nvGrpSpPr>
-      <p:grpSpPr/>
+      <p:grpSpPr>
+        <a:xfrm>
+          <a:off x="0" y="0"/>
+          <a:ext cx="0" cy="0"/>
+          <a:chOff x="0" y="0"/>
+          <a:chExt cx="0" cy="0"/>
+        </a:xfrm>
+      </p:grpSpPr>
       <p:sp>
         <p:nvSpPr>
           <p:cNvPr id="2" name="Rectangle 1"/>
@@ -19647,6 +20171,7 @@
           <a:lstStyle/>
           <a:p>
             <a:pPr algn="ctr"/>
+            <a:endParaRPr/>
           </a:p>
         </p:txBody>
       </p:sp>
@@ -19691,6 +20216,7 @@
           <a:lstStyle/>
           <a:p>
             <a:pPr algn="ctr"/>
+            <a:endParaRPr/>
           </a:p>
         </p:txBody>
       </p:sp>
@@ -19735,6 +20261,7 @@
           <a:lstStyle/>
           <a:p>
             <a:pPr algn="ctr"/>
+            <a:endParaRPr/>
           </a:p>
         </p:txBody>
       </p:sp>
@@ -19779,6 +20306,7 @@
           <a:lstStyle/>
           <a:p>
             <a:pPr algn="ctr"/>
+            <a:endParaRPr/>
           </a:p>
         </p:txBody>
       </p:sp>
@@ -19823,6 +20351,7 @@
           <a:lstStyle/>
           <a:p>
             <a:pPr algn="ctr"/>
+            <a:endParaRPr/>
           </a:p>
         </p:txBody>
       </p:sp>
@@ -19867,6 +20396,7 @@
           <a:lstStyle/>
           <a:p>
             <a:pPr algn="ctr"/>
+            <a:endParaRPr/>
           </a:p>
         </p:txBody>
       </p:sp>
@@ -19911,6 +20441,7 @@
           <a:lstStyle/>
           <a:p>
             <a:pPr algn="ctr"/>
+            <a:endParaRPr/>
           </a:p>
         </p:txBody>
       </p:sp>
@@ -19955,6 +20486,7 @@
           <a:lstStyle/>
           <a:p>
             <a:pPr algn="ctr"/>
+            <a:endParaRPr/>
           </a:p>
         </p:txBody>
       </p:sp>
@@ -19999,6 +20531,7 @@
           <a:lstStyle/>
           <a:p>
             <a:pPr algn="ctr"/>
+            <a:endParaRPr/>
           </a:p>
         </p:txBody>
       </p:sp>
@@ -20043,6 +20576,7 @@
           <a:lstStyle/>
           <a:p>
             <a:pPr algn="ctr"/>
+            <a:endParaRPr/>
           </a:p>
         </p:txBody>
       </p:sp>
@@ -20087,6 +20621,7 @@
           <a:lstStyle/>
           <a:p>
             <a:pPr algn="ctr"/>
+            <a:endParaRPr/>
           </a:p>
         </p:txBody>
       </p:sp>
@@ -20131,6 +20666,7 @@
           <a:lstStyle/>
           <a:p>
             <a:pPr algn="ctr"/>
+            <a:endParaRPr/>
           </a:p>
         </p:txBody>
       </p:sp>
@@ -20175,6 +20711,7 @@
           <a:lstStyle/>
           <a:p>
             <a:pPr algn="ctr"/>
+            <a:endParaRPr/>
           </a:p>
         </p:txBody>
       </p:sp>
@@ -20219,6 +20756,7 @@
           <a:lstStyle/>
           <a:p>
             <a:pPr algn="ctr"/>
+            <a:endParaRPr/>
           </a:p>
         </p:txBody>
       </p:sp>
@@ -20263,6 +20801,7 @@
           <a:lstStyle/>
           <a:p>
             <a:pPr algn="ctr"/>
+            <a:endParaRPr/>
           </a:p>
         </p:txBody>
       </p:sp>
@@ -20307,6 +20846,7 @@
           <a:lstStyle/>
           <a:p>
             <a:pPr algn="ctr"/>
+            <a:endParaRPr/>
           </a:p>
         </p:txBody>
       </p:sp>
@@ -20351,6 +20891,7 @@
           <a:lstStyle/>
           <a:p>
             <a:pPr algn="ctr"/>
+            <a:endParaRPr/>
           </a:p>
         </p:txBody>
       </p:sp>
@@ -20395,6 +20936,7 @@
           <a:lstStyle/>
           <a:p>
             <a:pPr algn="ctr"/>
+            <a:endParaRPr/>
           </a:p>
         </p:txBody>
       </p:sp>
@@ -20439,6 +20981,7 @@
           <a:lstStyle/>
           <a:p>
             <a:pPr algn="ctr"/>
+            <a:endParaRPr/>
           </a:p>
         </p:txBody>
       </p:sp>
@@ -20483,6 +21026,7 @@
           <a:lstStyle/>
           <a:p>
             <a:pPr algn="ctr"/>
+            <a:endParaRPr/>
           </a:p>
         </p:txBody>
       </p:sp>
@@ -20527,6 +21071,7 @@
           <a:lstStyle/>
           <a:p>
             <a:pPr algn="ctr"/>
+            <a:endParaRPr/>
           </a:p>
         </p:txBody>
       </p:sp>
@@ -20571,6 +21116,7 @@
           <a:lstStyle/>
           <a:p>
             <a:pPr algn="ctr"/>
+            <a:endParaRPr/>
           </a:p>
         </p:txBody>
       </p:sp>
@@ -20615,6 +21161,7 @@
           <a:lstStyle/>
           <a:p>
             <a:pPr algn="ctr"/>
+            <a:endParaRPr/>
           </a:p>
         </p:txBody>
       </p:sp>
@@ -20659,6 +21206,7 @@
           <a:lstStyle/>
           <a:p>
             <a:pPr algn="ctr"/>
+            <a:endParaRPr/>
           </a:p>
         </p:txBody>
       </p:sp>
@@ -20703,6 +21251,7 @@
           <a:lstStyle/>
           <a:p>
             <a:pPr algn="ctr"/>
+            <a:endParaRPr/>
           </a:p>
         </p:txBody>
       </p:sp>
@@ -20747,6 +21296,7 @@
           <a:lstStyle/>
           <a:p>
             <a:pPr algn="ctr"/>
+            <a:endParaRPr/>
           </a:p>
         </p:txBody>
       </p:sp>
@@ -20791,6 +21341,7 @@
           <a:lstStyle/>
           <a:p>
             <a:pPr algn="ctr"/>
+            <a:endParaRPr/>
           </a:p>
         </p:txBody>
       </p:sp>
@@ -20835,6 +21386,7 @@
           <a:lstStyle/>
           <a:p>
             <a:pPr algn="ctr"/>
+            <a:endParaRPr/>
           </a:p>
         </p:txBody>
       </p:sp>
@@ -20879,6 +21431,7 @@
           <a:lstStyle/>
           <a:p>
             <a:pPr algn="ctr"/>
+            <a:endParaRPr/>
           </a:p>
         </p:txBody>
       </p:sp>
@@ -20923,6 +21476,7 @@
           <a:lstStyle/>
           <a:p>
             <a:pPr algn="ctr"/>
+            <a:endParaRPr/>
           </a:p>
         </p:txBody>
       </p:sp>
@@ -20967,6 +21521,7 @@
           <a:lstStyle/>
           <a:p>
             <a:pPr algn="ctr"/>
+            <a:endParaRPr/>
           </a:p>
         </p:txBody>
       </p:sp>
@@ -21011,6 +21566,7 @@
           <a:lstStyle/>
           <a:p>
             <a:pPr algn="ctr"/>
+            <a:endParaRPr/>
           </a:p>
         </p:txBody>
       </p:sp>
@@ -21055,6 +21611,7 @@
           <a:lstStyle/>
           <a:p>
             <a:pPr algn="ctr"/>
+            <a:endParaRPr/>
           </a:p>
         </p:txBody>
       </p:sp>
@@ -21099,6 +21656,7 @@
           <a:lstStyle/>
           <a:p>
             <a:pPr algn="ctr"/>
+            <a:endParaRPr/>
           </a:p>
         </p:txBody>
       </p:sp>
@@ -21143,6 +21701,7 @@
           <a:lstStyle/>
           <a:p>
             <a:pPr algn="ctr"/>
+            <a:endParaRPr/>
           </a:p>
         </p:txBody>
       </p:sp>
@@ -21187,6 +21746,7 @@
           <a:lstStyle/>
           <a:p>
             <a:pPr algn="ctr"/>
+            <a:endParaRPr/>
           </a:p>
         </p:txBody>
       </p:sp>
@@ -21231,6 +21791,7 @@
           <a:lstStyle/>
           <a:p>
             <a:pPr algn="ctr"/>
+            <a:endParaRPr/>
           </a:p>
         </p:txBody>
       </p:sp>
@@ -21275,6 +21836,7 @@
           <a:lstStyle/>
           <a:p>
             <a:pPr algn="ctr"/>
+            <a:endParaRPr/>
           </a:p>
         </p:txBody>
       </p:sp>
@@ -21319,6 +21881,7 @@
           <a:lstStyle/>
           <a:p>
             <a:pPr algn="ctr"/>
+            <a:endParaRPr/>
           </a:p>
         </p:txBody>
       </p:sp>
@@ -21363,6 +21926,7 @@
           <a:lstStyle/>
           <a:p>
             <a:pPr algn="ctr"/>
+            <a:endParaRPr/>
           </a:p>
         </p:txBody>
       </p:sp>
@@ -21407,6 +21971,7 @@
           <a:lstStyle/>
           <a:p>
             <a:pPr algn="ctr"/>
+            <a:endParaRPr/>
           </a:p>
         </p:txBody>
       </p:sp>
@@ -21451,6 +22016,7 @@
           <a:lstStyle/>
           <a:p>
             <a:pPr algn="ctr"/>
+            <a:endParaRPr/>
           </a:p>
         </p:txBody>
       </p:sp>
@@ -21495,6 +22061,7 @@
           <a:lstStyle/>
           <a:p>
             <a:pPr algn="ctr"/>
+            <a:endParaRPr/>
           </a:p>
         </p:txBody>
       </p:sp>
@@ -21539,6 +22106,7 @@
           <a:lstStyle/>
           <a:p>
             <a:pPr algn="ctr"/>
+            <a:endParaRPr/>
           </a:p>
         </p:txBody>
       </p:sp>
@@ -21583,6 +22151,7 @@
           <a:lstStyle/>
           <a:p>
             <a:pPr algn="ctr"/>
+            <a:endParaRPr/>
           </a:p>
         </p:txBody>
       </p:sp>
@@ -21603,7 +22172,7 @@
           <a:noFill/>
         </p:spPr>
         <p:txBody>
-          <a:bodyPr wrap="square" anchor="t" lIns="0" rIns="0" tIns="0" bIns="0">
+          <a:bodyPr wrap="square" lIns="0" tIns="0" rIns="0" bIns="0" anchor="t">
             <a:spAutoFit/>
           </a:bodyPr>
           <a:lstStyle/>
@@ -21648,7 +22217,7 @@
           <a:noFill/>
         </p:spPr>
         <p:txBody>
-          <a:bodyPr wrap="square" anchor="t" lIns="0" rIns="0" tIns="0" bIns="0">
+          <a:bodyPr wrap="square" lIns="0" tIns="0" rIns="0" bIns="0" anchor="t">
             <a:spAutoFit/>
           </a:bodyPr>
           <a:lstStyle/>
@@ -21693,7 +22262,7 @@
           <a:noFill/>
         </p:spPr>
         <p:txBody>
-          <a:bodyPr wrap="square" anchor="t" lIns="0" rIns="0" tIns="0" bIns="0">
+          <a:bodyPr wrap="square" lIns="0" tIns="0" rIns="0" bIns="0" anchor="t">
             <a:spAutoFit/>
           </a:bodyPr>
           <a:lstStyle/>
@@ -21730,7 +22299,7 @@
 </file>
 
 <file path=ppt/slides/slide28.xml><?xml version="1.0" encoding="utf-8"?>
-<p:sld xmlns:a="http://schemas.openxmlformats.org/drawingml/2006/main" xmlns:p="http://schemas.openxmlformats.org/presentationml/2006/main" xmlns:r="http://schemas.openxmlformats.org/officeDocument/2006/relationships">
+<p:sld xmlns:a="http://schemas.openxmlformats.org/drawingml/2006/main" xmlns:r="http://schemas.openxmlformats.org/officeDocument/2006/relationships" xmlns:p="http://schemas.openxmlformats.org/presentationml/2006/main">
   <p:cSld>
     <p:spTree>
       <p:nvGrpSpPr>
@@ -21738,7 +22307,14 @@
         <p:cNvGrpSpPr/>
         <p:nvPr/>
       </p:nvGrpSpPr>
-      <p:grpSpPr/>
+      <p:grpSpPr>
+        <a:xfrm>
+          <a:off x="0" y="0"/>
+          <a:ext cx="0" cy="0"/>
+          <a:chOff x="0" y="0"/>
+          <a:chExt cx="0" cy="0"/>
+        </a:xfrm>
+      </p:grpSpPr>
       <p:sp>
         <p:nvSpPr>
           <p:cNvPr id="2" name="Rectangle 1"/>
@@ -21780,6 +22356,7 @@
           <a:lstStyle/>
           <a:p>
             <a:pPr algn="ctr"/>
+            <a:endParaRPr/>
           </a:p>
         </p:txBody>
       </p:sp>
@@ -21824,6 +22401,7 @@
           <a:lstStyle/>
           <a:p>
             <a:pPr algn="ctr"/>
+            <a:endParaRPr/>
           </a:p>
         </p:txBody>
       </p:sp>
@@ -21844,7 +22422,7 @@
           <a:noFill/>
         </p:spPr>
         <p:txBody>
-          <a:bodyPr wrap="square" anchor="t" lIns="0" rIns="0" tIns="0" bIns="0">
+          <a:bodyPr wrap="square" lIns="0" tIns="0" rIns="0" bIns="0" anchor="t">
             <a:spAutoFit/>
           </a:bodyPr>
           <a:lstStyle/>
@@ -21889,7 +22467,7 @@
           <a:noFill/>
         </p:spPr>
         <p:txBody>
-          <a:bodyPr wrap="square" anchor="t" lIns="0" rIns="0" tIns="0" bIns="0">
+          <a:bodyPr wrap="square" lIns="0" tIns="0" rIns="0" bIns="0" anchor="t">
             <a:spAutoFit/>
           </a:bodyPr>
           <a:lstStyle/>
@@ -21934,7 +22512,7 @@
           <a:noFill/>
         </p:spPr>
         <p:txBody>
-          <a:bodyPr wrap="square" anchor="t" lIns="0" rIns="0" tIns="0" bIns="0">
+          <a:bodyPr wrap="square" lIns="0" tIns="0" rIns="0" bIns="0" anchor="t">
             <a:spAutoFit/>
           </a:bodyPr>
           <a:lstStyle/>
@@ -22081,7 +22659,7 @@
           <a:noFill/>
         </p:spPr>
         <p:txBody>
-          <a:bodyPr wrap="square" anchor="t" lIns="0" rIns="0" tIns="0" bIns="0">
+          <a:bodyPr wrap="square" lIns="0" tIns="0" rIns="0" bIns="0" anchor="t">
             <a:spAutoFit/>
           </a:bodyPr>
           <a:lstStyle/>
@@ -22126,7 +22704,7 @@
           <a:noFill/>
         </p:spPr>
         <p:txBody>
-          <a:bodyPr wrap="square" anchor="t" lIns="0" rIns="0" tIns="0" bIns="0">
+          <a:bodyPr wrap="square" lIns="0" tIns="0" rIns="0" bIns="0" anchor="t">
             <a:spAutoFit/>
           </a:bodyPr>
           <a:lstStyle/>
@@ -22163,7 +22741,7 @@
 </file>
 
 <file path=ppt/slides/slide29.xml><?xml version="1.0" encoding="utf-8"?>
-<p:sld xmlns:a="http://schemas.openxmlformats.org/drawingml/2006/main" xmlns:p="http://schemas.openxmlformats.org/presentationml/2006/main" xmlns:r="http://schemas.openxmlformats.org/officeDocument/2006/relationships">
+<p:sld xmlns:a="http://schemas.openxmlformats.org/drawingml/2006/main" xmlns:r="http://schemas.openxmlformats.org/officeDocument/2006/relationships" xmlns:p="http://schemas.openxmlformats.org/presentationml/2006/main">
   <p:cSld>
     <p:spTree>
       <p:nvGrpSpPr>
@@ -22171,7 +22749,14 @@
         <p:cNvGrpSpPr/>
         <p:nvPr/>
       </p:nvGrpSpPr>
-      <p:grpSpPr/>
+      <p:grpSpPr>
+        <a:xfrm>
+          <a:off x="0" y="0"/>
+          <a:ext cx="0" cy="0"/>
+          <a:chOff x="0" y="0"/>
+          <a:chExt cx="0" cy="0"/>
+        </a:xfrm>
+      </p:grpSpPr>
       <p:sp>
         <p:nvSpPr>
           <p:cNvPr id="2" name="Rectangle 1"/>
@@ -22213,6 +22798,7 @@
           <a:lstStyle/>
           <a:p>
             <a:pPr algn="ctr"/>
+            <a:endParaRPr/>
           </a:p>
         </p:txBody>
       </p:sp>
@@ -22257,6 +22843,7 @@
           <a:lstStyle/>
           <a:p>
             <a:pPr algn="ctr"/>
+            <a:endParaRPr/>
           </a:p>
         </p:txBody>
       </p:sp>
@@ -22277,7 +22864,7 @@
           <a:noFill/>
         </p:spPr>
         <p:txBody>
-          <a:bodyPr wrap="square" anchor="t" lIns="0" rIns="0" tIns="0" bIns="0">
+          <a:bodyPr wrap="square" lIns="0" tIns="0" rIns="0" bIns="0" anchor="t">
             <a:spAutoFit/>
           </a:bodyPr>
           <a:lstStyle/>
@@ -22322,7 +22909,7 @@
           <a:noFill/>
         </p:spPr>
         <p:txBody>
-          <a:bodyPr wrap="square" anchor="t" lIns="0" rIns="0" tIns="0" bIns="0">
+          <a:bodyPr wrap="square" lIns="0" tIns="0" rIns="0" bIns="0" anchor="t">
             <a:spAutoFit/>
           </a:bodyPr>
           <a:lstStyle/>
@@ -22367,7 +22954,7 @@
           <a:noFill/>
         </p:spPr>
         <p:txBody>
-          <a:bodyPr wrap="square" anchor="t" lIns="0" rIns="0" tIns="0" bIns="0">
+          <a:bodyPr wrap="square" lIns="0" tIns="0" rIns="0" bIns="0" anchor="t">
             <a:spAutoFit/>
           </a:bodyPr>
           <a:lstStyle/>
@@ -22412,7 +22999,7 @@
           <a:noFill/>
         </p:spPr>
         <p:txBody>
-          <a:bodyPr wrap="square" anchor="t" lIns="0" rIns="0" tIns="0" bIns="0">
+          <a:bodyPr wrap="square" lIns="0" tIns="0" rIns="0" bIns="0" anchor="t">
             <a:spAutoFit/>
           </a:bodyPr>
           <a:lstStyle/>
@@ -22457,7 +23044,7 @@
           <a:noFill/>
         </p:spPr>
         <p:txBody>
-          <a:bodyPr wrap="square" anchor="t" lIns="0" rIns="0" tIns="0" bIns="0">
+          <a:bodyPr wrap="square" lIns="0" tIns="0" rIns="0" bIns="0" anchor="t">
             <a:spAutoFit/>
           </a:bodyPr>
           <a:lstStyle/>
@@ -22502,7 +23089,7 @@
           <a:noFill/>
         </p:spPr>
         <p:txBody>
-          <a:bodyPr wrap="square" anchor="t" lIns="0" rIns="0" tIns="0" bIns="0">
+          <a:bodyPr wrap="square" lIns="0" tIns="0" rIns="0" bIns="0" anchor="t">
             <a:spAutoFit/>
           </a:bodyPr>
           <a:lstStyle/>
@@ -22547,7 +23134,7 @@
           <a:noFill/>
         </p:spPr>
         <p:txBody>
-          <a:bodyPr wrap="square" anchor="t" lIns="0" rIns="0" tIns="0" bIns="0">
+          <a:bodyPr wrap="square" lIns="0" tIns="0" rIns="0" bIns="0" anchor="t">
             <a:spAutoFit/>
           </a:bodyPr>
           <a:lstStyle/>
@@ -22592,7 +23179,7 @@
           <a:noFill/>
         </p:spPr>
         <p:txBody>
-          <a:bodyPr wrap="square" anchor="t" lIns="0" rIns="0" tIns="0" bIns="0">
+          <a:bodyPr wrap="square" lIns="0" tIns="0" rIns="0" bIns="0" anchor="t">
             <a:spAutoFit/>
           </a:bodyPr>
           <a:lstStyle/>
@@ -22637,7 +23224,7 @@
           <a:noFill/>
         </p:spPr>
         <p:txBody>
-          <a:bodyPr wrap="square" anchor="t" lIns="0" rIns="0" tIns="0" bIns="0">
+          <a:bodyPr wrap="square" lIns="0" tIns="0" rIns="0" bIns="0" anchor="t">
             <a:spAutoFit/>
           </a:bodyPr>
           <a:lstStyle/>
@@ -22682,7 +23269,7 @@
           <a:noFill/>
         </p:spPr>
         <p:txBody>
-          <a:bodyPr wrap="square" anchor="t" lIns="0" rIns="0" tIns="0" bIns="0">
+          <a:bodyPr wrap="square" lIns="0" tIns="0" rIns="0" bIns="0" anchor="t">
             <a:spAutoFit/>
           </a:bodyPr>
           <a:lstStyle/>
@@ -22727,7 +23314,7 @@
           <a:noFill/>
         </p:spPr>
         <p:txBody>
-          <a:bodyPr wrap="square" anchor="t" lIns="0" rIns="0" tIns="0" bIns="0">
+          <a:bodyPr wrap="square" lIns="0" tIns="0" rIns="0" bIns="0" anchor="t">
             <a:spAutoFit/>
           </a:bodyPr>
           <a:lstStyle/>
@@ -22772,7 +23359,7 @@
           <a:noFill/>
         </p:spPr>
         <p:txBody>
-          <a:bodyPr wrap="square" anchor="t" lIns="0" rIns="0" tIns="0" bIns="0">
+          <a:bodyPr wrap="square" lIns="0" tIns="0" rIns="0" bIns="0" anchor="t">
             <a:spAutoFit/>
           </a:bodyPr>
           <a:lstStyle/>
@@ -22853,7 +23440,7 @@
           <a:noFill/>
         </p:spPr>
         <p:txBody>
-          <a:bodyPr wrap="square" anchor="t" lIns="0" rIns="0" tIns="0" bIns="0">
+          <a:bodyPr wrap="square" lIns="0" tIns="0" rIns="0" bIns="0" anchor="t">
             <a:spAutoFit/>
           </a:bodyPr>
           <a:lstStyle/>
@@ -22898,7 +23485,7 @@
           <a:noFill/>
         </p:spPr>
         <p:txBody>
-          <a:bodyPr wrap="square" anchor="t" lIns="0" rIns="0" tIns="0" bIns="0">
+          <a:bodyPr wrap="square" lIns="0" tIns="0" rIns="0" bIns="0" anchor="t">
             <a:spAutoFit/>
           </a:bodyPr>
           <a:lstStyle/>
@@ -22935,7 +23522,7 @@
 </file>
 
 <file path=ppt/slides/slide3.xml><?xml version="1.0" encoding="utf-8"?>
-<p:sld xmlns:a="http://schemas.openxmlformats.org/drawingml/2006/main" xmlns:p="http://schemas.openxmlformats.org/presentationml/2006/main" xmlns:r="http://schemas.openxmlformats.org/officeDocument/2006/relationships">
+<p:sld xmlns:a="http://schemas.openxmlformats.org/drawingml/2006/main" xmlns:r="http://schemas.openxmlformats.org/officeDocument/2006/relationships" xmlns:p="http://schemas.openxmlformats.org/presentationml/2006/main">
   <p:cSld>
     <p:spTree>
       <p:nvGrpSpPr>
@@ -22943,7 +23530,14 @@
         <p:cNvGrpSpPr/>
         <p:nvPr/>
       </p:nvGrpSpPr>
-      <p:grpSpPr/>
+      <p:grpSpPr>
+        <a:xfrm>
+          <a:off x="0" y="0"/>
+          <a:ext cx="0" cy="0"/>
+          <a:chOff x="0" y="0"/>
+          <a:chExt cx="0" cy="0"/>
+        </a:xfrm>
+      </p:grpSpPr>
       <p:sp>
         <p:nvSpPr>
           <p:cNvPr id="2" name="Rectangle 1"/>
@@ -22985,6 +23579,7 @@
           <a:lstStyle/>
           <a:p>
             <a:pPr algn="ctr"/>
+            <a:endParaRPr/>
           </a:p>
         </p:txBody>
       </p:sp>
@@ -23029,6 +23624,7 @@
           <a:lstStyle/>
           <a:p>
             <a:pPr algn="ctr"/>
+            <a:endParaRPr/>
           </a:p>
         </p:txBody>
       </p:sp>
@@ -23049,7 +23645,7 @@
           <a:noFill/>
         </p:spPr>
         <p:txBody>
-          <a:bodyPr wrap="square" anchor="t" lIns="0" rIns="0" tIns="0" bIns="0">
+          <a:bodyPr wrap="square" lIns="0" tIns="0" rIns="0" bIns="0" anchor="t">
             <a:spAutoFit/>
           </a:bodyPr>
           <a:lstStyle/>
@@ -23094,7 +23690,7 @@
           <a:noFill/>
         </p:spPr>
         <p:txBody>
-          <a:bodyPr wrap="square" anchor="t" lIns="0" rIns="0" tIns="0" bIns="0">
+          <a:bodyPr wrap="square" lIns="0" tIns="0" rIns="0" bIns="0" anchor="t">
             <a:spAutoFit/>
           </a:bodyPr>
           <a:lstStyle/>
@@ -23167,6 +23763,7 @@
           <a:lstStyle/>
           <a:p>
             <a:pPr algn="ctr"/>
+            <a:endParaRPr/>
           </a:p>
         </p:txBody>
       </p:sp>
@@ -23207,7 +23804,7 @@
           </a:fontRef>
         </p:style>
         <p:txBody>
-          <a:bodyPr rtlCol="0" anchor="ctr" wrap="none" lIns="0" rIns="0" tIns="0" bIns="0"/>
+          <a:bodyPr wrap="none" lIns="0" tIns="0" rIns="0" bIns="0" rtlCol="0" anchor="ctr"/>
           <a:lstStyle/>
           <a:p>
             <a:pPr algn="ctr"/>
@@ -23240,7 +23837,7 @@
           <a:noFill/>
         </p:spPr>
         <p:txBody>
-          <a:bodyPr wrap="square" anchor="t" lIns="0" rIns="0" tIns="0" bIns="0">
+          <a:bodyPr wrap="square" lIns="0" tIns="0" rIns="0" bIns="0" anchor="t">
             <a:spAutoFit/>
           </a:bodyPr>
           <a:lstStyle/>
@@ -23286,7 +23883,7 @@
           <a:noFill/>
         </p:spPr>
         <p:txBody>
-          <a:bodyPr wrap="square" anchor="t" lIns="0" rIns="0" tIns="0" bIns="0">
+          <a:bodyPr wrap="square" lIns="0" tIns="0" rIns="0" bIns="0" anchor="t">
             <a:spAutoFit/>
           </a:bodyPr>
           <a:lstStyle/>
@@ -23359,6 +23956,7 @@
           <a:lstStyle/>
           <a:p>
             <a:pPr algn="ctr"/>
+            <a:endParaRPr/>
           </a:p>
         </p:txBody>
       </p:sp>
@@ -23399,7 +23997,7 @@
           </a:fontRef>
         </p:style>
         <p:txBody>
-          <a:bodyPr rtlCol="0" anchor="ctr" wrap="none" lIns="0" rIns="0" tIns="0" bIns="0"/>
+          <a:bodyPr wrap="none" lIns="0" tIns="0" rIns="0" bIns="0" rtlCol="0" anchor="ctr"/>
           <a:lstStyle/>
           <a:p>
             <a:pPr algn="ctr"/>
@@ -23432,7 +24030,7 @@
           <a:noFill/>
         </p:spPr>
         <p:txBody>
-          <a:bodyPr wrap="square" anchor="t" lIns="0" rIns="0" tIns="0" bIns="0">
+          <a:bodyPr wrap="square" lIns="0" tIns="0" rIns="0" bIns="0" anchor="t">
             <a:spAutoFit/>
           </a:bodyPr>
           <a:lstStyle/>
@@ -23478,7 +24076,7 @@
           <a:noFill/>
         </p:spPr>
         <p:txBody>
-          <a:bodyPr wrap="square" anchor="t" lIns="0" rIns="0" tIns="0" bIns="0">
+          <a:bodyPr wrap="square" lIns="0" tIns="0" rIns="0" bIns="0" anchor="t">
             <a:spAutoFit/>
           </a:bodyPr>
           <a:lstStyle/>
@@ -23523,7 +24121,7 @@
           <a:noFill/>
         </p:spPr>
         <p:txBody>
-          <a:bodyPr wrap="square" anchor="t" lIns="0" rIns="0" tIns="0" bIns="0">
+          <a:bodyPr wrap="square" lIns="0" tIns="0" rIns="0" bIns="0" anchor="t">
             <a:spAutoFit/>
           </a:bodyPr>
           <a:lstStyle/>
@@ -23560,7 +24158,7 @@
 </file>
 
 <file path=ppt/slides/slide30.xml><?xml version="1.0" encoding="utf-8"?>
-<p:sld xmlns:a="http://schemas.openxmlformats.org/drawingml/2006/main" xmlns:p="http://schemas.openxmlformats.org/presentationml/2006/main" xmlns:r="http://schemas.openxmlformats.org/officeDocument/2006/relationships">
+<p:sld xmlns:a="http://schemas.openxmlformats.org/drawingml/2006/main" xmlns:r="http://schemas.openxmlformats.org/officeDocument/2006/relationships" xmlns:p="http://schemas.openxmlformats.org/presentationml/2006/main">
   <p:cSld>
     <p:spTree>
       <p:nvGrpSpPr>
@@ -23568,7 +24166,14 @@
         <p:cNvGrpSpPr/>
         <p:nvPr/>
       </p:nvGrpSpPr>
-      <p:grpSpPr/>
+      <p:grpSpPr>
+        <a:xfrm>
+          <a:off x="0" y="0"/>
+          <a:ext cx="0" cy="0"/>
+          <a:chOff x="0" y="0"/>
+          <a:chExt cx="0" cy="0"/>
+        </a:xfrm>
+      </p:grpSpPr>
       <p:sp>
         <p:nvSpPr>
           <p:cNvPr id="2" name="Rectangle 1"/>
@@ -23610,6 +24215,7 @@
           <a:lstStyle/>
           <a:p>
             <a:pPr algn="ctr"/>
+            <a:endParaRPr/>
           </a:p>
         </p:txBody>
       </p:sp>
@@ -23654,6 +24260,7 @@
           <a:lstStyle/>
           <a:p>
             <a:pPr algn="ctr"/>
+            <a:endParaRPr/>
           </a:p>
         </p:txBody>
       </p:sp>
@@ -23698,6 +24305,7 @@
           <a:lstStyle/>
           <a:p>
             <a:pPr algn="ctr"/>
+            <a:endParaRPr/>
           </a:p>
         </p:txBody>
       </p:sp>
@@ -23742,6 +24350,7 @@
           <a:lstStyle/>
           <a:p>
             <a:pPr algn="ctr"/>
+            <a:endParaRPr/>
           </a:p>
         </p:txBody>
       </p:sp>
@@ -23786,6 +24395,7 @@
           <a:lstStyle/>
           <a:p>
             <a:pPr algn="ctr"/>
+            <a:endParaRPr/>
           </a:p>
         </p:txBody>
       </p:sp>
@@ -23830,6 +24440,7 @@
           <a:lstStyle/>
           <a:p>
             <a:pPr algn="ctr"/>
+            <a:endParaRPr/>
           </a:p>
         </p:txBody>
       </p:sp>
@@ -23874,6 +24485,7 @@
           <a:lstStyle/>
           <a:p>
             <a:pPr algn="ctr"/>
+            <a:endParaRPr/>
           </a:p>
         </p:txBody>
       </p:sp>
@@ -23918,6 +24530,7 @@
           <a:lstStyle/>
           <a:p>
             <a:pPr algn="ctr"/>
+            <a:endParaRPr/>
           </a:p>
         </p:txBody>
       </p:sp>
@@ -23962,6 +24575,7 @@
           <a:lstStyle/>
           <a:p>
             <a:pPr algn="ctr"/>
+            <a:endParaRPr/>
           </a:p>
         </p:txBody>
       </p:sp>
@@ -24006,6 +24620,7 @@
           <a:lstStyle/>
           <a:p>
             <a:pPr algn="ctr"/>
+            <a:endParaRPr/>
           </a:p>
         </p:txBody>
       </p:sp>
@@ -24050,6 +24665,7 @@
           <a:lstStyle/>
           <a:p>
             <a:pPr algn="ctr"/>
+            <a:endParaRPr/>
           </a:p>
         </p:txBody>
       </p:sp>
@@ -24094,6 +24710,7 @@
           <a:lstStyle/>
           <a:p>
             <a:pPr algn="ctr"/>
+            <a:endParaRPr/>
           </a:p>
         </p:txBody>
       </p:sp>
@@ -24138,6 +24755,7 @@
           <a:lstStyle/>
           <a:p>
             <a:pPr algn="ctr"/>
+            <a:endParaRPr/>
           </a:p>
         </p:txBody>
       </p:sp>
@@ -24182,6 +24800,7 @@
           <a:lstStyle/>
           <a:p>
             <a:pPr algn="ctr"/>
+            <a:endParaRPr/>
           </a:p>
         </p:txBody>
       </p:sp>
@@ -24226,6 +24845,7 @@
           <a:lstStyle/>
           <a:p>
             <a:pPr algn="ctr"/>
+            <a:endParaRPr/>
           </a:p>
         </p:txBody>
       </p:sp>
@@ -24270,6 +24890,7 @@
           <a:lstStyle/>
           <a:p>
             <a:pPr algn="ctr"/>
+            <a:endParaRPr/>
           </a:p>
         </p:txBody>
       </p:sp>
@@ -24314,6 +24935,7 @@
           <a:lstStyle/>
           <a:p>
             <a:pPr algn="ctr"/>
+            <a:endParaRPr/>
           </a:p>
         </p:txBody>
       </p:sp>
@@ -24358,6 +24980,7 @@
           <a:lstStyle/>
           <a:p>
             <a:pPr algn="ctr"/>
+            <a:endParaRPr/>
           </a:p>
         </p:txBody>
       </p:sp>
@@ -24402,6 +25025,7 @@
           <a:lstStyle/>
           <a:p>
             <a:pPr algn="ctr"/>
+            <a:endParaRPr/>
           </a:p>
         </p:txBody>
       </p:sp>
@@ -24446,6 +25070,7 @@
           <a:lstStyle/>
           <a:p>
             <a:pPr algn="ctr"/>
+            <a:endParaRPr/>
           </a:p>
         </p:txBody>
       </p:sp>
@@ -24490,6 +25115,7 @@
           <a:lstStyle/>
           <a:p>
             <a:pPr algn="ctr"/>
+            <a:endParaRPr/>
           </a:p>
         </p:txBody>
       </p:sp>
@@ -24534,6 +25160,7 @@
           <a:lstStyle/>
           <a:p>
             <a:pPr algn="ctr"/>
+            <a:endParaRPr/>
           </a:p>
         </p:txBody>
       </p:sp>
@@ -24578,6 +25205,7 @@
           <a:lstStyle/>
           <a:p>
             <a:pPr algn="ctr"/>
+            <a:endParaRPr/>
           </a:p>
         </p:txBody>
       </p:sp>
@@ -24622,6 +25250,7 @@
           <a:lstStyle/>
           <a:p>
             <a:pPr algn="ctr"/>
+            <a:endParaRPr/>
           </a:p>
         </p:txBody>
       </p:sp>
@@ -24666,6 +25295,7 @@
           <a:lstStyle/>
           <a:p>
             <a:pPr algn="ctr"/>
+            <a:endParaRPr/>
           </a:p>
         </p:txBody>
       </p:sp>
@@ -24710,6 +25340,7 @@
           <a:lstStyle/>
           <a:p>
             <a:pPr algn="ctr"/>
+            <a:endParaRPr/>
           </a:p>
         </p:txBody>
       </p:sp>
@@ -24754,6 +25385,7 @@
           <a:lstStyle/>
           <a:p>
             <a:pPr algn="ctr"/>
+            <a:endParaRPr/>
           </a:p>
         </p:txBody>
       </p:sp>
@@ -24798,6 +25430,7 @@
           <a:lstStyle/>
           <a:p>
             <a:pPr algn="ctr"/>
+            <a:endParaRPr/>
           </a:p>
         </p:txBody>
       </p:sp>
@@ -24842,6 +25475,7 @@
           <a:lstStyle/>
           <a:p>
             <a:pPr algn="ctr"/>
+            <a:endParaRPr/>
           </a:p>
         </p:txBody>
       </p:sp>
@@ -24886,6 +25520,7 @@
           <a:lstStyle/>
           <a:p>
             <a:pPr algn="ctr"/>
+            <a:endParaRPr/>
           </a:p>
         </p:txBody>
       </p:sp>
@@ -24930,6 +25565,7 @@
           <a:lstStyle/>
           <a:p>
             <a:pPr algn="ctr"/>
+            <a:endParaRPr/>
           </a:p>
         </p:txBody>
       </p:sp>
@@ -24974,6 +25610,7 @@
           <a:lstStyle/>
           <a:p>
             <a:pPr algn="ctr"/>
+            <a:endParaRPr/>
           </a:p>
         </p:txBody>
       </p:sp>
@@ -25018,6 +25655,7 @@
           <a:lstStyle/>
           <a:p>
             <a:pPr algn="ctr"/>
+            <a:endParaRPr/>
           </a:p>
         </p:txBody>
       </p:sp>
@@ -25062,6 +25700,7 @@
           <a:lstStyle/>
           <a:p>
             <a:pPr algn="ctr"/>
+            <a:endParaRPr/>
           </a:p>
         </p:txBody>
       </p:sp>
@@ -25106,6 +25745,7 @@
           <a:lstStyle/>
           <a:p>
             <a:pPr algn="ctr"/>
+            <a:endParaRPr/>
           </a:p>
         </p:txBody>
       </p:sp>
@@ -25150,6 +25790,7 @@
           <a:lstStyle/>
           <a:p>
             <a:pPr algn="ctr"/>
+            <a:endParaRPr/>
           </a:p>
         </p:txBody>
       </p:sp>
@@ -25194,6 +25835,7 @@
           <a:lstStyle/>
           <a:p>
             <a:pPr algn="ctr"/>
+            <a:endParaRPr/>
           </a:p>
         </p:txBody>
       </p:sp>
@@ -25238,6 +25880,7 @@
           <a:lstStyle/>
           <a:p>
             <a:pPr algn="ctr"/>
+            <a:endParaRPr/>
           </a:p>
         </p:txBody>
       </p:sp>
@@ -25282,6 +25925,7 @@
           <a:lstStyle/>
           <a:p>
             <a:pPr algn="ctr"/>
+            <a:endParaRPr/>
           </a:p>
         </p:txBody>
       </p:sp>
@@ -25326,6 +25970,7 @@
           <a:lstStyle/>
           <a:p>
             <a:pPr algn="ctr"/>
+            <a:endParaRPr/>
           </a:p>
         </p:txBody>
       </p:sp>
@@ -25370,6 +26015,7 @@
           <a:lstStyle/>
           <a:p>
             <a:pPr algn="ctr"/>
+            <a:endParaRPr/>
           </a:p>
         </p:txBody>
       </p:sp>
@@ -25414,6 +26060,7 @@
           <a:lstStyle/>
           <a:p>
             <a:pPr algn="ctr"/>
+            <a:endParaRPr/>
           </a:p>
         </p:txBody>
       </p:sp>
@@ -25458,6 +26105,7 @@
           <a:lstStyle/>
           <a:p>
             <a:pPr algn="ctr"/>
+            <a:endParaRPr/>
           </a:p>
         </p:txBody>
       </p:sp>
@@ -25502,6 +26150,7 @@
           <a:lstStyle/>
           <a:p>
             <a:pPr algn="ctr"/>
+            <a:endParaRPr/>
           </a:p>
         </p:txBody>
       </p:sp>
@@ -25546,6 +26195,7 @@
           <a:lstStyle/>
           <a:p>
             <a:pPr algn="ctr"/>
+            <a:endParaRPr/>
           </a:p>
         </p:txBody>
       </p:sp>
@@ -25566,7 +26216,7 @@
           <a:noFill/>
         </p:spPr>
         <p:txBody>
-          <a:bodyPr wrap="square" anchor="t" lIns="0" rIns="0" tIns="0" bIns="0">
+          <a:bodyPr wrap="square" lIns="0" tIns="0" rIns="0" bIns="0" anchor="t">
             <a:spAutoFit/>
           </a:bodyPr>
           <a:lstStyle/>
@@ -25639,6 +26289,7 @@
           <a:lstStyle/>
           <a:p>
             <a:pPr algn="ctr"/>
+            <a:endParaRPr/>
           </a:p>
         </p:txBody>
       </p:sp>
@@ -25659,7 +26310,7 @@
           <a:noFill/>
         </p:spPr>
         <p:txBody>
-          <a:bodyPr wrap="square" anchor="t" lIns="0" rIns="0" tIns="0" bIns="0">
+          <a:bodyPr wrap="square" lIns="0" tIns="0" rIns="0" bIns="0" anchor="t">
             <a:spAutoFit/>
           </a:bodyPr>
           <a:lstStyle/>
@@ -25704,7 +26355,7 @@
           <a:noFill/>
         </p:spPr>
         <p:txBody>
-          <a:bodyPr wrap="square" anchor="t" lIns="0" rIns="0" tIns="0" bIns="0">
+          <a:bodyPr wrap="square" lIns="0" tIns="0" rIns="0" bIns="0" anchor="t">
             <a:spAutoFit/>
           </a:bodyPr>
           <a:lstStyle/>
@@ -25848,6 +26499,7 @@
           <a:lstStyle/>
           <a:p>
             <a:pPr algn="ctr"/>
+            <a:endParaRPr/>
           </a:p>
         </p:txBody>
       </p:sp>
@@ -25868,7 +26520,7 @@
           <a:noFill/>
         </p:spPr>
         <p:txBody>
-          <a:bodyPr wrap="square" anchor="t" lIns="0" rIns="0" tIns="0" bIns="0">
+          <a:bodyPr wrap="square" lIns="0" tIns="0" rIns="0" bIns="0" anchor="t">
             <a:spAutoFit/>
           </a:bodyPr>
           <a:lstStyle/>
@@ -25913,7 +26565,7 @@
           <a:noFill/>
         </p:spPr>
         <p:txBody>
-          <a:bodyPr wrap="square" anchor="t" lIns="0" rIns="0" tIns="0" bIns="0">
+          <a:bodyPr wrap="square" lIns="0" tIns="0" rIns="0" bIns="0" anchor="t">
             <a:spAutoFit/>
           </a:bodyPr>
           <a:lstStyle/>
@@ -26029,7 +26681,7 @@
           <a:noFill/>
         </p:spPr>
         <p:txBody>
-          <a:bodyPr wrap="square" anchor="t" lIns="0" rIns="0" tIns="0" bIns="0">
+          <a:bodyPr wrap="square" lIns="0" tIns="0" rIns="0" bIns="0" anchor="t">
             <a:spAutoFit/>
           </a:bodyPr>
           <a:lstStyle/>
@@ -26075,7 +26727,7 @@
 </file>
 
 <file path=ppt/slides/slide31.xml><?xml version="1.0" encoding="utf-8"?>
-<p:sld xmlns:a="http://schemas.openxmlformats.org/drawingml/2006/main" xmlns:p="http://schemas.openxmlformats.org/presentationml/2006/main" xmlns:r="http://schemas.openxmlformats.org/officeDocument/2006/relationships">
+<p:sld xmlns:a="http://schemas.openxmlformats.org/drawingml/2006/main" xmlns:r="http://schemas.openxmlformats.org/officeDocument/2006/relationships" xmlns:p="http://schemas.openxmlformats.org/presentationml/2006/main">
   <p:cSld>
     <p:spTree>
       <p:nvGrpSpPr>
@@ -26083,7 +26735,14 @@
         <p:cNvGrpSpPr/>
         <p:nvPr/>
       </p:nvGrpSpPr>
-      <p:grpSpPr/>
+      <p:grpSpPr>
+        <a:xfrm>
+          <a:off x="0" y="0"/>
+          <a:ext cx="0" cy="0"/>
+          <a:chOff x="0" y="0"/>
+          <a:chExt cx="0" cy="0"/>
+        </a:xfrm>
+      </p:grpSpPr>
       <p:sp>
         <p:nvSpPr>
           <p:cNvPr id="2" name="Rectangle 1"/>
@@ -26125,6 +26784,7 @@
           <a:lstStyle/>
           <a:p>
             <a:pPr algn="ctr"/>
+            <a:endParaRPr/>
           </a:p>
         </p:txBody>
       </p:sp>
@@ -26169,6 +26829,7 @@
           <a:lstStyle/>
           <a:p>
             <a:pPr algn="ctr"/>
+            <a:endParaRPr/>
           </a:p>
         </p:txBody>
       </p:sp>
@@ -26213,6 +26874,7 @@
           <a:lstStyle/>
           <a:p>
             <a:pPr algn="ctr"/>
+            <a:endParaRPr/>
           </a:p>
         </p:txBody>
       </p:sp>
@@ -26257,6 +26919,7 @@
           <a:lstStyle/>
           <a:p>
             <a:pPr algn="ctr"/>
+            <a:endParaRPr/>
           </a:p>
         </p:txBody>
       </p:sp>
@@ -26301,6 +26964,7 @@
           <a:lstStyle/>
           <a:p>
             <a:pPr algn="ctr"/>
+            <a:endParaRPr/>
           </a:p>
         </p:txBody>
       </p:sp>
@@ -26345,6 +27009,7 @@
           <a:lstStyle/>
           <a:p>
             <a:pPr algn="ctr"/>
+            <a:endParaRPr/>
           </a:p>
         </p:txBody>
       </p:sp>
@@ -26389,6 +27054,7 @@
           <a:lstStyle/>
           <a:p>
             <a:pPr algn="ctr"/>
+            <a:endParaRPr/>
           </a:p>
         </p:txBody>
       </p:sp>
@@ -26433,6 +27099,7 @@
           <a:lstStyle/>
           <a:p>
             <a:pPr algn="ctr"/>
+            <a:endParaRPr/>
           </a:p>
         </p:txBody>
       </p:sp>
@@ -26477,6 +27144,7 @@
           <a:lstStyle/>
           <a:p>
             <a:pPr algn="ctr"/>
+            <a:endParaRPr/>
           </a:p>
         </p:txBody>
       </p:sp>
@@ -26521,6 +27189,7 @@
           <a:lstStyle/>
           <a:p>
             <a:pPr algn="ctr"/>
+            <a:endParaRPr/>
           </a:p>
         </p:txBody>
       </p:sp>
@@ -26565,6 +27234,7 @@
           <a:lstStyle/>
           <a:p>
             <a:pPr algn="ctr"/>
+            <a:endParaRPr/>
           </a:p>
         </p:txBody>
       </p:sp>
@@ -26609,6 +27279,7 @@
           <a:lstStyle/>
           <a:p>
             <a:pPr algn="ctr"/>
+            <a:endParaRPr/>
           </a:p>
         </p:txBody>
       </p:sp>
@@ -26653,6 +27324,7 @@
           <a:lstStyle/>
           <a:p>
             <a:pPr algn="ctr"/>
+            <a:endParaRPr/>
           </a:p>
         </p:txBody>
       </p:sp>
@@ -26697,6 +27369,7 @@
           <a:lstStyle/>
           <a:p>
             <a:pPr algn="ctr"/>
+            <a:endParaRPr/>
           </a:p>
         </p:txBody>
       </p:sp>
@@ -26741,6 +27414,7 @@
           <a:lstStyle/>
           <a:p>
             <a:pPr algn="ctr"/>
+            <a:endParaRPr/>
           </a:p>
         </p:txBody>
       </p:sp>
@@ -26785,6 +27459,7 @@
           <a:lstStyle/>
           <a:p>
             <a:pPr algn="ctr"/>
+            <a:endParaRPr/>
           </a:p>
         </p:txBody>
       </p:sp>
@@ -26829,6 +27504,7 @@
           <a:lstStyle/>
           <a:p>
             <a:pPr algn="ctr"/>
+            <a:endParaRPr/>
           </a:p>
         </p:txBody>
       </p:sp>
@@ -26873,6 +27549,7 @@
           <a:lstStyle/>
           <a:p>
             <a:pPr algn="ctr"/>
+            <a:endParaRPr/>
           </a:p>
         </p:txBody>
       </p:sp>
@@ -26917,6 +27594,7 @@
           <a:lstStyle/>
           <a:p>
             <a:pPr algn="ctr"/>
+            <a:endParaRPr/>
           </a:p>
         </p:txBody>
       </p:sp>
@@ -26961,6 +27639,7 @@
           <a:lstStyle/>
           <a:p>
             <a:pPr algn="ctr"/>
+            <a:endParaRPr/>
           </a:p>
         </p:txBody>
       </p:sp>
@@ -27005,6 +27684,7 @@
           <a:lstStyle/>
           <a:p>
             <a:pPr algn="ctr"/>
+            <a:endParaRPr/>
           </a:p>
         </p:txBody>
       </p:sp>
@@ -27049,6 +27729,7 @@
           <a:lstStyle/>
           <a:p>
             <a:pPr algn="ctr"/>
+            <a:endParaRPr/>
           </a:p>
         </p:txBody>
       </p:sp>
@@ -27093,6 +27774,7 @@
           <a:lstStyle/>
           <a:p>
             <a:pPr algn="ctr"/>
+            <a:endParaRPr/>
           </a:p>
         </p:txBody>
       </p:sp>
@@ -27137,6 +27819,7 @@
           <a:lstStyle/>
           <a:p>
             <a:pPr algn="ctr"/>
+            <a:endParaRPr/>
           </a:p>
         </p:txBody>
       </p:sp>
@@ -27181,6 +27864,7 @@
           <a:lstStyle/>
           <a:p>
             <a:pPr algn="ctr"/>
+            <a:endParaRPr/>
           </a:p>
         </p:txBody>
       </p:sp>
@@ -27225,6 +27909,7 @@
           <a:lstStyle/>
           <a:p>
             <a:pPr algn="ctr"/>
+            <a:endParaRPr/>
           </a:p>
         </p:txBody>
       </p:sp>
@@ -27269,6 +27954,7 @@
           <a:lstStyle/>
           <a:p>
             <a:pPr algn="ctr"/>
+            <a:endParaRPr/>
           </a:p>
         </p:txBody>
       </p:sp>
@@ -27313,6 +27999,7 @@
           <a:lstStyle/>
           <a:p>
             <a:pPr algn="ctr"/>
+            <a:endParaRPr/>
           </a:p>
         </p:txBody>
       </p:sp>
@@ -27357,6 +28044,7 @@
           <a:lstStyle/>
           <a:p>
             <a:pPr algn="ctr"/>
+            <a:endParaRPr/>
           </a:p>
         </p:txBody>
       </p:sp>
@@ -27401,6 +28089,7 @@
           <a:lstStyle/>
           <a:p>
             <a:pPr algn="ctr"/>
+            <a:endParaRPr/>
           </a:p>
         </p:txBody>
       </p:sp>
@@ -27445,6 +28134,7 @@
           <a:lstStyle/>
           <a:p>
             <a:pPr algn="ctr"/>
+            <a:endParaRPr/>
           </a:p>
         </p:txBody>
       </p:sp>
@@ -27489,6 +28179,7 @@
           <a:lstStyle/>
           <a:p>
             <a:pPr algn="ctr"/>
+            <a:endParaRPr/>
           </a:p>
         </p:txBody>
       </p:sp>
@@ -27533,6 +28224,7 @@
           <a:lstStyle/>
           <a:p>
             <a:pPr algn="ctr"/>
+            <a:endParaRPr/>
           </a:p>
         </p:txBody>
       </p:sp>
@@ -27577,6 +28269,7 @@
           <a:lstStyle/>
           <a:p>
             <a:pPr algn="ctr"/>
+            <a:endParaRPr/>
           </a:p>
         </p:txBody>
       </p:sp>
@@ -27621,6 +28314,7 @@
           <a:lstStyle/>
           <a:p>
             <a:pPr algn="ctr"/>
+            <a:endParaRPr/>
           </a:p>
         </p:txBody>
       </p:sp>
@@ -27665,6 +28359,7 @@
           <a:lstStyle/>
           <a:p>
             <a:pPr algn="ctr"/>
+            <a:endParaRPr/>
           </a:p>
         </p:txBody>
       </p:sp>
@@ -27709,6 +28404,7 @@
           <a:lstStyle/>
           <a:p>
             <a:pPr algn="ctr"/>
+            <a:endParaRPr/>
           </a:p>
         </p:txBody>
       </p:sp>
@@ -27753,6 +28449,7 @@
           <a:lstStyle/>
           <a:p>
             <a:pPr algn="ctr"/>
+            <a:endParaRPr/>
           </a:p>
         </p:txBody>
       </p:sp>
@@ -27797,6 +28494,7 @@
           <a:lstStyle/>
           <a:p>
             <a:pPr algn="ctr"/>
+            <a:endParaRPr/>
           </a:p>
         </p:txBody>
       </p:sp>
@@ -27841,6 +28539,7 @@
           <a:lstStyle/>
           <a:p>
             <a:pPr algn="ctr"/>
+            <a:endParaRPr/>
           </a:p>
         </p:txBody>
       </p:sp>
@@ -27885,6 +28584,7 @@
           <a:lstStyle/>
           <a:p>
             <a:pPr algn="ctr"/>
+            <a:endParaRPr/>
           </a:p>
         </p:txBody>
       </p:sp>
@@ -27929,6 +28629,7 @@
           <a:lstStyle/>
           <a:p>
             <a:pPr algn="ctr"/>
+            <a:endParaRPr/>
           </a:p>
         </p:txBody>
       </p:sp>
@@ -27973,6 +28674,7 @@
           <a:lstStyle/>
           <a:p>
             <a:pPr algn="ctr"/>
+            <a:endParaRPr/>
           </a:p>
         </p:txBody>
       </p:sp>
@@ -28017,6 +28719,7 @@
           <a:lstStyle/>
           <a:p>
             <a:pPr algn="ctr"/>
+            <a:endParaRPr/>
           </a:p>
         </p:txBody>
       </p:sp>
@@ -28061,6 +28764,7 @@
           <a:lstStyle/>
           <a:p>
             <a:pPr algn="ctr"/>
+            <a:endParaRPr/>
           </a:p>
         </p:txBody>
       </p:sp>
@@ -28105,6 +28809,7 @@
           <a:lstStyle/>
           <a:p>
             <a:pPr algn="ctr"/>
+            <a:endParaRPr/>
           </a:p>
         </p:txBody>
       </p:sp>
@@ -28149,6 +28854,7 @@
           <a:lstStyle/>
           <a:p>
             <a:pPr algn="ctr"/>
+            <a:endParaRPr/>
           </a:p>
         </p:txBody>
       </p:sp>
@@ -28193,6 +28899,7 @@
           <a:lstStyle/>
           <a:p>
             <a:pPr algn="ctr"/>
+            <a:endParaRPr/>
           </a:p>
         </p:txBody>
       </p:sp>
@@ -28237,6 +28944,7 @@
           <a:lstStyle/>
           <a:p>
             <a:pPr algn="ctr"/>
+            <a:endParaRPr/>
           </a:p>
         </p:txBody>
       </p:sp>
@@ -28281,6 +28989,7 @@
           <a:lstStyle/>
           <a:p>
             <a:pPr algn="ctr"/>
+            <a:endParaRPr/>
           </a:p>
         </p:txBody>
       </p:sp>
@@ -28325,6 +29034,7 @@
           <a:lstStyle/>
           <a:p>
             <a:pPr algn="ctr"/>
+            <a:endParaRPr/>
           </a:p>
         </p:txBody>
       </p:sp>
@@ -28369,6 +29079,7 @@
           <a:lstStyle/>
           <a:p>
             <a:pPr algn="ctr"/>
+            <a:endParaRPr/>
           </a:p>
         </p:txBody>
       </p:sp>
@@ -28413,6 +29124,7 @@
           <a:lstStyle/>
           <a:p>
             <a:pPr algn="ctr"/>
+            <a:endParaRPr/>
           </a:p>
         </p:txBody>
       </p:sp>
@@ -28457,7 +29169,7 @@
           <a:noFill/>
         </p:spPr>
         <p:txBody>
-          <a:bodyPr wrap="square" anchor="t" lIns="0" rIns="0" tIns="0" bIns="0">
+          <a:bodyPr wrap="square" lIns="0" tIns="0" rIns="0" bIns="0" anchor="t">
             <a:spAutoFit/>
           </a:bodyPr>
           <a:lstStyle/>
@@ -28502,7 +29214,7 @@
           <a:noFill/>
         </p:spPr>
         <p:txBody>
-          <a:bodyPr wrap="square" anchor="t" lIns="0" rIns="0" tIns="0" bIns="0">
+          <a:bodyPr wrap="square" lIns="0" tIns="0" rIns="0" bIns="0" anchor="t">
             <a:spAutoFit/>
           </a:bodyPr>
           <a:lstStyle/>
@@ -28595,7 +29307,7 @@
           <a:noFill/>
         </p:spPr>
         <p:txBody>
-          <a:bodyPr wrap="square" anchor="t" lIns="0" rIns="0" tIns="0" bIns="0">
+          <a:bodyPr wrap="square" lIns="0" tIns="0" rIns="0" bIns="0" anchor="t">
             <a:spAutoFit/>
           </a:bodyPr>
           <a:lstStyle/>
@@ -28632,7 +29344,7 @@
 </file>
 
 <file path=ppt/slides/slide4.xml><?xml version="1.0" encoding="utf-8"?>
-<p:sld xmlns:a="http://schemas.openxmlformats.org/drawingml/2006/main" xmlns:p="http://schemas.openxmlformats.org/presentationml/2006/main" xmlns:r="http://schemas.openxmlformats.org/officeDocument/2006/relationships">
+<p:sld xmlns:a="http://schemas.openxmlformats.org/drawingml/2006/main" xmlns:r="http://schemas.openxmlformats.org/officeDocument/2006/relationships" xmlns:p="http://schemas.openxmlformats.org/presentationml/2006/main">
   <p:cSld>
     <p:spTree>
       <p:nvGrpSpPr>
@@ -28640,7 +29352,14 @@
         <p:cNvGrpSpPr/>
         <p:nvPr/>
       </p:nvGrpSpPr>
-      <p:grpSpPr/>
+      <p:grpSpPr>
+        <a:xfrm>
+          <a:off x="0" y="0"/>
+          <a:ext cx="0" cy="0"/>
+          <a:chOff x="0" y="0"/>
+          <a:chExt cx="0" cy="0"/>
+        </a:xfrm>
+      </p:grpSpPr>
       <p:sp>
         <p:nvSpPr>
           <p:cNvPr id="2" name="Rectangle 1"/>
@@ -28682,6 +29401,7 @@
           <a:lstStyle/>
           <a:p>
             <a:pPr algn="ctr"/>
+            <a:endParaRPr/>
           </a:p>
         </p:txBody>
       </p:sp>
@@ -28726,6 +29446,7 @@
           <a:lstStyle/>
           <a:p>
             <a:pPr algn="ctr"/>
+            <a:endParaRPr/>
           </a:p>
         </p:txBody>
       </p:sp>
@@ -28746,7 +29467,7 @@
           <a:noFill/>
         </p:spPr>
         <p:txBody>
-          <a:bodyPr wrap="square" anchor="t" lIns="0" rIns="0" tIns="0" bIns="0">
+          <a:bodyPr wrap="square" lIns="0" tIns="0" rIns="0" bIns="0" anchor="t">
             <a:spAutoFit/>
           </a:bodyPr>
           <a:lstStyle/>
@@ -28791,7 +29512,7 @@
           <a:noFill/>
         </p:spPr>
         <p:txBody>
-          <a:bodyPr wrap="square" anchor="t" lIns="0" rIns="0" tIns="0" bIns="0">
+          <a:bodyPr wrap="square" lIns="0" tIns="0" rIns="0" bIns="0" anchor="t">
             <a:spAutoFit/>
           </a:bodyPr>
           <a:lstStyle/>
@@ -28864,6 +29585,7 @@
           <a:lstStyle/>
           <a:p>
             <a:pPr algn="ctr"/>
+            <a:endParaRPr/>
           </a:p>
         </p:txBody>
       </p:sp>
@@ -28884,7 +29606,7 @@
           <a:noFill/>
         </p:spPr>
         <p:txBody>
-          <a:bodyPr wrap="square" anchor="t" lIns="0" rIns="0" tIns="0" bIns="0">
+          <a:bodyPr wrap="square" lIns="0" tIns="0" rIns="0" bIns="0" anchor="t">
             <a:spAutoFit/>
           </a:bodyPr>
           <a:lstStyle/>
@@ -28929,7 +29651,7 @@
           <a:noFill/>
         </p:spPr>
         <p:txBody>
-          <a:bodyPr wrap="square" anchor="t" lIns="0" rIns="0" tIns="0" bIns="0">
+          <a:bodyPr wrap="square" lIns="0" tIns="0" rIns="0" bIns="0" anchor="t">
             <a:spAutoFit/>
           </a:bodyPr>
           <a:lstStyle/>
@@ -29073,6 +29795,7 @@
           <a:lstStyle/>
           <a:p>
             <a:pPr algn="ctr"/>
+            <a:endParaRPr/>
           </a:p>
         </p:txBody>
       </p:sp>
@@ -29093,7 +29816,7 @@
           <a:noFill/>
         </p:spPr>
         <p:txBody>
-          <a:bodyPr wrap="square" anchor="t" lIns="0" rIns="0" tIns="0" bIns="0">
+          <a:bodyPr wrap="square" lIns="0" tIns="0" rIns="0" bIns="0" anchor="t">
             <a:spAutoFit/>
           </a:bodyPr>
           <a:lstStyle/>
@@ -29138,7 +29861,7 @@
           <a:noFill/>
         </p:spPr>
         <p:txBody>
-          <a:bodyPr wrap="square" anchor="t" lIns="0" rIns="0" tIns="0" bIns="0">
+          <a:bodyPr wrap="square" lIns="0" tIns="0" rIns="0" bIns="0" anchor="t">
             <a:spAutoFit/>
           </a:bodyPr>
           <a:lstStyle/>
@@ -29254,7 +29977,7 @@
           <a:noFill/>
         </p:spPr>
         <p:txBody>
-          <a:bodyPr wrap="square" anchor="t" lIns="0" rIns="0" tIns="0" bIns="0">
+          <a:bodyPr wrap="square" lIns="0" tIns="0" rIns="0" bIns="0" anchor="t">
             <a:spAutoFit/>
           </a:bodyPr>
           <a:lstStyle/>
@@ -29291,7 +30014,7 @@
 </file>
 
 <file path=ppt/slides/slide5.xml><?xml version="1.0" encoding="utf-8"?>
-<p:sld xmlns:a="http://schemas.openxmlformats.org/drawingml/2006/main" xmlns:p="http://schemas.openxmlformats.org/presentationml/2006/main" xmlns:r="http://schemas.openxmlformats.org/officeDocument/2006/relationships">
+<p:sld xmlns:a="http://schemas.openxmlformats.org/drawingml/2006/main" xmlns:r="http://schemas.openxmlformats.org/officeDocument/2006/relationships" xmlns:p="http://schemas.openxmlformats.org/presentationml/2006/main">
   <p:cSld>
     <p:spTree>
       <p:nvGrpSpPr>
@@ -29299,7 +30022,14 @@
         <p:cNvGrpSpPr/>
         <p:nvPr/>
       </p:nvGrpSpPr>
-      <p:grpSpPr/>
+      <p:grpSpPr>
+        <a:xfrm>
+          <a:off x="0" y="0"/>
+          <a:ext cx="0" cy="0"/>
+          <a:chOff x="0" y="0"/>
+          <a:chExt cx="0" cy="0"/>
+        </a:xfrm>
+      </p:grpSpPr>
       <p:sp>
         <p:nvSpPr>
           <p:cNvPr id="2" name="Rectangle 1"/>
@@ -29341,6 +30071,7 @@
           <a:lstStyle/>
           <a:p>
             <a:pPr algn="ctr"/>
+            <a:endParaRPr/>
           </a:p>
         </p:txBody>
       </p:sp>
@@ -29385,6 +30116,7 @@
           <a:lstStyle/>
           <a:p>
             <a:pPr algn="ctr"/>
+            <a:endParaRPr/>
           </a:p>
         </p:txBody>
       </p:sp>
@@ -29429,6 +30161,7 @@
           <a:lstStyle/>
           <a:p>
             <a:pPr algn="ctr"/>
+            <a:endParaRPr/>
           </a:p>
         </p:txBody>
       </p:sp>
@@ -29473,6 +30206,7 @@
           <a:lstStyle/>
           <a:p>
             <a:pPr algn="ctr"/>
+            <a:endParaRPr/>
           </a:p>
         </p:txBody>
       </p:sp>
@@ -29517,6 +30251,7 @@
           <a:lstStyle/>
           <a:p>
             <a:pPr algn="ctr"/>
+            <a:endParaRPr/>
           </a:p>
         </p:txBody>
       </p:sp>
@@ -29561,6 +30296,7 @@
           <a:lstStyle/>
           <a:p>
             <a:pPr algn="ctr"/>
+            <a:endParaRPr/>
           </a:p>
         </p:txBody>
       </p:sp>
@@ -29605,6 +30341,7 @@
           <a:lstStyle/>
           <a:p>
             <a:pPr algn="ctr"/>
+            <a:endParaRPr/>
           </a:p>
         </p:txBody>
       </p:sp>
@@ -29649,6 +30386,7 @@
           <a:lstStyle/>
           <a:p>
             <a:pPr algn="ctr"/>
+            <a:endParaRPr/>
           </a:p>
         </p:txBody>
       </p:sp>
@@ -29693,6 +30431,7 @@
           <a:lstStyle/>
           <a:p>
             <a:pPr algn="ctr"/>
+            <a:endParaRPr/>
           </a:p>
         </p:txBody>
       </p:sp>
@@ -29737,6 +30476,7 @@
           <a:lstStyle/>
           <a:p>
             <a:pPr algn="ctr"/>
+            <a:endParaRPr/>
           </a:p>
         </p:txBody>
       </p:sp>
@@ -29781,6 +30521,7 @@
           <a:lstStyle/>
           <a:p>
             <a:pPr algn="ctr"/>
+            <a:endParaRPr/>
           </a:p>
         </p:txBody>
       </p:sp>
@@ -29825,6 +30566,7 @@
           <a:lstStyle/>
           <a:p>
             <a:pPr algn="ctr"/>
+            <a:endParaRPr/>
           </a:p>
         </p:txBody>
       </p:sp>
@@ -29869,6 +30611,7 @@
           <a:lstStyle/>
           <a:p>
             <a:pPr algn="ctr"/>
+            <a:endParaRPr/>
           </a:p>
         </p:txBody>
       </p:sp>
@@ -29913,6 +30656,7 @@
           <a:lstStyle/>
           <a:p>
             <a:pPr algn="ctr"/>
+            <a:endParaRPr/>
           </a:p>
         </p:txBody>
       </p:sp>
@@ -29957,6 +30701,7 @@
           <a:lstStyle/>
           <a:p>
             <a:pPr algn="ctr"/>
+            <a:endParaRPr/>
           </a:p>
         </p:txBody>
       </p:sp>
@@ -30001,6 +30746,7 @@
           <a:lstStyle/>
           <a:p>
             <a:pPr algn="ctr"/>
+            <a:endParaRPr/>
           </a:p>
         </p:txBody>
       </p:sp>
@@ -30045,6 +30791,7 @@
           <a:lstStyle/>
           <a:p>
             <a:pPr algn="ctr"/>
+            <a:endParaRPr/>
           </a:p>
         </p:txBody>
       </p:sp>
@@ -30089,6 +30836,7 @@
           <a:lstStyle/>
           <a:p>
             <a:pPr algn="ctr"/>
+            <a:endParaRPr/>
           </a:p>
         </p:txBody>
       </p:sp>
@@ -30133,6 +30881,7 @@
           <a:lstStyle/>
           <a:p>
             <a:pPr algn="ctr"/>
+            <a:endParaRPr/>
           </a:p>
         </p:txBody>
       </p:sp>
@@ -30177,6 +30926,7 @@
           <a:lstStyle/>
           <a:p>
             <a:pPr algn="ctr"/>
+            <a:endParaRPr/>
           </a:p>
         </p:txBody>
       </p:sp>
@@ -30221,6 +30971,7 @@
           <a:lstStyle/>
           <a:p>
             <a:pPr algn="ctr"/>
+            <a:endParaRPr/>
           </a:p>
         </p:txBody>
       </p:sp>
@@ -30265,6 +31016,7 @@
           <a:lstStyle/>
           <a:p>
             <a:pPr algn="ctr"/>
+            <a:endParaRPr/>
           </a:p>
         </p:txBody>
       </p:sp>
@@ -30309,6 +31061,7 @@
           <a:lstStyle/>
           <a:p>
             <a:pPr algn="ctr"/>
+            <a:endParaRPr/>
           </a:p>
         </p:txBody>
       </p:sp>
@@ -30353,6 +31106,7 @@
           <a:lstStyle/>
           <a:p>
             <a:pPr algn="ctr"/>
+            <a:endParaRPr/>
           </a:p>
         </p:txBody>
       </p:sp>
@@ -30397,6 +31151,7 @@
           <a:lstStyle/>
           <a:p>
             <a:pPr algn="ctr"/>
+            <a:endParaRPr/>
           </a:p>
         </p:txBody>
       </p:sp>
@@ -30441,6 +31196,7 @@
           <a:lstStyle/>
           <a:p>
             <a:pPr algn="ctr"/>
+            <a:endParaRPr/>
           </a:p>
         </p:txBody>
       </p:sp>
@@ -30485,6 +31241,7 @@
           <a:lstStyle/>
           <a:p>
             <a:pPr algn="ctr"/>
+            <a:endParaRPr/>
           </a:p>
         </p:txBody>
       </p:sp>
@@ -30529,6 +31286,7 @@
           <a:lstStyle/>
           <a:p>
             <a:pPr algn="ctr"/>
+            <a:endParaRPr/>
           </a:p>
         </p:txBody>
       </p:sp>
@@ -30573,6 +31331,7 @@
           <a:lstStyle/>
           <a:p>
             <a:pPr algn="ctr"/>
+            <a:endParaRPr/>
           </a:p>
         </p:txBody>
       </p:sp>
@@ -30617,6 +31376,7 @@
           <a:lstStyle/>
           <a:p>
             <a:pPr algn="ctr"/>
+            <a:endParaRPr/>
           </a:p>
         </p:txBody>
       </p:sp>
@@ -30661,6 +31421,7 @@
           <a:lstStyle/>
           <a:p>
             <a:pPr algn="ctr"/>
+            <a:endParaRPr/>
           </a:p>
         </p:txBody>
       </p:sp>
@@ -30705,6 +31466,7 @@
           <a:lstStyle/>
           <a:p>
             <a:pPr algn="ctr"/>
+            <a:endParaRPr/>
           </a:p>
         </p:txBody>
       </p:sp>
@@ -30749,6 +31511,7 @@
           <a:lstStyle/>
           <a:p>
             <a:pPr algn="ctr"/>
+            <a:endParaRPr/>
           </a:p>
         </p:txBody>
       </p:sp>
@@ -30793,6 +31556,7 @@
           <a:lstStyle/>
           <a:p>
             <a:pPr algn="ctr"/>
+            <a:endParaRPr/>
           </a:p>
         </p:txBody>
       </p:sp>
@@ -30837,6 +31601,7 @@
           <a:lstStyle/>
           <a:p>
             <a:pPr algn="ctr"/>
+            <a:endParaRPr/>
           </a:p>
         </p:txBody>
       </p:sp>
@@ -30857,7 +31622,7 @@
           <a:noFill/>
         </p:spPr>
         <p:txBody>
-          <a:bodyPr wrap="square" anchor="t" lIns="0" rIns="0" tIns="0" bIns="0">
+          <a:bodyPr wrap="square" lIns="0" tIns="0" rIns="0" bIns="0" anchor="t">
             <a:spAutoFit/>
           </a:bodyPr>
           <a:lstStyle/>
@@ -30902,7 +31667,7 @@
           <a:noFill/>
         </p:spPr>
         <p:txBody>
-          <a:bodyPr wrap="square" anchor="t" lIns="0" rIns="0" tIns="0" bIns="0">
+          <a:bodyPr wrap="square" lIns="0" tIns="0" rIns="0" bIns="0" anchor="t">
             <a:spAutoFit/>
           </a:bodyPr>
           <a:lstStyle/>
@@ -30975,6 +31740,7 @@
           <a:lstStyle/>
           <a:p>
             <a:pPr algn="ctr"/>
+            <a:endParaRPr/>
           </a:p>
         </p:txBody>
       </p:sp>
@@ -31019,6 +31785,7 @@
           <a:lstStyle/>
           <a:p>
             <a:pPr algn="ctr"/>
+            <a:endParaRPr/>
           </a:p>
         </p:txBody>
       </p:sp>
@@ -31039,7 +31806,7 @@
           <a:noFill/>
         </p:spPr>
         <p:txBody>
-          <a:bodyPr wrap="square" anchor="t" lIns="0" rIns="0" tIns="0" bIns="0">
+          <a:bodyPr wrap="square" lIns="0" tIns="0" rIns="0" bIns="0" anchor="t">
             <a:spAutoFit/>
           </a:bodyPr>
           <a:lstStyle/>
@@ -31084,7 +31851,7 @@
           <a:noFill/>
         </p:spPr>
         <p:txBody>
-          <a:bodyPr wrap="square" anchor="t" lIns="0" rIns="0" tIns="0" bIns="0">
+          <a:bodyPr wrap="square" lIns="0" tIns="0" rIns="0" bIns="0" anchor="t">
             <a:spAutoFit/>
           </a:bodyPr>
           <a:lstStyle/>
@@ -31201,6 +31968,7 @@
           <a:lstStyle/>
           <a:p>
             <a:pPr algn="ctr"/>
+            <a:endParaRPr/>
           </a:p>
         </p:txBody>
       </p:sp>
@@ -31245,6 +32013,7 @@
           <a:lstStyle/>
           <a:p>
             <a:pPr algn="ctr"/>
+            <a:endParaRPr/>
           </a:p>
         </p:txBody>
       </p:sp>
@@ -31265,7 +32034,7 @@
           <a:noFill/>
         </p:spPr>
         <p:txBody>
-          <a:bodyPr wrap="square" anchor="t" lIns="0" rIns="0" tIns="0" bIns="0">
+          <a:bodyPr wrap="square" lIns="0" tIns="0" rIns="0" bIns="0" anchor="t">
             <a:spAutoFit/>
           </a:bodyPr>
           <a:lstStyle/>
@@ -31310,7 +32079,7 @@
           <a:noFill/>
         </p:spPr>
         <p:txBody>
-          <a:bodyPr wrap="square" anchor="t" lIns="0" rIns="0" tIns="0" bIns="0">
+          <a:bodyPr wrap="square" lIns="0" tIns="0" rIns="0" bIns="0" anchor="t">
             <a:spAutoFit/>
           </a:bodyPr>
           <a:lstStyle/>
@@ -31427,6 +32196,7 @@
           <a:lstStyle/>
           <a:p>
             <a:pPr algn="ctr"/>
+            <a:endParaRPr/>
           </a:p>
         </p:txBody>
       </p:sp>
@@ -31471,6 +32241,7 @@
           <a:lstStyle/>
           <a:p>
             <a:pPr algn="ctr"/>
+            <a:endParaRPr/>
           </a:p>
         </p:txBody>
       </p:sp>
@@ -31491,7 +32262,7 @@
           <a:noFill/>
         </p:spPr>
         <p:txBody>
-          <a:bodyPr wrap="square" anchor="t" lIns="0" rIns="0" tIns="0" bIns="0">
+          <a:bodyPr wrap="square" lIns="0" tIns="0" rIns="0" bIns="0" anchor="t">
             <a:spAutoFit/>
           </a:bodyPr>
           <a:lstStyle/>
@@ -31536,7 +32307,7 @@
           <a:noFill/>
         </p:spPr>
         <p:txBody>
-          <a:bodyPr wrap="square" anchor="t" lIns="0" rIns="0" tIns="0" bIns="0">
+          <a:bodyPr wrap="square" lIns="0" tIns="0" rIns="0" bIns="0" anchor="t">
             <a:spAutoFit/>
           </a:bodyPr>
           <a:lstStyle/>
@@ -31649,6 +32420,7 @@
           <a:lstStyle/>
           <a:p>
             <a:pPr algn="ctr"/>
+            <a:endParaRPr/>
           </a:p>
         </p:txBody>
       </p:sp>
@@ -31693,6 +32465,7 @@
           <a:lstStyle/>
           <a:p>
             <a:pPr algn="ctr"/>
+            <a:endParaRPr/>
           </a:p>
         </p:txBody>
       </p:sp>
@@ -31713,7 +32486,7 @@
           <a:noFill/>
         </p:spPr>
         <p:txBody>
-          <a:bodyPr wrap="square" anchor="t" lIns="0" rIns="0" tIns="0" bIns="0">
+          <a:bodyPr wrap="square" lIns="0" tIns="0" rIns="0" bIns="0" anchor="t">
             <a:spAutoFit/>
           </a:bodyPr>
           <a:lstStyle/>
@@ -31758,7 +32531,7 @@
           <a:noFill/>
         </p:spPr>
         <p:txBody>
-          <a:bodyPr wrap="square" anchor="t" lIns="0" rIns="0" tIns="0" bIns="0">
+          <a:bodyPr wrap="square" lIns="0" tIns="0" rIns="0" bIns="0" anchor="t">
             <a:spAutoFit/>
           </a:bodyPr>
           <a:lstStyle/>
@@ -31795,7 +32568,7 @@
 </file>
 
 <file path=ppt/slides/slide6.xml><?xml version="1.0" encoding="utf-8"?>
-<p:sld xmlns:a="http://schemas.openxmlformats.org/drawingml/2006/main" xmlns:p="http://schemas.openxmlformats.org/presentationml/2006/main" xmlns:r="http://schemas.openxmlformats.org/officeDocument/2006/relationships">
+<p:sld xmlns:a="http://schemas.openxmlformats.org/drawingml/2006/main" xmlns:r="http://schemas.openxmlformats.org/officeDocument/2006/relationships" xmlns:p="http://schemas.openxmlformats.org/presentationml/2006/main">
   <p:cSld>
     <p:spTree>
       <p:nvGrpSpPr>
@@ -31803,7 +32576,14 @@
         <p:cNvGrpSpPr/>
         <p:nvPr/>
       </p:nvGrpSpPr>
-      <p:grpSpPr/>
+      <p:grpSpPr>
+        <a:xfrm>
+          <a:off x="0" y="0"/>
+          <a:ext cx="0" cy="0"/>
+          <a:chOff x="0" y="0"/>
+          <a:chExt cx="0" cy="0"/>
+        </a:xfrm>
+      </p:grpSpPr>
       <p:sp>
         <p:nvSpPr>
           <p:cNvPr id="2" name="Rectangle 1"/>
@@ -31845,6 +32625,7 @@
           <a:lstStyle/>
           <a:p>
             <a:pPr algn="ctr"/>
+            <a:endParaRPr/>
           </a:p>
         </p:txBody>
       </p:sp>
@@ -31889,6 +32670,7 @@
           <a:lstStyle/>
           <a:p>
             <a:pPr algn="ctr"/>
+            <a:endParaRPr/>
           </a:p>
         </p:txBody>
       </p:sp>
@@ -31933,6 +32715,7 @@
           <a:lstStyle/>
           <a:p>
             <a:pPr algn="ctr"/>
+            <a:endParaRPr/>
           </a:p>
         </p:txBody>
       </p:sp>
@@ -31977,6 +32760,7 @@
           <a:lstStyle/>
           <a:p>
             <a:pPr algn="ctr"/>
+            <a:endParaRPr/>
           </a:p>
         </p:txBody>
       </p:sp>
@@ -32021,6 +32805,7 @@
           <a:lstStyle/>
           <a:p>
             <a:pPr algn="ctr"/>
+            <a:endParaRPr/>
           </a:p>
         </p:txBody>
       </p:sp>
@@ -32065,6 +32850,7 @@
           <a:lstStyle/>
           <a:p>
             <a:pPr algn="ctr"/>
+            <a:endParaRPr/>
           </a:p>
         </p:txBody>
       </p:sp>
@@ -32109,6 +32895,7 @@
           <a:lstStyle/>
           <a:p>
             <a:pPr algn="ctr"/>
+            <a:endParaRPr/>
           </a:p>
         </p:txBody>
       </p:sp>
@@ -32153,6 +32940,7 @@
           <a:lstStyle/>
           <a:p>
             <a:pPr algn="ctr"/>
+            <a:endParaRPr/>
           </a:p>
         </p:txBody>
       </p:sp>
@@ -32197,6 +32985,7 @@
           <a:lstStyle/>
           <a:p>
             <a:pPr algn="ctr"/>
+            <a:endParaRPr/>
           </a:p>
         </p:txBody>
       </p:sp>
@@ -32241,6 +33030,7 @@
           <a:lstStyle/>
           <a:p>
             <a:pPr algn="ctr"/>
+            <a:endParaRPr/>
           </a:p>
         </p:txBody>
       </p:sp>
@@ -32285,6 +33075,7 @@
           <a:lstStyle/>
           <a:p>
             <a:pPr algn="ctr"/>
+            <a:endParaRPr/>
           </a:p>
         </p:txBody>
       </p:sp>
@@ -32329,6 +33120,7 @@
           <a:lstStyle/>
           <a:p>
             <a:pPr algn="ctr"/>
+            <a:endParaRPr/>
           </a:p>
         </p:txBody>
       </p:sp>
@@ -32373,6 +33165,7 @@
           <a:lstStyle/>
           <a:p>
             <a:pPr algn="ctr"/>
+            <a:endParaRPr/>
           </a:p>
         </p:txBody>
       </p:sp>
@@ -32417,6 +33210,7 @@
           <a:lstStyle/>
           <a:p>
             <a:pPr algn="ctr"/>
+            <a:endParaRPr/>
           </a:p>
         </p:txBody>
       </p:sp>
@@ -32461,6 +33255,7 @@
           <a:lstStyle/>
           <a:p>
             <a:pPr algn="ctr"/>
+            <a:endParaRPr/>
           </a:p>
         </p:txBody>
       </p:sp>
@@ -32505,6 +33300,7 @@
           <a:lstStyle/>
           <a:p>
             <a:pPr algn="ctr"/>
+            <a:endParaRPr/>
           </a:p>
         </p:txBody>
       </p:sp>
@@ -32549,6 +33345,7 @@
           <a:lstStyle/>
           <a:p>
             <a:pPr algn="ctr"/>
+            <a:endParaRPr/>
           </a:p>
         </p:txBody>
       </p:sp>
@@ -32593,6 +33390,7 @@
           <a:lstStyle/>
           <a:p>
             <a:pPr algn="ctr"/>
+            <a:endParaRPr/>
           </a:p>
         </p:txBody>
       </p:sp>
@@ -32637,6 +33435,7 @@
           <a:lstStyle/>
           <a:p>
             <a:pPr algn="ctr"/>
+            <a:endParaRPr/>
           </a:p>
         </p:txBody>
       </p:sp>
@@ -32681,6 +33480,7 @@
           <a:lstStyle/>
           <a:p>
             <a:pPr algn="ctr"/>
+            <a:endParaRPr/>
           </a:p>
         </p:txBody>
       </p:sp>
@@ -32725,6 +33525,7 @@
           <a:lstStyle/>
           <a:p>
             <a:pPr algn="ctr"/>
+            <a:endParaRPr/>
           </a:p>
         </p:txBody>
       </p:sp>
@@ -32769,6 +33570,7 @@
           <a:lstStyle/>
           <a:p>
             <a:pPr algn="ctr"/>
+            <a:endParaRPr/>
           </a:p>
         </p:txBody>
       </p:sp>
@@ -32813,6 +33615,7 @@
           <a:lstStyle/>
           <a:p>
             <a:pPr algn="ctr"/>
+            <a:endParaRPr/>
           </a:p>
         </p:txBody>
       </p:sp>
@@ -32857,6 +33660,7 @@
           <a:lstStyle/>
           <a:p>
             <a:pPr algn="ctr"/>
+            <a:endParaRPr/>
           </a:p>
         </p:txBody>
       </p:sp>
@@ -32901,6 +33705,7 @@
           <a:lstStyle/>
           <a:p>
             <a:pPr algn="ctr"/>
+            <a:endParaRPr/>
           </a:p>
         </p:txBody>
       </p:sp>
@@ -32945,6 +33750,7 @@
           <a:lstStyle/>
           <a:p>
             <a:pPr algn="ctr"/>
+            <a:endParaRPr/>
           </a:p>
         </p:txBody>
       </p:sp>
@@ -32989,6 +33795,7 @@
           <a:lstStyle/>
           <a:p>
             <a:pPr algn="ctr"/>
+            <a:endParaRPr/>
           </a:p>
         </p:txBody>
       </p:sp>
@@ -33033,6 +33840,7 @@
           <a:lstStyle/>
           <a:p>
             <a:pPr algn="ctr"/>
+            <a:endParaRPr/>
           </a:p>
         </p:txBody>
       </p:sp>
@@ -33077,6 +33885,7 @@
           <a:lstStyle/>
           <a:p>
             <a:pPr algn="ctr"/>
+            <a:endParaRPr/>
           </a:p>
         </p:txBody>
       </p:sp>
@@ -33121,6 +33930,7 @@
           <a:lstStyle/>
           <a:p>
             <a:pPr algn="ctr"/>
+            <a:endParaRPr/>
           </a:p>
         </p:txBody>
       </p:sp>
@@ -33165,6 +33975,7 @@
           <a:lstStyle/>
           <a:p>
             <a:pPr algn="ctr"/>
+            <a:endParaRPr/>
           </a:p>
         </p:txBody>
       </p:sp>
@@ -33209,6 +34020,7 @@
           <a:lstStyle/>
           <a:p>
             <a:pPr algn="ctr"/>
+            <a:endParaRPr/>
           </a:p>
         </p:txBody>
       </p:sp>
@@ -33253,6 +34065,7 @@
           <a:lstStyle/>
           <a:p>
             <a:pPr algn="ctr"/>
+            <a:endParaRPr/>
           </a:p>
         </p:txBody>
       </p:sp>
@@ -33297,6 +34110,7 @@
           <a:lstStyle/>
           <a:p>
             <a:pPr algn="ctr"/>
+            <a:endParaRPr/>
           </a:p>
         </p:txBody>
       </p:sp>
@@ -33341,6 +34155,7 @@
           <a:lstStyle/>
           <a:p>
             <a:pPr algn="ctr"/>
+            <a:endParaRPr/>
           </a:p>
         </p:txBody>
       </p:sp>
@@ -33385,6 +34200,7 @@
           <a:lstStyle/>
           <a:p>
             <a:pPr algn="ctr"/>
+            <a:endParaRPr/>
           </a:p>
         </p:txBody>
       </p:sp>
@@ -33429,6 +34245,7 @@
           <a:lstStyle/>
           <a:p>
             <a:pPr algn="ctr"/>
+            <a:endParaRPr/>
           </a:p>
         </p:txBody>
       </p:sp>
@@ -33473,6 +34290,7 @@
           <a:lstStyle/>
           <a:p>
             <a:pPr algn="ctr"/>
+            <a:endParaRPr/>
           </a:p>
         </p:txBody>
       </p:sp>
@@ -33517,6 +34335,7 @@
           <a:lstStyle/>
           <a:p>
             <a:pPr algn="ctr"/>
+            <a:endParaRPr/>
           </a:p>
         </p:txBody>
       </p:sp>
@@ -33561,6 +34380,7 @@
           <a:lstStyle/>
           <a:p>
             <a:pPr algn="ctr"/>
+            <a:endParaRPr/>
           </a:p>
         </p:txBody>
       </p:sp>
@@ -33605,6 +34425,7 @@
           <a:lstStyle/>
           <a:p>
             <a:pPr algn="ctr"/>
+            <a:endParaRPr/>
           </a:p>
         </p:txBody>
       </p:sp>
@@ -33649,6 +34470,7 @@
           <a:lstStyle/>
           <a:p>
             <a:pPr algn="ctr"/>
+            <a:endParaRPr/>
           </a:p>
         </p:txBody>
       </p:sp>
@@ -33693,6 +34515,7 @@
           <a:lstStyle/>
           <a:p>
             <a:pPr algn="ctr"/>
+            <a:endParaRPr/>
           </a:p>
         </p:txBody>
       </p:sp>
@@ -33737,6 +34560,7 @@
           <a:lstStyle/>
           <a:p>
             <a:pPr algn="ctr"/>
+            <a:endParaRPr/>
           </a:p>
         </p:txBody>
       </p:sp>
@@ -33781,6 +34605,7 @@
           <a:lstStyle/>
           <a:p>
             <a:pPr algn="ctr"/>
+            <a:endParaRPr/>
           </a:p>
         </p:txBody>
       </p:sp>
@@ -33801,7 +34626,7 @@
           <a:noFill/>
         </p:spPr>
         <p:txBody>
-          <a:bodyPr wrap="square" anchor="t" lIns="0" rIns="0" tIns="0" bIns="0">
+          <a:bodyPr wrap="square" lIns="0" tIns="0" rIns="0" bIns="0" anchor="t">
             <a:spAutoFit/>
           </a:bodyPr>
           <a:lstStyle/>
@@ -33846,7 +34671,7 @@
           <a:noFill/>
         </p:spPr>
         <p:txBody>
-          <a:bodyPr wrap="square" anchor="t" lIns="0" rIns="0" tIns="0" bIns="0">
+          <a:bodyPr wrap="square" lIns="0" tIns="0" rIns="0" bIns="0" anchor="t">
             <a:spAutoFit/>
           </a:bodyPr>
           <a:lstStyle/>
@@ -33891,7 +34716,7 @@
           <a:noFill/>
         </p:spPr>
         <p:txBody>
-          <a:bodyPr wrap="square" anchor="t" lIns="0" rIns="0" tIns="0" bIns="0">
+          <a:bodyPr wrap="square" lIns="0" tIns="0" rIns="0" bIns="0" anchor="t">
             <a:spAutoFit/>
           </a:bodyPr>
           <a:lstStyle/>
@@ -33928,7 +34753,7 @@
 </file>
 
 <file path=ppt/slides/slide7.xml><?xml version="1.0" encoding="utf-8"?>
-<p:sld xmlns:a="http://schemas.openxmlformats.org/drawingml/2006/main" xmlns:p="http://schemas.openxmlformats.org/presentationml/2006/main" xmlns:r="http://schemas.openxmlformats.org/officeDocument/2006/relationships">
+<p:sld xmlns:a="http://schemas.openxmlformats.org/drawingml/2006/main" xmlns:r="http://schemas.openxmlformats.org/officeDocument/2006/relationships" xmlns:p="http://schemas.openxmlformats.org/presentationml/2006/main">
   <p:cSld>
     <p:spTree>
       <p:nvGrpSpPr>
@@ -33936,7 +34761,14 @@
         <p:cNvGrpSpPr/>
         <p:nvPr/>
       </p:nvGrpSpPr>
-      <p:grpSpPr/>
+      <p:grpSpPr>
+        <a:xfrm>
+          <a:off x="0" y="0"/>
+          <a:ext cx="0" cy="0"/>
+          <a:chOff x="0" y="0"/>
+          <a:chExt cx="0" cy="0"/>
+        </a:xfrm>
+      </p:grpSpPr>
       <p:sp>
         <p:nvSpPr>
           <p:cNvPr id="2" name="Rectangle 1"/>
@@ -33978,6 +34810,7 @@
           <a:lstStyle/>
           <a:p>
             <a:pPr algn="ctr"/>
+            <a:endParaRPr/>
           </a:p>
         </p:txBody>
       </p:sp>
@@ -34022,6 +34855,7 @@
           <a:lstStyle/>
           <a:p>
             <a:pPr algn="ctr"/>
+            <a:endParaRPr/>
           </a:p>
         </p:txBody>
       </p:sp>
@@ -34042,7 +34876,7 @@
           <a:noFill/>
         </p:spPr>
         <p:txBody>
-          <a:bodyPr wrap="square" anchor="t" lIns="0" rIns="0" tIns="0" bIns="0">
+          <a:bodyPr wrap="square" lIns="0" tIns="0" rIns="0" bIns="0" anchor="t">
             <a:spAutoFit/>
           </a:bodyPr>
           <a:lstStyle/>
@@ -34087,7 +34921,7 @@
           <a:noFill/>
         </p:spPr>
         <p:txBody>
-          <a:bodyPr wrap="square" anchor="t" lIns="0" rIns="0" tIns="0" bIns="0">
+          <a:bodyPr wrap="square" lIns="0" tIns="0" rIns="0" bIns="0" anchor="t">
             <a:spAutoFit/>
           </a:bodyPr>
           <a:lstStyle/>
@@ -34132,7 +34966,7 @@
           <a:noFill/>
         </p:spPr>
         <p:txBody>
-          <a:bodyPr wrap="square" anchor="t" lIns="0" rIns="0" tIns="0" bIns="0">
+          <a:bodyPr wrap="square" lIns="0" tIns="0" rIns="0" bIns="0" anchor="t">
             <a:spAutoFit/>
           </a:bodyPr>
           <a:lstStyle/>
@@ -34315,7 +35149,7 @@
           <a:noFill/>
         </p:spPr>
         <p:txBody>
-          <a:bodyPr wrap="square" anchor="t" lIns="0" rIns="0" tIns="0" bIns="0">
+          <a:bodyPr wrap="square" lIns="0" tIns="0" rIns="0" bIns="0" anchor="t">
             <a:spAutoFit/>
           </a:bodyPr>
           <a:lstStyle/>
@@ -34352,7 +35186,7 @@
 </file>
 
 <file path=ppt/slides/slide8.xml><?xml version="1.0" encoding="utf-8"?>
-<p:sld xmlns:a="http://schemas.openxmlformats.org/drawingml/2006/main" xmlns:p="http://schemas.openxmlformats.org/presentationml/2006/main" xmlns:r="http://schemas.openxmlformats.org/officeDocument/2006/relationships">
+<p:sld xmlns:a="http://schemas.openxmlformats.org/drawingml/2006/main" xmlns:r="http://schemas.openxmlformats.org/officeDocument/2006/relationships" xmlns:p="http://schemas.openxmlformats.org/presentationml/2006/main">
   <p:cSld>
     <p:spTree>
       <p:nvGrpSpPr>
@@ -34360,7 +35194,14 @@
         <p:cNvGrpSpPr/>
         <p:nvPr/>
       </p:nvGrpSpPr>
-      <p:grpSpPr/>
+      <p:grpSpPr>
+        <a:xfrm>
+          <a:off x="0" y="0"/>
+          <a:ext cx="0" cy="0"/>
+          <a:chOff x="0" y="0"/>
+          <a:chExt cx="0" cy="0"/>
+        </a:xfrm>
+      </p:grpSpPr>
       <p:sp>
         <p:nvSpPr>
           <p:cNvPr id="2" name="Rectangle 1"/>
@@ -34402,6 +35243,7 @@
           <a:lstStyle/>
           <a:p>
             <a:pPr algn="ctr"/>
+            <a:endParaRPr/>
           </a:p>
         </p:txBody>
       </p:sp>
@@ -34446,6 +35288,7 @@
           <a:lstStyle/>
           <a:p>
             <a:pPr algn="ctr"/>
+            <a:endParaRPr/>
           </a:p>
         </p:txBody>
       </p:sp>
@@ -34466,7 +35309,7 @@
           <a:noFill/>
         </p:spPr>
         <p:txBody>
-          <a:bodyPr wrap="square" anchor="t" lIns="0" rIns="0" tIns="0" bIns="0">
+          <a:bodyPr wrap="square" lIns="0" tIns="0" rIns="0" bIns="0" anchor="t">
             <a:spAutoFit/>
           </a:bodyPr>
           <a:lstStyle/>
@@ -34511,7 +35354,7 @@
           <a:noFill/>
         </p:spPr>
         <p:txBody>
-          <a:bodyPr wrap="square" anchor="t" lIns="0" rIns="0" tIns="0" bIns="0">
+          <a:bodyPr wrap="square" lIns="0" tIns="0" rIns="0" bIns="0" anchor="t">
             <a:spAutoFit/>
           </a:bodyPr>
           <a:lstStyle/>
@@ -34556,7 +35399,7 @@
           <a:noFill/>
         </p:spPr>
         <p:txBody>
-          <a:bodyPr wrap="square" anchor="t" lIns="0" rIns="0" tIns="0" bIns="0">
+          <a:bodyPr wrap="square" lIns="0" tIns="0" rIns="0" bIns="0" anchor="t">
             <a:spAutoFit/>
           </a:bodyPr>
           <a:lstStyle/>
@@ -34739,7 +35582,7 @@
           <a:noFill/>
         </p:spPr>
         <p:txBody>
-          <a:bodyPr wrap="square" anchor="t" lIns="0" rIns="0" tIns="0" bIns="0">
+          <a:bodyPr wrap="square" lIns="0" tIns="0" rIns="0" bIns="0" anchor="t">
             <a:spAutoFit/>
           </a:bodyPr>
           <a:lstStyle/>
@@ -34776,7 +35619,7 @@
 </file>
 
 <file path=ppt/slides/slide9.xml><?xml version="1.0" encoding="utf-8"?>
-<p:sld xmlns:a="http://schemas.openxmlformats.org/drawingml/2006/main" xmlns:p="http://schemas.openxmlformats.org/presentationml/2006/main" xmlns:r="http://schemas.openxmlformats.org/officeDocument/2006/relationships">
+<p:sld xmlns:a="http://schemas.openxmlformats.org/drawingml/2006/main" xmlns:r="http://schemas.openxmlformats.org/officeDocument/2006/relationships" xmlns:p="http://schemas.openxmlformats.org/presentationml/2006/main">
   <p:cSld>
     <p:spTree>
       <p:nvGrpSpPr>
@@ -34784,7 +35627,14 @@
         <p:cNvGrpSpPr/>
         <p:nvPr/>
       </p:nvGrpSpPr>
-      <p:grpSpPr/>
+      <p:grpSpPr>
+        <a:xfrm>
+          <a:off x="0" y="0"/>
+          <a:ext cx="0" cy="0"/>
+          <a:chOff x="0" y="0"/>
+          <a:chExt cx="0" cy="0"/>
+        </a:xfrm>
+      </p:grpSpPr>
       <p:sp>
         <p:nvSpPr>
           <p:cNvPr id="2" name="Rectangle 1"/>
@@ -34826,6 +35676,7 @@
           <a:lstStyle/>
           <a:p>
             <a:pPr algn="ctr"/>
+            <a:endParaRPr/>
           </a:p>
         </p:txBody>
       </p:sp>
@@ -34870,6 +35721,7 @@
           <a:lstStyle/>
           <a:p>
             <a:pPr algn="ctr"/>
+            <a:endParaRPr/>
           </a:p>
         </p:txBody>
       </p:sp>
@@ -34890,7 +35742,7 @@
           <a:noFill/>
         </p:spPr>
         <p:txBody>
-          <a:bodyPr wrap="square" anchor="t" lIns="0" rIns="0" tIns="0" bIns="0">
+          <a:bodyPr wrap="square" lIns="0" tIns="0" rIns="0" bIns="0" anchor="t">
             <a:spAutoFit/>
           </a:bodyPr>
           <a:lstStyle/>
@@ -34935,7 +35787,7 @@
           <a:noFill/>
         </p:spPr>
         <p:txBody>
-          <a:bodyPr wrap="square" anchor="t" lIns="0" rIns="0" tIns="0" bIns="0">
+          <a:bodyPr wrap="square" lIns="0" tIns="0" rIns="0" bIns="0" anchor="t">
             <a:spAutoFit/>
           </a:bodyPr>
           <a:lstStyle/>
@@ -34980,7 +35832,7 @@
           <a:noFill/>
         </p:spPr>
         <p:txBody>
-          <a:bodyPr wrap="square" anchor="t" lIns="0" rIns="0" tIns="0" bIns="0">
+          <a:bodyPr wrap="square" lIns="0" tIns="0" rIns="0" bIns="0" anchor="t">
             <a:spAutoFit/>
           </a:bodyPr>
           <a:lstStyle/>
@@ -35025,7 +35877,7 @@
           <a:noFill/>
         </p:spPr>
         <p:txBody>
-          <a:bodyPr wrap="square" anchor="t" lIns="0" rIns="0" tIns="0" bIns="0">
+          <a:bodyPr wrap="square" lIns="0" tIns="0" rIns="0" bIns="0" anchor="t">
             <a:spAutoFit/>
           </a:bodyPr>
           <a:lstStyle/>
@@ -35110,7 +35962,7 @@
           <a:noFill/>
         </p:spPr>
         <p:txBody>
-          <a:bodyPr wrap="square" anchor="t" lIns="0" rIns="0" tIns="0" bIns="0">
+          <a:bodyPr wrap="square" lIns="0" tIns="0" rIns="0" bIns="0" anchor="t">
             <a:spAutoFit/>
           </a:bodyPr>
           <a:lstStyle/>
@@ -35464,4 +36316,10 @@
   </a:objectDefaults>
   <a:extraClrSchemeLst/>
 </a:theme>
+</file>
+
+<file path=docMetadata/LabelInfo.xml><?xml version="1.0" encoding="utf-8"?>
+<clbl:labelList xmlns:clbl="http://schemas.microsoft.com/office/2020/mipLabelMetadata">
+  <clbl:label id="{41f44385-be75-4dc2-abf7-73a8d0466140}" enabled="1" method="Standard" siteId="{008ae55d-17d4-45aa-b610-52181f8f0f6c}" contentBits="2" removed="0"/>
+</clbl:labelList>
 </file>